--- a/output/wordlabs-spire-3day.pptx
+++ b/output/wordlabs-spire-3day.pptx
@@ -6071,118 +6071,215 @@
                 <a:ea typeface="Calibri" pitchFamily="34" charset="-122"/>
                 <a:cs typeface="Calibri" pitchFamily="34" charset="-120"/>
               </a:rPr>
-              <a:t> his team, and the players were truly </a:t>
-            </a:r>
+              <a:t> his team, and their hard work left him full of admiration.</a:t>
+            </a:r>
+            <a:endParaRPr lang="en-US" sz="1800" dirty="0"/>
+          </a:p>
+        </p:txBody>
+      </p:sp>
+      <p:sp>
+        <p:nvSpPr>
+          <p:cNvPr id="13" name="Shape 11"/>
+          <p:cNvSpPr/>
+          <p:nvPr/>
+        </p:nvSpPr>
+        <p:spPr>
+          <a:xfrm>
+            <a:off x="365760" y="2852928"/>
+            <a:ext cx="8412480" cy="475488"/>
+          </a:xfrm>
+          <a:prstGeom prst="rect">
+            <a:avLst>
+              <a:gd name="adj" fmla="val 15385"/>
+            </a:avLst>
+          </a:prstGeom>
+          <a:solidFill>
+            <a:srgbClr val="CCFBF1"/>
+          </a:solidFill>
+          <a:ln w="12700">
+            <a:solidFill>
+              <a:srgbClr val="0D9488"/>
+            </a:solidFill>
+            <a:prstDash val="solid"/>
+          </a:ln>
+        </p:spPr>
+      </p:sp>
+      <p:sp>
+        <p:nvSpPr>
+          <p:cNvPr id="14" name="Text 12"/>
+          <p:cNvSpPr/>
+          <p:nvPr/>
+        </p:nvSpPr>
+        <p:spPr>
+          <a:xfrm>
+            <a:off x="502920" y="2852928"/>
+            <a:ext cx="8229600" cy="475488"/>
+          </a:xfrm>
+          <a:prstGeom prst="rect">
+            <a:avLst/>
+          </a:prstGeom>
+          <a:noFill/>
+          <a:ln/>
+        </p:spPr>
+        <p:txBody>
+          <a:bodyPr wrap="square" rtlCol="0" anchor="ctr"/>
+          <a:lstStyle/>
+          <a:p>
             <a:pPr algn="l" indent="0" marL="0">
               <a:buNone/>
             </a:pPr>
             <a:r>
-              <a:rPr lang="en-US" sz="1800" b="1" dirty="0">
-                <a:solidFill>
-                  <a:srgbClr val="0D9488"/>
-                </a:solidFill>
-                <a:highlight>
-                  <a:srgbClr val="CCFBF1"/>
-                </a:highlight>
+              <a:rPr lang="en-US" sz="1200" b="1" dirty="0">
+                <a:solidFill>
+                  <a:srgbClr val="0F766E"/>
+                </a:solidFill>
                 <a:latin typeface="Calibri" pitchFamily="34" charset="0"/>
                 <a:ea typeface="Calibri" pitchFamily="34" charset="-122"/>
                 <a:cs typeface="Calibri" pitchFamily="34" charset="-120"/>
               </a:rPr>
-              <a:t>inspired</a:t>
-            </a:r>
-            <a:pPr algn="l" indent="0" marL="0">
-              <a:buNone/>
-            </a:pPr>
-            <a:r>
-              <a:rPr lang="en-US" sz="1800" dirty="0">
-                <a:solidFill>
-                  <a:srgbClr val="0F172A"/>
+              <a:t>Now rewrite each focus word below with space between letters — leave room for your breakdown.</a:t>
+            </a:r>
+            <a:endParaRPr lang="en-US" sz="1200" dirty="0"/>
+          </a:p>
+        </p:txBody>
+      </p:sp>
+      <p:sp>
+        <p:nvSpPr>
+          <p:cNvPr id="15" name="Shape 13"/>
+          <p:cNvSpPr/>
+          <p:nvPr/>
+        </p:nvSpPr>
+        <p:spPr>
+          <a:xfrm>
+            <a:off x="1737360" y="3456432"/>
+            <a:ext cx="2560320" cy="1005840"/>
+          </a:xfrm>
+          <a:prstGeom prst="rect">
+            <a:avLst>
+              <a:gd name="adj" fmla="val 7273"/>
+            </a:avLst>
+          </a:prstGeom>
+          <a:solidFill>
+            <a:srgbClr val="F8FAFC"/>
+          </a:solidFill>
+          <a:ln w="12700">
+            <a:solidFill>
+              <a:srgbClr val="E2E8F0"/>
+            </a:solidFill>
+            <a:prstDash val="solid"/>
+          </a:ln>
+        </p:spPr>
+      </p:sp>
+      <p:sp>
+        <p:nvSpPr>
+          <p:cNvPr id="16" name="Shape 14"/>
+          <p:cNvSpPr/>
+          <p:nvPr/>
+        </p:nvSpPr>
+        <p:spPr>
+          <a:xfrm>
+            <a:off x="1737360" y="3977640"/>
+            <a:ext cx="2560320" cy="0"/>
+          </a:xfrm>
+          <a:prstGeom prst="line">
+            <a:avLst/>
+          </a:prstGeom>
+          <a:noFill/>
+          <a:ln w="12700">
+            <a:solidFill>
+              <a:srgbClr val="E2E8F0"/>
+            </a:solidFill>
+            <a:prstDash val="dash"/>
+          </a:ln>
+        </p:spPr>
+      </p:sp>
+      <p:sp>
+        <p:nvSpPr>
+          <p:cNvPr id="17" name="Text 15"/>
+          <p:cNvSpPr/>
+          <p:nvPr/>
+        </p:nvSpPr>
+        <p:spPr>
+          <a:xfrm>
+            <a:off x="1737360" y="3456432"/>
+            <a:ext cx="2560320" cy="502920"/>
+          </a:xfrm>
+          <a:prstGeom prst="rect">
+            <a:avLst/>
+          </a:prstGeom>
+          <a:noFill/>
+          <a:ln/>
+        </p:spPr>
+        <p:txBody>
+          <a:bodyPr wrap="square" lIns="0" tIns="0" rIns="0" bIns="0" rtlCol="0" anchor="ctr"/>
+          <a:lstStyle/>
+          <a:p>
+            <a:pPr algn="ctr" indent="0" marL="0">
+              <a:buNone/>
+            </a:pPr>
+            <a:r>
+              <a:rPr lang="en-US" sz="1400" b="1" dirty="0">
+                <a:solidFill>
+                  <a:srgbClr val="0D9488"/>
+                </a:solidFill>
+                <a:latin typeface="Trebuchet MS" pitchFamily="34" charset="0"/>
+                <a:ea typeface="Trebuchet MS" pitchFamily="34" charset="-122"/>
+                <a:cs typeface="Trebuchet MS" pitchFamily="34" charset="-120"/>
+              </a:rPr>
+              <a:t>inspire</a:t>
+            </a:r>
+            <a:endParaRPr lang="en-US" sz="1400" dirty="0"/>
+          </a:p>
+        </p:txBody>
+      </p:sp>
+      <p:sp>
+        <p:nvSpPr>
+          <p:cNvPr id="18" name="Text 16"/>
+          <p:cNvSpPr/>
+          <p:nvPr/>
+        </p:nvSpPr>
+        <p:spPr>
+          <a:xfrm>
+            <a:off x="1737360" y="4005072"/>
+            <a:ext cx="2560320" cy="457200"/>
+          </a:xfrm>
+          <a:prstGeom prst="rect">
+            <a:avLst/>
+          </a:prstGeom>
+          <a:noFill/>
+          <a:ln/>
+        </p:spPr>
+        <p:txBody>
+          <a:bodyPr wrap="square" lIns="0" tIns="0" rIns="0" bIns="0" rtlCol="0" anchor="ctr"/>
+          <a:lstStyle/>
+          <a:p>
+            <a:pPr algn="ctr" indent="0" marL="0">
+              <a:buNone/>
+            </a:pPr>
+            <a:r>
+              <a:rPr lang="en-US" sz="900" i="1" dirty="0">
+                <a:solidFill>
+                  <a:srgbClr val="475569"/>
                 </a:solidFill>
                 <a:latin typeface="Calibri" pitchFamily="34" charset="0"/>
                 <a:ea typeface="Calibri" pitchFamily="34" charset="-122"/>
                 <a:cs typeface="Calibri" pitchFamily="34" charset="-120"/>
               </a:rPr>
-              <a:t> by his words.</a:t>
-            </a:r>
-            <a:endParaRPr lang="en-US" sz="1800" dirty="0"/>
-          </a:p>
-        </p:txBody>
-      </p:sp>
-      <p:sp>
-        <p:nvSpPr>
-          <p:cNvPr id="13" name="Shape 11"/>
-          <p:cNvSpPr/>
-          <p:nvPr/>
-        </p:nvSpPr>
-        <p:spPr>
-          <a:xfrm>
-            <a:off x="365760" y="2852928"/>
-            <a:ext cx="8412480" cy="475488"/>
-          </a:xfrm>
-          <a:prstGeom prst="rect">
-            <a:avLst>
-              <a:gd name="adj" fmla="val 15385"/>
-            </a:avLst>
-          </a:prstGeom>
-          <a:solidFill>
-            <a:srgbClr val="CCFBF1"/>
-          </a:solidFill>
-          <a:ln w="12700">
-            <a:solidFill>
-              <a:srgbClr val="0D9488"/>
-            </a:solidFill>
-            <a:prstDash val="solid"/>
-          </a:ln>
-        </p:spPr>
-      </p:sp>
-      <p:sp>
-        <p:nvSpPr>
-          <p:cNvPr id="14" name="Text 12"/>
-          <p:cNvSpPr/>
-          <p:nvPr/>
-        </p:nvSpPr>
-        <p:spPr>
-          <a:xfrm>
-            <a:off x="502920" y="2852928"/>
-            <a:ext cx="8229600" cy="475488"/>
-          </a:xfrm>
-          <a:prstGeom prst="rect">
-            <a:avLst/>
-          </a:prstGeom>
-          <a:noFill/>
-          <a:ln/>
-        </p:spPr>
-        <p:txBody>
-          <a:bodyPr wrap="square" rtlCol="0" anchor="ctr"/>
-          <a:lstStyle/>
-          <a:p>
-            <a:pPr algn="l" indent="0" marL="0">
-              <a:buNone/>
-            </a:pPr>
-            <a:r>
-              <a:rPr lang="en-US" sz="1200" b="1" dirty="0">
-                <a:solidFill>
-                  <a:srgbClr val="0F766E"/>
-                </a:solidFill>
-                <a:latin typeface="Calibri" pitchFamily="34" charset="0"/>
-                <a:ea typeface="Calibri" pitchFamily="34" charset="-122"/>
-                <a:cs typeface="Calibri" pitchFamily="34" charset="-120"/>
-              </a:rPr>
-              <a:t>Now rewrite each focus word below with space between letters — leave room for your breakdown.</a:t>
-            </a:r>
-            <a:endParaRPr lang="en-US" sz="1200" dirty="0"/>
-          </a:p>
-        </p:txBody>
-      </p:sp>
-      <p:sp>
-        <p:nvSpPr>
-          <p:cNvPr id="15" name="Shape 13"/>
-          <p:cNvSpPr/>
-          <p:nvPr/>
-        </p:nvSpPr>
-        <p:spPr>
-          <a:xfrm>
-            <a:off x="1737360" y="3456432"/>
+              <a:t>write your breakdown below</a:t>
+            </a:r>
+            <a:endParaRPr lang="en-US" sz="900" dirty="0"/>
+          </a:p>
+        </p:txBody>
+      </p:sp>
+      <p:sp>
+        <p:nvSpPr>
+          <p:cNvPr id="19" name="Shape 17"/>
+          <p:cNvSpPr/>
+          <p:nvPr/>
+        </p:nvSpPr>
+        <p:spPr>
+          <a:xfrm>
+            <a:off x="4572000" y="3456432"/>
             <a:ext cx="2560320" cy="1005840"/>
           </a:xfrm>
           <a:prstGeom prst="rect">
@@ -6203,13 +6300,13 @@
       </p:sp>
       <p:sp>
         <p:nvSpPr>
-          <p:cNvPr id="16" name="Shape 14"/>
-          <p:cNvSpPr/>
-          <p:nvPr/>
-        </p:nvSpPr>
-        <p:spPr>
-          <a:xfrm>
-            <a:off x="1737360" y="3977640"/>
+          <p:cNvPr id="20" name="Shape 18"/>
+          <p:cNvSpPr/>
+          <p:nvPr/>
+        </p:nvSpPr>
+        <p:spPr>
+          <a:xfrm>
+            <a:off x="4572000" y="3977640"/>
             <a:ext cx="2560320" cy="0"/>
           </a:xfrm>
           <a:prstGeom prst="line">
@@ -6226,13 +6323,13 @@
       </p:sp>
       <p:sp>
         <p:nvSpPr>
-          <p:cNvPr id="17" name="Text 15"/>
-          <p:cNvSpPr/>
-          <p:nvPr/>
-        </p:nvSpPr>
-        <p:spPr>
-          <a:xfrm>
-            <a:off x="1737360" y="3456432"/>
+          <p:cNvPr id="21" name="Text 19"/>
+          <p:cNvSpPr/>
+          <p:nvPr/>
+        </p:nvSpPr>
+        <p:spPr>
+          <a:xfrm>
+            <a:off x="4572000" y="3456432"/>
             <a:ext cx="2560320" cy="502920"/>
           </a:xfrm>
           <a:prstGeom prst="rect">
@@ -6257,135 +6354,7 @@
                 <a:ea typeface="Trebuchet MS" pitchFamily="34" charset="-122"/>
                 <a:cs typeface="Trebuchet MS" pitchFamily="34" charset="-120"/>
               </a:rPr>
-              <a:t>inspire</a:t>
-            </a:r>
-            <a:endParaRPr lang="en-US" sz="1400" dirty="0"/>
-          </a:p>
-        </p:txBody>
-      </p:sp>
-      <p:sp>
-        <p:nvSpPr>
-          <p:cNvPr id="18" name="Text 16"/>
-          <p:cNvSpPr/>
-          <p:nvPr/>
-        </p:nvSpPr>
-        <p:spPr>
-          <a:xfrm>
-            <a:off x="1737360" y="4005072"/>
-            <a:ext cx="2560320" cy="457200"/>
-          </a:xfrm>
-          <a:prstGeom prst="rect">
-            <a:avLst/>
-          </a:prstGeom>
-          <a:noFill/>
-          <a:ln/>
-        </p:spPr>
-        <p:txBody>
-          <a:bodyPr wrap="square" lIns="0" tIns="0" rIns="0" bIns="0" rtlCol="0" anchor="ctr"/>
-          <a:lstStyle/>
-          <a:p>
-            <a:pPr algn="ctr" indent="0" marL="0">
-              <a:buNone/>
-            </a:pPr>
-            <a:r>
-              <a:rPr lang="en-US" sz="900" i="1" dirty="0">
-                <a:solidFill>
-                  <a:srgbClr val="475569"/>
-                </a:solidFill>
-                <a:latin typeface="Calibri" pitchFamily="34" charset="0"/>
-                <a:ea typeface="Calibri" pitchFamily="34" charset="-122"/>
-                <a:cs typeface="Calibri" pitchFamily="34" charset="-120"/>
-              </a:rPr>
-              <a:t>write your breakdown below</a:t>
-            </a:r>
-            <a:endParaRPr lang="en-US" sz="900" dirty="0"/>
-          </a:p>
-        </p:txBody>
-      </p:sp>
-      <p:sp>
-        <p:nvSpPr>
-          <p:cNvPr id="19" name="Shape 17"/>
-          <p:cNvSpPr/>
-          <p:nvPr/>
-        </p:nvSpPr>
-        <p:spPr>
-          <a:xfrm>
-            <a:off x="4572000" y="3456432"/>
-            <a:ext cx="2560320" cy="1005840"/>
-          </a:xfrm>
-          <a:prstGeom prst="rect">
-            <a:avLst>
-              <a:gd name="adj" fmla="val 7273"/>
-            </a:avLst>
-          </a:prstGeom>
-          <a:solidFill>
-            <a:srgbClr val="F8FAFC"/>
-          </a:solidFill>
-          <a:ln w="12700">
-            <a:solidFill>
-              <a:srgbClr val="E2E8F0"/>
-            </a:solidFill>
-            <a:prstDash val="solid"/>
-          </a:ln>
-        </p:spPr>
-      </p:sp>
-      <p:sp>
-        <p:nvSpPr>
-          <p:cNvPr id="20" name="Shape 18"/>
-          <p:cNvSpPr/>
-          <p:nvPr/>
-        </p:nvSpPr>
-        <p:spPr>
-          <a:xfrm>
-            <a:off x="4572000" y="3977640"/>
-            <a:ext cx="2560320" cy="0"/>
-          </a:xfrm>
-          <a:prstGeom prst="line">
-            <a:avLst/>
-          </a:prstGeom>
-          <a:noFill/>
-          <a:ln w="12700">
-            <a:solidFill>
-              <a:srgbClr val="E2E8F0"/>
-            </a:solidFill>
-            <a:prstDash val="dash"/>
-          </a:ln>
-        </p:spPr>
-      </p:sp>
-      <p:sp>
-        <p:nvSpPr>
-          <p:cNvPr id="21" name="Text 19"/>
-          <p:cNvSpPr/>
-          <p:nvPr/>
-        </p:nvSpPr>
-        <p:spPr>
-          <a:xfrm>
-            <a:off x="4572000" y="3456432"/>
-            <a:ext cx="2560320" cy="502920"/>
-          </a:xfrm>
-          <a:prstGeom prst="rect">
-            <a:avLst/>
-          </a:prstGeom>
-          <a:noFill/>
-          <a:ln/>
-        </p:spPr>
-        <p:txBody>
-          <a:bodyPr wrap="square" lIns="0" tIns="0" rIns="0" bIns="0" rtlCol="0" anchor="ctr"/>
-          <a:lstStyle/>
-          <a:p>
-            <a:pPr algn="ctr" indent="0" marL="0">
-              <a:buNone/>
-            </a:pPr>
-            <a:r>
-              <a:rPr lang="en-US" sz="1400" b="1" dirty="0">
-                <a:solidFill>
-                  <a:srgbClr val="0D9488"/>
-                </a:solidFill>
-                <a:latin typeface="Trebuchet MS" pitchFamily="34" charset="0"/>
-                <a:ea typeface="Trebuchet MS" pitchFamily="34" charset="-122"/>
-                <a:cs typeface="Trebuchet MS" pitchFamily="34" charset="-120"/>
-              </a:rPr>
-              <a:t>inspired</a:t>
+              <a:t>aspire</a:t>
             </a:r>
             <a:endParaRPr lang="en-US" sz="1400" dirty="0"/>
           </a:p>
@@ -7972,7 +7941,7 @@
                 <a:ea typeface="Calibri" pitchFamily="34" charset="-122"/>
                 <a:cs typeface="Calibri" pitchFamily="34" charset="-120"/>
               </a:rPr>
-              <a:t>breathe</a:t>
+              <a:t>breathe, breath</a:t>
             </a:r>
             <a:endParaRPr lang="en-US" sz="850" dirty="0"/>
           </a:p>
@@ -8957,7 +8926,7 @@
                 <a:ea typeface="Calibri" pitchFamily="34" charset="-122"/>
                 <a:cs typeface="Calibri" pitchFamily="34" charset="-120"/>
               </a:rPr>
-              <a:t>breathe</a:t>
+              <a:t>breathe, breath</a:t>
             </a:r>
             <a:endParaRPr lang="en-US" sz="850" dirty="0"/>
           </a:p>
@@ -10074,7 +10043,7 @@
                 <a:ea typeface="Calibri" pitchFamily="34" charset="-122"/>
                 <a:cs typeface="Calibri" pitchFamily="34" charset="-120"/>
               </a:rPr>
-              <a:t>breathe</a:t>
+              <a:t>breathe, breath</a:t>
             </a:r>
             <a:endParaRPr lang="en-US" sz="850" dirty="0"/>
           </a:p>
@@ -11258,7 +11227,7 @@
                 <a:ea typeface="Trebuchet MS" pitchFamily="34" charset="-122"/>
                 <a:cs typeface="Trebuchet MS" pitchFamily="34" charset="-120"/>
               </a:rPr>
-              <a:t>inspired</a:t>
+              <a:t>aspire</a:t>
             </a:r>
             <a:endParaRPr lang="en-US" sz="2800" dirty="0"/>
           </a:p>
@@ -12085,7 +12054,7 @@
                 <a:ea typeface="Trebuchet MS" pitchFamily="34" charset="-122"/>
                 <a:cs typeface="Trebuchet MS" pitchFamily="34" charset="-120"/>
               </a:rPr>
-              <a:t>inspired</a:t>
+              <a:t>aspire</a:t>
             </a:r>
             <a:endParaRPr lang="en-US" sz="2800" dirty="0"/>
           </a:p>
@@ -12165,7 +12134,7 @@
         </p:nvSpPr>
         <p:spPr>
           <a:xfrm>
-            <a:off x="2221992" y="2258568"/>
+            <a:off x="2938272" y="2258568"/>
             <a:ext cx="1828800" cy="292608"/>
           </a:xfrm>
           <a:prstGeom prst="rect">
@@ -12199,7 +12168,7 @@
         </p:nvSpPr>
         <p:spPr>
           <a:xfrm>
-            <a:off x="2221992" y="2258568"/>
+            <a:off x="2938272" y="2258568"/>
             <a:ext cx="1828800" cy="292608"/>
           </a:xfrm>
           <a:prstGeom prst="rect">
@@ -12224,7 +12193,7 @@
                 <a:ea typeface="Trebuchet MS" pitchFamily="34" charset="-122"/>
                 <a:cs typeface="Trebuchet MS" pitchFamily="34" charset="-120"/>
               </a:rPr>
-              <a:t>in</a:t>
+              <a:t>a</a:t>
             </a:r>
             <a:endParaRPr lang="en-US" sz="1300" dirty="0"/>
           </a:p>
@@ -12238,7 +12207,7 @@
         </p:nvSpPr>
         <p:spPr>
           <a:xfrm>
-            <a:off x="2221992" y="2569464"/>
+            <a:off x="2938272" y="2569464"/>
             <a:ext cx="1828800" cy="201168"/>
           </a:xfrm>
           <a:prstGeom prst="rect">
@@ -12263,7 +12232,7 @@
                 <a:ea typeface="Calibri" pitchFamily="34" charset="-122"/>
                 <a:cs typeface="Calibri" pitchFamily="34" charset="-120"/>
               </a:rPr>
-              <a:t>into, upon</a:t>
+              <a:t>to, toward</a:t>
             </a:r>
             <a:endParaRPr lang="en-US" sz="850" dirty="0"/>
           </a:p>
@@ -12277,7 +12246,7 @@
         </p:nvSpPr>
         <p:spPr>
           <a:xfrm>
-            <a:off x="4370832" y="2258568"/>
+            <a:off x="5803392" y="2258568"/>
             <a:ext cx="1828800" cy="292608"/>
           </a:xfrm>
           <a:prstGeom prst="rect">
@@ -12311,7 +12280,7 @@
         </p:nvSpPr>
         <p:spPr>
           <a:xfrm>
-            <a:off x="4370832" y="2258568"/>
+            <a:off x="5803392" y="2258568"/>
             <a:ext cx="1828800" cy="292608"/>
           </a:xfrm>
           <a:prstGeom prst="rect">
@@ -12350,7 +12319,7 @@
         </p:nvSpPr>
         <p:spPr>
           <a:xfrm>
-            <a:off x="4370832" y="2569464"/>
+            <a:off x="5803392" y="2569464"/>
             <a:ext cx="1828800" cy="201168"/>
           </a:xfrm>
           <a:prstGeom prst="rect">
@@ -12375,7 +12344,7 @@
                 <a:ea typeface="Calibri" pitchFamily="34" charset="-122"/>
                 <a:cs typeface="Calibri" pitchFamily="34" charset="-120"/>
               </a:rPr>
-              <a:t>breathe</a:t>
+              <a:t>breathe, breath</a:t>
             </a:r>
             <a:endParaRPr lang="en-US" sz="850" dirty="0"/>
           </a:p>
@@ -12389,30 +12358,23 @@
         </p:nvSpPr>
         <p:spPr>
           <a:xfrm>
-            <a:off x="6519672" y="2258568"/>
-            <a:ext cx="1828800" cy="292608"/>
+            <a:off x="365760" y="3273552"/>
+            <a:ext cx="1371600" cy="658368"/>
           </a:xfrm>
           <a:prstGeom prst="rect">
             <a:avLst>
-              <a:gd name="adj" fmla="val 25000"/>
+              <a:gd name="adj" fmla="val 8333"/>
             </a:avLst>
           </a:prstGeom>
           <a:solidFill>
-            <a:srgbClr val="FCE7F3"/>
-          </a:solidFill>
-          <a:ln w="19050">
-            <a:solidFill>
-              <a:srgbClr val="DB2777"/>
-            </a:solidFill>
-            <a:prstDash val="solid"/>
-          </a:ln>
-          <a:effectLst>
-            <a:outerShdw sx="100000" sy="100000" kx="0" ky="0" algn="bl" rotWithShape="0" blurRad="101600" dist="38100" dir="8100000">
-              <a:srgbClr val="000000">
-                <a:alpha val="12000"/>
-              </a:srgbClr>
-            </a:outerShdw>
-          </a:effectLst>
+            <a:srgbClr val="E2E8F0"/>
+          </a:solidFill>
+          <a:ln w="12700">
+            <a:solidFill>
+              <a:srgbClr val="E2E8F0"/>
+            </a:solidFill>
+            <a:prstDash val="solid"/>
+          </a:ln>
         </p:spPr>
       </p:sp>
       <p:sp>
@@ -12423,8 +12385,8 @@
         </p:nvSpPr>
         <p:spPr>
           <a:xfrm>
-            <a:off x="6519672" y="2258568"/>
-            <a:ext cx="1828800" cy="292608"/>
+            <a:off x="365760" y="3273552"/>
+            <a:ext cx="1371600" cy="658368"/>
           </a:xfrm>
           <a:prstGeom prst="rect">
             <a:avLst/>
@@ -12440,95 +12402,83 @@
               <a:buNone/>
             </a:pPr>
             <a:r>
-              <a:rPr lang="en-US" sz="1300" b="1" dirty="0">
-                <a:solidFill>
-                  <a:srgbClr val="9D174D"/>
+              <a:rPr lang="en-US" sz="1100" b="1" dirty="0">
+                <a:solidFill>
+                  <a:srgbClr val="475569"/>
                 </a:solidFill>
                 <a:latin typeface="Trebuchet MS" pitchFamily="34" charset="0"/>
                 <a:ea typeface="Trebuchet MS" pitchFamily="34" charset="-122"/>
                 <a:cs typeface="Trebuchet MS" pitchFamily="34" charset="-120"/>
               </a:rPr>
-              <a:t>d</a:t>
-            </a:r>
-            <a:endParaRPr lang="en-US" sz="1300" dirty="0"/>
-          </a:p>
-        </p:txBody>
-      </p:sp>
-      <p:sp>
-        <p:nvSpPr>
-          <p:cNvPr id="24" name="Text 22"/>
-          <p:cNvSpPr/>
-          <p:nvPr/>
-        </p:nvSpPr>
-        <p:spPr>
-          <a:xfrm>
-            <a:off x="6519672" y="2569464"/>
-            <a:ext cx="1828800" cy="201168"/>
-          </a:xfrm>
-          <a:prstGeom prst="rect">
-            <a:avLst/>
-          </a:prstGeom>
-          <a:noFill/>
-          <a:ln/>
-        </p:spPr>
-        <p:txBody>
-          <a:bodyPr wrap="square" lIns="0" tIns="0" rIns="0" bIns="0" rtlCol="0" anchor="t"/>
-          <a:lstStyle/>
-          <a:p>
-            <a:pPr algn="ctr" indent="0" marL="0">
-              <a:buNone/>
-            </a:pPr>
-            <a:r>
-              <a:rPr lang="en-US" sz="850" dirty="0">
-                <a:solidFill>
-                  <a:srgbClr val="475569"/>
+              <a:t>Syllables</a:t>
+            </a:r>
+            <a:endParaRPr lang="en-US" sz="1100" dirty="0"/>
+          </a:p>
+        </p:txBody>
+      </p:sp>
+      <p:sp>
+        <p:nvSpPr>
+          <p:cNvPr id="24" name="Shape 22"/>
+          <p:cNvSpPr/>
+          <p:nvPr/>
+        </p:nvSpPr>
+        <p:spPr>
+          <a:xfrm>
+            <a:off x="1874520" y="3273552"/>
+            <a:ext cx="6903720" cy="658368"/>
+          </a:xfrm>
+          <a:prstGeom prst="rect">
+            <a:avLst>
+              <a:gd name="adj" fmla="val 8333"/>
+            </a:avLst>
+          </a:prstGeom>
+          <a:solidFill>
+            <a:srgbClr val="F8FAFC"/>
+          </a:solidFill>
+          <a:ln w="12700">
+            <a:solidFill>
+              <a:srgbClr val="E2E8F0"/>
+            </a:solidFill>
+            <a:prstDash val="dash"/>
+          </a:ln>
+        </p:spPr>
+      </p:sp>
+      <p:sp>
+        <p:nvSpPr>
+          <p:cNvPr id="25" name="Text 23"/>
+          <p:cNvSpPr/>
+          <p:nvPr/>
+        </p:nvSpPr>
+        <p:spPr>
+          <a:xfrm>
+            <a:off x="1874520" y="3273552"/>
+            <a:ext cx="6903720" cy="658368"/>
+          </a:xfrm>
+          <a:prstGeom prst="rect">
+            <a:avLst/>
+          </a:prstGeom>
+          <a:noFill/>
+          <a:ln/>
+        </p:spPr>
+        <p:txBody>
+          <a:bodyPr wrap="square" rtlCol="0" anchor="ctr"/>
+          <a:lstStyle/>
+          <a:p>
+            <a:pPr algn="ctr" indent="0" marL="0">
+              <a:buNone/>
+            </a:pPr>
+            <a:r>
+              <a:rPr lang="en-US" sz="1100" i="1" dirty="0">
+                <a:solidFill>
+                  <a:srgbClr val="CBD5E1"/>
                 </a:solidFill>
                 <a:latin typeface="Calibri" pitchFamily="34" charset="0"/>
                 <a:ea typeface="Calibri" pitchFamily="34" charset="-122"/>
                 <a:cs typeface="Calibri" pitchFamily="34" charset="-120"/>
               </a:rPr>
-              <a:t>past tense</a:t>
-            </a:r>
-            <a:endParaRPr lang="en-US" sz="850" dirty="0"/>
-          </a:p>
-        </p:txBody>
-      </p:sp>
-      <p:sp>
-        <p:nvSpPr>
-          <p:cNvPr id="25" name="Text 23"/>
-          <p:cNvSpPr/>
-          <p:nvPr/>
-        </p:nvSpPr>
-        <p:spPr>
-          <a:xfrm>
-            <a:off x="6519672" y="2752344"/>
-            <a:ext cx="1828800" cy="182880"/>
-          </a:xfrm>
-          <a:prstGeom prst="rect">
-            <a:avLst/>
-          </a:prstGeom>
-          <a:noFill/>
-          <a:ln/>
-        </p:spPr>
-        <p:txBody>
-          <a:bodyPr wrap="square" lIns="0" tIns="0" rIns="0" bIns="0" rtlCol="0" anchor="t"/>
-          <a:lstStyle/>
-          <a:p>
-            <a:pPr algn="ctr" indent="0" marL="0">
-              <a:buNone/>
-            </a:pPr>
-            <a:r>
-              <a:rPr lang="en-US" sz="700" i="1" dirty="0">
-                <a:solidFill>
-                  <a:srgbClr val="94A3B8"/>
-                </a:solidFill>
-                <a:latin typeface="Calibri" pitchFamily="34" charset="0"/>
-                <a:ea typeface="Calibri" pitchFamily="34" charset="-122"/>
-                <a:cs typeface="Calibri" pitchFamily="34" charset="-120"/>
-              </a:rPr>
-              <a:t>'e' dropped before vowel suffix</a:t>
-            </a:r>
-            <a:endParaRPr lang="en-US" sz="700" dirty="0"/>
+              <a:t>Write here...</a:t>
+            </a:r>
+            <a:endParaRPr lang="en-US" sz="1100" dirty="0"/>
           </a:p>
         </p:txBody>
       </p:sp>
@@ -12540,12 +12490,12 @@
         </p:nvSpPr>
         <p:spPr>
           <a:xfrm>
-            <a:off x="365760" y="3273552"/>
-            <a:ext cx="1371600" cy="658368"/>
+            <a:off x="365760" y="4096512"/>
+            <a:ext cx="1371600" cy="804672"/>
           </a:xfrm>
           <a:prstGeom prst="rect">
             <a:avLst>
-              <a:gd name="adj" fmla="val 8333"/>
+              <a:gd name="adj" fmla="val 6818"/>
             </a:avLst>
           </a:prstGeom>
           <a:solidFill>
@@ -12567,8 +12517,8 @@
         </p:nvSpPr>
         <p:spPr>
           <a:xfrm>
-            <a:off x="365760" y="3273552"/>
-            <a:ext cx="1371600" cy="658368"/>
+            <a:off x="365760" y="4096512"/>
+            <a:ext cx="1371600" cy="804672"/>
           </a:xfrm>
           <a:prstGeom prst="rect">
             <a:avLst/>
@@ -12592,7 +12542,7 @@
                 <a:ea typeface="Trebuchet MS" pitchFamily="34" charset="-122"/>
                 <a:cs typeface="Trebuchet MS" pitchFamily="34" charset="-120"/>
               </a:rPr>
-              <a:t>Syllables</a:t>
+              <a:t>Phonemes</a:t>
             </a:r>
             <a:endParaRPr lang="en-US" sz="1100" dirty="0"/>
           </a:p>
@@ -12606,74 +12556,8 @@
         </p:nvSpPr>
         <p:spPr>
           <a:xfrm>
-            <a:off x="1874520" y="3273552"/>
-            <a:ext cx="6903720" cy="658368"/>
-          </a:xfrm>
-          <a:prstGeom prst="rect">
-            <a:avLst>
-              <a:gd name="adj" fmla="val 8333"/>
-            </a:avLst>
-          </a:prstGeom>
-          <a:solidFill>
-            <a:srgbClr val="F8FAFC"/>
-          </a:solidFill>
-          <a:ln w="12700">
-            <a:solidFill>
-              <a:srgbClr val="E2E8F0"/>
-            </a:solidFill>
-            <a:prstDash val="dash"/>
-          </a:ln>
-        </p:spPr>
-      </p:sp>
-      <p:sp>
-        <p:nvSpPr>
-          <p:cNvPr id="29" name="Text 27"/>
-          <p:cNvSpPr/>
-          <p:nvPr/>
-        </p:nvSpPr>
-        <p:spPr>
-          <a:xfrm>
-            <a:off x="1874520" y="3273552"/>
-            <a:ext cx="6903720" cy="658368"/>
-          </a:xfrm>
-          <a:prstGeom prst="rect">
-            <a:avLst/>
-          </a:prstGeom>
-          <a:noFill/>
-          <a:ln/>
-        </p:spPr>
-        <p:txBody>
-          <a:bodyPr wrap="square" rtlCol="0" anchor="ctr"/>
-          <a:lstStyle/>
-          <a:p>
-            <a:pPr algn="ctr" indent="0" marL="0">
-              <a:buNone/>
-            </a:pPr>
-            <a:r>
-              <a:rPr lang="en-US" sz="1100" i="1" dirty="0">
-                <a:solidFill>
-                  <a:srgbClr val="CBD5E1"/>
-                </a:solidFill>
-                <a:latin typeface="Calibri" pitchFamily="34" charset="0"/>
-                <a:ea typeface="Calibri" pitchFamily="34" charset="-122"/>
-                <a:cs typeface="Calibri" pitchFamily="34" charset="-120"/>
-              </a:rPr>
-              <a:t>Write here...</a:t>
-            </a:r>
-            <a:endParaRPr lang="en-US" sz="1100" dirty="0"/>
-          </a:p>
-        </p:txBody>
-      </p:sp>
-      <p:sp>
-        <p:nvSpPr>
-          <p:cNvPr id="30" name="Shape 28"/>
-          <p:cNvSpPr/>
-          <p:nvPr/>
-        </p:nvSpPr>
-        <p:spPr>
-          <a:xfrm>
-            <a:off x="365760" y="4096512"/>
-            <a:ext cx="1371600" cy="804672"/>
+            <a:off x="1874520" y="4096512"/>
+            <a:ext cx="6903720" cy="804672"/>
           </a:xfrm>
           <a:prstGeom prst="rect">
             <a:avLst>
@@ -12681,85 +12565,19 @@
             </a:avLst>
           </a:prstGeom>
           <a:solidFill>
-            <a:srgbClr val="E2E8F0"/>
+            <a:srgbClr val="F8FAFC"/>
           </a:solidFill>
           <a:ln w="12700">
             <a:solidFill>
               <a:srgbClr val="E2E8F0"/>
             </a:solidFill>
-            <a:prstDash val="solid"/>
-          </a:ln>
-        </p:spPr>
-      </p:sp>
-      <p:sp>
-        <p:nvSpPr>
-          <p:cNvPr id="31" name="Text 29"/>
-          <p:cNvSpPr/>
-          <p:nvPr/>
-        </p:nvSpPr>
-        <p:spPr>
-          <a:xfrm>
-            <a:off x="365760" y="4096512"/>
-            <a:ext cx="1371600" cy="804672"/>
-          </a:xfrm>
-          <a:prstGeom prst="rect">
-            <a:avLst/>
-          </a:prstGeom>
-          <a:noFill/>
-          <a:ln/>
-        </p:spPr>
-        <p:txBody>
-          <a:bodyPr wrap="square" lIns="0" tIns="0" rIns="0" bIns="0" rtlCol="0" anchor="ctr"/>
-          <a:lstStyle/>
-          <a:p>
-            <a:pPr algn="ctr" indent="0" marL="0">
-              <a:buNone/>
-            </a:pPr>
-            <a:r>
-              <a:rPr lang="en-US" sz="1100" b="1" dirty="0">
-                <a:solidFill>
-                  <a:srgbClr val="475569"/>
-                </a:solidFill>
-                <a:latin typeface="Trebuchet MS" pitchFamily="34" charset="0"/>
-                <a:ea typeface="Trebuchet MS" pitchFamily="34" charset="-122"/>
-                <a:cs typeface="Trebuchet MS" pitchFamily="34" charset="-120"/>
-              </a:rPr>
-              <a:t>Phonemes</a:t>
-            </a:r>
-            <a:endParaRPr lang="en-US" sz="1100" dirty="0"/>
-          </a:p>
-        </p:txBody>
-      </p:sp>
-      <p:sp>
-        <p:nvSpPr>
-          <p:cNvPr id="32" name="Shape 30"/>
-          <p:cNvSpPr/>
-          <p:nvPr/>
-        </p:nvSpPr>
-        <p:spPr>
-          <a:xfrm>
-            <a:off x="1874520" y="4096512"/>
-            <a:ext cx="6903720" cy="804672"/>
-          </a:xfrm>
-          <a:prstGeom prst="rect">
-            <a:avLst>
-              <a:gd name="adj" fmla="val 6818"/>
-            </a:avLst>
-          </a:prstGeom>
-          <a:solidFill>
-            <a:srgbClr val="F8FAFC"/>
-          </a:solidFill>
-          <a:ln w="12700">
-            <a:solidFill>
-              <a:srgbClr val="E2E8F0"/>
-            </a:solidFill>
             <a:prstDash val="dash"/>
           </a:ln>
         </p:spPr>
       </p:sp>
       <p:sp>
         <p:nvSpPr>
-          <p:cNvPr id="33" name="Text 31"/>
+          <p:cNvPr id="29" name="Text 27"/>
           <p:cNvSpPr/>
           <p:nvPr/>
         </p:nvSpPr>
@@ -13221,7 +13039,7 @@
                 <a:ea typeface="Trebuchet MS" pitchFamily="34" charset="-122"/>
                 <a:cs typeface="Trebuchet MS" pitchFamily="34" charset="-120"/>
               </a:rPr>
-              <a:t>inspired</a:t>
+              <a:t>aspire</a:t>
             </a:r>
             <a:endParaRPr lang="en-US" sz="2800" dirty="0"/>
           </a:p>
@@ -13301,7 +13119,7 @@
         </p:nvSpPr>
         <p:spPr>
           <a:xfrm>
-            <a:off x="2221992" y="2258568"/>
+            <a:off x="2938272" y="2258568"/>
             <a:ext cx="1828800" cy="292608"/>
           </a:xfrm>
           <a:prstGeom prst="rect">
@@ -13335,7 +13153,7 @@
         </p:nvSpPr>
         <p:spPr>
           <a:xfrm>
-            <a:off x="2221992" y="2258568"/>
+            <a:off x="2938272" y="2258568"/>
             <a:ext cx="1828800" cy="292608"/>
           </a:xfrm>
           <a:prstGeom prst="rect">
@@ -13360,7 +13178,7 @@
                 <a:ea typeface="Trebuchet MS" pitchFamily="34" charset="-122"/>
                 <a:cs typeface="Trebuchet MS" pitchFamily="34" charset="-120"/>
               </a:rPr>
-              <a:t>in</a:t>
+              <a:t>a</a:t>
             </a:r>
             <a:endParaRPr lang="en-US" sz="1300" dirty="0"/>
           </a:p>
@@ -13374,7 +13192,7 @@
         </p:nvSpPr>
         <p:spPr>
           <a:xfrm>
-            <a:off x="2221992" y="2569464"/>
+            <a:off x="2938272" y="2569464"/>
             <a:ext cx="1828800" cy="201168"/>
           </a:xfrm>
           <a:prstGeom prst="rect">
@@ -13399,7 +13217,7 @@
                 <a:ea typeface="Calibri" pitchFamily="34" charset="-122"/>
                 <a:cs typeface="Calibri" pitchFamily="34" charset="-120"/>
               </a:rPr>
-              <a:t>into, upon</a:t>
+              <a:t>to, toward</a:t>
             </a:r>
             <a:endParaRPr lang="en-US" sz="850" dirty="0"/>
           </a:p>
@@ -13413,7 +13231,7 @@
         </p:nvSpPr>
         <p:spPr>
           <a:xfrm>
-            <a:off x="4370832" y="2258568"/>
+            <a:off x="5803392" y="2258568"/>
             <a:ext cx="1828800" cy="292608"/>
           </a:xfrm>
           <a:prstGeom prst="rect">
@@ -13447,7 +13265,7 @@
         </p:nvSpPr>
         <p:spPr>
           <a:xfrm>
-            <a:off x="4370832" y="2258568"/>
+            <a:off x="5803392" y="2258568"/>
             <a:ext cx="1828800" cy="292608"/>
           </a:xfrm>
           <a:prstGeom prst="rect">
@@ -13486,7 +13304,7 @@
         </p:nvSpPr>
         <p:spPr>
           <a:xfrm>
-            <a:off x="4370832" y="2569464"/>
+            <a:off x="5803392" y="2569464"/>
             <a:ext cx="1828800" cy="201168"/>
           </a:xfrm>
           <a:prstGeom prst="rect">
@@ -13511,7 +13329,7 @@
                 <a:ea typeface="Calibri" pitchFamily="34" charset="-122"/>
                 <a:cs typeface="Calibri" pitchFamily="34" charset="-120"/>
               </a:rPr>
-              <a:t>breathe</a:t>
+              <a:t>breathe, breath</a:t>
             </a:r>
             <a:endParaRPr lang="en-US" sz="850" dirty="0"/>
           </a:p>
@@ -13525,30 +13343,23 @@
         </p:nvSpPr>
         <p:spPr>
           <a:xfrm>
-            <a:off x="6519672" y="2258568"/>
-            <a:ext cx="1828800" cy="292608"/>
+            <a:off x="365760" y="3273552"/>
+            <a:ext cx="1371600" cy="658368"/>
           </a:xfrm>
           <a:prstGeom prst="rect">
             <a:avLst>
-              <a:gd name="adj" fmla="val 25000"/>
+              <a:gd name="adj" fmla="val 8333"/>
             </a:avLst>
           </a:prstGeom>
           <a:solidFill>
-            <a:srgbClr val="FCE7F3"/>
-          </a:solidFill>
-          <a:ln w="19050">
-            <a:solidFill>
-              <a:srgbClr val="DB2777"/>
-            </a:solidFill>
-            <a:prstDash val="solid"/>
-          </a:ln>
-          <a:effectLst>
-            <a:outerShdw sx="100000" sy="100000" kx="0" ky="0" algn="bl" rotWithShape="0" blurRad="101600" dist="38100" dir="8100000">
-              <a:srgbClr val="000000">
-                <a:alpha val="12000"/>
-              </a:srgbClr>
-            </a:outerShdw>
-          </a:effectLst>
+            <a:srgbClr val="E2E8F0"/>
+          </a:solidFill>
+          <a:ln w="12700">
+            <a:solidFill>
+              <a:srgbClr val="E2E8F0"/>
+            </a:solidFill>
+            <a:prstDash val="solid"/>
+          </a:ln>
         </p:spPr>
       </p:sp>
       <p:sp>
@@ -13559,8 +13370,8 @@
         </p:nvSpPr>
         <p:spPr>
           <a:xfrm>
-            <a:off x="6519672" y="2258568"/>
-            <a:ext cx="1828800" cy="292608"/>
+            <a:off x="365760" y="3273552"/>
+            <a:ext cx="1371600" cy="658368"/>
           </a:xfrm>
           <a:prstGeom prst="rect">
             <a:avLst/>
@@ -13576,108 +13387,30 @@
               <a:buNone/>
             </a:pPr>
             <a:r>
-              <a:rPr lang="en-US" sz="1300" b="1" dirty="0">
-                <a:solidFill>
-                  <a:srgbClr val="9D174D"/>
+              <a:rPr lang="en-US" sz="1100" b="1" dirty="0">
+                <a:solidFill>
+                  <a:srgbClr val="475569"/>
                 </a:solidFill>
                 <a:latin typeface="Trebuchet MS" pitchFamily="34" charset="0"/>
                 <a:ea typeface="Trebuchet MS" pitchFamily="34" charset="-122"/>
                 <a:cs typeface="Trebuchet MS" pitchFamily="34" charset="-120"/>
               </a:rPr>
-              <a:t>d</a:t>
-            </a:r>
-            <a:endParaRPr lang="en-US" sz="1300" dirty="0"/>
-          </a:p>
-        </p:txBody>
-      </p:sp>
-      <p:sp>
-        <p:nvSpPr>
-          <p:cNvPr id="24" name="Text 22"/>
-          <p:cNvSpPr/>
-          <p:nvPr/>
-        </p:nvSpPr>
-        <p:spPr>
-          <a:xfrm>
-            <a:off x="6519672" y="2569464"/>
-            <a:ext cx="1828800" cy="201168"/>
-          </a:xfrm>
-          <a:prstGeom prst="rect">
-            <a:avLst/>
-          </a:prstGeom>
-          <a:noFill/>
-          <a:ln/>
-        </p:spPr>
-        <p:txBody>
-          <a:bodyPr wrap="square" lIns="0" tIns="0" rIns="0" bIns="0" rtlCol="0" anchor="t"/>
-          <a:lstStyle/>
-          <a:p>
-            <a:pPr algn="ctr" indent="0" marL="0">
-              <a:buNone/>
-            </a:pPr>
-            <a:r>
-              <a:rPr lang="en-US" sz="850" dirty="0">
-                <a:solidFill>
-                  <a:srgbClr val="475569"/>
-                </a:solidFill>
-                <a:latin typeface="Calibri" pitchFamily="34" charset="0"/>
-                <a:ea typeface="Calibri" pitchFamily="34" charset="-122"/>
-                <a:cs typeface="Calibri" pitchFamily="34" charset="-120"/>
-              </a:rPr>
-              <a:t>past tense</a:t>
-            </a:r>
-            <a:endParaRPr lang="en-US" sz="850" dirty="0"/>
-          </a:p>
-        </p:txBody>
-      </p:sp>
-      <p:sp>
-        <p:nvSpPr>
-          <p:cNvPr id="25" name="Text 23"/>
-          <p:cNvSpPr/>
-          <p:nvPr/>
-        </p:nvSpPr>
-        <p:spPr>
-          <a:xfrm>
-            <a:off x="6519672" y="2752344"/>
-            <a:ext cx="1828800" cy="182880"/>
-          </a:xfrm>
-          <a:prstGeom prst="rect">
-            <a:avLst/>
-          </a:prstGeom>
-          <a:noFill/>
-          <a:ln/>
-        </p:spPr>
-        <p:txBody>
-          <a:bodyPr wrap="square" lIns="0" tIns="0" rIns="0" bIns="0" rtlCol="0" anchor="t"/>
-          <a:lstStyle/>
-          <a:p>
-            <a:pPr algn="ctr" indent="0" marL="0">
-              <a:buNone/>
-            </a:pPr>
-            <a:r>
-              <a:rPr lang="en-US" sz="700" i="1" dirty="0">
-                <a:solidFill>
-                  <a:srgbClr val="94A3B8"/>
-                </a:solidFill>
-                <a:latin typeface="Calibri" pitchFamily="34" charset="0"/>
-                <a:ea typeface="Calibri" pitchFamily="34" charset="-122"/>
-                <a:cs typeface="Calibri" pitchFamily="34" charset="-120"/>
-              </a:rPr>
-              <a:t>'e' dropped before vowel suffix</a:t>
-            </a:r>
-            <a:endParaRPr lang="en-US" sz="700" dirty="0"/>
-          </a:p>
-        </p:txBody>
-      </p:sp>
-      <p:sp>
-        <p:nvSpPr>
-          <p:cNvPr id="26" name="Shape 24"/>
-          <p:cNvSpPr/>
-          <p:nvPr/>
-        </p:nvSpPr>
-        <p:spPr>
-          <a:xfrm>
-            <a:off x="365760" y="3273552"/>
-            <a:ext cx="1371600" cy="658368"/>
+              <a:t>Syllables</a:t>
+            </a:r>
+            <a:endParaRPr lang="en-US" sz="1100" dirty="0"/>
+          </a:p>
+        </p:txBody>
+      </p:sp>
+      <p:sp>
+        <p:nvSpPr>
+          <p:cNvPr id="24" name="Shape 22"/>
+          <p:cNvSpPr/>
+          <p:nvPr/>
+        </p:nvSpPr>
+        <p:spPr>
+          <a:xfrm>
+            <a:off x="1874520" y="3273552"/>
+            <a:ext cx="6903720" cy="658368"/>
           </a:xfrm>
           <a:prstGeom prst="rect">
             <a:avLst>
@@ -13685,26 +13418,53 @@
             </a:avLst>
           </a:prstGeom>
           <a:solidFill>
-            <a:srgbClr val="E2E8F0"/>
-          </a:solidFill>
-          <a:ln w="12700">
-            <a:solidFill>
-              <a:srgbClr val="E2E8F0"/>
-            </a:solidFill>
-            <a:prstDash val="solid"/>
-          </a:ln>
-        </p:spPr>
-      </p:sp>
-      <p:sp>
-        <p:nvSpPr>
-          <p:cNvPr id="27" name="Text 25"/>
-          <p:cNvSpPr/>
-          <p:nvPr/>
-        </p:nvSpPr>
-        <p:spPr>
-          <a:xfrm>
-            <a:off x="365760" y="3273552"/>
-            <a:ext cx="1371600" cy="658368"/>
+            <a:srgbClr val="CCFBF1"/>
+          </a:solidFill>
+          <a:ln w="12700">
+            <a:solidFill>
+              <a:srgbClr val="0D9488"/>
+            </a:solidFill>
+            <a:prstDash val="solid"/>
+          </a:ln>
+        </p:spPr>
+      </p:sp>
+      <p:sp>
+        <p:nvSpPr>
+          <p:cNvPr id="25" name="Shape 23"/>
+          <p:cNvSpPr/>
+          <p:nvPr/>
+        </p:nvSpPr>
+        <p:spPr>
+          <a:xfrm>
+            <a:off x="2999232" y="3364992"/>
+            <a:ext cx="1645920" cy="475488"/>
+          </a:xfrm>
+          <a:prstGeom prst="rect">
+            <a:avLst>
+              <a:gd name="adj" fmla="val 9615"/>
+            </a:avLst>
+          </a:prstGeom>
+          <a:solidFill>
+            <a:srgbClr val="FFFFFF"/>
+          </a:solidFill>
+          <a:ln w="12700">
+            <a:solidFill>
+              <a:srgbClr val="0D9488"/>
+            </a:solidFill>
+            <a:prstDash val="solid"/>
+          </a:ln>
+        </p:spPr>
+      </p:sp>
+      <p:sp>
+        <p:nvSpPr>
+          <p:cNvPr id="26" name="Text 24"/>
+          <p:cNvSpPr/>
+          <p:nvPr/>
+        </p:nvSpPr>
+        <p:spPr>
+          <a:xfrm>
+            <a:off x="2999232" y="3364992"/>
+            <a:ext cx="1645920" cy="475488"/>
           </a:xfrm>
           <a:prstGeom prst="rect">
             <a:avLst/>
@@ -13720,17 +13480,56 @@
               <a:buNone/>
             </a:pPr>
             <a:r>
-              <a:rPr lang="en-US" sz="1100" b="1" dirty="0">
-                <a:solidFill>
-                  <a:srgbClr val="475569"/>
+              <a:rPr lang="en-US" sz="1400" b="1" dirty="0">
+                <a:solidFill>
+                  <a:srgbClr val="0D9488"/>
                 </a:solidFill>
                 <a:latin typeface="Trebuchet MS" pitchFamily="34" charset="0"/>
                 <a:ea typeface="Trebuchet MS" pitchFamily="34" charset="-122"/>
                 <a:cs typeface="Trebuchet MS" pitchFamily="34" charset="-120"/>
               </a:rPr>
-              <a:t>Syllables</a:t>
-            </a:r>
-            <a:endParaRPr lang="en-US" sz="1100" dirty="0"/>
+              <a:t>a</a:t>
+            </a:r>
+            <a:endParaRPr lang="en-US" sz="1400" dirty="0"/>
+          </a:p>
+        </p:txBody>
+      </p:sp>
+      <p:sp>
+        <p:nvSpPr>
+          <p:cNvPr id="27" name="Text 25"/>
+          <p:cNvSpPr/>
+          <p:nvPr/>
+        </p:nvSpPr>
+        <p:spPr>
+          <a:xfrm>
+            <a:off x="4645152" y="3364992"/>
+            <a:ext cx="1097280" cy="475488"/>
+          </a:xfrm>
+          <a:prstGeom prst="rect">
+            <a:avLst/>
+          </a:prstGeom>
+          <a:noFill/>
+          <a:ln/>
+        </p:spPr>
+        <p:txBody>
+          <a:bodyPr wrap="square" lIns="0" tIns="0" rIns="0" bIns="0" rtlCol="0" anchor="ctr"/>
+          <a:lstStyle/>
+          <a:p>
+            <a:pPr algn="ctr" indent="0" marL="0">
+              <a:buNone/>
+            </a:pPr>
+            <a:r>
+              <a:rPr lang="en-US" sz="1600" b="1" dirty="0">
+                <a:solidFill>
+                  <a:srgbClr val="0D9488"/>
+                </a:solidFill>
+                <a:latin typeface="Trebuchet MS" pitchFamily="34" charset="0"/>
+                <a:ea typeface="Trebuchet MS" pitchFamily="34" charset="-122"/>
+                <a:cs typeface="Trebuchet MS" pitchFamily="34" charset="-120"/>
+              </a:rPr>
+              <a:t>·</a:t>
+            </a:r>
+            <a:endParaRPr lang="en-US" sz="1600" dirty="0"/>
           </a:p>
         </p:txBody>
       </p:sp>
@@ -13742,34 +13541,7 @@
         </p:nvSpPr>
         <p:spPr>
           <a:xfrm>
-            <a:off x="1874520" y="3273552"/>
-            <a:ext cx="6903720" cy="658368"/>
-          </a:xfrm>
-          <a:prstGeom prst="rect">
-            <a:avLst>
-              <a:gd name="adj" fmla="val 8333"/>
-            </a:avLst>
-          </a:prstGeom>
-          <a:solidFill>
-            <a:srgbClr val="CCFBF1"/>
-          </a:solidFill>
-          <a:ln w="12700">
-            <a:solidFill>
-              <a:srgbClr val="0D9488"/>
-            </a:solidFill>
-            <a:prstDash val="solid"/>
-          </a:ln>
-        </p:spPr>
-      </p:sp>
-      <p:sp>
-        <p:nvSpPr>
-          <p:cNvPr id="29" name="Shape 27"/>
-          <p:cNvSpPr/>
-          <p:nvPr/>
-        </p:nvSpPr>
-        <p:spPr>
-          <a:xfrm>
-            <a:off x="2999232" y="3364992"/>
+            <a:off x="5742432" y="3364992"/>
             <a:ext cx="1645920" cy="475488"/>
           </a:xfrm>
           <a:prstGeom prst="rect">
@@ -13790,13 +13562,13 @@
       </p:sp>
       <p:sp>
         <p:nvSpPr>
-          <p:cNvPr id="30" name="Text 28"/>
-          <p:cNvSpPr/>
-          <p:nvPr/>
-        </p:nvSpPr>
-        <p:spPr>
-          <a:xfrm>
-            <a:off x="2999232" y="3364992"/>
+          <p:cNvPr id="29" name="Text 27"/>
+          <p:cNvSpPr/>
+          <p:nvPr/>
+        </p:nvSpPr>
+        <p:spPr>
+          <a:xfrm>
+            <a:off x="5742432" y="3364992"/>
             <a:ext cx="1645920" cy="475488"/>
           </a:xfrm>
           <a:prstGeom prst="rect">
@@ -13821,7 +13593,7 @@
                 <a:ea typeface="Trebuchet MS" pitchFamily="34" charset="-122"/>
                 <a:cs typeface="Trebuchet MS" pitchFamily="34" charset="-120"/>
               </a:rPr>
-              <a:t>in</a:t>
+              <a:t>spire</a:t>
             </a:r>
             <a:endParaRPr lang="en-US" sz="1400" dirty="0"/>
           </a:p>
@@ -13829,14 +13601,41 @@
       </p:sp>
       <p:sp>
         <p:nvSpPr>
+          <p:cNvPr id="30" name="Shape 28"/>
+          <p:cNvSpPr/>
+          <p:nvPr/>
+        </p:nvSpPr>
+        <p:spPr>
+          <a:xfrm>
+            <a:off x="365760" y="4096512"/>
+            <a:ext cx="1371600" cy="804672"/>
+          </a:xfrm>
+          <a:prstGeom prst="rect">
+            <a:avLst>
+              <a:gd name="adj" fmla="val 6818"/>
+            </a:avLst>
+          </a:prstGeom>
+          <a:solidFill>
+            <a:srgbClr val="E2E8F0"/>
+          </a:solidFill>
+          <a:ln w="12700">
+            <a:solidFill>
+              <a:srgbClr val="E2E8F0"/>
+            </a:solidFill>
+            <a:prstDash val="solid"/>
+          </a:ln>
+        </p:spPr>
+      </p:sp>
+      <p:sp>
+        <p:nvSpPr>
           <p:cNvPr id="31" name="Text 29"/>
           <p:cNvSpPr/>
           <p:nvPr/>
         </p:nvSpPr>
         <p:spPr>
           <a:xfrm>
-            <a:off x="4645152" y="3364992"/>
-            <a:ext cx="1097280" cy="475488"/>
+            <a:off x="365760" y="4096512"/>
+            <a:ext cx="1371600" cy="804672"/>
           </a:xfrm>
           <a:prstGeom prst="rect">
             <a:avLst/>
@@ -13852,17 +13651,17 @@
               <a:buNone/>
             </a:pPr>
             <a:r>
-              <a:rPr lang="en-US" sz="1600" b="1" dirty="0">
-                <a:solidFill>
-                  <a:srgbClr val="0D9488"/>
+              <a:rPr lang="en-US" sz="1100" b="1" dirty="0">
+                <a:solidFill>
+                  <a:srgbClr val="475569"/>
                 </a:solidFill>
                 <a:latin typeface="Trebuchet MS" pitchFamily="34" charset="0"/>
                 <a:ea typeface="Trebuchet MS" pitchFamily="34" charset="-122"/>
                 <a:cs typeface="Trebuchet MS" pitchFamily="34" charset="-120"/>
               </a:rPr>
-              <a:t>·</a:t>
-            </a:r>
-            <a:endParaRPr lang="en-US" sz="1600" dirty="0"/>
+              <a:t>Phonemes</a:t>
+            </a:r>
+            <a:endParaRPr lang="en-US" sz="1100" dirty="0"/>
           </a:p>
         </p:txBody>
       </p:sp>
@@ -13874,74 +13673,8 @@
         </p:nvSpPr>
         <p:spPr>
           <a:xfrm>
-            <a:off x="5742432" y="3364992"/>
-            <a:ext cx="1645920" cy="475488"/>
-          </a:xfrm>
-          <a:prstGeom prst="rect">
-            <a:avLst>
-              <a:gd name="adj" fmla="val 9615"/>
-            </a:avLst>
-          </a:prstGeom>
-          <a:solidFill>
-            <a:srgbClr val="FFFFFF"/>
-          </a:solidFill>
-          <a:ln w="12700">
-            <a:solidFill>
-              <a:srgbClr val="0D9488"/>
-            </a:solidFill>
-            <a:prstDash val="solid"/>
-          </a:ln>
-        </p:spPr>
-      </p:sp>
-      <p:sp>
-        <p:nvSpPr>
-          <p:cNvPr id="33" name="Text 31"/>
-          <p:cNvSpPr/>
-          <p:nvPr/>
-        </p:nvSpPr>
-        <p:spPr>
-          <a:xfrm>
-            <a:off x="5742432" y="3364992"/>
-            <a:ext cx="1645920" cy="475488"/>
-          </a:xfrm>
-          <a:prstGeom prst="rect">
-            <a:avLst/>
-          </a:prstGeom>
-          <a:noFill/>
-          <a:ln/>
-        </p:spPr>
-        <p:txBody>
-          <a:bodyPr wrap="square" lIns="0" tIns="0" rIns="0" bIns="0" rtlCol="0" anchor="ctr"/>
-          <a:lstStyle/>
-          <a:p>
-            <a:pPr algn="ctr" indent="0" marL="0">
-              <a:buNone/>
-            </a:pPr>
-            <a:r>
-              <a:rPr lang="en-US" sz="1400" b="1" dirty="0">
-                <a:solidFill>
-                  <a:srgbClr val="0D9488"/>
-                </a:solidFill>
-                <a:latin typeface="Trebuchet MS" pitchFamily="34" charset="0"/>
-                <a:ea typeface="Trebuchet MS" pitchFamily="34" charset="-122"/>
-                <a:cs typeface="Trebuchet MS" pitchFamily="34" charset="-120"/>
-              </a:rPr>
-              <a:t>spired</a:t>
-            </a:r>
-            <a:endParaRPr lang="en-US" sz="1400" dirty="0"/>
-          </a:p>
-        </p:txBody>
-      </p:sp>
-      <p:sp>
-        <p:nvSpPr>
-          <p:cNvPr id="34" name="Shape 32"/>
-          <p:cNvSpPr/>
-          <p:nvPr/>
-        </p:nvSpPr>
-        <p:spPr>
-          <a:xfrm>
-            <a:off x="365760" y="4096512"/>
-            <a:ext cx="1371600" cy="804672"/>
+            <a:off x="1874520" y="4096512"/>
+            <a:ext cx="6903720" cy="804672"/>
           </a:xfrm>
           <a:prstGeom prst="rect">
             <a:avLst>
@@ -13949,85 +13682,19 @@
             </a:avLst>
           </a:prstGeom>
           <a:solidFill>
-            <a:srgbClr val="E2E8F0"/>
+            <a:srgbClr val="F8FAFC"/>
           </a:solidFill>
           <a:ln w="12700">
             <a:solidFill>
               <a:srgbClr val="E2E8F0"/>
             </a:solidFill>
-            <a:prstDash val="solid"/>
-          </a:ln>
-        </p:spPr>
-      </p:sp>
-      <p:sp>
-        <p:nvSpPr>
-          <p:cNvPr id="35" name="Text 33"/>
-          <p:cNvSpPr/>
-          <p:nvPr/>
-        </p:nvSpPr>
-        <p:spPr>
-          <a:xfrm>
-            <a:off x="365760" y="4096512"/>
-            <a:ext cx="1371600" cy="804672"/>
-          </a:xfrm>
-          <a:prstGeom prst="rect">
-            <a:avLst/>
-          </a:prstGeom>
-          <a:noFill/>
-          <a:ln/>
-        </p:spPr>
-        <p:txBody>
-          <a:bodyPr wrap="square" lIns="0" tIns="0" rIns="0" bIns="0" rtlCol="0" anchor="ctr"/>
-          <a:lstStyle/>
-          <a:p>
-            <a:pPr algn="ctr" indent="0" marL="0">
-              <a:buNone/>
-            </a:pPr>
-            <a:r>
-              <a:rPr lang="en-US" sz="1100" b="1" dirty="0">
-                <a:solidFill>
-                  <a:srgbClr val="475569"/>
-                </a:solidFill>
-                <a:latin typeface="Trebuchet MS" pitchFamily="34" charset="0"/>
-                <a:ea typeface="Trebuchet MS" pitchFamily="34" charset="-122"/>
-                <a:cs typeface="Trebuchet MS" pitchFamily="34" charset="-120"/>
-              </a:rPr>
-              <a:t>Phonemes</a:t>
-            </a:r>
-            <a:endParaRPr lang="en-US" sz="1100" dirty="0"/>
-          </a:p>
-        </p:txBody>
-      </p:sp>
-      <p:sp>
-        <p:nvSpPr>
-          <p:cNvPr id="36" name="Shape 34"/>
-          <p:cNvSpPr/>
-          <p:nvPr/>
-        </p:nvSpPr>
-        <p:spPr>
-          <a:xfrm>
-            <a:off x="1874520" y="4096512"/>
-            <a:ext cx="6903720" cy="804672"/>
-          </a:xfrm>
-          <a:prstGeom prst="rect">
-            <a:avLst>
-              <a:gd name="adj" fmla="val 6818"/>
-            </a:avLst>
-          </a:prstGeom>
-          <a:solidFill>
-            <a:srgbClr val="F8FAFC"/>
-          </a:solidFill>
-          <a:ln w="12700">
-            <a:solidFill>
-              <a:srgbClr val="E2E8F0"/>
-            </a:solidFill>
             <a:prstDash val="dash"/>
           </a:ln>
         </p:spPr>
       </p:sp>
       <p:sp>
         <p:nvSpPr>
-          <p:cNvPr id="37" name="Text 35"/>
+          <p:cNvPr id="33" name="Text 31"/>
           <p:cNvSpPr/>
           <p:nvPr/>
         </p:nvSpPr>
@@ -14754,7 +14421,7 @@
                 <a:ea typeface="Trebuchet MS" pitchFamily="34" charset="-122"/>
                 <a:cs typeface="Trebuchet MS" pitchFamily="34" charset="-120"/>
               </a:rPr>
-              <a:t>inspired</a:t>
+              <a:t>aspire</a:t>
             </a:r>
             <a:endParaRPr lang="en-US" sz="2800" dirty="0"/>
           </a:p>
@@ -14834,7 +14501,7 @@
         </p:nvSpPr>
         <p:spPr>
           <a:xfrm>
-            <a:off x="2221992" y="2258568"/>
+            <a:off x="2938272" y="2258568"/>
             <a:ext cx="1828800" cy="292608"/>
           </a:xfrm>
           <a:prstGeom prst="rect">
@@ -14868,7 +14535,7 @@
         </p:nvSpPr>
         <p:spPr>
           <a:xfrm>
-            <a:off x="2221992" y="2258568"/>
+            <a:off x="2938272" y="2258568"/>
             <a:ext cx="1828800" cy="292608"/>
           </a:xfrm>
           <a:prstGeom prst="rect">
@@ -14893,7 +14560,7 @@
                 <a:ea typeface="Trebuchet MS" pitchFamily="34" charset="-122"/>
                 <a:cs typeface="Trebuchet MS" pitchFamily="34" charset="-120"/>
               </a:rPr>
-              <a:t>in</a:t>
+              <a:t>a</a:t>
             </a:r>
             <a:endParaRPr lang="en-US" sz="1300" dirty="0"/>
           </a:p>
@@ -14907,7 +14574,7 @@
         </p:nvSpPr>
         <p:spPr>
           <a:xfrm>
-            <a:off x="2221992" y="2569464"/>
+            <a:off x="2938272" y="2569464"/>
             <a:ext cx="1828800" cy="201168"/>
           </a:xfrm>
           <a:prstGeom prst="rect">
@@ -14932,7 +14599,7 @@
                 <a:ea typeface="Calibri" pitchFamily="34" charset="-122"/>
                 <a:cs typeface="Calibri" pitchFamily="34" charset="-120"/>
               </a:rPr>
-              <a:t>into, upon</a:t>
+              <a:t>to, toward</a:t>
             </a:r>
             <a:endParaRPr lang="en-US" sz="850" dirty="0"/>
           </a:p>
@@ -14946,7 +14613,7 @@
         </p:nvSpPr>
         <p:spPr>
           <a:xfrm>
-            <a:off x="4370832" y="2258568"/>
+            <a:off x="5803392" y="2258568"/>
             <a:ext cx="1828800" cy="292608"/>
           </a:xfrm>
           <a:prstGeom prst="rect">
@@ -14980,7 +14647,7 @@
         </p:nvSpPr>
         <p:spPr>
           <a:xfrm>
-            <a:off x="4370832" y="2258568"/>
+            <a:off x="5803392" y="2258568"/>
             <a:ext cx="1828800" cy="292608"/>
           </a:xfrm>
           <a:prstGeom prst="rect">
@@ -15019,7 +14686,7 @@
         </p:nvSpPr>
         <p:spPr>
           <a:xfrm>
-            <a:off x="4370832" y="2569464"/>
+            <a:off x="5803392" y="2569464"/>
             <a:ext cx="1828800" cy="201168"/>
           </a:xfrm>
           <a:prstGeom prst="rect">
@@ -15044,7 +14711,7 @@
                 <a:ea typeface="Calibri" pitchFamily="34" charset="-122"/>
                 <a:cs typeface="Calibri" pitchFamily="34" charset="-120"/>
               </a:rPr>
-              <a:t>breathe</a:t>
+              <a:t>breathe, breath</a:t>
             </a:r>
             <a:endParaRPr lang="en-US" sz="850" dirty="0"/>
           </a:p>
@@ -15058,30 +14725,23 @@
         </p:nvSpPr>
         <p:spPr>
           <a:xfrm>
-            <a:off x="6519672" y="2258568"/>
-            <a:ext cx="1828800" cy="292608"/>
+            <a:off x="365760" y="3273552"/>
+            <a:ext cx="1371600" cy="658368"/>
           </a:xfrm>
           <a:prstGeom prst="rect">
             <a:avLst>
-              <a:gd name="adj" fmla="val 25000"/>
+              <a:gd name="adj" fmla="val 8333"/>
             </a:avLst>
           </a:prstGeom>
           <a:solidFill>
-            <a:srgbClr val="FCE7F3"/>
-          </a:solidFill>
-          <a:ln w="19050">
-            <a:solidFill>
-              <a:srgbClr val="DB2777"/>
-            </a:solidFill>
-            <a:prstDash val="solid"/>
-          </a:ln>
-          <a:effectLst>
-            <a:outerShdw sx="100000" sy="100000" kx="0" ky="0" algn="bl" rotWithShape="0" blurRad="101600" dist="38100" dir="8100000">
-              <a:srgbClr val="000000">
-                <a:alpha val="12000"/>
-              </a:srgbClr>
-            </a:outerShdw>
-          </a:effectLst>
+            <a:srgbClr val="E2E8F0"/>
+          </a:solidFill>
+          <a:ln w="12700">
+            <a:solidFill>
+              <a:srgbClr val="E2E8F0"/>
+            </a:solidFill>
+            <a:prstDash val="solid"/>
+          </a:ln>
         </p:spPr>
       </p:sp>
       <p:sp>
@@ -15092,8 +14752,8 @@
         </p:nvSpPr>
         <p:spPr>
           <a:xfrm>
-            <a:off x="6519672" y="2258568"/>
-            <a:ext cx="1828800" cy="292608"/>
+            <a:off x="365760" y="3273552"/>
+            <a:ext cx="1371600" cy="658368"/>
           </a:xfrm>
           <a:prstGeom prst="rect">
             <a:avLst/>
@@ -15109,108 +14769,30 @@
               <a:buNone/>
             </a:pPr>
             <a:r>
-              <a:rPr lang="en-US" sz="1300" b="1" dirty="0">
-                <a:solidFill>
-                  <a:srgbClr val="9D174D"/>
+              <a:rPr lang="en-US" sz="1100" b="1" dirty="0">
+                <a:solidFill>
+                  <a:srgbClr val="475569"/>
                 </a:solidFill>
                 <a:latin typeface="Trebuchet MS" pitchFamily="34" charset="0"/>
                 <a:ea typeface="Trebuchet MS" pitchFamily="34" charset="-122"/>
                 <a:cs typeface="Trebuchet MS" pitchFamily="34" charset="-120"/>
               </a:rPr>
-              <a:t>d</a:t>
-            </a:r>
-            <a:endParaRPr lang="en-US" sz="1300" dirty="0"/>
-          </a:p>
-        </p:txBody>
-      </p:sp>
-      <p:sp>
-        <p:nvSpPr>
-          <p:cNvPr id="24" name="Text 22"/>
-          <p:cNvSpPr/>
-          <p:nvPr/>
-        </p:nvSpPr>
-        <p:spPr>
-          <a:xfrm>
-            <a:off x="6519672" y="2569464"/>
-            <a:ext cx="1828800" cy="201168"/>
-          </a:xfrm>
-          <a:prstGeom prst="rect">
-            <a:avLst/>
-          </a:prstGeom>
-          <a:noFill/>
-          <a:ln/>
-        </p:spPr>
-        <p:txBody>
-          <a:bodyPr wrap="square" lIns="0" tIns="0" rIns="0" bIns="0" rtlCol="0" anchor="t"/>
-          <a:lstStyle/>
-          <a:p>
-            <a:pPr algn="ctr" indent="0" marL="0">
-              <a:buNone/>
-            </a:pPr>
-            <a:r>
-              <a:rPr lang="en-US" sz="850" dirty="0">
-                <a:solidFill>
-                  <a:srgbClr val="475569"/>
-                </a:solidFill>
-                <a:latin typeface="Calibri" pitchFamily="34" charset="0"/>
-                <a:ea typeface="Calibri" pitchFamily="34" charset="-122"/>
-                <a:cs typeface="Calibri" pitchFamily="34" charset="-120"/>
-              </a:rPr>
-              <a:t>past tense</a:t>
-            </a:r>
-            <a:endParaRPr lang="en-US" sz="850" dirty="0"/>
-          </a:p>
-        </p:txBody>
-      </p:sp>
-      <p:sp>
-        <p:nvSpPr>
-          <p:cNvPr id="25" name="Text 23"/>
-          <p:cNvSpPr/>
-          <p:nvPr/>
-        </p:nvSpPr>
-        <p:spPr>
-          <a:xfrm>
-            <a:off x="6519672" y="2752344"/>
-            <a:ext cx="1828800" cy="182880"/>
-          </a:xfrm>
-          <a:prstGeom prst="rect">
-            <a:avLst/>
-          </a:prstGeom>
-          <a:noFill/>
-          <a:ln/>
-        </p:spPr>
-        <p:txBody>
-          <a:bodyPr wrap="square" lIns="0" tIns="0" rIns="0" bIns="0" rtlCol="0" anchor="t"/>
-          <a:lstStyle/>
-          <a:p>
-            <a:pPr algn="ctr" indent="0" marL="0">
-              <a:buNone/>
-            </a:pPr>
-            <a:r>
-              <a:rPr lang="en-US" sz="700" i="1" dirty="0">
-                <a:solidFill>
-                  <a:srgbClr val="94A3B8"/>
-                </a:solidFill>
-                <a:latin typeface="Calibri" pitchFamily="34" charset="0"/>
-                <a:ea typeface="Calibri" pitchFamily="34" charset="-122"/>
-                <a:cs typeface="Calibri" pitchFamily="34" charset="-120"/>
-              </a:rPr>
-              <a:t>'e' dropped before vowel suffix</a:t>
-            </a:r>
-            <a:endParaRPr lang="en-US" sz="700" dirty="0"/>
-          </a:p>
-        </p:txBody>
-      </p:sp>
-      <p:sp>
-        <p:nvSpPr>
-          <p:cNvPr id="26" name="Shape 24"/>
-          <p:cNvSpPr/>
-          <p:nvPr/>
-        </p:nvSpPr>
-        <p:spPr>
-          <a:xfrm>
-            <a:off x="365760" y="3273552"/>
-            <a:ext cx="1371600" cy="658368"/>
+              <a:t>Syllables</a:t>
+            </a:r>
+            <a:endParaRPr lang="en-US" sz="1100" dirty="0"/>
+          </a:p>
+        </p:txBody>
+      </p:sp>
+      <p:sp>
+        <p:nvSpPr>
+          <p:cNvPr id="24" name="Shape 22"/>
+          <p:cNvSpPr/>
+          <p:nvPr/>
+        </p:nvSpPr>
+        <p:spPr>
+          <a:xfrm>
+            <a:off x="1874520" y="3273552"/>
+            <a:ext cx="6903720" cy="658368"/>
           </a:xfrm>
           <a:prstGeom prst="rect">
             <a:avLst>
@@ -15218,26 +14800,53 @@
             </a:avLst>
           </a:prstGeom>
           <a:solidFill>
-            <a:srgbClr val="E2E8F0"/>
-          </a:solidFill>
-          <a:ln w="12700">
-            <a:solidFill>
-              <a:srgbClr val="E2E8F0"/>
-            </a:solidFill>
-            <a:prstDash val="solid"/>
-          </a:ln>
-        </p:spPr>
-      </p:sp>
-      <p:sp>
-        <p:nvSpPr>
-          <p:cNvPr id="27" name="Text 25"/>
-          <p:cNvSpPr/>
-          <p:nvPr/>
-        </p:nvSpPr>
-        <p:spPr>
-          <a:xfrm>
-            <a:off x="365760" y="3273552"/>
-            <a:ext cx="1371600" cy="658368"/>
+            <a:srgbClr val="CCFBF1"/>
+          </a:solidFill>
+          <a:ln w="12700">
+            <a:solidFill>
+              <a:srgbClr val="0D9488"/>
+            </a:solidFill>
+            <a:prstDash val="solid"/>
+          </a:ln>
+        </p:spPr>
+      </p:sp>
+      <p:sp>
+        <p:nvSpPr>
+          <p:cNvPr id="25" name="Shape 23"/>
+          <p:cNvSpPr/>
+          <p:nvPr/>
+        </p:nvSpPr>
+        <p:spPr>
+          <a:xfrm>
+            <a:off x="2999232" y="3364992"/>
+            <a:ext cx="1645920" cy="475488"/>
+          </a:xfrm>
+          <a:prstGeom prst="rect">
+            <a:avLst>
+              <a:gd name="adj" fmla="val 9615"/>
+            </a:avLst>
+          </a:prstGeom>
+          <a:solidFill>
+            <a:srgbClr val="FFFFFF"/>
+          </a:solidFill>
+          <a:ln w="12700">
+            <a:solidFill>
+              <a:srgbClr val="0D9488"/>
+            </a:solidFill>
+            <a:prstDash val="solid"/>
+          </a:ln>
+        </p:spPr>
+      </p:sp>
+      <p:sp>
+        <p:nvSpPr>
+          <p:cNvPr id="26" name="Text 24"/>
+          <p:cNvSpPr/>
+          <p:nvPr/>
+        </p:nvSpPr>
+        <p:spPr>
+          <a:xfrm>
+            <a:off x="2999232" y="3364992"/>
+            <a:ext cx="1645920" cy="475488"/>
           </a:xfrm>
           <a:prstGeom prst="rect">
             <a:avLst/>
@@ -15253,15 +14862,186 @@
               <a:buNone/>
             </a:pPr>
             <a:r>
-              <a:rPr lang="en-US" sz="1100" b="1" dirty="0">
-                <a:solidFill>
-                  <a:srgbClr val="475569"/>
+              <a:rPr lang="en-US" sz="1400" b="1" dirty="0">
+                <a:solidFill>
+                  <a:srgbClr val="0D9488"/>
                 </a:solidFill>
                 <a:latin typeface="Trebuchet MS" pitchFamily="34" charset="0"/>
                 <a:ea typeface="Trebuchet MS" pitchFamily="34" charset="-122"/>
                 <a:cs typeface="Trebuchet MS" pitchFamily="34" charset="-120"/>
               </a:rPr>
-              <a:t>Syllables</a:t>
+              <a:t>a</a:t>
+            </a:r>
+            <a:endParaRPr lang="en-US" sz="1400" dirty="0"/>
+          </a:p>
+        </p:txBody>
+      </p:sp>
+      <p:sp>
+        <p:nvSpPr>
+          <p:cNvPr id="27" name="Text 25"/>
+          <p:cNvSpPr/>
+          <p:nvPr/>
+        </p:nvSpPr>
+        <p:spPr>
+          <a:xfrm>
+            <a:off x="4645152" y="3364992"/>
+            <a:ext cx="1097280" cy="475488"/>
+          </a:xfrm>
+          <a:prstGeom prst="rect">
+            <a:avLst/>
+          </a:prstGeom>
+          <a:noFill/>
+          <a:ln/>
+        </p:spPr>
+        <p:txBody>
+          <a:bodyPr wrap="square" lIns="0" tIns="0" rIns="0" bIns="0" rtlCol="0" anchor="ctr"/>
+          <a:lstStyle/>
+          <a:p>
+            <a:pPr algn="ctr" indent="0" marL="0">
+              <a:buNone/>
+            </a:pPr>
+            <a:r>
+              <a:rPr lang="en-US" sz="1600" b="1" dirty="0">
+                <a:solidFill>
+                  <a:srgbClr val="0D9488"/>
+                </a:solidFill>
+                <a:latin typeface="Trebuchet MS" pitchFamily="34" charset="0"/>
+                <a:ea typeface="Trebuchet MS" pitchFamily="34" charset="-122"/>
+                <a:cs typeface="Trebuchet MS" pitchFamily="34" charset="-120"/>
+              </a:rPr>
+              <a:t>·</a:t>
+            </a:r>
+            <a:endParaRPr lang="en-US" sz="1600" dirty="0"/>
+          </a:p>
+        </p:txBody>
+      </p:sp>
+      <p:sp>
+        <p:nvSpPr>
+          <p:cNvPr id="28" name="Shape 26"/>
+          <p:cNvSpPr/>
+          <p:nvPr/>
+        </p:nvSpPr>
+        <p:spPr>
+          <a:xfrm>
+            <a:off x="5742432" y="3364992"/>
+            <a:ext cx="1645920" cy="475488"/>
+          </a:xfrm>
+          <a:prstGeom prst="rect">
+            <a:avLst>
+              <a:gd name="adj" fmla="val 9615"/>
+            </a:avLst>
+          </a:prstGeom>
+          <a:solidFill>
+            <a:srgbClr val="FFFFFF"/>
+          </a:solidFill>
+          <a:ln w="12700">
+            <a:solidFill>
+              <a:srgbClr val="0D9488"/>
+            </a:solidFill>
+            <a:prstDash val="solid"/>
+          </a:ln>
+        </p:spPr>
+      </p:sp>
+      <p:sp>
+        <p:nvSpPr>
+          <p:cNvPr id="29" name="Text 27"/>
+          <p:cNvSpPr/>
+          <p:nvPr/>
+        </p:nvSpPr>
+        <p:spPr>
+          <a:xfrm>
+            <a:off x="5742432" y="3364992"/>
+            <a:ext cx="1645920" cy="475488"/>
+          </a:xfrm>
+          <a:prstGeom prst="rect">
+            <a:avLst/>
+          </a:prstGeom>
+          <a:noFill/>
+          <a:ln/>
+        </p:spPr>
+        <p:txBody>
+          <a:bodyPr wrap="square" lIns="0" tIns="0" rIns="0" bIns="0" rtlCol="0" anchor="ctr"/>
+          <a:lstStyle/>
+          <a:p>
+            <a:pPr algn="ctr" indent="0" marL="0">
+              <a:buNone/>
+            </a:pPr>
+            <a:r>
+              <a:rPr lang="en-US" sz="1400" b="1" dirty="0">
+                <a:solidFill>
+                  <a:srgbClr val="0D9488"/>
+                </a:solidFill>
+                <a:latin typeface="Trebuchet MS" pitchFamily="34" charset="0"/>
+                <a:ea typeface="Trebuchet MS" pitchFamily="34" charset="-122"/>
+                <a:cs typeface="Trebuchet MS" pitchFamily="34" charset="-120"/>
+              </a:rPr>
+              <a:t>spire</a:t>
+            </a:r>
+            <a:endParaRPr lang="en-US" sz="1400" dirty="0"/>
+          </a:p>
+        </p:txBody>
+      </p:sp>
+      <p:sp>
+        <p:nvSpPr>
+          <p:cNvPr id="30" name="Shape 28"/>
+          <p:cNvSpPr/>
+          <p:nvPr/>
+        </p:nvSpPr>
+        <p:spPr>
+          <a:xfrm>
+            <a:off x="365760" y="4096512"/>
+            <a:ext cx="1371600" cy="804672"/>
+          </a:xfrm>
+          <a:prstGeom prst="rect">
+            <a:avLst>
+              <a:gd name="adj" fmla="val 6818"/>
+            </a:avLst>
+          </a:prstGeom>
+          <a:solidFill>
+            <a:srgbClr val="E2E8F0"/>
+          </a:solidFill>
+          <a:ln w="12700">
+            <a:solidFill>
+              <a:srgbClr val="E2E8F0"/>
+            </a:solidFill>
+            <a:prstDash val="solid"/>
+          </a:ln>
+        </p:spPr>
+      </p:sp>
+      <p:sp>
+        <p:nvSpPr>
+          <p:cNvPr id="31" name="Text 29"/>
+          <p:cNvSpPr/>
+          <p:nvPr/>
+        </p:nvSpPr>
+        <p:spPr>
+          <a:xfrm>
+            <a:off x="365760" y="4096512"/>
+            <a:ext cx="1371600" cy="804672"/>
+          </a:xfrm>
+          <a:prstGeom prst="rect">
+            <a:avLst/>
+          </a:prstGeom>
+          <a:noFill/>
+          <a:ln/>
+        </p:spPr>
+        <p:txBody>
+          <a:bodyPr wrap="square" lIns="0" tIns="0" rIns="0" bIns="0" rtlCol="0" anchor="ctr"/>
+          <a:lstStyle/>
+          <a:p>
+            <a:pPr algn="ctr" indent="0" marL="0">
+              <a:buNone/>
+            </a:pPr>
+            <a:r>
+              <a:rPr lang="en-US" sz="1100" b="1" dirty="0">
+                <a:solidFill>
+                  <a:srgbClr val="475569"/>
+                </a:solidFill>
+                <a:latin typeface="Trebuchet MS" pitchFamily="34" charset="0"/>
+                <a:ea typeface="Trebuchet MS" pitchFamily="34" charset="-122"/>
+                <a:cs typeface="Trebuchet MS" pitchFamily="34" charset="-120"/>
+              </a:rPr>
+              <a:t>Phonemes</a:t>
             </a:r>
             <a:endParaRPr lang="en-US" sz="1100" dirty="0"/>
           </a:p>
@@ -15269,13 +15049,13 @@
       </p:sp>
       <p:sp>
         <p:nvSpPr>
-          <p:cNvPr id="28" name="Shape 26"/>
-          <p:cNvSpPr/>
-          <p:nvPr/>
-        </p:nvSpPr>
-        <p:spPr>
-          <a:xfrm>
-            <a:off x="1874520" y="3273552"/>
+          <p:cNvPr id="32" name="Shape 30"/>
+          <p:cNvSpPr/>
+          <p:nvPr/>
+        </p:nvSpPr>
+        <p:spPr>
+          <a:xfrm>
+            <a:off x="1874520" y="4096512"/>
             <a:ext cx="6903720" cy="658368"/>
           </a:xfrm>
           <a:prstGeom prst="rect">
@@ -15284,30 +15064,30 @@
             </a:avLst>
           </a:prstGeom>
           <a:solidFill>
-            <a:srgbClr val="CCFBF1"/>
-          </a:solidFill>
-          <a:ln w="12700">
-            <a:solidFill>
-              <a:srgbClr val="0D9488"/>
-            </a:solidFill>
-            <a:prstDash val="solid"/>
-          </a:ln>
-        </p:spPr>
-      </p:sp>
-      <p:sp>
-        <p:nvSpPr>
-          <p:cNvPr id="29" name="Shape 27"/>
-          <p:cNvSpPr/>
-          <p:nvPr/>
-        </p:nvSpPr>
-        <p:spPr>
-          <a:xfrm>
-            <a:off x="2999232" y="3364992"/>
-            <a:ext cx="1645920" cy="475488"/>
+            <a:srgbClr val="FCE7F3"/>
+          </a:solidFill>
+          <a:ln w="12700">
+            <a:solidFill>
+              <a:srgbClr val="DB2777"/>
+            </a:solidFill>
+            <a:prstDash val="solid"/>
+          </a:ln>
+        </p:spPr>
+      </p:sp>
+      <p:sp>
+        <p:nvSpPr>
+          <p:cNvPr id="33" name="Shape 31"/>
+          <p:cNvSpPr/>
+          <p:nvPr/>
+        </p:nvSpPr>
+        <p:spPr>
+          <a:xfrm>
+            <a:off x="2427732" y="4169664"/>
+            <a:ext cx="685800" cy="475488"/>
           </a:xfrm>
           <a:prstGeom prst="rect">
             <a:avLst>
-              <a:gd name="adj" fmla="val 9615"/>
+              <a:gd name="adj" fmla="val 7692"/>
             </a:avLst>
           </a:prstGeom>
           <a:solidFill>
@@ -15315,22 +15095,22 @@
           </a:solidFill>
           <a:ln w="12700">
             <a:solidFill>
-              <a:srgbClr val="0D9488"/>
-            </a:solidFill>
-            <a:prstDash val="solid"/>
-          </a:ln>
-        </p:spPr>
-      </p:sp>
-      <p:sp>
-        <p:nvSpPr>
-          <p:cNvPr id="30" name="Text 28"/>
-          <p:cNvSpPr/>
-          <p:nvPr/>
-        </p:nvSpPr>
-        <p:spPr>
-          <a:xfrm>
-            <a:off x="2999232" y="3364992"/>
-            <a:ext cx="1645920" cy="475488"/>
+              <a:srgbClr val="DB2777"/>
+            </a:solidFill>
+            <a:prstDash val="solid"/>
+          </a:ln>
+        </p:spPr>
+      </p:sp>
+      <p:sp>
+        <p:nvSpPr>
+          <p:cNvPr id="34" name="Text 32"/>
+          <p:cNvSpPr/>
+          <p:nvPr/>
+        </p:nvSpPr>
+        <p:spPr>
+          <a:xfrm>
+            <a:off x="2427732" y="4169664"/>
+            <a:ext cx="685800" cy="475488"/>
           </a:xfrm>
           <a:prstGeom prst="rect">
             <a:avLst/>
@@ -15346,30 +15126,57 @@
               <a:buNone/>
             </a:pPr>
             <a:r>
-              <a:rPr lang="en-US" sz="1400" b="1" dirty="0">
-                <a:solidFill>
-                  <a:srgbClr val="0D9488"/>
+              <a:rPr lang="en-US" sz="900" b="1" dirty="0">
+                <a:solidFill>
+                  <a:srgbClr val="9D174D"/>
                 </a:solidFill>
                 <a:latin typeface="Trebuchet MS" pitchFamily="34" charset="0"/>
                 <a:ea typeface="Trebuchet MS" pitchFamily="34" charset="-122"/>
                 <a:cs typeface="Trebuchet MS" pitchFamily="34" charset="-120"/>
               </a:rPr>
-              <a:t>in</a:t>
-            </a:r>
-            <a:endParaRPr lang="en-US" sz="1400" dirty="0"/>
-          </a:p>
-        </p:txBody>
-      </p:sp>
-      <p:sp>
-        <p:nvSpPr>
-          <p:cNvPr id="31" name="Text 29"/>
-          <p:cNvSpPr/>
-          <p:nvPr/>
-        </p:nvSpPr>
-        <p:spPr>
-          <a:xfrm>
-            <a:off x="4645152" y="3364992"/>
-            <a:ext cx="1097280" cy="475488"/>
+              <a:t>a</a:t>
+            </a:r>
+            <a:endParaRPr lang="en-US" sz="900" dirty="0"/>
+          </a:p>
+        </p:txBody>
+      </p:sp>
+      <p:sp>
+        <p:nvSpPr>
+          <p:cNvPr id="35" name="Shape 33"/>
+          <p:cNvSpPr/>
+          <p:nvPr/>
+        </p:nvSpPr>
+        <p:spPr>
+          <a:xfrm>
+            <a:off x="3639312" y="4169664"/>
+            <a:ext cx="685800" cy="475488"/>
+          </a:xfrm>
+          <a:prstGeom prst="rect">
+            <a:avLst>
+              <a:gd name="adj" fmla="val 7692"/>
+            </a:avLst>
+          </a:prstGeom>
+          <a:solidFill>
+            <a:srgbClr val="FFFFFF"/>
+          </a:solidFill>
+          <a:ln w="12700">
+            <a:solidFill>
+              <a:srgbClr val="DB2777"/>
+            </a:solidFill>
+            <a:prstDash val="solid"/>
+          </a:ln>
+        </p:spPr>
+      </p:sp>
+      <p:sp>
+        <p:nvSpPr>
+          <p:cNvPr id="36" name="Text 34"/>
+          <p:cNvSpPr/>
+          <p:nvPr/>
+        </p:nvSpPr>
+        <p:spPr>
+          <a:xfrm>
+            <a:off x="3639312" y="4169664"/>
+            <a:ext cx="685800" cy="475488"/>
           </a:xfrm>
           <a:prstGeom prst="rect">
             <a:avLst/>
@@ -15385,34 +15192,34 @@
               <a:buNone/>
             </a:pPr>
             <a:r>
-              <a:rPr lang="en-US" sz="1600" b="1" dirty="0">
-                <a:solidFill>
-                  <a:srgbClr val="0D9488"/>
+              <a:rPr lang="en-US" sz="900" b="1" dirty="0">
+                <a:solidFill>
+                  <a:srgbClr val="9D174D"/>
                 </a:solidFill>
                 <a:latin typeface="Trebuchet MS" pitchFamily="34" charset="0"/>
                 <a:ea typeface="Trebuchet MS" pitchFamily="34" charset="-122"/>
                 <a:cs typeface="Trebuchet MS" pitchFamily="34" charset="-120"/>
               </a:rPr>
-              <a:t>·</a:t>
-            </a:r>
-            <a:endParaRPr lang="en-US" sz="1600" dirty="0"/>
-          </a:p>
-        </p:txBody>
-      </p:sp>
-      <p:sp>
-        <p:nvSpPr>
-          <p:cNvPr id="32" name="Shape 30"/>
-          <p:cNvSpPr/>
-          <p:nvPr/>
-        </p:nvSpPr>
-        <p:spPr>
-          <a:xfrm>
-            <a:off x="5742432" y="3364992"/>
-            <a:ext cx="1645920" cy="475488"/>
+              <a:t>s</a:t>
+            </a:r>
+            <a:endParaRPr lang="en-US" sz="900" dirty="0"/>
+          </a:p>
+        </p:txBody>
+      </p:sp>
+      <p:sp>
+        <p:nvSpPr>
+          <p:cNvPr id="37" name="Shape 35"/>
+          <p:cNvSpPr/>
+          <p:nvPr/>
+        </p:nvSpPr>
+        <p:spPr>
+          <a:xfrm>
+            <a:off x="4850892" y="4169664"/>
+            <a:ext cx="685800" cy="475488"/>
           </a:xfrm>
           <a:prstGeom prst="rect">
             <a:avLst>
-              <a:gd name="adj" fmla="val 9615"/>
+              <a:gd name="adj" fmla="val 7692"/>
             </a:avLst>
           </a:prstGeom>
           <a:solidFill>
@@ -15420,22 +15227,22 @@
           </a:solidFill>
           <a:ln w="12700">
             <a:solidFill>
-              <a:srgbClr val="0D9488"/>
-            </a:solidFill>
-            <a:prstDash val="solid"/>
-          </a:ln>
-        </p:spPr>
-      </p:sp>
-      <p:sp>
-        <p:nvSpPr>
-          <p:cNvPr id="33" name="Text 31"/>
-          <p:cNvSpPr/>
-          <p:nvPr/>
-        </p:nvSpPr>
-        <p:spPr>
-          <a:xfrm>
-            <a:off x="5742432" y="3364992"/>
-            <a:ext cx="1645920" cy="475488"/>
+              <a:srgbClr val="DB2777"/>
+            </a:solidFill>
+            <a:prstDash val="solid"/>
+          </a:ln>
+        </p:spPr>
+      </p:sp>
+      <p:sp>
+        <p:nvSpPr>
+          <p:cNvPr id="38" name="Text 36"/>
+          <p:cNvSpPr/>
+          <p:nvPr/>
+        </p:nvSpPr>
+        <p:spPr>
+          <a:xfrm>
+            <a:off x="4850892" y="4169664"/>
+            <a:ext cx="685800" cy="475488"/>
           </a:xfrm>
           <a:prstGeom prst="rect">
             <a:avLst/>
@@ -15451,57 +15258,57 @@
               <a:buNone/>
             </a:pPr>
             <a:r>
-              <a:rPr lang="en-US" sz="1400" b="1" dirty="0">
-                <a:solidFill>
-                  <a:srgbClr val="0D9488"/>
+              <a:rPr lang="en-US" sz="900" b="1" dirty="0">
+                <a:solidFill>
+                  <a:srgbClr val="9D174D"/>
                 </a:solidFill>
                 <a:latin typeface="Trebuchet MS" pitchFamily="34" charset="0"/>
                 <a:ea typeface="Trebuchet MS" pitchFamily="34" charset="-122"/>
                 <a:cs typeface="Trebuchet MS" pitchFamily="34" charset="-120"/>
               </a:rPr>
-              <a:t>spired</a:t>
-            </a:r>
-            <a:endParaRPr lang="en-US" sz="1400" dirty="0"/>
-          </a:p>
-        </p:txBody>
-      </p:sp>
-      <p:sp>
-        <p:nvSpPr>
-          <p:cNvPr id="34" name="Shape 32"/>
-          <p:cNvSpPr/>
-          <p:nvPr/>
-        </p:nvSpPr>
-        <p:spPr>
-          <a:xfrm>
-            <a:off x="365760" y="4096512"/>
-            <a:ext cx="1371600" cy="804672"/>
+              <a:t>p</a:t>
+            </a:r>
+            <a:endParaRPr lang="en-US" sz="900" dirty="0"/>
+          </a:p>
+        </p:txBody>
+      </p:sp>
+      <p:sp>
+        <p:nvSpPr>
+          <p:cNvPr id="39" name="Shape 37"/>
+          <p:cNvSpPr/>
+          <p:nvPr/>
+        </p:nvSpPr>
+        <p:spPr>
+          <a:xfrm>
+            <a:off x="6062472" y="4169664"/>
+            <a:ext cx="685800" cy="475488"/>
           </a:xfrm>
           <a:prstGeom prst="rect">
             <a:avLst>
-              <a:gd name="adj" fmla="val 6818"/>
+              <a:gd name="adj" fmla="val 7692"/>
             </a:avLst>
           </a:prstGeom>
           <a:solidFill>
-            <a:srgbClr val="E2E8F0"/>
-          </a:solidFill>
-          <a:ln w="12700">
-            <a:solidFill>
-              <a:srgbClr val="E2E8F0"/>
-            </a:solidFill>
-            <a:prstDash val="solid"/>
-          </a:ln>
-        </p:spPr>
-      </p:sp>
-      <p:sp>
-        <p:nvSpPr>
-          <p:cNvPr id="35" name="Text 33"/>
-          <p:cNvSpPr/>
-          <p:nvPr/>
-        </p:nvSpPr>
-        <p:spPr>
-          <a:xfrm>
-            <a:off x="365760" y="4096512"/>
-            <a:ext cx="1371600" cy="804672"/>
+            <a:srgbClr val="FFFFFF"/>
+          </a:solidFill>
+          <a:ln w="12700">
+            <a:solidFill>
+              <a:srgbClr val="DB2777"/>
+            </a:solidFill>
+            <a:prstDash val="solid"/>
+          </a:ln>
+        </p:spPr>
+      </p:sp>
+      <p:sp>
+        <p:nvSpPr>
+          <p:cNvPr id="40" name="Text 38"/>
+          <p:cNvSpPr/>
+          <p:nvPr/>
+        </p:nvSpPr>
+        <p:spPr>
+          <a:xfrm>
+            <a:off x="6062472" y="4169664"/>
+            <a:ext cx="685800" cy="475488"/>
           </a:xfrm>
           <a:prstGeom prst="rect">
             <a:avLst/>
@@ -15517,56 +15324,29 @@
               <a:buNone/>
             </a:pPr>
             <a:r>
-              <a:rPr lang="en-US" sz="1100" b="1" dirty="0">
-                <a:solidFill>
-                  <a:srgbClr val="475569"/>
+              <a:rPr lang="en-US" sz="900" b="1" dirty="0">
+                <a:solidFill>
+                  <a:srgbClr val="9D174D"/>
                 </a:solidFill>
                 <a:latin typeface="Trebuchet MS" pitchFamily="34" charset="0"/>
                 <a:ea typeface="Trebuchet MS" pitchFamily="34" charset="-122"/>
                 <a:cs typeface="Trebuchet MS" pitchFamily="34" charset="-120"/>
               </a:rPr>
-              <a:t>Phonemes</a:t>
-            </a:r>
-            <a:endParaRPr lang="en-US" sz="1100" dirty="0"/>
-          </a:p>
-        </p:txBody>
-      </p:sp>
-      <p:sp>
-        <p:nvSpPr>
-          <p:cNvPr id="36" name="Shape 34"/>
-          <p:cNvSpPr/>
-          <p:nvPr/>
-        </p:nvSpPr>
-        <p:spPr>
-          <a:xfrm>
-            <a:off x="1874520" y="4096512"/>
-            <a:ext cx="6903720" cy="658368"/>
-          </a:xfrm>
-          <a:prstGeom prst="rect">
-            <a:avLst>
-              <a:gd name="adj" fmla="val 8333"/>
-            </a:avLst>
-          </a:prstGeom>
-          <a:solidFill>
-            <a:srgbClr val="FCE7F3"/>
-          </a:solidFill>
-          <a:ln w="12700">
-            <a:solidFill>
-              <a:srgbClr val="DB2777"/>
-            </a:solidFill>
-            <a:prstDash val="solid"/>
-          </a:ln>
-        </p:spPr>
-      </p:sp>
-      <p:sp>
-        <p:nvSpPr>
-          <p:cNvPr id="37" name="Shape 35"/>
-          <p:cNvSpPr/>
-          <p:nvPr/>
-        </p:nvSpPr>
-        <p:spPr>
-          <a:xfrm>
-            <a:off x="2124837" y="4169664"/>
+              <a:t>i</a:t>
+            </a:r>
+            <a:endParaRPr lang="en-US" sz="900" dirty="0"/>
+          </a:p>
+        </p:txBody>
+      </p:sp>
+      <p:sp>
+        <p:nvSpPr>
+          <p:cNvPr id="41" name="Shape 39"/>
+          <p:cNvSpPr/>
+          <p:nvPr/>
+        </p:nvSpPr>
+        <p:spPr>
+          <a:xfrm>
+            <a:off x="7274052" y="4169664"/>
             <a:ext cx="685800" cy="475488"/>
           </a:xfrm>
           <a:prstGeom prst="rect">
@@ -15587,13 +15367,13 @@
       </p:sp>
       <p:sp>
         <p:nvSpPr>
-          <p:cNvPr id="38" name="Text 36"/>
-          <p:cNvSpPr/>
-          <p:nvPr/>
-        </p:nvSpPr>
-        <p:spPr>
-          <a:xfrm>
-            <a:off x="2124837" y="4169664"/>
+          <p:cNvPr id="42" name="Text 40"/>
+          <p:cNvSpPr/>
+          <p:nvPr/>
+        </p:nvSpPr>
+        <p:spPr>
+          <a:xfrm>
+            <a:off x="7274052" y="4169664"/>
             <a:ext cx="685800" cy="475488"/>
           </a:xfrm>
           <a:prstGeom prst="rect">
@@ -15618,403 +15398,7 @@
                 <a:ea typeface="Trebuchet MS" pitchFamily="34" charset="-122"/>
                 <a:cs typeface="Trebuchet MS" pitchFamily="34" charset="-120"/>
               </a:rPr>
-              <a:t>i</a:t>
-            </a:r>
-            <a:endParaRPr lang="en-US" sz="900" dirty="0"/>
-          </a:p>
-        </p:txBody>
-      </p:sp>
-      <p:sp>
-        <p:nvSpPr>
-          <p:cNvPr id="39" name="Shape 37"/>
-          <p:cNvSpPr/>
-          <p:nvPr/>
-        </p:nvSpPr>
-        <p:spPr>
-          <a:xfrm>
-            <a:off x="3033522" y="4169664"/>
-            <a:ext cx="685800" cy="475488"/>
-          </a:xfrm>
-          <a:prstGeom prst="rect">
-            <a:avLst>
-              <a:gd name="adj" fmla="val 7692"/>
-            </a:avLst>
-          </a:prstGeom>
-          <a:solidFill>
-            <a:srgbClr val="FFFFFF"/>
-          </a:solidFill>
-          <a:ln w="12700">
-            <a:solidFill>
-              <a:srgbClr val="DB2777"/>
-            </a:solidFill>
-            <a:prstDash val="solid"/>
-          </a:ln>
-        </p:spPr>
-      </p:sp>
-      <p:sp>
-        <p:nvSpPr>
-          <p:cNvPr id="40" name="Text 38"/>
-          <p:cNvSpPr/>
-          <p:nvPr/>
-        </p:nvSpPr>
-        <p:spPr>
-          <a:xfrm>
-            <a:off x="3033522" y="4169664"/>
-            <a:ext cx="685800" cy="475488"/>
-          </a:xfrm>
-          <a:prstGeom prst="rect">
-            <a:avLst/>
-          </a:prstGeom>
-          <a:noFill/>
-          <a:ln/>
-        </p:spPr>
-        <p:txBody>
-          <a:bodyPr wrap="square" lIns="0" tIns="0" rIns="0" bIns="0" rtlCol="0" anchor="ctr"/>
-          <a:lstStyle/>
-          <a:p>
-            <a:pPr algn="ctr" indent="0" marL="0">
-              <a:buNone/>
-            </a:pPr>
-            <a:r>
-              <a:rPr lang="en-US" sz="900" b="1" dirty="0">
-                <a:solidFill>
-                  <a:srgbClr val="9D174D"/>
-                </a:solidFill>
-                <a:latin typeface="Trebuchet MS" pitchFamily="34" charset="0"/>
-                <a:ea typeface="Trebuchet MS" pitchFamily="34" charset="-122"/>
-                <a:cs typeface="Trebuchet MS" pitchFamily="34" charset="-120"/>
-              </a:rPr>
-              <a:t>n</a:t>
-            </a:r>
-            <a:endParaRPr lang="en-US" sz="900" dirty="0"/>
-          </a:p>
-        </p:txBody>
-      </p:sp>
-      <p:sp>
-        <p:nvSpPr>
-          <p:cNvPr id="41" name="Shape 39"/>
-          <p:cNvSpPr/>
-          <p:nvPr/>
-        </p:nvSpPr>
-        <p:spPr>
-          <a:xfrm>
-            <a:off x="3942207" y="4169664"/>
-            <a:ext cx="685800" cy="475488"/>
-          </a:xfrm>
-          <a:prstGeom prst="rect">
-            <a:avLst>
-              <a:gd name="adj" fmla="val 7692"/>
-            </a:avLst>
-          </a:prstGeom>
-          <a:solidFill>
-            <a:srgbClr val="FFFFFF"/>
-          </a:solidFill>
-          <a:ln w="12700">
-            <a:solidFill>
-              <a:srgbClr val="DB2777"/>
-            </a:solidFill>
-            <a:prstDash val="solid"/>
-          </a:ln>
-        </p:spPr>
-      </p:sp>
-      <p:sp>
-        <p:nvSpPr>
-          <p:cNvPr id="42" name="Text 40"/>
-          <p:cNvSpPr/>
-          <p:nvPr/>
-        </p:nvSpPr>
-        <p:spPr>
-          <a:xfrm>
-            <a:off x="3942207" y="4169664"/>
-            <a:ext cx="685800" cy="475488"/>
-          </a:xfrm>
-          <a:prstGeom prst="rect">
-            <a:avLst/>
-          </a:prstGeom>
-          <a:noFill/>
-          <a:ln/>
-        </p:spPr>
-        <p:txBody>
-          <a:bodyPr wrap="square" lIns="0" tIns="0" rIns="0" bIns="0" rtlCol="0" anchor="ctr"/>
-          <a:lstStyle/>
-          <a:p>
-            <a:pPr algn="ctr" indent="0" marL="0">
-              <a:buNone/>
-            </a:pPr>
-            <a:r>
-              <a:rPr lang="en-US" sz="900" b="1" dirty="0">
-                <a:solidFill>
-                  <a:srgbClr val="9D174D"/>
-                </a:solidFill>
-                <a:latin typeface="Trebuchet MS" pitchFamily="34" charset="0"/>
-                <a:ea typeface="Trebuchet MS" pitchFamily="34" charset="-122"/>
-                <a:cs typeface="Trebuchet MS" pitchFamily="34" charset="-120"/>
-              </a:rPr>
-              <a:t>s</a:t>
-            </a:r>
-            <a:endParaRPr lang="en-US" sz="900" dirty="0"/>
-          </a:p>
-        </p:txBody>
-      </p:sp>
-      <p:sp>
-        <p:nvSpPr>
-          <p:cNvPr id="43" name="Shape 41"/>
-          <p:cNvSpPr/>
-          <p:nvPr/>
-        </p:nvSpPr>
-        <p:spPr>
-          <a:xfrm>
-            <a:off x="4850892" y="4169664"/>
-            <a:ext cx="685800" cy="475488"/>
-          </a:xfrm>
-          <a:prstGeom prst="rect">
-            <a:avLst>
-              <a:gd name="adj" fmla="val 7692"/>
-            </a:avLst>
-          </a:prstGeom>
-          <a:solidFill>
-            <a:srgbClr val="FFFFFF"/>
-          </a:solidFill>
-          <a:ln w="12700">
-            <a:solidFill>
-              <a:srgbClr val="DB2777"/>
-            </a:solidFill>
-            <a:prstDash val="solid"/>
-          </a:ln>
-        </p:spPr>
-      </p:sp>
-      <p:sp>
-        <p:nvSpPr>
-          <p:cNvPr id="44" name="Text 42"/>
-          <p:cNvSpPr/>
-          <p:nvPr/>
-        </p:nvSpPr>
-        <p:spPr>
-          <a:xfrm>
-            <a:off x="4850892" y="4169664"/>
-            <a:ext cx="685800" cy="475488"/>
-          </a:xfrm>
-          <a:prstGeom prst="rect">
-            <a:avLst/>
-          </a:prstGeom>
-          <a:noFill/>
-          <a:ln/>
-        </p:spPr>
-        <p:txBody>
-          <a:bodyPr wrap="square" lIns="0" tIns="0" rIns="0" bIns="0" rtlCol="0" anchor="ctr"/>
-          <a:lstStyle/>
-          <a:p>
-            <a:pPr algn="ctr" indent="0" marL="0">
-              <a:buNone/>
-            </a:pPr>
-            <a:r>
-              <a:rPr lang="en-US" sz="900" b="1" dirty="0">
-                <a:solidFill>
-                  <a:srgbClr val="9D174D"/>
-                </a:solidFill>
-                <a:latin typeface="Trebuchet MS" pitchFamily="34" charset="0"/>
-                <a:ea typeface="Trebuchet MS" pitchFamily="34" charset="-122"/>
-                <a:cs typeface="Trebuchet MS" pitchFamily="34" charset="-120"/>
-              </a:rPr>
-              <a:t>p</a:t>
-            </a:r>
-            <a:endParaRPr lang="en-US" sz="900" dirty="0"/>
-          </a:p>
-        </p:txBody>
-      </p:sp>
-      <p:sp>
-        <p:nvSpPr>
-          <p:cNvPr id="45" name="Shape 43"/>
-          <p:cNvSpPr/>
-          <p:nvPr/>
-        </p:nvSpPr>
-        <p:spPr>
-          <a:xfrm>
-            <a:off x="5759577" y="4169664"/>
-            <a:ext cx="685800" cy="475488"/>
-          </a:xfrm>
-          <a:prstGeom prst="rect">
-            <a:avLst>
-              <a:gd name="adj" fmla="val 7692"/>
-            </a:avLst>
-          </a:prstGeom>
-          <a:solidFill>
-            <a:srgbClr val="FFFFFF"/>
-          </a:solidFill>
-          <a:ln w="12700">
-            <a:solidFill>
-              <a:srgbClr val="DB2777"/>
-            </a:solidFill>
-            <a:prstDash val="solid"/>
-          </a:ln>
-        </p:spPr>
-      </p:sp>
-      <p:sp>
-        <p:nvSpPr>
-          <p:cNvPr id="46" name="Text 44"/>
-          <p:cNvSpPr/>
-          <p:nvPr/>
-        </p:nvSpPr>
-        <p:spPr>
-          <a:xfrm>
-            <a:off x="5759577" y="4169664"/>
-            <a:ext cx="685800" cy="475488"/>
-          </a:xfrm>
-          <a:prstGeom prst="rect">
-            <a:avLst/>
-          </a:prstGeom>
-          <a:noFill/>
-          <a:ln/>
-        </p:spPr>
-        <p:txBody>
-          <a:bodyPr wrap="square" lIns="0" tIns="0" rIns="0" bIns="0" rtlCol="0" anchor="ctr"/>
-          <a:lstStyle/>
-          <a:p>
-            <a:pPr algn="ctr" indent="0" marL="0">
-              <a:buNone/>
-            </a:pPr>
-            <a:r>
-              <a:rPr lang="en-US" sz="900" b="1" dirty="0">
-                <a:solidFill>
-                  <a:srgbClr val="9D174D"/>
-                </a:solidFill>
-                <a:latin typeface="Trebuchet MS" pitchFamily="34" charset="0"/>
-                <a:ea typeface="Trebuchet MS" pitchFamily="34" charset="-122"/>
-                <a:cs typeface="Trebuchet MS" pitchFamily="34" charset="-120"/>
-              </a:rPr>
-              <a:t>i</a:t>
-            </a:r>
-            <a:endParaRPr lang="en-US" sz="900" dirty="0"/>
-          </a:p>
-        </p:txBody>
-      </p:sp>
-      <p:sp>
-        <p:nvSpPr>
-          <p:cNvPr id="47" name="Shape 45"/>
-          <p:cNvSpPr/>
-          <p:nvPr/>
-        </p:nvSpPr>
-        <p:spPr>
-          <a:xfrm>
-            <a:off x="6668262" y="4169664"/>
-            <a:ext cx="685800" cy="475488"/>
-          </a:xfrm>
-          <a:prstGeom prst="rect">
-            <a:avLst>
-              <a:gd name="adj" fmla="val 7692"/>
-            </a:avLst>
-          </a:prstGeom>
-          <a:solidFill>
-            <a:srgbClr val="FFFFFF"/>
-          </a:solidFill>
-          <a:ln w="12700">
-            <a:solidFill>
-              <a:srgbClr val="DB2777"/>
-            </a:solidFill>
-            <a:prstDash val="solid"/>
-          </a:ln>
-        </p:spPr>
-      </p:sp>
-      <p:sp>
-        <p:nvSpPr>
-          <p:cNvPr id="48" name="Text 46"/>
-          <p:cNvSpPr/>
-          <p:nvPr/>
-        </p:nvSpPr>
-        <p:spPr>
-          <a:xfrm>
-            <a:off x="6668262" y="4169664"/>
-            <a:ext cx="685800" cy="475488"/>
-          </a:xfrm>
-          <a:prstGeom prst="rect">
-            <a:avLst/>
-          </a:prstGeom>
-          <a:noFill/>
-          <a:ln/>
-        </p:spPr>
-        <p:txBody>
-          <a:bodyPr wrap="square" lIns="0" tIns="0" rIns="0" bIns="0" rtlCol="0" anchor="ctr"/>
-          <a:lstStyle/>
-          <a:p>
-            <a:pPr algn="ctr" indent="0" marL="0">
-              <a:buNone/>
-            </a:pPr>
-            <a:r>
-              <a:rPr lang="en-US" sz="900" b="1" dirty="0">
-                <a:solidFill>
-                  <a:srgbClr val="9D174D"/>
-                </a:solidFill>
-                <a:latin typeface="Trebuchet MS" pitchFamily="34" charset="0"/>
-                <a:ea typeface="Trebuchet MS" pitchFamily="34" charset="-122"/>
-                <a:cs typeface="Trebuchet MS" pitchFamily="34" charset="-120"/>
-              </a:rPr>
-              <a:t>r</a:t>
-            </a:r>
-            <a:endParaRPr lang="en-US" sz="900" dirty="0"/>
-          </a:p>
-        </p:txBody>
-      </p:sp>
-      <p:sp>
-        <p:nvSpPr>
-          <p:cNvPr id="49" name="Shape 47"/>
-          <p:cNvSpPr/>
-          <p:nvPr/>
-        </p:nvSpPr>
-        <p:spPr>
-          <a:xfrm>
-            <a:off x="7576947" y="4169664"/>
-            <a:ext cx="685800" cy="475488"/>
-          </a:xfrm>
-          <a:prstGeom prst="rect">
-            <a:avLst>
-              <a:gd name="adj" fmla="val 7692"/>
-            </a:avLst>
-          </a:prstGeom>
-          <a:solidFill>
-            <a:srgbClr val="FFFFFF"/>
-          </a:solidFill>
-          <a:ln w="12700">
-            <a:solidFill>
-              <a:srgbClr val="DB2777"/>
-            </a:solidFill>
-            <a:prstDash val="solid"/>
-          </a:ln>
-        </p:spPr>
-      </p:sp>
-      <p:sp>
-        <p:nvSpPr>
-          <p:cNvPr id="50" name="Text 48"/>
-          <p:cNvSpPr/>
-          <p:nvPr/>
-        </p:nvSpPr>
-        <p:spPr>
-          <a:xfrm>
-            <a:off x="7576947" y="4169664"/>
-            <a:ext cx="685800" cy="475488"/>
-          </a:xfrm>
-          <a:prstGeom prst="rect">
-            <a:avLst/>
-          </a:prstGeom>
-          <a:noFill/>
-          <a:ln/>
-        </p:spPr>
-        <p:txBody>
-          <a:bodyPr wrap="square" lIns="0" tIns="0" rIns="0" bIns="0" rtlCol="0" anchor="ctr"/>
-          <a:lstStyle/>
-          <a:p>
-            <a:pPr algn="ctr" indent="0" marL="0">
-              <a:buNone/>
-            </a:pPr>
-            <a:r>
-              <a:rPr lang="en-US" sz="900" b="1" dirty="0">
-                <a:solidFill>
-                  <a:srgbClr val="9D174D"/>
-                </a:solidFill>
-                <a:latin typeface="Trebuchet MS" pitchFamily="34" charset="0"/>
-                <a:ea typeface="Trebuchet MS" pitchFamily="34" charset="-122"/>
-                <a:cs typeface="Trebuchet MS" pitchFamily="34" charset="-120"/>
-              </a:rPr>
-              <a:t>ed</a:t>
+              <a:t>re</a:t>
             </a:r>
             <a:endParaRPr lang="en-US" sz="900" dirty="0"/>
           </a:p>
@@ -17340,7 +16724,7 @@
                 <a:ea typeface="Calibri" pitchFamily="34" charset="-122"/>
                 <a:cs typeface="Calibri" pitchFamily="34" charset="-120"/>
               </a:rPr>
-              <a:t>Although they tried to </a:t>
+              <a:t>After they chose to </a:t>
             </a:r>
             <a:pPr algn="l" indent="0" marL="0">
               <a:buNone/>
@@ -17371,7 +16755,7 @@
                 <a:ea typeface="Calibri" pitchFamily="34" charset="-122"/>
                 <a:cs typeface="Calibri" pitchFamily="34" charset="-120"/>
               </a:rPr>
-              <a:t> in secret, their </a:t>
+              <a:t> against the rules, their actions caused the project to </a:t>
             </a:r>
             <a:pPr algn="l" indent="0" marL="0">
               <a:buNone/>
@@ -17388,7 +16772,7 @@
                 <a:ea typeface="Calibri" pitchFamily="34" charset="-122"/>
                 <a:cs typeface="Calibri" pitchFamily="34" charset="-120"/>
               </a:rPr>
-              <a:t>conspiracy</a:t>
+              <a:t>expire</a:t>
             </a:r>
             <a:pPr algn="l" indent="0" marL="0">
               <a:buNone/>
@@ -17402,7 +16786,7 @@
                 <a:ea typeface="Calibri" pitchFamily="34" charset="-122"/>
                 <a:cs typeface="Calibri" pitchFamily="34" charset="-120"/>
               </a:rPr>
-              <a:t> only </a:t>
+              <a:t>, and everyone stopped feeling any </a:t>
             </a:r>
             <a:pPr algn="l" indent="0" marL="0">
               <a:buNone/>
@@ -17419,7 +16803,7 @@
                 <a:ea typeface="Calibri" pitchFamily="34" charset="-122"/>
                 <a:cs typeface="Calibri" pitchFamily="34" charset="-120"/>
               </a:rPr>
-              <a:t>inspired</a:t>
+              <a:t>inspiration</a:t>
             </a:r>
             <a:pPr algn="l" indent="0" marL="0">
               <a:buNone/>
@@ -17433,7 +16817,7 @@
                 <a:ea typeface="Calibri" pitchFamily="34" charset="-122"/>
                 <a:cs typeface="Calibri" pitchFamily="34" charset="-120"/>
               </a:rPr>
-              <a:t> others to stand up for what was right.</a:t>
+              <a:t>.</a:t>
             </a:r>
             <a:endParaRPr lang="en-US" sz="1800" dirty="0"/>
           </a:p>
@@ -17716,7 +17100,7 @@
                 <a:ea typeface="Trebuchet MS" pitchFamily="34" charset="-122"/>
                 <a:cs typeface="Trebuchet MS" pitchFamily="34" charset="-120"/>
               </a:rPr>
-              <a:t>conspiracy</a:t>
+              <a:t>expire</a:t>
             </a:r>
             <a:endParaRPr lang="en-US" sz="1400" dirty="0"/>
           </a:p>
@@ -17844,7 +17228,7 @@
                 <a:ea typeface="Trebuchet MS" pitchFamily="34" charset="-122"/>
                 <a:cs typeface="Trebuchet MS" pitchFamily="34" charset="-120"/>
               </a:rPr>
-              <a:t>inspired</a:t>
+              <a:t>inspiration</a:t>
             </a:r>
             <a:endParaRPr lang="en-US" sz="1400" dirty="0"/>
           </a:p>
@@ -19431,7 +18815,7 @@
                 <a:ea typeface="Calibri" pitchFamily="34" charset="-122"/>
                 <a:cs typeface="Calibri" pitchFamily="34" charset="-120"/>
               </a:rPr>
-              <a:t>breathe</a:t>
+              <a:t>breathe, breath</a:t>
             </a:r>
             <a:endParaRPr lang="en-US" sz="850" dirty="0"/>
           </a:p>
@@ -20416,7 +19800,7 @@
                 <a:ea typeface="Calibri" pitchFamily="34" charset="-122"/>
                 <a:cs typeface="Calibri" pitchFamily="34" charset="-120"/>
               </a:rPr>
-              <a:t>breathe</a:t>
+              <a:t>breathe, breath</a:t>
             </a:r>
             <a:endParaRPr lang="en-US" sz="850" dirty="0"/>
           </a:p>
@@ -21533,7 +20917,7 @@
                 <a:ea typeface="Calibri" pitchFamily="34" charset="-122"/>
                 <a:cs typeface="Calibri" pitchFamily="34" charset="-120"/>
               </a:rPr>
-              <a:t>breathe</a:t>
+              <a:t>breathe, breath</a:t>
             </a:r>
             <a:endParaRPr lang="en-US" sz="850" dirty="0"/>
           </a:p>
@@ -22822,7 +22206,7 @@
                 <a:ea typeface="Trebuchet MS" pitchFamily="34" charset="-122"/>
                 <a:cs typeface="Trebuchet MS" pitchFamily="34" charset="-120"/>
               </a:rPr>
-              <a:t>conspiracy</a:t>
+              <a:t>expire</a:t>
             </a:r>
             <a:endParaRPr lang="en-US" sz="2800" dirty="0"/>
           </a:p>
@@ -23649,7 +23033,7 @@
                 <a:ea typeface="Trebuchet MS" pitchFamily="34" charset="-122"/>
                 <a:cs typeface="Trebuchet MS" pitchFamily="34" charset="-120"/>
               </a:rPr>
-              <a:t>conspiracy</a:t>
+              <a:t>expire</a:t>
             </a:r>
             <a:endParaRPr lang="en-US" sz="2800" dirty="0"/>
           </a:p>
@@ -23729,7 +23113,7 @@
         </p:nvSpPr>
         <p:spPr>
           <a:xfrm>
-            <a:off x="2221992" y="2258568"/>
+            <a:off x="2938272" y="2258568"/>
             <a:ext cx="1828800" cy="292608"/>
           </a:xfrm>
           <a:prstGeom prst="rect">
@@ -23763,7 +23147,7 @@
         </p:nvSpPr>
         <p:spPr>
           <a:xfrm>
-            <a:off x="2221992" y="2258568"/>
+            <a:off x="2938272" y="2258568"/>
             <a:ext cx="1828800" cy="292608"/>
           </a:xfrm>
           <a:prstGeom prst="rect">
@@ -23788,7 +23172,7 @@
                 <a:ea typeface="Trebuchet MS" pitchFamily="34" charset="-122"/>
                 <a:cs typeface="Trebuchet MS" pitchFamily="34" charset="-120"/>
               </a:rPr>
-              <a:t>con</a:t>
+              <a:t>ex</a:t>
             </a:r>
             <a:endParaRPr lang="en-US" sz="1300" dirty="0"/>
           </a:p>
@@ -23802,7 +23186,7 @@
         </p:nvSpPr>
         <p:spPr>
           <a:xfrm>
-            <a:off x="2221992" y="2569464"/>
+            <a:off x="2938272" y="2569464"/>
             <a:ext cx="1828800" cy="201168"/>
           </a:xfrm>
           <a:prstGeom prst="rect">
@@ -23827,7 +23211,7 @@
                 <a:ea typeface="Calibri" pitchFamily="34" charset="-122"/>
                 <a:cs typeface="Calibri" pitchFamily="34" charset="-120"/>
               </a:rPr>
-              <a:t>together, with</a:t>
+              <a:t>out, away</a:t>
             </a:r>
             <a:endParaRPr lang="en-US" sz="850" dirty="0"/>
           </a:p>
@@ -23841,7 +23225,7 @@
         </p:nvSpPr>
         <p:spPr>
           <a:xfrm>
-            <a:off x="4370832" y="2258568"/>
+            <a:off x="5803392" y="2258568"/>
             <a:ext cx="1828800" cy="292608"/>
           </a:xfrm>
           <a:prstGeom prst="rect">
@@ -23875,7 +23259,7 @@
         </p:nvSpPr>
         <p:spPr>
           <a:xfrm>
-            <a:off x="4370832" y="2258568"/>
+            <a:off x="5803392" y="2258568"/>
             <a:ext cx="1828800" cy="292608"/>
           </a:xfrm>
           <a:prstGeom prst="rect">
@@ -23914,7 +23298,7 @@
         </p:nvSpPr>
         <p:spPr>
           <a:xfrm>
-            <a:off x="4370832" y="2569464"/>
+            <a:off x="5803392" y="2569464"/>
             <a:ext cx="1828800" cy="201168"/>
           </a:xfrm>
           <a:prstGeom prst="rect">
@@ -23939,7 +23323,7 @@
                 <a:ea typeface="Calibri" pitchFamily="34" charset="-122"/>
                 <a:cs typeface="Calibri" pitchFamily="34" charset="-120"/>
               </a:rPr>
-              <a:t>breathe</a:t>
+              <a:t>breathe, breath</a:t>
             </a:r>
             <a:endParaRPr lang="en-US" sz="850" dirty="0"/>
           </a:p>
@@ -23953,30 +23337,23 @@
         </p:nvSpPr>
         <p:spPr>
           <a:xfrm>
-            <a:off x="6519672" y="2258568"/>
-            <a:ext cx="1828800" cy="292608"/>
+            <a:off x="365760" y="3273552"/>
+            <a:ext cx="1371600" cy="658368"/>
           </a:xfrm>
           <a:prstGeom prst="rect">
             <a:avLst>
-              <a:gd name="adj" fmla="val 25000"/>
+              <a:gd name="adj" fmla="val 8333"/>
             </a:avLst>
           </a:prstGeom>
           <a:solidFill>
-            <a:srgbClr val="FCE7F3"/>
-          </a:solidFill>
-          <a:ln w="19050">
-            <a:solidFill>
-              <a:srgbClr val="DB2777"/>
-            </a:solidFill>
-            <a:prstDash val="solid"/>
-          </a:ln>
-          <a:effectLst>
-            <a:outerShdw sx="100000" sy="100000" kx="0" ky="0" algn="bl" rotWithShape="0" blurRad="101600" dist="38100" dir="8100000">
-              <a:srgbClr val="000000">
-                <a:alpha val="12000"/>
-              </a:srgbClr>
-            </a:outerShdw>
-          </a:effectLst>
+            <a:srgbClr val="E2E8F0"/>
+          </a:solidFill>
+          <a:ln w="12700">
+            <a:solidFill>
+              <a:srgbClr val="E2E8F0"/>
+            </a:solidFill>
+            <a:prstDash val="solid"/>
+          </a:ln>
         </p:spPr>
       </p:sp>
       <p:sp>
@@ -23987,8 +23364,8 @@
         </p:nvSpPr>
         <p:spPr>
           <a:xfrm>
-            <a:off x="6519672" y="2258568"/>
-            <a:ext cx="1828800" cy="292608"/>
+            <a:off x="365760" y="3273552"/>
+            <a:ext cx="1371600" cy="658368"/>
           </a:xfrm>
           <a:prstGeom prst="rect">
             <a:avLst/>
@@ -24004,95 +23381,83 @@
               <a:buNone/>
             </a:pPr>
             <a:r>
-              <a:rPr lang="en-US" sz="1300" b="1" dirty="0">
-                <a:solidFill>
-                  <a:srgbClr val="9D174D"/>
+              <a:rPr lang="en-US" sz="1100" b="1" dirty="0">
+                <a:solidFill>
+                  <a:srgbClr val="475569"/>
                 </a:solidFill>
                 <a:latin typeface="Trebuchet MS" pitchFamily="34" charset="0"/>
                 <a:ea typeface="Trebuchet MS" pitchFamily="34" charset="-122"/>
                 <a:cs typeface="Trebuchet MS" pitchFamily="34" charset="-120"/>
               </a:rPr>
-              <a:t>acy</a:t>
-            </a:r>
-            <a:endParaRPr lang="en-US" sz="1300" dirty="0"/>
-          </a:p>
-        </p:txBody>
-      </p:sp>
-      <p:sp>
-        <p:nvSpPr>
-          <p:cNvPr id="24" name="Text 22"/>
-          <p:cNvSpPr/>
-          <p:nvPr/>
-        </p:nvSpPr>
-        <p:spPr>
-          <a:xfrm>
-            <a:off x="6519672" y="2569464"/>
-            <a:ext cx="1828800" cy="201168"/>
-          </a:xfrm>
-          <a:prstGeom prst="rect">
-            <a:avLst/>
-          </a:prstGeom>
-          <a:noFill/>
-          <a:ln/>
-        </p:spPr>
-        <p:txBody>
-          <a:bodyPr wrap="square" lIns="0" tIns="0" rIns="0" bIns="0" rtlCol="0" anchor="t"/>
-          <a:lstStyle/>
-          <a:p>
-            <a:pPr algn="ctr" indent="0" marL="0">
-              <a:buNone/>
-            </a:pPr>
-            <a:r>
-              <a:rPr lang="en-US" sz="850" dirty="0">
-                <a:solidFill>
-                  <a:srgbClr val="475569"/>
+              <a:t>Syllables</a:t>
+            </a:r>
+            <a:endParaRPr lang="en-US" sz="1100" dirty="0"/>
+          </a:p>
+        </p:txBody>
+      </p:sp>
+      <p:sp>
+        <p:nvSpPr>
+          <p:cNvPr id="24" name="Shape 22"/>
+          <p:cNvSpPr/>
+          <p:nvPr/>
+        </p:nvSpPr>
+        <p:spPr>
+          <a:xfrm>
+            <a:off x="1874520" y="3273552"/>
+            <a:ext cx="6903720" cy="658368"/>
+          </a:xfrm>
+          <a:prstGeom prst="rect">
+            <a:avLst>
+              <a:gd name="adj" fmla="val 8333"/>
+            </a:avLst>
+          </a:prstGeom>
+          <a:solidFill>
+            <a:srgbClr val="F8FAFC"/>
+          </a:solidFill>
+          <a:ln w="12700">
+            <a:solidFill>
+              <a:srgbClr val="E2E8F0"/>
+            </a:solidFill>
+            <a:prstDash val="dash"/>
+          </a:ln>
+        </p:spPr>
+      </p:sp>
+      <p:sp>
+        <p:nvSpPr>
+          <p:cNvPr id="25" name="Text 23"/>
+          <p:cNvSpPr/>
+          <p:nvPr/>
+        </p:nvSpPr>
+        <p:spPr>
+          <a:xfrm>
+            <a:off x="1874520" y="3273552"/>
+            <a:ext cx="6903720" cy="658368"/>
+          </a:xfrm>
+          <a:prstGeom prst="rect">
+            <a:avLst/>
+          </a:prstGeom>
+          <a:noFill/>
+          <a:ln/>
+        </p:spPr>
+        <p:txBody>
+          <a:bodyPr wrap="square" rtlCol="0" anchor="ctr"/>
+          <a:lstStyle/>
+          <a:p>
+            <a:pPr algn="ctr" indent="0" marL="0">
+              <a:buNone/>
+            </a:pPr>
+            <a:r>
+              <a:rPr lang="en-US" sz="1100" i="1" dirty="0">
+                <a:solidFill>
+                  <a:srgbClr val="CBD5E1"/>
                 </a:solidFill>
                 <a:latin typeface="Calibri" pitchFamily="34" charset="0"/>
                 <a:ea typeface="Calibri" pitchFamily="34" charset="-122"/>
                 <a:cs typeface="Calibri" pitchFamily="34" charset="-120"/>
               </a:rPr>
-              <a:t>state or condition of</a:t>
-            </a:r>
-            <a:endParaRPr lang="en-US" sz="850" dirty="0"/>
-          </a:p>
-        </p:txBody>
-      </p:sp>
-      <p:sp>
-        <p:nvSpPr>
-          <p:cNvPr id="25" name="Text 23"/>
-          <p:cNvSpPr/>
-          <p:nvPr/>
-        </p:nvSpPr>
-        <p:spPr>
-          <a:xfrm>
-            <a:off x="6519672" y="2752344"/>
-            <a:ext cx="1828800" cy="182880"/>
-          </a:xfrm>
-          <a:prstGeom prst="rect">
-            <a:avLst/>
-          </a:prstGeom>
-          <a:noFill/>
-          <a:ln/>
-        </p:spPr>
-        <p:txBody>
-          <a:bodyPr wrap="square" lIns="0" tIns="0" rIns="0" bIns="0" rtlCol="0" anchor="t"/>
-          <a:lstStyle/>
-          <a:p>
-            <a:pPr algn="ctr" indent="0" marL="0">
-              <a:buNone/>
-            </a:pPr>
-            <a:r>
-              <a:rPr lang="en-US" sz="700" i="1" dirty="0">
-                <a:solidFill>
-                  <a:srgbClr val="94A3B8"/>
-                </a:solidFill>
-                <a:latin typeface="Calibri" pitchFamily="34" charset="0"/>
-                <a:ea typeface="Calibri" pitchFamily="34" charset="-122"/>
-                <a:cs typeface="Calibri" pitchFamily="34" charset="-120"/>
-              </a:rPr>
-              <a:t>'e' dropped before vowel suffix</a:t>
-            </a:r>
-            <a:endParaRPr lang="en-US" sz="700" dirty="0"/>
+              <a:t>Write here...</a:t>
+            </a:r>
+            <a:endParaRPr lang="en-US" sz="1100" dirty="0"/>
           </a:p>
         </p:txBody>
       </p:sp>
@@ -24104,12 +23469,12 @@
         </p:nvSpPr>
         <p:spPr>
           <a:xfrm>
-            <a:off x="365760" y="3273552"/>
-            <a:ext cx="1371600" cy="658368"/>
+            <a:off x="365760" y="4096512"/>
+            <a:ext cx="1371600" cy="804672"/>
           </a:xfrm>
           <a:prstGeom prst="rect">
             <a:avLst>
-              <a:gd name="adj" fmla="val 8333"/>
+              <a:gd name="adj" fmla="val 6818"/>
             </a:avLst>
           </a:prstGeom>
           <a:solidFill>
@@ -24131,8 +23496,8 @@
         </p:nvSpPr>
         <p:spPr>
           <a:xfrm>
-            <a:off x="365760" y="3273552"/>
-            <a:ext cx="1371600" cy="658368"/>
+            <a:off x="365760" y="4096512"/>
+            <a:ext cx="1371600" cy="804672"/>
           </a:xfrm>
           <a:prstGeom prst="rect">
             <a:avLst/>
@@ -24156,7 +23521,7 @@
                 <a:ea typeface="Trebuchet MS" pitchFamily="34" charset="-122"/>
                 <a:cs typeface="Trebuchet MS" pitchFamily="34" charset="-120"/>
               </a:rPr>
-              <a:t>Syllables</a:t>
+              <a:t>Phonemes</a:t>
             </a:r>
             <a:endParaRPr lang="en-US" sz="1100" dirty="0"/>
           </a:p>
@@ -24170,74 +23535,8 @@
         </p:nvSpPr>
         <p:spPr>
           <a:xfrm>
-            <a:off x="1874520" y="3273552"/>
-            <a:ext cx="6903720" cy="658368"/>
-          </a:xfrm>
-          <a:prstGeom prst="rect">
-            <a:avLst>
-              <a:gd name="adj" fmla="val 8333"/>
-            </a:avLst>
-          </a:prstGeom>
-          <a:solidFill>
-            <a:srgbClr val="F8FAFC"/>
-          </a:solidFill>
-          <a:ln w="12700">
-            <a:solidFill>
-              <a:srgbClr val="E2E8F0"/>
-            </a:solidFill>
-            <a:prstDash val="dash"/>
-          </a:ln>
-        </p:spPr>
-      </p:sp>
-      <p:sp>
-        <p:nvSpPr>
-          <p:cNvPr id="29" name="Text 27"/>
-          <p:cNvSpPr/>
-          <p:nvPr/>
-        </p:nvSpPr>
-        <p:spPr>
-          <a:xfrm>
-            <a:off x="1874520" y="3273552"/>
-            <a:ext cx="6903720" cy="658368"/>
-          </a:xfrm>
-          <a:prstGeom prst="rect">
-            <a:avLst/>
-          </a:prstGeom>
-          <a:noFill/>
-          <a:ln/>
-        </p:spPr>
-        <p:txBody>
-          <a:bodyPr wrap="square" rtlCol="0" anchor="ctr"/>
-          <a:lstStyle/>
-          <a:p>
-            <a:pPr algn="ctr" indent="0" marL="0">
-              <a:buNone/>
-            </a:pPr>
-            <a:r>
-              <a:rPr lang="en-US" sz="1100" i="1" dirty="0">
-                <a:solidFill>
-                  <a:srgbClr val="CBD5E1"/>
-                </a:solidFill>
-                <a:latin typeface="Calibri" pitchFamily="34" charset="0"/>
-                <a:ea typeface="Calibri" pitchFamily="34" charset="-122"/>
-                <a:cs typeface="Calibri" pitchFamily="34" charset="-120"/>
-              </a:rPr>
-              <a:t>Write here...</a:t>
-            </a:r>
-            <a:endParaRPr lang="en-US" sz="1100" dirty="0"/>
-          </a:p>
-        </p:txBody>
-      </p:sp>
-      <p:sp>
-        <p:nvSpPr>
-          <p:cNvPr id="30" name="Shape 28"/>
-          <p:cNvSpPr/>
-          <p:nvPr/>
-        </p:nvSpPr>
-        <p:spPr>
-          <a:xfrm>
-            <a:off x="365760" y="4096512"/>
-            <a:ext cx="1371600" cy="804672"/>
+            <a:off x="1874520" y="4096512"/>
+            <a:ext cx="6903720" cy="804672"/>
           </a:xfrm>
           <a:prstGeom prst="rect">
             <a:avLst>
@@ -24245,85 +23544,19 @@
             </a:avLst>
           </a:prstGeom>
           <a:solidFill>
-            <a:srgbClr val="E2E8F0"/>
+            <a:srgbClr val="F8FAFC"/>
           </a:solidFill>
           <a:ln w="12700">
             <a:solidFill>
               <a:srgbClr val="E2E8F0"/>
             </a:solidFill>
-            <a:prstDash val="solid"/>
-          </a:ln>
-        </p:spPr>
-      </p:sp>
-      <p:sp>
-        <p:nvSpPr>
-          <p:cNvPr id="31" name="Text 29"/>
-          <p:cNvSpPr/>
-          <p:nvPr/>
-        </p:nvSpPr>
-        <p:spPr>
-          <a:xfrm>
-            <a:off x="365760" y="4096512"/>
-            <a:ext cx="1371600" cy="804672"/>
-          </a:xfrm>
-          <a:prstGeom prst="rect">
-            <a:avLst/>
-          </a:prstGeom>
-          <a:noFill/>
-          <a:ln/>
-        </p:spPr>
-        <p:txBody>
-          <a:bodyPr wrap="square" lIns="0" tIns="0" rIns="0" bIns="0" rtlCol="0" anchor="ctr"/>
-          <a:lstStyle/>
-          <a:p>
-            <a:pPr algn="ctr" indent="0" marL="0">
-              <a:buNone/>
-            </a:pPr>
-            <a:r>
-              <a:rPr lang="en-US" sz="1100" b="1" dirty="0">
-                <a:solidFill>
-                  <a:srgbClr val="475569"/>
-                </a:solidFill>
-                <a:latin typeface="Trebuchet MS" pitchFamily="34" charset="0"/>
-                <a:ea typeface="Trebuchet MS" pitchFamily="34" charset="-122"/>
-                <a:cs typeface="Trebuchet MS" pitchFamily="34" charset="-120"/>
-              </a:rPr>
-              <a:t>Phonemes</a:t>
-            </a:r>
-            <a:endParaRPr lang="en-US" sz="1100" dirty="0"/>
-          </a:p>
-        </p:txBody>
-      </p:sp>
-      <p:sp>
-        <p:nvSpPr>
-          <p:cNvPr id="32" name="Shape 30"/>
-          <p:cNvSpPr/>
-          <p:nvPr/>
-        </p:nvSpPr>
-        <p:spPr>
-          <a:xfrm>
-            <a:off x="1874520" y="4096512"/>
-            <a:ext cx="6903720" cy="804672"/>
-          </a:xfrm>
-          <a:prstGeom prst="rect">
-            <a:avLst>
-              <a:gd name="adj" fmla="val 6818"/>
-            </a:avLst>
-          </a:prstGeom>
-          <a:solidFill>
-            <a:srgbClr val="F8FAFC"/>
-          </a:solidFill>
-          <a:ln w="12700">
-            <a:solidFill>
-              <a:srgbClr val="E2E8F0"/>
-            </a:solidFill>
             <a:prstDash val="dash"/>
           </a:ln>
         </p:spPr>
       </p:sp>
       <p:sp>
         <p:nvSpPr>
-          <p:cNvPr id="33" name="Text 31"/>
+          <p:cNvPr id="29" name="Text 27"/>
           <p:cNvSpPr/>
           <p:nvPr/>
         </p:nvSpPr>
@@ -25504,7 +24737,7 @@
                 <a:ea typeface="Trebuchet MS" pitchFamily="34" charset="-122"/>
                 <a:cs typeface="Trebuchet MS" pitchFamily="34" charset="-120"/>
               </a:rPr>
-              <a:t>conspiracy</a:t>
+              <a:t>expire</a:t>
             </a:r>
             <a:endParaRPr lang="en-US" sz="2800" dirty="0"/>
           </a:p>
@@ -25584,7 +24817,7 @@
         </p:nvSpPr>
         <p:spPr>
           <a:xfrm>
-            <a:off x="2221992" y="2258568"/>
+            <a:off x="2938272" y="2258568"/>
             <a:ext cx="1828800" cy="292608"/>
           </a:xfrm>
           <a:prstGeom prst="rect">
@@ -25618,7 +24851,7 @@
         </p:nvSpPr>
         <p:spPr>
           <a:xfrm>
-            <a:off x="2221992" y="2258568"/>
+            <a:off x="2938272" y="2258568"/>
             <a:ext cx="1828800" cy="292608"/>
           </a:xfrm>
           <a:prstGeom prst="rect">
@@ -25643,7 +24876,7 @@
                 <a:ea typeface="Trebuchet MS" pitchFamily="34" charset="-122"/>
                 <a:cs typeface="Trebuchet MS" pitchFamily="34" charset="-120"/>
               </a:rPr>
-              <a:t>con</a:t>
+              <a:t>ex</a:t>
             </a:r>
             <a:endParaRPr lang="en-US" sz="1300" dirty="0"/>
           </a:p>
@@ -25657,7 +24890,7 @@
         </p:nvSpPr>
         <p:spPr>
           <a:xfrm>
-            <a:off x="2221992" y="2569464"/>
+            <a:off x="2938272" y="2569464"/>
             <a:ext cx="1828800" cy="201168"/>
           </a:xfrm>
           <a:prstGeom prst="rect">
@@ -25682,7 +24915,7 @@
                 <a:ea typeface="Calibri" pitchFamily="34" charset="-122"/>
                 <a:cs typeface="Calibri" pitchFamily="34" charset="-120"/>
               </a:rPr>
-              <a:t>together, with</a:t>
+              <a:t>out, away</a:t>
             </a:r>
             <a:endParaRPr lang="en-US" sz="850" dirty="0"/>
           </a:p>
@@ -25696,7 +24929,7 @@
         </p:nvSpPr>
         <p:spPr>
           <a:xfrm>
-            <a:off x="4370832" y="2258568"/>
+            <a:off x="5803392" y="2258568"/>
             <a:ext cx="1828800" cy="292608"/>
           </a:xfrm>
           <a:prstGeom prst="rect">
@@ -25730,7 +24963,7 @@
         </p:nvSpPr>
         <p:spPr>
           <a:xfrm>
-            <a:off x="4370832" y="2258568"/>
+            <a:off x="5803392" y="2258568"/>
             <a:ext cx="1828800" cy="292608"/>
           </a:xfrm>
           <a:prstGeom prst="rect">
@@ -25769,7 +25002,7 @@
         </p:nvSpPr>
         <p:spPr>
           <a:xfrm>
-            <a:off x="4370832" y="2569464"/>
+            <a:off x="5803392" y="2569464"/>
             <a:ext cx="1828800" cy="201168"/>
           </a:xfrm>
           <a:prstGeom prst="rect">
@@ -25794,7 +25027,7 @@
                 <a:ea typeface="Calibri" pitchFamily="34" charset="-122"/>
                 <a:cs typeface="Calibri" pitchFamily="34" charset="-120"/>
               </a:rPr>
-              <a:t>breathe</a:t>
+              <a:t>breathe, breath</a:t>
             </a:r>
             <a:endParaRPr lang="en-US" sz="850" dirty="0"/>
           </a:p>
@@ -25808,30 +25041,23 @@
         </p:nvSpPr>
         <p:spPr>
           <a:xfrm>
-            <a:off x="6519672" y="2258568"/>
-            <a:ext cx="1828800" cy="292608"/>
+            <a:off x="365760" y="3273552"/>
+            <a:ext cx="1371600" cy="658368"/>
           </a:xfrm>
           <a:prstGeom prst="rect">
             <a:avLst>
-              <a:gd name="adj" fmla="val 25000"/>
+              <a:gd name="adj" fmla="val 8333"/>
             </a:avLst>
           </a:prstGeom>
           <a:solidFill>
-            <a:srgbClr val="FCE7F3"/>
-          </a:solidFill>
-          <a:ln w="19050">
-            <a:solidFill>
-              <a:srgbClr val="DB2777"/>
-            </a:solidFill>
-            <a:prstDash val="solid"/>
-          </a:ln>
-          <a:effectLst>
-            <a:outerShdw sx="100000" sy="100000" kx="0" ky="0" algn="bl" rotWithShape="0" blurRad="101600" dist="38100" dir="8100000">
-              <a:srgbClr val="000000">
-                <a:alpha val="12000"/>
-              </a:srgbClr>
-            </a:outerShdw>
-          </a:effectLst>
+            <a:srgbClr val="E2E8F0"/>
+          </a:solidFill>
+          <a:ln w="12700">
+            <a:solidFill>
+              <a:srgbClr val="E2E8F0"/>
+            </a:solidFill>
+            <a:prstDash val="solid"/>
+          </a:ln>
         </p:spPr>
       </p:sp>
       <p:sp>
@@ -25842,8 +25068,8 @@
         </p:nvSpPr>
         <p:spPr>
           <a:xfrm>
-            <a:off x="6519672" y="2258568"/>
-            <a:ext cx="1828800" cy="292608"/>
+            <a:off x="365760" y="3273552"/>
+            <a:ext cx="1371600" cy="658368"/>
           </a:xfrm>
           <a:prstGeom prst="rect">
             <a:avLst/>
@@ -25859,108 +25085,30 @@
               <a:buNone/>
             </a:pPr>
             <a:r>
-              <a:rPr lang="en-US" sz="1300" b="1" dirty="0">
-                <a:solidFill>
-                  <a:srgbClr val="9D174D"/>
+              <a:rPr lang="en-US" sz="1100" b="1" dirty="0">
+                <a:solidFill>
+                  <a:srgbClr val="475569"/>
                 </a:solidFill>
                 <a:latin typeface="Trebuchet MS" pitchFamily="34" charset="0"/>
                 <a:ea typeface="Trebuchet MS" pitchFamily="34" charset="-122"/>
                 <a:cs typeface="Trebuchet MS" pitchFamily="34" charset="-120"/>
               </a:rPr>
-              <a:t>acy</a:t>
-            </a:r>
-            <a:endParaRPr lang="en-US" sz="1300" dirty="0"/>
-          </a:p>
-        </p:txBody>
-      </p:sp>
-      <p:sp>
-        <p:nvSpPr>
-          <p:cNvPr id="24" name="Text 22"/>
-          <p:cNvSpPr/>
-          <p:nvPr/>
-        </p:nvSpPr>
-        <p:spPr>
-          <a:xfrm>
-            <a:off x="6519672" y="2569464"/>
-            <a:ext cx="1828800" cy="201168"/>
-          </a:xfrm>
-          <a:prstGeom prst="rect">
-            <a:avLst/>
-          </a:prstGeom>
-          <a:noFill/>
-          <a:ln/>
-        </p:spPr>
-        <p:txBody>
-          <a:bodyPr wrap="square" lIns="0" tIns="0" rIns="0" bIns="0" rtlCol="0" anchor="t"/>
-          <a:lstStyle/>
-          <a:p>
-            <a:pPr algn="ctr" indent="0" marL="0">
-              <a:buNone/>
-            </a:pPr>
-            <a:r>
-              <a:rPr lang="en-US" sz="850" dirty="0">
-                <a:solidFill>
-                  <a:srgbClr val="475569"/>
-                </a:solidFill>
-                <a:latin typeface="Calibri" pitchFamily="34" charset="0"/>
-                <a:ea typeface="Calibri" pitchFamily="34" charset="-122"/>
-                <a:cs typeface="Calibri" pitchFamily="34" charset="-120"/>
-              </a:rPr>
-              <a:t>state or condition of</a:t>
-            </a:r>
-            <a:endParaRPr lang="en-US" sz="850" dirty="0"/>
-          </a:p>
-        </p:txBody>
-      </p:sp>
-      <p:sp>
-        <p:nvSpPr>
-          <p:cNvPr id="25" name="Text 23"/>
-          <p:cNvSpPr/>
-          <p:nvPr/>
-        </p:nvSpPr>
-        <p:spPr>
-          <a:xfrm>
-            <a:off x="6519672" y="2752344"/>
-            <a:ext cx="1828800" cy="182880"/>
-          </a:xfrm>
-          <a:prstGeom prst="rect">
-            <a:avLst/>
-          </a:prstGeom>
-          <a:noFill/>
-          <a:ln/>
-        </p:spPr>
-        <p:txBody>
-          <a:bodyPr wrap="square" lIns="0" tIns="0" rIns="0" bIns="0" rtlCol="0" anchor="t"/>
-          <a:lstStyle/>
-          <a:p>
-            <a:pPr algn="ctr" indent="0" marL="0">
-              <a:buNone/>
-            </a:pPr>
-            <a:r>
-              <a:rPr lang="en-US" sz="700" i="1" dirty="0">
-                <a:solidFill>
-                  <a:srgbClr val="94A3B8"/>
-                </a:solidFill>
-                <a:latin typeface="Calibri" pitchFamily="34" charset="0"/>
-                <a:ea typeface="Calibri" pitchFamily="34" charset="-122"/>
-                <a:cs typeface="Calibri" pitchFamily="34" charset="-120"/>
-              </a:rPr>
-              <a:t>'e' dropped before vowel suffix</a:t>
-            </a:r>
-            <a:endParaRPr lang="en-US" sz="700" dirty="0"/>
-          </a:p>
-        </p:txBody>
-      </p:sp>
-      <p:sp>
-        <p:nvSpPr>
-          <p:cNvPr id="26" name="Shape 24"/>
-          <p:cNvSpPr/>
-          <p:nvPr/>
-        </p:nvSpPr>
-        <p:spPr>
-          <a:xfrm>
-            <a:off x="365760" y="3273552"/>
-            <a:ext cx="1371600" cy="658368"/>
+              <a:t>Syllables</a:t>
+            </a:r>
+            <a:endParaRPr lang="en-US" sz="1100" dirty="0"/>
+          </a:p>
+        </p:txBody>
+      </p:sp>
+      <p:sp>
+        <p:nvSpPr>
+          <p:cNvPr id="24" name="Shape 22"/>
+          <p:cNvSpPr/>
+          <p:nvPr/>
+        </p:nvSpPr>
+        <p:spPr>
+          <a:xfrm>
+            <a:off x="1874520" y="3273552"/>
+            <a:ext cx="6903720" cy="658368"/>
           </a:xfrm>
           <a:prstGeom prst="rect">
             <a:avLst>
@@ -25968,26 +25116,53 @@
             </a:avLst>
           </a:prstGeom>
           <a:solidFill>
-            <a:srgbClr val="E2E8F0"/>
-          </a:solidFill>
-          <a:ln w="12700">
-            <a:solidFill>
-              <a:srgbClr val="E2E8F0"/>
-            </a:solidFill>
-            <a:prstDash val="solid"/>
-          </a:ln>
-        </p:spPr>
-      </p:sp>
-      <p:sp>
-        <p:nvSpPr>
-          <p:cNvPr id="27" name="Text 25"/>
-          <p:cNvSpPr/>
-          <p:nvPr/>
-        </p:nvSpPr>
-        <p:spPr>
-          <a:xfrm>
-            <a:off x="365760" y="3273552"/>
-            <a:ext cx="1371600" cy="658368"/>
+            <a:srgbClr val="CCFBF1"/>
+          </a:solidFill>
+          <a:ln w="12700">
+            <a:solidFill>
+              <a:srgbClr val="0D9488"/>
+            </a:solidFill>
+            <a:prstDash val="solid"/>
+          </a:ln>
+        </p:spPr>
+      </p:sp>
+      <p:sp>
+        <p:nvSpPr>
+          <p:cNvPr id="25" name="Shape 23"/>
+          <p:cNvSpPr/>
+          <p:nvPr/>
+        </p:nvSpPr>
+        <p:spPr>
+          <a:xfrm>
+            <a:off x="2999232" y="3364992"/>
+            <a:ext cx="1645920" cy="475488"/>
+          </a:xfrm>
+          <a:prstGeom prst="rect">
+            <a:avLst>
+              <a:gd name="adj" fmla="val 9615"/>
+            </a:avLst>
+          </a:prstGeom>
+          <a:solidFill>
+            <a:srgbClr val="FFFFFF"/>
+          </a:solidFill>
+          <a:ln w="12700">
+            <a:solidFill>
+              <a:srgbClr val="0D9488"/>
+            </a:solidFill>
+            <a:prstDash val="solid"/>
+          </a:ln>
+        </p:spPr>
+      </p:sp>
+      <p:sp>
+        <p:nvSpPr>
+          <p:cNvPr id="26" name="Text 24"/>
+          <p:cNvSpPr/>
+          <p:nvPr/>
+        </p:nvSpPr>
+        <p:spPr>
+          <a:xfrm>
+            <a:off x="2999232" y="3364992"/>
+            <a:ext cx="1645920" cy="475488"/>
           </a:xfrm>
           <a:prstGeom prst="rect">
             <a:avLst/>
@@ -26003,17 +25178,56 @@
               <a:buNone/>
             </a:pPr>
             <a:r>
-              <a:rPr lang="en-US" sz="1100" b="1" dirty="0">
-                <a:solidFill>
-                  <a:srgbClr val="475569"/>
+              <a:rPr lang="en-US" sz="1400" b="1" dirty="0">
+                <a:solidFill>
+                  <a:srgbClr val="0D9488"/>
                 </a:solidFill>
                 <a:latin typeface="Trebuchet MS" pitchFamily="34" charset="0"/>
                 <a:ea typeface="Trebuchet MS" pitchFamily="34" charset="-122"/>
                 <a:cs typeface="Trebuchet MS" pitchFamily="34" charset="-120"/>
               </a:rPr>
-              <a:t>Syllables</a:t>
-            </a:r>
-            <a:endParaRPr lang="en-US" sz="1100" dirty="0"/>
+              <a:t>ex</a:t>
+            </a:r>
+            <a:endParaRPr lang="en-US" sz="1400" dirty="0"/>
+          </a:p>
+        </p:txBody>
+      </p:sp>
+      <p:sp>
+        <p:nvSpPr>
+          <p:cNvPr id="27" name="Text 25"/>
+          <p:cNvSpPr/>
+          <p:nvPr/>
+        </p:nvSpPr>
+        <p:spPr>
+          <a:xfrm>
+            <a:off x="4645152" y="3364992"/>
+            <a:ext cx="1097280" cy="475488"/>
+          </a:xfrm>
+          <a:prstGeom prst="rect">
+            <a:avLst/>
+          </a:prstGeom>
+          <a:noFill/>
+          <a:ln/>
+        </p:spPr>
+        <p:txBody>
+          <a:bodyPr wrap="square" lIns="0" tIns="0" rIns="0" bIns="0" rtlCol="0" anchor="ctr"/>
+          <a:lstStyle/>
+          <a:p>
+            <a:pPr algn="ctr" indent="0" marL="0">
+              <a:buNone/>
+            </a:pPr>
+            <a:r>
+              <a:rPr lang="en-US" sz="1600" b="1" dirty="0">
+                <a:solidFill>
+                  <a:srgbClr val="0D9488"/>
+                </a:solidFill>
+                <a:latin typeface="Trebuchet MS" pitchFamily="34" charset="0"/>
+                <a:ea typeface="Trebuchet MS" pitchFamily="34" charset="-122"/>
+                <a:cs typeface="Trebuchet MS" pitchFamily="34" charset="-120"/>
+              </a:rPr>
+              <a:t>·</a:t>
+            </a:r>
+            <a:endParaRPr lang="en-US" sz="1600" dirty="0"/>
           </a:p>
         </p:txBody>
       </p:sp>
@@ -26025,35 +25239,8 @@
         </p:nvSpPr>
         <p:spPr>
           <a:xfrm>
-            <a:off x="1874520" y="3273552"/>
-            <a:ext cx="6903720" cy="658368"/>
-          </a:xfrm>
-          <a:prstGeom prst="rect">
-            <a:avLst>
-              <a:gd name="adj" fmla="val 8333"/>
-            </a:avLst>
-          </a:prstGeom>
-          <a:solidFill>
-            <a:srgbClr val="CCFBF1"/>
-          </a:solidFill>
-          <a:ln w="12700">
-            <a:solidFill>
-              <a:srgbClr val="0D9488"/>
-            </a:solidFill>
-            <a:prstDash val="solid"/>
-          </a:ln>
-        </p:spPr>
-      </p:sp>
-      <p:sp>
-        <p:nvSpPr>
-          <p:cNvPr id="29" name="Shape 27"/>
-          <p:cNvSpPr/>
-          <p:nvPr/>
-        </p:nvSpPr>
-        <p:spPr>
-          <a:xfrm>
-            <a:off x="1975104" y="3364992"/>
-            <a:ext cx="1554480" cy="475488"/>
+            <a:off x="5742432" y="3364992"/>
+            <a:ext cx="1645920" cy="475488"/>
           </a:xfrm>
           <a:prstGeom prst="rect">
             <a:avLst>
@@ -26073,14 +25260,14 @@
       </p:sp>
       <p:sp>
         <p:nvSpPr>
-          <p:cNvPr id="30" name="Text 28"/>
-          <p:cNvSpPr/>
-          <p:nvPr/>
-        </p:nvSpPr>
-        <p:spPr>
-          <a:xfrm>
-            <a:off x="1975104" y="3364992"/>
-            <a:ext cx="1554480" cy="475488"/>
+          <p:cNvPr id="29" name="Text 27"/>
+          <p:cNvSpPr/>
+          <p:nvPr/>
+        </p:nvSpPr>
+        <p:spPr>
+          <a:xfrm>
+            <a:off x="5742432" y="3364992"/>
+            <a:ext cx="1645920" cy="475488"/>
           </a:xfrm>
           <a:prstGeom prst="rect">
             <a:avLst/>
@@ -26104,7 +25291,7 @@
                 <a:ea typeface="Trebuchet MS" pitchFamily="34" charset="-122"/>
                 <a:cs typeface="Trebuchet MS" pitchFamily="34" charset="-120"/>
               </a:rPr>
-              <a:t>con</a:t>
+              <a:t>pire</a:t>
             </a:r>
             <a:endParaRPr lang="en-US" sz="1400" dirty="0"/>
           </a:p>
@@ -26112,14 +25299,41 @@
       </p:sp>
       <p:sp>
         <p:nvSpPr>
+          <p:cNvPr id="30" name="Shape 28"/>
+          <p:cNvSpPr/>
+          <p:nvPr/>
+        </p:nvSpPr>
+        <p:spPr>
+          <a:xfrm>
+            <a:off x="365760" y="4096512"/>
+            <a:ext cx="1371600" cy="804672"/>
+          </a:xfrm>
+          <a:prstGeom prst="rect">
+            <a:avLst>
+              <a:gd name="adj" fmla="val 6818"/>
+            </a:avLst>
+          </a:prstGeom>
+          <a:solidFill>
+            <a:srgbClr val="E2E8F0"/>
+          </a:solidFill>
+          <a:ln w="12700">
+            <a:solidFill>
+              <a:srgbClr val="E2E8F0"/>
+            </a:solidFill>
+            <a:prstDash val="solid"/>
+          </a:ln>
+        </p:spPr>
+      </p:sp>
+      <p:sp>
+        <p:nvSpPr>
           <p:cNvPr id="31" name="Text 29"/>
           <p:cNvSpPr/>
           <p:nvPr/>
         </p:nvSpPr>
         <p:spPr>
           <a:xfrm>
-            <a:off x="3529584" y="3364992"/>
-            <a:ext cx="73152" cy="475488"/>
+            <a:off x="365760" y="4096512"/>
+            <a:ext cx="1371600" cy="804672"/>
           </a:xfrm>
           <a:prstGeom prst="rect">
             <a:avLst/>
@@ -26135,17 +25349,17 @@
               <a:buNone/>
             </a:pPr>
             <a:r>
-              <a:rPr lang="en-US" sz="1600" b="1" dirty="0">
-                <a:solidFill>
-                  <a:srgbClr val="0D9488"/>
+              <a:rPr lang="en-US" sz="1100" b="1" dirty="0">
+                <a:solidFill>
+                  <a:srgbClr val="475569"/>
                 </a:solidFill>
                 <a:latin typeface="Trebuchet MS" pitchFamily="34" charset="0"/>
                 <a:ea typeface="Trebuchet MS" pitchFamily="34" charset="-122"/>
                 <a:cs typeface="Trebuchet MS" pitchFamily="34" charset="-120"/>
               </a:rPr>
-              <a:t>·</a:t>
-            </a:r>
-            <a:endParaRPr lang="en-US" sz="1600" dirty="0"/>
+              <a:t>Phonemes</a:t>
+            </a:r>
+            <a:endParaRPr lang="en-US" sz="1100" dirty="0"/>
           </a:p>
         </p:txBody>
       </p:sp>
@@ -26157,284 +25371,8 @@
         </p:nvSpPr>
         <p:spPr>
           <a:xfrm>
-            <a:off x="3602736" y="3364992"/>
-            <a:ext cx="1554480" cy="475488"/>
-          </a:xfrm>
-          <a:prstGeom prst="rect">
-            <a:avLst>
-              <a:gd name="adj" fmla="val 9615"/>
-            </a:avLst>
-          </a:prstGeom>
-          <a:solidFill>
-            <a:srgbClr val="FFFFFF"/>
-          </a:solidFill>
-          <a:ln w="12700">
-            <a:solidFill>
-              <a:srgbClr val="0D9488"/>
-            </a:solidFill>
-            <a:prstDash val="solid"/>
-          </a:ln>
-        </p:spPr>
-      </p:sp>
-      <p:sp>
-        <p:nvSpPr>
-          <p:cNvPr id="33" name="Text 31"/>
-          <p:cNvSpPr/>
-          <p:nvPr/>
-        </p:nvSpPr>
-        <p:spPr>
-          <a:xfrm>
-            <a:off x="3602736" y="3364992"/>
-            <a:ext cx="1554480" cy="475488"/>
-          </a:xfrm>
-          <a:prstGeom prst="rect">
-            <a:avLst/>
-          </a:prstGeom>
-          <a:noFill/>
-          <a:ln/>
-        </p:spPr>
-        <p:txBody>
-          <a:bodyPr wrap="square" lIns="0" tIns="0" rIns="0" bIns="0" rtlCol="0" anchor="ctr"/>
-          <a:lstStyle/>
-          <a:p>
-            <a:pPr algn="ctr" indent="0" marL="0">
-              <a:buNone/>
-            </a:pPr>
-            <a:r>
-              <a:rPr lang="en-US" sz="1400" b="1" dirty="0">
-                <a:solidFill>
-                  <a:srgbClr val="0D9488"/>
-                </a:solidFill>
-                <a:latin typeface="Trebuchet MS" pitchFamily="34" charset="0"/>
-                <a:ea typeface="Trebuchet MS" pitchFamily="34" charset="-122"/>
-                <a:cs typeface="Trebuchet MS" pitchFamily="34" charset="-120"/>
-              </a:rPr>
-              <a:t>spir</a:t>
-            </a:r>
-            <a:endParaRPr lang="en-US" sz="1400" dirty="0"/>
-          </a:p>
-        </p:txBody>
-      </p:sp>
-      <p:sp>
-        <p:nvSpPr>
-          <p:cNvPr id="34" name="Text 32"/>
-          <p:cNvSpPr/>
-          <p:nvPr/>
-        </p:nvSpPr>
-        <p:spPr>
-          <a:xfrm>
-            <a:off x="5157216" y="3364992"/>
-            <a:ext cx="73152" cy="475488"/>
-          </a:xfrm>
-          <a:prstGeom prst="rect">
-            <a:avLst/>
-          </a:prstGeom>
-          <a:noFill/>
-          <a:ln/>
-        </p:spPr>
-        <p:txBody>
-          <a:bodyPr wrap="square" lIns="0" tIns="0" rIns="0" bIns="0" rtlCol="0" anchor="ctr"/>
-          <a:lstStyle/>
-          <a:p>
-            <a:pPr algn="ctr" indent="0" marL="0">
-              <a:buNone/>
-            </a:pPr>
-            <a:r>
-              <a:rPr lang="en-US" sz="1600" b="1" dirty="0">
-                <a:solidFill>
-                  <a:srgbClr val="0D9488"/>
-                </a:solidFill>
-                <a:latin typeface="Trebuchet MS" pitchFamily="34" charset="0"/>
-                <a:ea typeface="Trebuchet MS" pitchFamily="34" charset="-122"/>
-                <a:cs typeface="Trebuchet MS" pitchFamily="34" charset="-120"/>
-              </a:rPr>
-              <a:t>·</a:t>
-            </a:r>
-            <a:endParaRPr lang="en-US" sz="1600" dirty="0"/>
-          </a:p>
-        </p:txBody>
-      </p:sp>
-      <p:sp>
-        <p:nvSpPr>
-          <p:cNvPr id="35" name="Shape 33"/>
-          <p:cNvSpPr/>
-          <p:nvPr/>
-        </p:nvSpPr>
-        <p:spPr>
-          <a:xfrm>
-            <a:off x="5230368" y="3364992"/>
-            <a:ext cx="1554480" cy="475488"/>
-          </a:xfrm>
-          <a:prstGeom prst="rect">
-            <a:avLst>
-              <a:gd name="adj" fmla="val 9615"/>
-            </a:avLst>
-          </a:prstGeom>
-          <a:solidFill>
-            <a:srgbClr val="FFFFFF"/>
-          </a:solidFill>
-          <a:ln w="12700">
-            <a:solidFill>
-              <a:srgbClr val="0D9488"/>
-            </a:solidFill>
-            <a:prstDash val="solid"/>
-          </a:ln>
-        </p:spPr>
-      </p:sp>
-      <p:sp>
-        <p:nvSpPr>
-          <p:cNvPr id="36" name="Text 34"/>
-          <p:cNvSpPr/>
-          <p:nvPr/>
-        </p:nvSpPr>
-        <p:spPr>
-          <a:xfrm>
-            <a:off x="5230368" y="3364992"/>
-            <a:ext cx="1554480" cy="475488"/>
-          </a:xfrm>
-          <a:prstGeom prst="rect">
-            <a:avLst/>
-          </a:prstGeom>
-          <a:noFill/>
-          <a:ln/>
-        </p:spPr>
-        <p:txBody>
-          <a:bodyPr wrap="square" lIns="0" tIns="0" rIns="0" bIns="0" rtlCol="0" anchor="ctr"/>
-          <a:lstStyle/>
-          <a:p>
-            <a:pPr algn="ctr" indent="0" marL="0">
-              <a:buNone/>
-            </a:pPr>
-            <a:r>
-              <a:rPr lang="en-US" sz="1400" b="1" dirty="0">
-                <a:solidFill>
-                  <a:srgbClr val="0D9488"/>
-                </a:solidFill>
-                <a:latin typeface="Trebuchet MS" pitchFamily="34" charset="0"/>
-                <a:ea typeface="Trebuchet MS" pitchFamily="34" charset="-122"/>
-                <a:cs typeface="Trebuchet MS" pitchFamily="34" charset="-120"/>
-              </a:rPr>
-              <a:t>a</a:t>
-            </a:r>
-            <a:endParaRPr lang="en-US" sz="1400" dirty="0"/>
-          </a:p>
-        </p:txBody>
-      </p:sp>
-      <p:sp>
-        <p:nvSpPr>
-          <p:cNvPr id="37" name="Text 35"/>
-          <p:cNvSpPr/>
-          <p:nvPr/>
-        </p:nvSpPr>
-        <p:spPr>
-          <a:xfrm>
-            <a:off x="6784848" y="3364992"/>
-            <a:ext cx="73152" cy="475488"/>
-          </a:xfrm>
-          <a:prstGeom prst="rect">
-            <a:avLst/>
-          </a:prstGeom>
-          <a:noFill/>
-          <a:ln/>
-        </p:spPr>
-        <p:txBody>
-          <a:bodyPr wrap="square" lIns="0" tIns="0" rIns="0" bIns="0" rtlCol="0" anchor="ctr"/>
-          <a:lstStyle/>
-          <a:p>
-            <a:pPr algn="ctr" indent="0" marL="0">
-              <a:buNone/>
-            </a:pPr>
-            <a:r>
-              <a:rPr lang="en-US" sz="1600" b="1" dirty="0">
-                <a:solidFill>
-                  <a:srgbClr val="0D9488"/>
-                </a:solidFill>
-                <a:latin typeface="Trebuchet MS" pitchFamily="34" charset="0"/>
-                <a:ea typeface="Trebuchet MS" pitchFamily="34" charset="-122"/>
-                <a:cs typeface="Trebuchet MS" pitchFamily="34" charset="-120"/>
-              </a:rPr>
-              <a:t>·</a:t>
-            </a:r>
-            <a:endParaRPr lang="en-US" sz="1600" dirty="0"/>
-          </a:p>
-        </p:txBody>
-      </p:sp>
-      <p:sp>
-        <p:nvSpPr>
-          <p:cNvPr id="38" name="Shape 36"/>
-          <p:cNvSpPr/>
-          <p:nvPr/>
-        </p:nvSpPr>
-        <p:spPr>
-          <a:xfrm>
-            <a:off x="6858000" y="3364992"/>
-            <a:ext cx="1554480" cy="475488"/>
-          </a:xfrm>
-          <a:prstGeom prst="rect">
-            <a:avLst>
-              <a:gd name="adj" fmla="val 9615"/>
-            </a:avLst>
-          </a:prstGeom>
-          <a:solidFill>
-            <a:srgbClr val="FFFFFF"/>
-          </a:solidFill>
-          <a:ln w="12700">
-            <a:solidFill>
-              <a:srgbClr val="0D9488"/>
-            </a:solidFill>
-            <a:prstDash val="solid"/>
-          </a:ln>
-        </p:spPr>
-      </p:sp>
-      <p:sp>
-        <p:nvSpPr>
-          <p:cNvPr id="39" name="Text 37"/>
-          <p:cNvSpPr/>
-          <p:nvPr/>
-        </p:nvSpPr>
-        <p:spPr>
-          <a:xfrm>
-            <a:off x="6858000" y="3364992"/>
-            <a:ext cx="1554480" cy="475488"/>
-          </a:xfrm>
-          <a:prstGeom prst="rect">
-            <a:avLst/>
-          </a:prstGeom>
-          <a:noFill/>
-          <a:ln/>
-        </p:spPr>
-        <p:txBody>
-          <a:bodyPr wrap="square" lIns="0" tIns="0" rIns="0" bIns="0" rtlCol="0" anchor="ctr"/>
-          <a:lstStyle/>
-          <a:p>
-            <a:pPr algn="ctr" indent="0" marL="0">
-              <a:buNone/>
-            </a:pPr>
-            <a:r>
-              <a:rPr lang="en-US" sz="1400" b="1" dirty="0">
-                <a:solidFill>
-                  <a:srgbClr val="0D9488"/>
-                </a:solidFill>
-                <a:latin typeface="Trebuchet MS" pitchFamily="34" charset="0"/>
-                <a:ea typeface="Trebuchet MS" pitchFamily="34" charset="-122"/>
-                <a:cs typeface="Trebuchet MS" pitchFamily="34" charset="-120"/>
-              </a:rPr>
-              <a:t>cy</a:t>
-            </a:r>
-            <a:endParaRPr lang="en-US" sz="1400" dirty="0"/>
-          </a:p>
-        </p:txBody>
-      </p:sp>
-      <p:sp>
-        <p:nvSpPr>
-          <p:cNvPr id="40" name="Shape 38"/>
-          <p:cNvSpPr/>
-          <p:nvPr/>
-        </p:nvSpPr>
-        <p:spPr>
-          <a:xfrm>
-            <a:off x="365760" y="4096512"/>
-            <a:ext cx="1371600" cy="804672"/>
+            <a:off x="1874520" y="4096512"/>
+            <a:ext cx="6903720" cy="804672"/>
           </a:xfrm>
           <a:prstGeom prst="rect">
             <a:avLst>
@@ -26442,85 +25380,19 @@
             </a:avLst>
           </a:prstGeom>
           <a:solidFill>
-            <a:srgbClr val="E2E8F0"/>
+            <a:srgbClr val="F8FAFC"/>
           </a:solidFill>
           <a:ln w="12700">
             <a:solidFill>
               <a:srgbClr val="E2E8F0"/>
             </a:solidFill>
-            <a:prstDash val="solid"/>
-          </a:ln>
-        </p:spPr>
-      </p:sp>
-      <p:sp>
-        <p:nvSpPr>
-          <p:cNvPr id="41" name="Text 39"/>
-          <p:cNvSpPr/>
-          <p:nvPr/>
-        </p:nvSpPr>
-        <p:spPr>
-          <a:xfrm>
-            <a:off x="365760" y="4096512"/>
-            <a:ext cx="1371600" cy="804672"/>
-          </a:xfrm>
-          <a:prstGeom prst="rect">
-            <a:avLst/>
-          </a:prstGeom>
-          <a:noFill/>
-          <a:ln/>
-        </p:spPr>
-        <p:txBody>
-          <a:bodyPr wrap="square" lIns="0" tIns="0" rIns="0" bIns="0" rtlCol="0" anchor="ctr"/>
-          <a:lstStyle/>
-          <a:p>
-            <a:pPr algn="ctr" indent="0" marL="0">
-              <a:buNone/>
-            </a:pPr>
-            <a:r>
-              <a:rPr lang="en-US" sz="1100" b="1" dirty="0">
-                <a:solidFill>
-                  <a:srgbClr val="475569"/>
-                </a:solidFill>
-                <a:latin typeface="Trebuchet MS" pitchFamily="34" charset="0"/>
-                <a:ea typeface="Trebuchet MS" pitchFamily="34" charset="-122"/>
-                <a:cs typeface="Trebuchet MS" pitchFamily="34" charset="-120"/>
-              </a:rPr>
-              <a:t>Phonemes</a:t>
-            </a:r>
-            <a:endParaRPr lang="en-US" sz="1100" dirty="0"/>
-          </a:p>
-        </p:txBody>
-      </p:sp>
-      <p:sp>
-        <p:nvSpPr>
-          <p:cNvPr id="42" name="Shape 40"/>
-          <p:cNvSpPr/>
-          <p:nvPr/>
-        </p:nvSpPr>
-        <p:spPr>
-          <a:xfrm>
-            <a:off x="1874520" y="4096512"/>
-            <a:ext cx="6903720" cy="804672"/>
-          </a:xfrm>
-          <a:prstGeom prst="rect">
-            <a:avLst>
-              <a:gd name="adj" fmla="val 6818"/>
-            </a:avLst>
-          </a:prstGeom>
-          <a:solidFill>
-            <a:srgbClr val="F8FAFC"/>
-          </a:solidFill>
-          <a:ln w="12700">
-            <a:solidFill>
-              <a:srgbClr val="E2E8F0"/>
-            </a:solidFill>
             <a:prstDash val="dash"/>
           </a:ln>
         </p:spPr>
       </p:sp>
       <p:sp>
         <p:nvSpPr>
-          <p:cNvPr id="43" name="Text 41"/>
+          <p:cNvPr id="33" name="Text 31"/>
           <p:cNvSpPr/>
           <p:nvPr/>
         </p:nvSpPr>
@@ -26982,7 +25854,7 @@
                 <a:ea typeface="Trebuchet MS" pitchFamily="34" charset="-122"/>
                 <a:cs typeface="Trebuchet MS" pitchFamily="34" charset="-120"/>
               </a:rPr>
-              <a:t>conspiracy</a:t>
+              <a:t>expire</a:t>
             </a:r>
             <a:endParaRPr lang="en-US" sz="2800" dirty="0"/>
           </a:p>
@@ -27062,7 +25934,7 @@
         </p:nvSpPr>
         <p:spPr>
           <a:xfrm>
-            <a:off x="2221992" y="2258568"/>
+            <a:off x="2938272" y="2258568"/>
             <a:ext cx="1828800" cy="292608"/>
           </a:xfrm>
           <a:prstGeom prst="rect">
@@ -27096,7 +25968,7 @@
         </p:nvSpPr>
         <p:spPr>
           <a:xfrm>
-            <a:off x="2221992" y="2258568"/>
+            <a:off x="2938272" y="2258568"/>
             <a:ext cx="1828800" cy="292608"/>
           </a:xfrm>
           <a:prstGeom prst="rect">
@@ -27121,7 +25993,7 @@
                 <a:ea typeface="Trebuchet MS" pitchFamily="34" charset="-122"/>
                 <a:cs typeface="Trebuchet MS" pitchFamily="34" charset="-120"/>
               </a:rPr>
-              <a:t>con</a:t>
+              <a:t>ex</a:t>
             </a:r>
             <a:endParaRPr lang="en-US" sz="1300" dirty="0"/>
           </a:p>
@@ -27135,7 +26007,7 @@
         </p:nvSpPr>
         <p:spPr>
           <a:xfrm>
-            <a:off x="2221992" y="2569464"/>
+            <a:off x="2938272" y="2569464"/>
             <a:ext cx="1828800" cy="201168"/>
           </a:xfrm>
           <a:prstGeom prst="rect">
@@ -27160,7 +26032,7 @@
                 <a:ea typeface="Calibri" pitchFamily="34" charset="-122"/>
                 <a:cs typeface="Calibri" pitchFamily="34" charset="-120"/>
               </a:rPr>
-              <a:t>together, with</a:t>
+              <a:t>out, away</a:t>
             </a:r>
             <a:endParaRPr lang="en-US" sz="850" dirty="0"/>
           </a:p>
@@ -27174,7 +26046,7 @@
         </p:nvSpPr>
         <p:spPr>
           <a:xfrm>
-            <a:off x="4370832" y="2258568"/>
+            <a:off x="5803392" y="2258568"/>
             <a:ext cx="1828800" cy="292608"/>
           </a:xfrm>
           <a:prstGeom prst="rect">
@@ -27208,7 +26080,7 @@
         </p:nvSpPr>
         <p:spPr>
           <a:xfrm>
-            <a:off x="4370832" y="2258568"/>
+            <a:off x="5803392" y="2258568"/>
             <a:ext cx="1828800" cy="292608"/>
           </a:xfrm>
           <a:prstGeom prst="rect">
@@ -27247,7 +26119,7 @@
         </p:nvSpPr>
         <p:spPr>
           <a:xfrm>
-            <a:off x="4370832" y="2569464"/>
+            <a:off x="5803392" y="2569464"/>
             <a:ext cx="1828800" cy="201168"/>
           </a:xfrm>
           <a:prstGeom prst="rect">
@@ -27272,7 +26144,7 @@
                 <a:ea typeface="Calibri" pitchFamily="34" charset="-122"/>
                 <a:cs typeface="Calibri" pitchFamily="34" charset="-120"/>
               </a:rPr>
-              <a:t>breathe</a:t>
+              <a:t>breathe, breath</a:t>
             </a:r>
             <a:endParaRPr lang="en-US" sz="850" dirty="0"/>
           </a:p>
@@ -27286,30 +26158,23 @@
         </p:nvSpPr>
         <p:spPr>
           <a:xfrm>
-            <a:off x="6519672" y="2258568"/>
-            <a:ext cx="1828800" cy="292608"/>
+            <a:off x="365760" y="3273552"/>
+            <a:ext cx="1371600" cy="658368"/>
           </a:xfrm>
           <a:prstGeom prst="rect">
             <a:avLst>
-              <a:gd name="adj" fmla="val 25000"/>
+              <a:gd name="adj" fmla="val 8333"/>
             </a:avLst>
           </a:prstGeom>
           <a:solidFill>
-            <a:srgbClr val="FCE7F3"/>
-          </a:solidFill>
-          <a:ln w="19050">
-            <a:solidFill>
-              <a:srgbClr val="DB2777"/>
-            </a:solidFill>
-            <a:prstDash val="solid"/>
-          </a:ln>
-          <a:effectLst>
-            <a:outerShdw sx="100000" sy="100000" kx="0" ky="0" algn="bl" rotWithShape="0" blurRad="101600" dist="38100" dir="8100000">
-              <a:srgbClr val="000000">
-                <a:alpha val="12000"/>
-              </a:srgbClr>
-            </a:outerShdw>
-          </a:effectLst>
+            <a:srgbClr val="E2E8F0"/>
+          </a:solidFill>
+          <a:ln w="12700">
+            <a:solidFill>
+              <a:srgbClr val="E2E8F0"/>
+            </a:solidFill>
+            <a:prstDash val="solid"/>
+          </a:ln>
         </p:spPr>
       </p:sp>
       <p:sp>
@@ -27320,8 +26185,8 @@
         </p:nvSpPr>
         <p:spPr>
           <a:xfrm>
-            <a:off x="6519672" y="2258568"/>
-            <a:ext cx="1828800" cy="292608"/>
+            <a:off x="365760" y="3273552"/>
+            <a:ext cx="1371600" cy="658368"/>
           </a:xfrm>
           <a:prstGeom prst="rect">
             <a:avLst/>
@@ -27337,108 +26202,30 @@
               <a:buNone/>
             </a:pPr>
             <a:r>
-              <a:rPr lang="en-US" sz="1300" b="1" dirty="0">
-                <a:solidFill>
-                  <a:srgbClr val="9D174D"/>
+              <a:rPr lang="en-US" sz="1100" b="1" dirty="0">
+                <a:solidFill>
+                  <a:srgbClr val="475569"/>
                 </a:solidFill>
                 <a:latin typeface="Trebuchet MS" pitchFamily="34" charset="0"/>
                 <a:ea typeface="Trebuchet MS" pitchFamily="34" charset="-122"/>
                 <a:cs typeface="Trebuchet MS" pitchFamily="34" charset="-120"/>
               </a:rPr>
-              <a:t>acy</a:t>
-            </a:r>
-            <a:endParaRPr lang="en-US" sz="1300" dirty="0"/>
-          </a:p>
-        </p:txBody>
-      </p:sp>
-      <p:sp>
-        <p:nvSpPr>
-          <p:cNvPr id="24" name="Text 22"/>
-          <p:cNvSpPr/>
-          <p:nvPr/>
-        </p:nvSpPr>
-        <p:spPr>
-          <a:xfrm>
-            <a:off x="6519672" y="2569464"/>
-            <a:ext cx="1828800" cy="201168"/>
-          </a:xfrm>
-          <a:prstGeom prst="rect">
-            <a:avLst/>
-          </a:prstGeom>
-          <a:noFill/>
-          <a:ln/>
-        </p:spPr>
-        <p:txBody>
-          <a:bodyPr wrap="square" lIns="0" tIns="0" rIns="0" bIns="0" rtlCol="0" anchor="t"/>
-          <a:lstStyle/>
-          <a:p>
-            <a:pPr algn="ctr" indent="0" marL="0">
-              <a:buNone/>
-            </a:pPr>
-            <a:r>
-              <a:rPr lang="en-US" sz="850" dirty="0">
-                <a:solidFill>
-                  <a:srgbClr val="475569"/>
-                </a:solidFill>
-                <a:latin typeface="Calibri" pitchFamily="34" charset="0"/>
-                <a:ea typeface="Calibri" pitchFamily="34" charset="-122"/>
-                <a:cs typeface="Calibri" pitchFamily="34" charset="-120"/>
-              </a:rPr>
-              <a:t>state or condition of</a:t>
-            </a:r>
-            <a:endParaRPr lang="en-US" sz="850" dirty="0"/>
-          </a:p>
-        </p:txBody>
-      </p:sp>
-      <p:sp>
-        <p:nvSpPr>
-          <p:cNvPr id="25" name="Text 23"/>
-          <p:cNvSpPr/>
-          <p:nvPr/>
-        </p:nvSpPr>
-        <p:spPr>
-          <a:xfrm>
-            <a:off x="6519672" y="2752344"/>
-            <a:ext cx="1828800" cy="182880"/>
-          </a:xfrm>
-          <a:prstGeom prst="rect">
-            <a:avLst/>
-          </a:prstGeom>
-          <a:noFill/>
-          <a:ln/>
-        </p:spPr>
-        <p:txBody>
-          <a:bodyPr wrap="square" lIns="0" tIns="0" rIns="0" bIns="0" rtlCol="0" anchor="t"/>
-          <a:lstStyle/>
-          <a:p>
-            <a:pPr algn="ctr" indent="0" marL="0">
-              <a:buNone/>
-            </a:pPr>
-            <a:r>
-              <a:rPr lang="en-US" sz="700" i="1" dirty="0">
-                <a:solidFill>
-                  <a:srgbClr val="94A3B8"/>
-                </a:solidFill>
-                <a:latin typeface="Calibri" pitchFamily="34" charset="0"/>
-                <a:ea typeface="Calibri" pitchFamily="34" charset="-122"/>
-                <a:cs typeface="Calibri" pitchFamily="34" charset="-120"/>
-              </a:rPr>
-              <a:t>'e' dropped before vowel suffix</a:t>
-            </a:r>
-            <a:endParaRPr lang="en-US" sz="700" dirty="0"/>
-          </a:p>
-        </p:txBody>
-      </p:sp>
-      <p:sp>
-        <p:nvSpPr>
-          <p:cNvPr id="26" name="Shape 24"/>
-          <p:cNvSpPr/>
-          <p:nvPr/>
-        </p:nvSpPr>
-        <p:spPr>
-          <a:xfrm>
-            <a:off x="365760" y="3273552"/>
-            <a:ext cx="1371600" cy="658368"/>
+              <a:t>Syllables</a:t>
+            </a:r>
+            <a:endParaRPr lang="en-US" sz="1100" dirty="0"/>
+          </a:p>
+        </p:txBody>
+      </p:sp>
+      <p:sp>
+        <p:nvSpPr>
+          <p:cNvPr id="24" name="Shape 22"/>
+          <p:cNvSpPr/>
+          <p:nvPr/>
+        </p:nvSpPr>
+        <p:spPr>
+          <a:xfrm>
+            <a:off x="1874520" y="3273552"/>
+            <a:ext cx="6903720" cy="658368"/>
           </a:xfrm>
           <a:prstGeom prst="rect">
             <a:avLst>
@@ -27446,26 +26233,53 @@
             </a:avLst>
           </a:prstGeom>
           <a:solidFill>
-            <a:srgbClr val="E2E8F0"/>
-          </a:solidFill>
-          <a:ln w="12700">
-            <a:solidFill>
-              <a:srgbClr val="E2E8F0"/>
-            </a:solidFill>
-            <a:prstDash val="solid"/>
-          </a:ln>
-        </p:spPr>
-      </p:sp>
-      <p:sp>
-        <p:nvSpPr>
-          <p:cNvPr id="27" name="Text 25"/>
-          <p:cNvSpPr/>
-          <p:nvPr/>
-        </p:nvSpPr>
-        <p:spPr>
-          <a:xfrm>
-            <a:off x="365760" y="3273552"/>
-            <a:ext cx="1371600" cy="658368"/>
+            <a:srgbClr val="CCFBF1"/>
+          </a:solidFill>
+          <a:ln w="12700">
+            <a:solidFill>
+              <a:srgbClr val="0D9488"/>
+            </a:solidFill>
+            <a:prstDash val="solid"/>
+          </a:ln>
+        </p:spPr>
+      </p:sp>
+      <p:sp>
+        <p:nvSpPr>
+          <p:cNvPr id="25" name="Shape 23"/>
+          <p:cNvSpPr/>
+          <p:nvPr/>
+        </p:nvSpPr>
+        <p:spPr>
+          <a:xfrm>
+            <a:off x="2999232" y="3364992"/>
+            <a:ext cx="1645920" cy="475488"/>
+          </a:xfrm>
+          <a:prstGeom prst="rect">
+            <a:avLst>
+              <a:gd name="adj" fmla="val 9615"/>
+            </a:avLst>
+          </a:prstGeom>
+          <a:solidFill>
+            <a:srgbClr val="FFFFFF"/>
+          </a:solidFill>
+          <a:ln w="12700">
+            <a:solidFill>
+              <a:srgbClr val="0D9488"/>
+            </a:solidFill>
+            <a:prstDash val="solid"/>
+          </a:ln>
+        </p:spPr>
+      </p:sp>
+      <p:sp>
+        <p:nvSpPr>
+          <p:cNvPr id="26" name="Text 24"/>
+          <p:cNvSpPr/>
+          <p:nvPr/>
+        </p:nvSpPr>
+        <p:spPr>
+          <a:xfrm>
+            <a:off x="2999232" y="3364992"/>
+            <a:ext cx="1645920" cy="475488"/>
           </a:xfrm>
           <a:prstGeom prst="rect">
             <a:avLst/>
@@ -27481,15 +26295,186 @@
               <a:buNone/>
             </a:pPr>
             <a:r>
-              <a:rPr lang="en-US" sz="1100" b="1" dirty="0">
-                <a:solidFill>
-                  <a:srgbClr val="475569"/>
+              <a:rPr lang="en-US" sz="1400" b="1" dirty="0">
+                <a:solidFill>
+                  <a:srgbClr val="0D9488"/>
                 </a:solidFill>
                 <a:latin typeface="Trebuchet MS" pitchFamily="34" charset="0"/>
                 <a:ea typeface="Trebuchet MS" pitchFamily="34" charset="-122"/>
                 <a:cs typeface="Trebuchet MS" pitchFamily="34" charset="-120"/>
               </a:rPr>
-              <a:t>Syllables</a:t>
+              <a:t>ex</a:t>
+            </a:r>
+            <a:endParaRPr lang="en-US" sz="1400" dirty="0"/>
+          </a:p>
+        </p:txBody>
+      </p:sp>
+      <p:sp>
+        <p:nvSpPr>
+          <p:cNvPr id="27" name="Text 25"/>
+          <p:cNvSpPr/>
+          <p:nvPr/>
+        </p:nvSpPr>
+        <p:spPr>
+          <a:xfrm>
+            <a:off x="4645152" y="3364992"/>
+            <a:ext cx="1097280" cy="475488"/>
+          </a:xfrm>
+          <a:prstGeom prst="rect">
+            <a:avLst/>
+          </a:prstGeom>
+          <a:noFill/>
+          <a:ln/>
+        </p:spPr>
+        <p:txBody>
+          <a:bodyPr wrap="square" lIns="0" tIns="0" rIns="0" bIns="0" rtlCol="0" anchor="ctr"/>
+          <a:lstStyle/>
+          <a:p>
+            <a:pPr algn="ctr" indent="0" marL="0">
+              <a:buNone/>
+            </a:pPr>
+            <a:r>
+              <a:rPr lang="en-US" sz="1600" b="1" dirty="0">
+                <a:solidFill>
+                  <a:srgbClr val="0D9488"/>
+                </a:solidFill>
+                <a:latin typeface="Trebuchet MS" pitchFamily="34" charset="0"/>
+                <a:ea typeface="Trebuchet MS" pitchFamily="34" charset="-122"/>
+                <a:cs typeface="Trebuchet MS" pitchFamily="34" charset="-120"/>
+              </a:rPr>
+              <a:t>·</a:t>
+            </a:r>
+            <a:endParaRPr lang="en-US" sz="1600" dirty="0"/>
+          </a:p>
+        </p:txBody>
+      </p:sp>
+      <p:sp>
+        <p:nvSpPr>
+          <p:cNvPr id="28" name="Shape 26"/>
+          <p:cNvSpPr/>
+          <p:nvPr/>
+        </p:nvSpPr>
+        <p:spPr>
+          <a:xfrm>
+            <a:off x="5742432" y="3364992"/>
+            <a:ext cx="1645920" cy="475488"/>
+          </a:xfrm>
+          <a:prstGeom prst="rect">
+            <a:avLst>
+              <a:gd name="adj" fmla="val 9615"/>
+            </a:avLst>
+          </a:prstGeom>
+          <a:solidFill>
+            <a:srgbClr val="FFFFFF"/>
+          </a:solidFill>
+          <a:ln w="12700">
+            <a:solidFill>
+              <a:srgbClr val="0D9488"/>
+            </a:solidFill>
+            <a:prstDash val="solid"/>
+          </a:ln>
+        </p:spPr>
+      </p:sp>
+      <p:sp>
+        <p:nvSpPr>
+          <p:cNvPr id="29" name="Text 27"/>
+          <p:cNvSpPr/>
+          <p:nvPr/>
+        </p:nvSpPr>
+        <p:spPr>
+          <a:xfrm>
+            <a:off x="5742432" y="3364992"/>
+            <a:ext cx="1645920" cy="475488"/>
+          </a:xfrm>
+          <a:prstGeom prst="rect">
+            <a:avLst/>
+          </a:prstGeom>
+          <a:noFill/>
+          <a:ln/>
+        </p:spPr>
+        <p:txBody>
+          <a:bodyPr wrap="square" lIns="0" tIns="0" rIns="0" bIns="0" rtlCol="0" anchor="ctr"/>
+          <a:lstStyle/>
+          <a:p>
+            <a:pPr algn="ctr" indent="0" marL="0">
+              <a:buNone/>
+            </a:pPr>
+            <a:r>
+              <a:rPr lang="en-US" sz="1400" b="1" dirty="0">
+                <a:solidFill>
+                  <a:srgbClr val="0D9488"/>
+                </a:solidFill>
+                <a:latin typeface="Trebuchet MS" pitchFamily="34" charset="0"/>
+                <a:ea typeface="Trebuchet MS" pitchFamily="34" charset="-122"/>
+                <a:cs typeface="Trebuchet MS" pitchFamily="34" charset="-120"/>
+              </a:rPr>
+              <a:t>pire</a:t>
+            </a:r>
+            <a:endParaRPr lang="en-US" sz="1400" dirty="0"/>
+          </a:p>
+        </p:txBody>
+      </p:sp>
+      <p:sp>
+        <p:nvSpPr>
+          <p:cNvPr id="30" name="Shape 28"/>
+          <p:cNvSpPr/>
+          <p:nvPr/>
+        </p:nvSpPr>
+        <p:spPr>
+          <a:xfrm>
+            <a:off x="365760" y="4096512"/>
+            <a:ext cx="1371600" cy="804672"/>
+          </a:xfrm>
+          <a:prstGeom prst="rect">
+            <a:avLst>
+              <a:gd name="adj" fmla="val 6818"/>
+            </a:avLst>
+          </a:prstGeom>
+          <a:solidFill>
+            <a:srgbClr val="E2E8F0"/>
+          </a:solidFill>
+          <a:ln w="12700">
+            <a:solidFill>
+              <a:srgbClr val="E2E8F0"/>
+            </a:solidFill>
+            <a:prstDash val="solid"/>
+          </a:ln>
+        </p:spPr>
+      </p:sp>
+      <p:sp>
+        <p:nvSpPr>
+          <p:cNvPr id="31" name="Text 29"/>
+          <p:cNvSpPr/>
+          <p:nvPr/>
+        </p:nvSpPr>
+        <p:spPr>
+          <a:xfrm>
+            <a:off x="365760" y="4096512"/>
+            <a:ext cx="1371600" cy="804672"/>
+          </a:xfrm>
+          <a:prstGeom prst="rect">
+            <a:avLst/>
+          </a:prstGeom>
+          <a:noFill/>
+          <a:ln/>
+        </p:spPr>
+        <p:txBody>
+          <a:bodyPr wrap="square" lIns="0" tIns="0" rIns="0" bIns="0" rtlCol="0" anchor="ctr"/>
+          <a:lstStyle/>
+          <a:p>
+            <a:pPr algn="ctr" indent="0" marL="0">
+              <a:buNone/>
+            </a:pPr>
+            <a:r>
+              <a:rPr lang="en-US" sz="1100" b="1" dirty="0">
+                <a:solidFill>
+                  <a:srgbClr val="475569"/>
+                </a:solidFill>
+                <a:latin typeface="Trebuchet MS" pitchFamily="34" charset="0"/>
+                <a:ea typeface="Trebuchet MS" pitchFamily="34" charset="-122"/>
+                <a:cs typeface="Trebuchet MS" pitchFamily="34" charset="-120"/>
+              </a:rPr>
+              <a:t>Phonemes</a:t>
             </a:r>
             <a:endParaRPr lang="en-US" sz="1100" dirty="0"/>
           </a:p>
@@ -27497,13 +26482,13 @@
       </p:sp>
       <p:sp>
         <p:nvSpPr>
-          <p:cNvPr id="28" name="Shape 26"/>
-          <p:cNvSpPr/>
-          <p:nvPr/>
-        </p:nvSpPr>
-        <p:spPr>
-          <a:xfrm>
-            <a:off x="1874520" y="3273552"/>
+          <p:cNvPr id="32" name="Shape 30"/>
+          <p:cNvSpPr/>
+          <p:nvPr/>
+        </p:nvSpPr>
+        <p:spPr>
+          <a:xfrm>
+            <a:off x="1874520" y="4096512"/>
             <a:ext cx="6903720" cy="658368"/>
           </a:xfrm>
           <a:prstGeom prst="rect">
@@ -27512,30 +26497,30 @@
             </a:avLst>
           </a:prstGeom>
           <a:solidFill>
-            <a:srgbClr val="CCFBF1"/>
-          </a:solidFill>
-          <a:ln w="12700">
-            <a:solidFill>
-              <a:srgbClr val="0D9488"/>
-            </a:solidFill>
-            <a:prstDash val="solid"/>
-          </a:ln>
-        </p:spPr>
-      </p:sp>
-      <p:sp>
-        <p:nvSpPr>
-          <p:cNvPr id="29" name="Shape 27"/>
-          <p:cNvSpPr/>
-          <p:nvPr/>
-        </p:nvSpPr>
-        <p:spPr>
-          <a:xfrm>
-            <a:off x="1975104" y="3364992"/>
-            <a:ext cx="1554480" cy="475488"/>
+            <a:srgbClr val="FCE7F3"/>
+          </a:solidFill>
+          <a:ln w="12700">
+            <a:solidFill>
+              <a:srgbClr val="DB2777"/>
+            </a:solidFill>
+            <a:prstDash val="solid"/>
+          </a:ln>
+        </p:spPr>
+      </p:sp>
+      <p:sp>
+        <p:nvSpPr>
+          <p:cNvPr id="33" name="Shape 31"/>
+          <p:cNvSpPr/>
+          <p:nvPr/>
+        </p:nvSpPr>
+        <p:spPr>
+          <a:xfrm>
+            <a:off x="2427732" y="4169664"/>
+            <a:ext cx="685800" cy="475488"/>
           </a:xfrm>
           <a:prstGeom prst="rect">
             <a:avLst>
-              <a:gd name="adj" fmla="val 9615"/>
+              <a:gd name="adj" fmla="val 7692"/>
             </a:avLst>
           </a:prstGeom>
           <a:solidFill>
@@ -27543,22 +26528,22 @@
           </a:solidFill>
           <a:ln w="12700">
             <a:solidFill>
-              <a:srgbClr val="0D9488"/>
-            </a:solidFill>
-            <a:prstDash val="solid"/>
-          </a:ln>
-        </p:spPr>
-      </p:sp>
-      <p:sp>
-        <p:nvSpPr>
-          <p:cNvPr id="30" name="Text 28"/>
-          <p:cNvSpPr/>
-          <p:nvPr/>
-        </p:nvSpPr>
-        <p:spPr>
-          <a:xfrm>
-            <a:off x="1975104" y="3364992"/>
-            <a:ext cx="1554480" cy="475488"/>
+              <a:srgbClr val="DB2777"/>
+            </a:solidFill>
+            <a:prstDash val="solid"/>
+          </a:ln>
+        </p:spPr>
+      </p:sp>
+      <p:sp>
+        <p:nvSpPr>
+          <p:cNvPr id="34" name="Text 32"/>
+          <p:cNvSpPr/>
+          <p:nvPr/>
+        </p:nvSpPr>
+        <p:spPr>
+          <a:xfrm>
+            <a:off x="2427732" y="4169664"/>
+            <a:ext cx="685800" cy="475488"/>
           </a:xfrm>
           <a:prstGeom prst="rect">
             <a:avLst/>
@@ -27574,30 +26559,57 @@
               <a:buNone/>
             </a:pPr>
             <a:r>
-              <a:rPr lang="en-US" sz="1400" b="1" dirty="0">
-                <a:solidFill>
-                  <a:srgbClr val="0D9488"/>
+              <a:rPr lang="en-US" sz="900" b="1" dirty="0">
+                <a:solidFill>
+                  <a:srgbClr val="9D174D"/>
                 </a:solidFill>
                 <a:latin typeface="Trebuchet MS" pitchFamily="34" charset="0"/>
                 <a:ea typeface="Trebuchet MS" pitchFamily="34" charset="-122"/>
                 <a:cs typeface="Trebuchet MS" pitchFamily="34" charset="-120"/>
               </a:rPr>
-              <a:t>con</a:t>
-            </a:r>
-            <a:endParaRPr lang="en-US" sz="1400" dirty="0"/>
-          </a:p>
-        </p:txBody>
-      </p:sp>
-      <p:sp>
-        <p:nvSpPr>
-          <p:cNvPr id="31" name="Text 29"/>
-          <p:cNvSpPr/>
-          <p:nvPr/>
-        </p:nvSpPr>
-        <p:spPr>
-          <a:xfrm>
-            <a:off x="3529584" y="3364992"/>
-            <a:ext cx="73152" cy="475488"/>
+              <a:t>e</a:t>
+            </a:r>
+            <a:endParaRPr lang="en-US" sz="900" dirty="0"/>
+          </a:p>
+        </p:txBody>
+      </p:sp>
+      <p:sp>
+        <p:nvSpPr>
+          <p:cNvPr id="35" name="Shape 33"/>
+          <p:cNvSpPr/>
+          <p:nvPr/>
+        </p:nvSpPr>
+        <p:spPr>
+          <a:xfrm>
+            <a:off x="3639312" y="4169664"/>
+            <a:ext cx="685800" cy="475488"/>
+          </a:xfrm>
+          <a:prstGeom prst="rect">
+            <a:avLst>
+              <a:gd name="adj" fmla="val 7692"/>
+            </a:avLst>
+          </a:prstGeom>
+          <a:solidFill>
+            <a:srgbClr val="FFFFFF"/>
+          </a:solidFill>
+          <a:ln w="12700">
+            <a:solidFill>
+              <a:srgbClr val="DB2777"/>
+            </a:solidFill>
+            <a:prstDash val="solid"/>
+          </a:ln>
+        </p:spPr>
+      </p:sp>
+      <p:sp>
+        <p:nvSpPr>
+          <p:cNvPr id="36" name="Text 34"/>
+          <p:cNvSpPr/>
+          <p:nvPr/>
+        </p:nvSpPr>
+        <p:spPr>
+          <a:xfrm>
+            <a:off x="3639312" y="4169664"/>
+            <a:ext cx="685800" cy="475488"/>
           </a:xfrm>
           <a:prstGeom prst="rect">
             <a:avLst/>
@@ -27613,34 +26625,34 @@
               <a:buNone/>
             </a:pPr>
             <a:r>
-              <a:rPr lang="en-US" sz="1600" b="1" dirty="0">
-                <a:solidFill>
-                  <a:srgbClr val="0D9488"/>
+              <a:rPr lang="en-US" sz="900" b="1" dirty="0">
+                <a:solidFill>
+                  <a:srgbClr val="9D174D"/>
                 </a:solidFill>
                 <a:latin typeface="Trebuchet MS" pitchFamily="34" charset="0"/>
                 <a:ea typeface="Trebuchet MS" pitchFamily="34" charset="-122"/>
                 <a:cs typeface="Trebuchet MS" pitchFamily="34" charset="-120"/>
               </a:rPr>
-              <a:t>·</a:t>
-            </a:r>
-            <a:endParaRPr lang="en-US" sz="1600" dirty="0"/>
-          </a:p>
-        </p:txBody>
-      </p:sp>
-      <p:sp>
-        <p:nvSpPr>
-          <p:cNvPr id="32" name="Shape 30"/>
-          <p:cNvSpPr/>
-          <p:nvPr/>
-        </p:nvSpPr>
-        <p:spPr>
-          <a:xfrm>
-            <a:off x="3602736" y="3364992"/>
-            <a:ext cx="1554480" cy="475488"/>
+              <a:t>x</a:t>
+            </a:r>
+            <a:endParaRPr lang="en-US" sz="900" dirty="0"/>
+          </a:p>
+        </p:txBody>
+      </p:sp>
+      <p:sp>
+        <p:nvSpPr>
+          <p:cNvPr id="37" name="Shape 35"/>
+          <p:cNvSpPr/>
+          <p:nvPr/>
+        </p:nvSpPr>
+        <p:spPr>
+          <a:xfrm>
+            <a:off x="4850892" y="4169664"/>
+            <a:ext cx="685800" cy="475488"/>
           </a:xfrm>
           <a:prstGeom prst="rect">
             <a:avLst>
-              <a:gd name="adj" fmla="val 9615"/>
+              <a:gd name="adj" fmla="val 7692"/>
             </a:avLst>
           </a:prstGeom>
           <a:solidFill>
@@ -27648,22 +26660,22 @@
           </a:solidFill>
           <a:ln w="12700">
             <a:solidFill>
-              <a:srgbClr val="0D9488"/>
-            </a:solidFill>
-            <a:prstDash val="solid"/>
-          </a:ln>
-        </p:spPr>
-      </p:sp>
-      <p:sp>
-        <p:nvSpPr>
-          <p:cNvPr id="33" name="Text 31"/>
-          <p:cNvSpPr/>
-          <p:nvPr/>
-        </p:nvSpPr>
-        <p:spPr>
-          <a:xfrm>
-            <a:off x="3602736" y="3364992"/>
-            <a:ext cx="1554480" cy="475488"/>
+              <a:srgbClr val="DB2777"/>
+            </a:solidFill>
+            <a:prstDash val="solid"/>
+          </a:ln>
+        </p:spPr>
+      </p:sp>
+      <p:sp>
+        <p:nvSpPr>
+          <p:cNvPr id="38" name="Text 36"/>
+          <p:cNvSpPr/>
+          <p:nvPr/>
+        </p:nvSpPr>
+        <p:spPr>
+          <a:xfrm>
+            <a:off x="4850892" y="4169664"/>
+            <a:ext cx="685800" cy="475488"/>
           </a:xfrm>
           <a:prstGeom prst="rect">
             <a:avLst/>
@@ -27679,30 +26691,57 @@
               <a:buNone/>
             </a:pPr>
             <a:r>
-              <a:rPr lang="en-US" sz="1400" b="1" dirty="0">
-                <a:solidFill>
-                  <a:srgbClr val="0D9488"/>
+              <a:rPr lang="en-US" sz="900" b="1" dirty="0">
+                <a:solidFill>
+                  <a:srgbClr val="9D174D"/>
                 </a:solidFill>
                 <a:latin typeface="Trebuchet MS" pitchFamily="34" charset="0"/>
                 <a:ea typeface="Trebuchet MS" pitchFamily="34" charset="-122"/>
                 <a:cs typeface="Trebuchet MS" pitchFamily="34" charset="-120"/>
               </a:rPr>
-              <a:t>spir</a:t>
-            </a:r>
-            <a:endParaRPr lang="en-US" sz="1400" dirty="0"/>
-          </a:p>
-        </p:txBody>
-      </p:sp>
-      <p:sp>
-        <p:nvSpPr>
-          <p:cNvPr id="34" name="Text 32"/>
-          <p:cNvSpPr/>
-          <p:nvPr/>
-        </p:nvSpPr>
-        <p:spPr>
-          <a:xfrm>
-            <a:off x="5157216" y="3364992"/>
-            <a:ext cx="73152" cy="475488"/>
+              <a:t>p</a:t>
+            </a:r>
+            <a:endParaRPr lang="en-US" sz="900" dirty="0"/>
+          </a:p>
+        </p:txBody>
+      </p:sp>
+      <p:sp>
+        <p:nvSpPr>
+          <p:cNvPr id="39" name="Shape 37"/>
+          <p:cNvSpPr/>
+          <p:nvPr/>
+        </p:nvSpPr>
+        <p:spPr>
+          <a:xfrm>
+            <a:off x="6062472" y="4169664"/>
+            <a:ext cx="685800" cy="475488"/>
+          </a:xfrm>
+          <a:prstGeom prst="rect">
+            <a:avLst>
+              <a:gd name="adj" fmla="val 7692"/>
+            </a:avLst>
+          </a:prstGeom>
+          <a:solidFill>
+            <a:srgbClr val="FFFFFF"/>
+          </a:solidFill>
+          <a:ln w="12700">
+            <a:solidFill>
+              <a:srgbClr val="DB2777"/>
+            </a:solidFill>
+            <a:prstDash val="solid"/>
+          </a:ln>
+        </p:spPr>
+      </p:sp>
+      <p:sp>
+        <p:nvSpPr>
+          <p:cNvPr id="40" name="Text 38"/>
+          <p:cNvSpPr/>
+          <p:nvPr/>
+        </p:nvSpPr>
+        <p:spPr>
+          <a:xfrm>
+            <a:off x="6062472" y="4169664"/>
+            <a:ext cx="685800" cy="475488"/>
           </a:xfrm>
           <a:prstGeom prst="rect">
             <a:avLst/>
@@ -27718,34 +26757,34 @@
               <a:buNone/>
             </a:pPr>
             <a:r>
-              <a:rPr lang="en-US" sz="1600" b="1" dirty="0">
-                <a:solidFill>
-                  <a:srgbClr val="0D9488"/>
+              <a:rPr lang="en-US" sz="900" b="1" dirty="0">
+                <a:solidFill>
+                  <a:srgbClr val="9D174D"/>
                 </a:solidFill>
                 <a:latin typeface="Trebuchet MS" pitchFamily="34" charset="0"/>
                 <a:ea typeface="Trebuchet MS" pitchFamily="34" charset="-122"/>
                 <a:cs typeface="Trebuchet MS" pitchFamily="34" charset="-120"/>
               </a:rPr>
-              <a:t>·</a:t>
-            </a:r>
-            <a:endParaRPr lang="en-US" sz="1600" dirty="0"/>
-          </a:p>
-        </p:txBody>
-      </p:sp>
-      <p:sp>
-        <p:nvSpPr>
-          <p:cNvPr id="35" name="Shape 33"/>
-          <p:cNvSpPr/>
-          <p:nvPr/>
-        </p:nvSpPr>
-        <p:spPr>
-          <a:xfrm>
-            <a:off x="5230368" y="3364992"/>
-            <a:ext cx="1554480" cy="475488"/>
+              <a:t>i</a:t>
+            </a:r>
+            <a:endParaRPr lang="en-US" sz="900" dirty="0"/>
+          </a:p>
+        </p:txBody>
+      </p:sp>
+      <p:sp>
+        <p:nvSpPr>
+          <p:cNvPr id="41" name="Shape 39"/>
+          <p:cNvSpPr/>
+          <p:nvPr/>
+        </p:nvSpPr>
+        <p:spPr>
+          <a:xfrm>
+            <a:off x="7274052" y="4169664"/>
+            <a:ext cx="685800" cy="475488"/>
           </a:xfrm>
           <a:prstGeom prst="rect">
             <a:avLst>
-              <a:gd name="adj" fmla="val 9615"/>
+              <a:gd name="adj" fmla="val 7692"/>
             </a:avLst>
           </a:prstGeom>
           <a:solidFill>
@@ -27753,22 +26792,22 @@
           </a:solidFill>
           <a:ln w="12700">
             <a:solidFill>
-              <a:srgbClr val="0D9488"/>
-            </a:solidFill>
-            <a:prstDash val="solid"/>
-          </a:ln>
-        </p:spPr>
-      </p:sp>
-      <p:sp>
-        <p:nvSpPr>
-          <p:cNvPr id="36" name="Text 34"/>
-          <p:cNvSpPr/>
-          <p:nvPr/>
-        </p:nvSpPr>
-        <p:spPr>
-          <a:xfrm>
-            <a:off x="5230368" y="3364992"/>
-            <a:ext cx="1554480" cy="475488"/>
+              <a:srgbClr val="DB2777"/>
+            </a:solidFill>
+            <a:prstDash val="solid"/>
+          </a:ln>
+        </p:spPr>
+      </p:sp>
+      <p:sp>
+        <p:nvSpPr>
+          <p:cNvPr id="42" name="Text 40"/>
+          <p:cNvSpPr/>
+          <p:nvPr/>
+        </p:nvSpPr>
+        <p:spPr>
+          <a:xfrm>
+            <a:off x="7274052" y="4169664"/>
+            <a:ext cx="685800" cy="475488"/>
           </a:xfrm>
           <a:prstGeom prst="rect">
             <a:avLst/>
@@ -27784,951 +26823,15 @@
               <a:buNone/>
             </a:pPr>
             <a:r>
-              <a:rPr lang="en-US" sz="1400" b="1" dirty="0">
-                <a:solidFill>
-                  <a:srgbClr val="0D9488"/>
+              <a:rPr lang="en-US" sz="900" b="1" dirty="0">
+                <a:solidFill>
+                  <a:srgbClr val="9D174D"/>
                 </a:solidFill>
                 <a:latin typeface="Trebuchet MS" pitchFamily="34" charset="0"/>
                 <a:ea typeface="Trebuchet MS" pitchFamily="34" charset="-122"/>
                 <a:cs typeface="Trebuchet MS" pitchFamily="34" charset="-120"/>
               </a:rPr>
-              <a:t>a</a:t>
-            </a:r>
-            <a:endParaRPr lang="en-US" sz="1400" dirty="0"/>
-          </a:p>
-        </p:txBody>
-      </p:sp>
-      <p:sp>
-        <p:nvSpPr>
-          <p:cNvPr id="37" name="Text 35"/>
-          <p:cNvSpPr/>
-          <p:nvPr/>
-        </p:nvSpPr>
-        <p:spPr>
-          <a:xfrm>
-            <a:off x="6784848" y="3364992"/>
-            <a:ext cx="73152" cy="475488"/>
-          </a:xfrm>
-          <a:prstGeom prst="rect">
-            <a:avLst/>
-          </a:prstGeom>
-          <a:noFill/>
-          <a:ln/>
-        </p:spPr>
-        <p:txBody>
-          <a:bodyPr wrap="square" lIns="0" tIns="0" rIns="0" bIns="0" rtlCol="0" anchor="ctr"/>
-          <a:lstStyle/>
-          <a:p>
-            <a:pPr algn="ctr" indent="0" marL="0">
-              <a:buNone/>
-            </a:pPr>
-            <a:r>
-              <a:rPr lang="en-US" sz="1600" b="1" dirty="0">
-                <a:solidFill>
-                  <a:srgbClr val="0D9488"/>
-                </a:solidFill>
-                <a:latin typeface="Trebuchet MS" pitchFamily="34" charset="0"/>
-                <a:ea typeface="Trebuchet MS" pitchFamily="34" charset="-122"/>
-                <a:cs typeface="Trebuchet MS" pitchFamily="34" charset="-120"/>
-              </a:rPr>
-              <a:t>·</a:t>
-            </a:r>
-            <a:endParaRPr lang="en-US" sz="1600" dirty="0"/>
-          </a:p>
-        </p:txBody>
-      </p:sp>
-      <p:sp>
-        <p:nvSpPr>
-          <p:cNvPr id="38" name="Shape 36"/>
-          <p:cNvSpPr/>
-          <p:nvPr/>
-        </p:nvSpPr>
-        <p:spPr>
-          <a:xfrm>
-            <a:off x="6858000" y="3364992"/>
-            <a:ext cx="1554480" cy="475488"/>
-          </a:xfrm>
-          <a:prstGeom prst="rect">
-            <a:avLst>
-              <a:gd name="adj" fmla="val 9615"/>
-            </a:avLst>
-          </a:prstGeom>
-          <a:solidFill>
-            <a:srgbClr val="FFFFFF"/>
-          </a:solidFill>
-          <a:ln w="12700">
-            <a:solidFill>
-              <a:srgbClr val="0D9488"/>
-            </a:solidFill>
-            <a:prstDash val="solid"/>
-          </a:ln>
-        </p:spPr>
-      </p:sp>
-      <p:sp>
-        <p:nvSpPr>
-          <p:cNvPr id="39" name="Text 37"/>
-          <p:cNvSpPr/>
-          <p:nvPr/>
-        </p:nvSpPr>
-        <p:spPr>
-          <a:xfrm>
-            <a:off x="6858000" y="3364992"/>
-            <a:ext cx="1554480" cy="475488"/>
-          </a:xfrm>
-          <a:prstGeom prst="rect">
-            <a:avLst/>
-          </a:prstGeom>
-          <a:noFill/>
-          <a:ln/>
-        </p:spPr>
-        <p:txBody>
-          <a:bodyPr wrap="square" lIns="0" tIns="0" rIns="0" bIns="0" rtlCol="0" anchor="ctr"/>
-          <a:lstStyle/>
-          <a:p>
-            <a:pPr algn="ctr" indent="0" marL="0">
-              <a:buNone/>
-            </a:pPr>
-            <a:r>
-              <a:rPr lang="en-US" sz="1400" b="1" dirty="0">
-                <a:solidFill>
-                  <a:srgbClr val="0D9488"/>
-                </a:solidFill>
-                <a:latin typeface="Trebuchet MS" pitchFamily="34" charset="0"/>
-                <a:ea typeface="Trebuchet MS" pitchFamily="34" charset="-122"/>
-                <a:cs typeface="Trebuchet MS" pitchFamily="34" charset="-120"/>
-              </a:rPr>
-              <a:t>cy</a:t>
-            </a:r>
-            <a:endParaRPr lang="en-US" sz="1400" dirty="0"/>
-          </a:p>
-        </p:txBody>
-      </p:sp>
-      <p:sp>
-        <p:nvSpPr>
-          <p:cNvPr id="40" name="Shape 38"/>
-          <p:cNvSpPr/>
-          <p:nvPr/>
-        </p:nvSpPr>
-        <p:spPr>
-          <a:xfrm>
-            <a:off x="365760" y="4096512"/>
-            <a:ext cx="1371600" cy="804672"/>
-          </a:xfrm>
-          <a:prstGeom prst="rect">
-            <a:avLst>
-              <a:gd name="adj" fmla="val 6818"/>
-            </a:avLst>
-          </a:prstGeom>
-          <a:solidFill>
-            <a:srgbClr val="E2E8F0"/>
-          </a:solidFill>
-          <a:ln w="12700">
-            <a:solidFill>
-              <a:srgbClr val="E2E8F0"/>
-            </a:solidFill>
-            <a:prstDash val="solid"/>
-          </a:ln>
-        </p:spPr>
-      </p:sp>
-      <p:sp>
-        <p:nvSpPr>
-          <p:cNvPr id="41" name="Text 39"/>
-          <p:cNvSpPr/>
-          <p:nvPr/>
-        </p:nvSpPr>
-        <p:spPr>
-          <a:xfrm>
-            <a:off x="365760" y="4096512"/>
-            <a:ext cx="1371600" cy="804672"/>
-          </a:xfrm>
-          <a:prstGeom prst="rect">
-            <a:avLst/>
-          </a:prstGeom>
-          <a:noFill/>
-          <a:ln/>
-        </p:spPr>
-        <p:txBody>
-          <a:bodyPr wrap="square" lIns="0" tIns="0" rIns="0" bIns="0" rtlCol="0" anchor="ctr"/>
-          <a:lstStyle/>
-          <a:p>
-            <a:pPr algn="ctr" indent="0" marL="0">
-              <a:buNone/>
-            </a:pPr>
-            <a:r>
-              <a:rPr lang="en-US" sz="1100" b="1" dirty="0">
-                <a:solidFill>
-                  <a:srgbClr val="475569"/>
-                </a:solidFill>
-                <a:latin typeface="Trebuchet MS" pitchFamily="34" charset="0"/>
-                <a:ea typeface="Trebuchet MS" pitchFamily="34" charset="-122"/>
-                <a:cs typeface="Trebuchet MS" pitchFamily="34" charset="-120"/>
-              </a:rPr>
-              <a:t>Phonemes</a:t>
-            </a:r>
-            <a:endParaRPr lang="en-US" sz="1100" dirty="0"/>
-          </a:p>
-        </p:txBody>
-      </p:sp>
-      <p:sp>
-        <p:nvSpPr>
-          <p:cNvPr id="42" name="Shape 40"/>
-          <p:cNvSpPr/>
-          <p:nvPr/>
-        </p:nvSpPr>
-        <p:spPr>
-          <a:xfrm>
-            <a:off x="1874520" y="4096512"/>
-            <a:ext cx="6903720" cy="804672"/>
-          </a:xfrm>
-          <a:prstGeom prst="rect">
-            <a:avLst>
-              <a:gd name="adj" fmla="val 6818"/>
-            </a:avLst>
-          </a:prstGeom>
-          <a:solidFill>
-            <a:srgbClr val="FCE7F3"/>
-          </a:solidFill>
-          <a:ln w="12700">
-            <a:solidFill>
-              <a:srgbClr val="DB2777"/>
-            </a:solidFill>
-            <a:prstDash val="solid"/>
-          </a:ln>
-        </p:spPr>
-      </p:sp>
-      <p:sp>
-        <p:nvSpPr>
-          <p:cNvPr id="43" name="Shape 41"/>
-          <p:cNvSpPr/>
-          <p:nvPr/>
-        </p:nvSpPr>
-        <p:spPr>
-          <a:xfrm>
-            <a:off x="1951828" y="4169664"/>
-            <a:ext cx="603504" cy="384048"/>
-          </a:xfrm>
-          <a:prstGeom prst="rect">
-            <a:avLst>
-              <a:gd name="adj" fmla="val 9524"/>
-            </a:avLst>
-          </a:prstGeom>
-          <a:solidFill>
-            <a:srgbClr val="FFFFFF"/>
-          </a:solidFill>
-          <a:ln w="12700">
-            <a:solidFill>
-              <a:srgbClr val="DB2777"/>
-            </a:solidFill>
-            <a:prstDash val="solid"/>
-          </a:ln>
-        </p:spPr>
-      </p:sp>
-      <p:sp>
-        <p:nvSpPr>
-          <p:cNvPr id="44" name="Text 42"/>
-          <p:cNvSpPr/>
-          <p:nvPr/>
-        </p:nvSpPr>
-        <p:spPr>
-          <a:xfrm>
-            <a:off x="1951828" y="4169664"/>
-            <a:ext cx="603504" cy="384048"/>
-          </a:xfrm>
-          <a:prstGeom prst="rect">
-            <a:avLst/>
-          </a:prstGeom>
-          <a:noFill/>
-          <a:ln/>
-        </p:spPr>
-        <p:txBody>
-          <a:bodyPr wrap="square" lIns="0" tIns="0" rIns="0" bIns="0" rtlCol="0" anchor="ctr"/>
-          <a:lstStyle/>
-          <a:p>
-            <a:pPr algn="ctr" indent="0" marL="0">
-              <a:buNone/>
-            </a:pPr>
-            <a:r>
-              <a:rPr lang="en-US" sz="900" b="1" dirty="0">
-                <a:solidFill>
-                  <a:srgbClr val="9D174D"/>
-                </a:solidFill>
-                <a:latin typeface="Trebuchet MS" pitchFamily="34" charset="0"/>
-                <a:ea typeface="Trebuchet MS" pitchFamily="34" charset="-122"/>
-                <a:cs typeface="Trebuchet MS" pitchFamily="34" charset="-120"/>
-              </a:rPr>
-              <a:t>c</a:t>
-            </a:r>
-            <a:endParaRPr lang="en-US" sz="900" dirty="0"/>
-          </a:p>
-        </p:txBody>
-      </p:sp>
-      <p:sp>
-        <p:nvSpPr>
-          <p:cNvPr id="45" name="Text 43"/>
-          <p:cNvSpPr/>
-          <p:nvPr/>
-        </p:nvSpPr>
-        <p:spPr>
-          <a:xfrm>
-            <a:off x="1951828" y="4572000"/>
-            <a:ext cx="603504" cy="219456"/>
-          </a:xfrm>
-          <a:prstGeom prst="rect">
-            <a:avLst/>
-          </a:prstGeom>
-          <a:noFill/>
-          <a:ln/>
-        </p:spPr>
-        <p:txBody>
-          <a:bodyPr wrap="square" lIns="0" tIns="0" rIns="0" bIns="0" rtlCol="0" anchor="t"/>
-          <a:lstStyle/>
-          <a:p>
-            <a:pPr algn="ctr" indent="0" marL="0">
-              <a:buNone/>
-            </a:pPr>
-            <a:r>
-              <a:rPr lang="en-US" sz="750" i="1" dirty="0">
-                <a:solidFill>
-                  <a:srgbClr val="94A3B8"/>
-                </a:solidFill>
-                <a:latin typeface="Calibri" pitchFamily="34" charset="0"/>
-                <a:ea typeface="Calibri" pitchFamily="34" charset="-122"/>
-                <a:cs typeface="Calibri" pitchFamily="34" charset="-120"/>
-              </a:rPr>
-              <a:t>/k/</a:t>
-            </a:r>
-            <a:endParaRPr lang="en-US" sz="750" dirty="0"/>
-          </a:p>
-        </p:txBody>
-      </p:sp>
-      <p:sp>
-        <p:nvSpPr>
-          <p:cNvPr id="46" name="Shape 44"/>
-          <p:cNvSpPr/>
-          <p:nvPr/>
-        </p:nvSpPr>
-        <p:spPr>
-          <a:xfrm>
-            <a:off x="2605209" y="4169664"/>
-            <a:ext cx="603504" cy="384048"/>
-          </a:xfrm>
-          <a:prstGeom prst="rect">
-            <a:avLst>
-              <a:gd name="adj" fmla="val 9524"/>
-            </a:avLst>
-          </a:prstGeom>
-          <a:solidFill>
-            <a:srgbClr val="FFFFFF"/>
-          </a:solidFill>
-          <a:ln w="12700">
-            <a:solidFill>
-              <a:srgbClr val="DB2777"/>
-            </a:solidFill>
-            <a:prstDash val="solid"/>
-          </a:ln>
-        </p:spPr>
-      </p:sp>
-      <p:sp>
-        <p:nvSpPr>
-          <p:cNvPr id="47" name="Text 45"/>
-          <p:cNvSpPr/>
-          <p:nvPr/>
-        </p:nvSpPr>
-        <p:spPr>
-          <a:xfrm>
-            <a:off x="2605209" y="4169664"/>
-            <a:ext cx="603504" cy="384048"/>
-          </a:xfrm>
-          <a:prstGeom prst="rect">
-            <a:avLst/>
-          </a:prstGeom>
-          <a:noFill/>
-          <a:ln/>
-        </p:spPr>
-        <p:txBody>
-          <a:bodyPr wrap="square" lIns="0" tIns="0" rIns="0" bIns="0" rtlCol="0" anchor="ctr"/>
-          <a:lstStyle/>
-          <a:p>
-            <a:pPr algn="ctr" indent="0" marL="0">
-              <a:buNone/>
-            </a:pPr>
-            <a:r>
-              <a:rPr lang="en-US" sz="900" b="1" dirty="0">
-                <a:solidFill>
-                  <a:srgbClr val="9D174D"/>
-                </a:solidFill>
-                <a:latin typeface="Trebuchet MS" pitchFamily="34" charset="0"/>
-                <a:ea typeface="Trebuchet MS" pitchFamily="34" charset="-122"/>
-                <a:cs typeface="Trebuchet MS" pitchFamily="34" charset="-120"/>
-              </a:rPr>
-              <a:t>o</a:t>
-            </a:r>
-            <a:endParaRPr lang="en-US" sz="900" dirty="0"/>
-          </a:p>
-        </p:txBody>
-      </p:sp>
-      <p:sp>
-        <p:nvSpPr>
-          <p:cNvPr id="48" name="Shape 46"/>
-          <p:cNvSpPr/>
-          <p:nvPr/>
-        </p:nvSpPr>
-        <p:spPr>
-          <a:xfrm>
-            <a:off x="3258589" y="4169664"/>
-            <a:ext cx="603504" cy="384048"/>
-          </a:xfrm>
-          <a:prstGeom prst="rect">
-            <a:avLst>
-              <a:gd name="adj" fmla="val 9524"/>
-            </a:avLst>
-          </a:prstGeom>
-          <a:solidFill>
-            <a:srgbClr val="FFFFFF"/>
-          </a:solidFill>
-          <a:ln w="12700">
-            <a:solidFill>
-              <a:srgbClr val="DB2777"/>
-            </a:solidFill>
-            <a:prstDash val="solid"/>
-          </a:ln>
-        </p:spPr>
-      </p:sp>
-      <p:sp>
-        <p:nvSpPr>
-          <p:cNvPr id="49" name="Text 47"/>
-          <p:cNvSpPr/>
-          <p:nvPr/>
-        </p:nvSpPr>
-        <p:spPr>
-          <a:xfrm>
-            <a:off x="3258589" y="4169664"/>
-            <a:ext cx="603504" cy="384048"/>
-          </a:xfrm>
-          <a:prstGeom prst="rect">
-            <a:avLst/>
-          </a:prstGeom>
-          <a:noFill/>
-          <a:ln/>
-        </p:spPr>
-        <p:txBody>
-          <a:bodyPr wrap="square" lIns="0" tIns="0" rIns="0" bIns="0" rtlCol="0" anchor="ctr"/>
-          <a:lstStyle/>
-          <a:p>
-            <a:pPr algn="ctr" indent="0" marL="0">
-              <a:buNone/>
-            </a:pPr>
-            <a:r>
-              <a:rPr lang="en-US" sz="900" b="1" dirty="0">
-                <a:solidFill>
-                  <a:srgbClr val="9D174D"/>
-                </a:solidFill>
-                <a:latin typeface="Trebuchet MS" pitchFamily="34" charset="0"/>
-                <a:ea typeface="Trebuchet MS" pitchFamily="34" charset="-122"/>
-                <a:cs typeface="Trebuchet MS" pitchFamily="34" charset="-120"/>
-              </a:rPr>
-              <a:t>n</a:t>
-            </a:r>
-            <a:endParaRPr lang="en-US" sz="900" dirty="0"/>
-          </a:p>
-        </p:txBody>
-      </p:sp>
-      <p:sp>
-        <p:nvSpPr>
-          <p:cNvPr id="50" name="Shape 48"/>
-          <p:cNvSpPr/>
-          <p:nvPr/>
-        </p:nvSpPr>
-        <p:spPr>
-          <a:xfrm>
-            <a:off x="3911969" y="4169664"/>
-            <a:ext cx="603504" cy="384048"/>
-          </a:xfrm>
-          <a:prstGeom prst="rect">
-            <a:avLst>
-              <a:gd name="adj" fmla="val 9524"/>
-            </a:avLst>
-          </a:prstGeom>
-          <a:solidFill>
-            <a:srgbClr val="FFFFFF"/>
-          </a:solidFill>
-          <a:ln w="12700">
-            <a:solidFill>
-              <a:srgbClr val="DB2777"/>
-            </a:solidFill>
-            <a:prstDash val="solid"/>
-          </a:ln>
-        </p:spPr>
-      </p:sp>
-      <p:sp>
-        <p:nvSpPr>
-          <p:cNvPr id="51" name="Text 49"/>
-          <p:cNvSpPr/>
-          <p:nvPr/>
-        </p:nvSpPr>
-        <p:spPr>
-          <a:xfrm>
-            <a:off x="3911969" y="4169664"/>
-            <a:ext cx="603504" cy="384048"/>
-          </a:xfrm>
-          <a:prstGeom prst="rect">
-            <a:avLst/>
-          </a:prstGeom>
-          <a:noFill/>
-          <a:ln/>
-        </p:spPr>
-        <p:txBody>
-          <a:bodyPr wrap="square" lIns="0" tIns="0" rIns="0" bIns="0" rtlCol="0" anchor="ctr"/>
-          <a:lstStyle/>
-          <a:p>
-            <a:pPr algn="ctr" indent="0" marL="0">
-              <a:buNone/>
-            </a:pPr>
-            <a:r>
-              <a:rPr lang="en-US" sz="900" b="1" dirty="0">
-                <a:solidFill>
-                  <a:srgbClr val="9D174D"/>
-                </a:solidFill>
-                <a:latin typeface="Trebuchet MS" pitchFamily="34" charset="0"/>
-                <a:ea typeface="Trebuchet MS" pitchFamily="34" charset="-122"/>
-                <a:cs typeface="Trebuchet MS" pitchFamily="34" charset="-120"/>
-              </a:rPr>
-              <a:t>s</a:t>
-            </a:r>
-            <a:endParaRPr lang="en-US" sz="900" dirty="0"/>
-          </a:p>
-        </p:txBody>
-      </p:sp>
-      <p:sp>
-        <p:nvSpPr>
-          <p:cNvPr id="52" name="Shape 50"/>
-          <p:cNvSpPr/>
-          <p:nvPr/>
-        </p:nvSpPr>
-        <p:spPr>
-          <a:xfrm>
-            <a:off x="4565350" y="4169664"/>
-            <a:ext cx="603504" cy="384048"/>
-          </a:xfrm>
-          <a:prstGeom prst="rect">
-            <a:avLst>
-              <a:gd name="adj" fmla="val 9524"/>
-            </a:avLst>
-          </a:prstGeom>
-          <a:solidFill>
-            <a:srgbClr val="FFFFFF"/>
-          </a:solidFill>
-          <a:ln w="12700">
-            <a:solidFill>
-              <a:srgbClr val="DB2777"/>
-            </a:solidFill>
-            <a:prstDash val="solid"/>
-          </a:ln>
-        </p:spPr>
-      </p:sp>
-      <p:sp>
-        <p:nvSpPr>
-          <p:cNvPr id="53" name="Text 51"/>
-          <p:cNvSpPr/>
-          <p:nvPr/>
-        </p:nvSpPr>
-        <p:spPr>
-          <a:xfrm>
-            <a:off x="4565350" y="4169664"/>
-            <a:ext cx="603504" cy="384048"/>
-          </a:xfrm>
-          <a:prstGeom prst="rect">
-            <a:avLst/>
-          </a:prstGeom>
-          <a:noFill/>
-          <a:ln/>
-        </p:spPr>
-        <p:txBody>
-          <a:bodyPr wrap="square" lIns="0" tIns="0" rIns="0" bIns="0" rtlCol="0" anchor="ctr"/>
-          <a:lstStyle/>
-          <a:p>
-            <a:pPr algn="ctr" indent="0" marL="0">
-              <a:buNone/>
-            </a:pPr>
-            <a:r>
-              <a:rPr lang="en-US" sz="900" b="1" dirty="0">
-                <a:solidFill>
-                  <a:srgbClr val="9D174D"/>
-                </a:solidFill>
-                <a:latin typeface="Trebuchet MS" pitchFamily="34" charset="0"/>
-                <a:ea typeface="Trebuchet MS" pitchFamily="34" charset="-122"/>
-                <a:cs typeface="Trebuchet MS" pitchFamily="34" charset="-120"/>
-              </a:rPr>
-              <a:t>p</a:t>
-            </a:r>
-            <a:endParaRPr lang="en-US" sz="900" dirty="0"/>
-          </a:p>
-        </p:txBody>
-      </p:sp>
-      <p:sp>
-        <p:nvSpPr>
-          <p:cNvPr id="54" name="Shape 52"/>
-          <p:cNvSpPr/>
-          <p:nvPr/>
-        </p:nvSpPr>
-        <p:spPr>
-          <a:xfrm>
-            <a:off x="5218730" y="4169664"/>
-            <a:ext cx="603504" cy="384048"/>
-          </a:xfrm>
-          <a:prstGeom prst="rect">
-            <a:avLst>
-              <a:gd name="adj" fmla="val 9524"/>
-            </a:avLst>
-          </a:prstGeom>
-          <a:solidFill>
-            <a:srgbClr val="FFFFFF"/>
-          </a:solidFill>
-          <a:ln w="12700">
-            <a:solidFill>
-              <a:srgbClr val="DB2777"/>
-            </a:solidFill>
-            <a:prstDash val="solid"/>
-          </a:ln>
-        </p:spPr>
-      </p:sp>
-      <p:sp>
-        <p:nvSpPr>
-          <p:cNvPr id="55" name="Text 53"/>
-          <p:cNvSpPr/>
-          <p:nvPr/>
-        </p:nvSpPr>
-        <p:spPr>
-          <a:xfrm>
-            <a:off x="5218730" y="4169664"/>
-            <a:ext cx="603504" cy="384048"/>
-          </a:xfrm>
-          <a:prstGeom prst="rect">
-            <a:avLst/>
-          </a:prstGeom>
-          <a:noFill/>
-          <a:ln/>
-        </p:spPr>
-        <p:txBody>
-          <a:bodyPr wrap="square" lIns="0" tIns="0" rIns="0" bIns="0" rtlCol="0" anchor="ctr"/>
-          <a:lstStyle/>
-          <a:p>
-            <a:pPr algn="ctr" indent="0" marL="0">
-              <a:buNone/>
-            </a:pPr>
-            <a:r>
-              <a:rPr lang="en-US" sz="900" b="1" dirty="0">
-                <a:solidFill>
-                  <a:srgbClr val="9D174D"/>
-                </a:solidFill>
-                <a:latin typeface="Trebuchet MS" pitchFamily="34" charset="0"/>
-                <a:ea typeface="Trebuchet MS" pitchFamily="34" charset="-122"/>
-                <a:cs typeface="Trebuchet MS" pitchFamily="34" charset="-120"/>
-              </a:rPr>
-              <a:t>i</a:t>
-            </a:r>
-            <a:endParaRPr lang="en-US" sz="900" dirty="0"/>
-          </a:p>
-        </p:txBody>
-      </p:sp>
-      <p:sp>
-        <p:nvSpPr>
-          <p:cNvPr id="56" name="Shape 54"/>
-          <p:cNvSpPr/>
-          <p:nvPr/>
-        </p:nvSpPr>
-        <p:spPr>
-          <a:xfrm>
-            <a:off x="5872111" y="4169664"/>
-            <a:ext cx="603504" cy="384048"/>
-          </a:xfrm>
-          <a:prstGeom prst="rect">
-            <a:avLst>
-              <a:gd name="adj" fmla="val 9524"/>
-            </a:avLst>
-          </a:prstGeom>
-          <a:solidFill>
-            <a:srgbClr val="FFFFFF"/>
-          </a:solidFill>
-          <a:ln w="12700">
-            <a:solidFill>
-              <a:srgbClr val="DB2777"/>
-            </a:solidFill>
-            <a:prstDash val="solid"/>
-          </a:ln>
-        </p:spPr>
-      </p:sp>
-      <p:sp>
-        <p:nvSpPr>
-          <p:cNvPr id="57" name="Text 55"/>
-          <p:cNvSpPr/>
-          <p:nvPr/>
-        </p:nvSpPr>
-        <p:spPr>
-          <a:xfrm>
-            <a:off x="5872111" y="4169664"/>
-            <a:ext cx="603504" cy="384048"/>
-          </a:xfrm>
-          <a:prstGeom prst="rect">
-            <a:avLst/>
-          </a:prstGeom>
-          <a:noFill/>
-          <a:ln/>
-        </p:spPr>
-        <p:txBody>
-          <a:bodyPr wrap="square" lIns="0" tIns="0" rIns="0" bIns="0" rtlCol="0" anchor="ctr"/>
-          <a:lstStyle/>
-          <a:p>
-            <a:pPr algn="ctr" indent="0" marL="0">
-              <a:buNone/>
-            </a:pPr>
-            <a:r>
-              <a:rPr lang="en-US" sz="900" b="1" dirty="0">
-                <a:solidFill>
-                  <a:srgbClr val="9D174D"/>
-                </a:solidFill>
-                <a:latin typeface="Trebuchet MS" pitchFamily="34" charset="0"/>
-                <a:ea typeface="Trebuchet MS" pitchFamily="34" charset="-122"/>
-                <a:cs typeface="Trebuchet MS" pitchFamily="34" charset="-120"/>
-              </a:rPr>
-              <a:t>r</a:t>
-            </a:r>
-            <a:endParaRPr lang="en-US" sz="900" dirty="0"/>
-          </a:p>
-        </p:txBody>
-      </p:sp>
-      <p:sp>
-        <p:nvSpPr>
-          <p:cNvPr id="58" name="Shape 56"/>
-          <p:cNvSpPr/>
-          <p:nvPr/>
-        </p:nvSpPr>
-        <p:spPr>
-          <a:xfrm>
-            <a:off x="6525491" y="4169664"/>
-            <a:ext cx="603504" cy="384048"/>
-          </a:xfrm>
-          <a:prstGeom prst="rect">
-            <a:avLst>
-              <a:gd name="adj" fmla="val 9524"/>
-            </a:avLst>
-          </a:prstGeom>
-          <a:solidFill>
-            <a:srgbClr val="FFFFFF"/>
-          </a:solidFill>
-          <a:ln w="12700">
-            <a:solidFill>
-              <a:srgbClr val="DB2777"/>
-            </a:solidFill>
-            <a:prstDash val="solid"/>
-          </a:ln>
-        </p:spPr>
-      </p:sp>
-      <p:sp>
-        <p:nvSpPr>
-          <p:cNvPr id="59" name="Text 57"/>
-          <p:cNvSpPr/>
-          <p:nvPr/>
-        </p:nvSpPr>
-        <p:spPr>
-          <a:xfrm>
-            <a:off x="6525491" y="4169664"/>
-            <a:ext cx="603504" cy="384048"/>
-          </a:xfrm>
-          <a:prstGeom prst="rect">
-            <a:avLst/>
-          </a:prstGeom>
-          <a:noFill/>
-          <a:ln/>
-        </p:spPr>
-        <p:txBody>
-          <a:bodyPr wrap="square" lIns="0" tIns="0" rIns="0" bIns="0" rtlCol="0" anchor="ctr"/>
-          <a:lstStyle/>
-          <a:p>
-            <a:pPr algn="ctr" indent="0" marL="0">
-              <a:buNone/>
-            </a:pPr>
-            <a:r>
-              <a:rPr lang="en-US" sz="900" b="1" dirty="0">
-                <a:solidFill>
-                  <a:srgbClr val="9D174D"/>
-                </a:solidFill>
-                <a:latin typeface="Trebuchet MS" pitchFamily="34" charset="0"/>
-                <a:ea typeface="Trebuchet MS" pitchFamily="34" charset="-122"/>
-                <a:cs typeface="Trebuchet MS" pitchFamily="34" charset="-120"/>
-              </a:rPr>
-              <a:t>a</a:t>
-            </a:r>
-            <a:endParaRPr lang="en-US" sz="900" dirty="0"/>
-          </a:p>
-        </p:txBody>
-      </p:sp>
-      <p:sp>
-        <p:nvSpPr>
-          <p:cNvPr id="60" name="Shape 58"/>
-          <p:cNvSpPr/>
-          <p:nvPr/>
-        </p:nvSpPr>
-        <p:spPr>
-          <a:xfrm>
-            <a:off x="7178871" y="4169664"/>
-            <a:ext cx="603504" cy="384048"/>
-          </a:xfrm>
-          <a:prstGeom prst="rect">
-            <a:avLst>
-              <a:gd name="adj" fmla="val 9524"/>
-            </a:avLst>
-          </a:prstGeom>
-          <a:solidFill>
-            <a:srgbClr val="FFFFFF"/>
-          </a:solidFill>
-          <a:ln w="12700">
-            <a:solidFill>
-              <a:srgbClr val="DB2777"/>
-            </a:solidFill>
-            <a:prstDash val="solid"/>
-          </a:ln>
-        </p:spPr>
-      </p:sp>
-      <p:sp>
-        <p:nvSpPr>
-          <p:cNvPr id="61" name="Text 59"/>
-          <p:cNvSpPr/>
-          <p:nvPr/>
-        </p:nvSpPr>
-        <p:spPr>
-          <a:xfrm>
-            <a:off x="7178871" y="4169664"/>
-            <a:ext cx="603504" cy="384048"/>
-          </a:xfrm>
-          <a:prstGeom prst="rect">
-            <a:avLst/>
-          </a:prstGeom>
-          <a:noFill/>
-          <a:ln/>
-        </p:spPr>
-        <p:txBody>
-          <a:bodyPr wrap="square" lIns="0" tIns="0" rIns="0" bIns="0" rtlCol="0" anchor="ctr"/>
-          <a:lstStyle/>
-          <a:p>
-            <a:pPr algn="ctr" indent="0" marL="0">
-              <a:buNone/>
-            </a:pPr>
-            <a:r>
-              <a:rPr lang="en-US" sz="900" b="1" dirty="0">
-                <a:solidFill>
-                  <a:srgbClr val="9D174D"/>
-                </a:solidFill>
-                <a:latin typeface="Trebuchet MS" pitchFamily="34" charset="0"/>
-                <a:ea typeface="Trebuchet MS" pitchFamily="34" charset="-122"/>
-                <a:cs typeface="Trebuchet MS" pitchFamily="34" charset="-120"/>
-              </a:rPr>
-              <a:t>c</a:t>
-            </a:r>
-            <a:endParaRPr lang="en-US" sz="900" dirty="0"/>
-          </a:p>
-        </p:txBody>
-      </p:sp>
-      <p:sp>
-        <p:nvSpPr>
-          <p:cNvPr id="62" name="Text 60"/>
-          <p:cNvSpPr/>
-          <p:nvPr/>
-        </p:nvSpPr>
-        <p:spPr>
-          <a:xfrm>
-            <a:off x="7178871" y="4572000"/>
-            <a:ext cx="603504" cy="219456"/>
-          </a:xfrm>
-          <a:prstGeom prst="rect">
-            <a:avLst/>
-          </a:prstGeom>
-          <a:noFill/>
-          <a:ln/>
-        </p:spPr>
-        <p:txBody>
-          <a:bodyPr wrap="square" lIns="0" tIns="0" rIns="0" bIns="0" rtlCol="0" anchor="t"/>
-          <a:lstStyle/>
-          <a:p>
-            <a:pPr algn="ctr" indent="0" marL="0">
-              <a:buNone/>
-            </a:pPr>
-            <a:r>
-              <a:rPr lang="en-US" sz="750" i="1" dirty="0">
-                <a:solidFill>
-                  <a:srgbClr val="94A3B8"/>
-                </a:solidFill>
-                <a:latin typeface="Calibri" pitchFamily="34" charset="0"/>
-                <a:ea typeface="Calibri" pitchFamily="34" charset="-122"/>
-                <a:cs typeface="Calibri" pitchFamily="34" charset="-120"/>
-              </a:rPr>
-              <a:t>/s/</a:t>
-            </a:r>
-            <a:endParaRPr lang="en-US" sz="750" dirty="0"/>
-          </a:p>
-        </p:txBody>
-      </p:sp>
-      <p:sp>
-        <p:nvSpPr>
-          <p:cNvPr id="63" name="Shape 61"/>
-          <p:cNvSpPr/>
-          <p:nvPr/>
-        </p:nvSpPr>
-        <p:spPr>
-          <a:xfrm>
-            <a:off x="7832252" y="4169664"/>
-            <a:ext cx="603504" cy="384048"/>
-          </a:xfrm>
-          <a:prstGeom prst="rect">
-            <a:avLst>
-              <a:gd name="adj" fmla="val 9524"/>
-            </a:avLst>
-          </a:prstGeom>
-          <a:solidFill>
-            <a:srgbClr val="FFFFFF"/>
-          </a:solidFill>
-          <a:ln w="12700">
-            <a:solidFill>
-              <a:srgbClr val="DB2777"/>
-            </a:solidFill>
-            <a:prstDash val="solid"/>
-          </a:ln>
-        </p:spPr>
-      </p:sp>
-      <p:sp>
-        <p:nvSpPr>
-          <p:cNvPr id="64" name="Text 62"/>
-          <p:cNvSpPr/>
-          <p:nvPr/>
-        </p:nvSpPr>
-        <p:spPr>
-          <a:xfrm>
-            <a:off x="7832252" y="4169664"/>
-            <a:ext cx="603504" cy="384048"/>
-          </a:xfrm>
-          <a:prstGeom prst="rect">
-            <a:avLst/>
-          </a:prstGeom>
-          <a:noFill/>
-          <a:ln/>
-        </p:spPr>
-        <p:txBody>
-          <a:bodyPr wrap="square" lIns="0" tIns="0" rIns="0" bIns="0" rtlCol="0" anchor="ctr"/>
-          <a:lstStyle/>
-          <a:p>
-            <a:pPr algn="ctr" indent="0" marL="0">
-              <a:buNone/>
-            </a:pPr>
-            <a:r>
-              <a:rPr lang="en-US" sz="900" b="1" dirty="0">
-                <a:solidFill>
-                  <a:srgbClr val="9D174D"/>
-                </a:solidFill>
-                <a:latin typeface="Trebuchet MS" pitchFamily="34" charset="0"/>
-                <a:ea typeface="Trebuchet MS" pitchFamily="34" charset="-122"/>
-                <a:cs typeface="Trebuchet MS" pitchFamily="34" charset="-120"/>
-              </a:rPr>
-              <a:t>y</a:t>
+              <a:t>re</a:t>
             </a:r>
             <a:endParaRPr lang="en-US" sz="900" dirty="0"/>
           </a:p>
@@ -29159,7 +27262,7 @@
                 <a:ea typeface="Trebuchet MS" pitchFamily="34" charset="-122"/>
                 <a:cs typeface="Trebuchet MS" pitchFamily="34" charset="-120"/>
               </a:rPr>
-              <a:t>inspired</a:t>
+              <a:t>inspiration</a:t>
             </a:r>
             <a:endParaRPr lang="en-US" sz="2800" dirty="0"/>
           </a:p>
@@ -29986,7 +28089,7 @@
                 <a:ea typeface="Trebuchet MS" pitchFamily="34" charset="-122"/>
                 <a:cs typeface="Trebuchet MS" pitchFamily="34" charset="-120"/>
               </a:rPr>
-              <a:t>inspired</a:t>
+              <a:t>inspiration</a:t>
             </a:r>
             <a:endParaRPr lang="en-US" sz="2800" dirty="0"/>
           </a:p>
@@ -30276,7 +28379,7 @@
                 <a:ea typeface="Calibri" pitchFamily="34" charset="-122"/>
                 <a:cs typeface="Calibri" pitchFamily="34" charset="-120"/>
               </a:rPr>
-              <a:t>breathe</a:t>
+              <a:t>breathe, breath</a:t>
             </a:r>
             <a:endParaRPr lang="en-US" sz="850" dirty="0"/>
           </a:p>
@@ -30284,7 +28387,46 @@
       </p:sp>
       <p:sp>
         <p:nvSpPr>
-          <p:cNvPr id="22" name="Shape 20"/>
+          <p:cNvPr id="22" name="Text 20"/>
+          <p:cNvSpPr/>
+          <p:nvPr/>
+        </p:nvSpPr>
+        <p:spPr>
+          <a:xfrm>
+            <a:off x="4370832" y="2752344"/>
+            <a:ext cx="1828800" cy="182880"/>
+          </a:xfrm>
+          <a:prstGeom prst="rect">
+            <a:avLst/>
+          </a:prstGeom>
+          <a:noFill/>
+          <a:ln/>
+        </p:spPr>
+        <p:txBody>
+          <a:bodyPr wrap="square" lIns="0" tIns="0" rIns="0" bIns="0" rtlCol="0" anchor="t"/>
+          <a:lstStyle/>
+          <a:p>
+            <a:pPr algn="ctr" indent="0" marL="0">
+              <a:buNone/>
+            </a:pPr>
+            <a:r>
+              <a:rPr lang="en-US" sz="700" i="1" dirty="0">
+                <a:solidFill>
+                  <a:srgbClr val="94A3B8"/>
+                </a:solidFill>
+                <a:latin typeface="Calibri" pitchFamily="34" charset="0"/>
+                <a:ea typeface="Calibri" pitchFamily="34" charset="-122"/>
+                <a:cs typeface="Calibri" pitchFamily="34" charset="-120"/>
+              </a:rPr>
+              <a:t>'e' dropped before vowel suffix</a:t>
+            </a:r>
+            <a:endParaRPr lang="en-US" sz="700" dirty="0"/>
+          </a:p>
+        </p:txBody>
+      </p:sp>
+      <p:sp>
+        <p:nvSpPr>
+          <p:cNvPr id="23" name="Shape 21"/>
           <p:cNvSpPr/>
           <p:nvPr/>
         </p:nvSpPr>
@@ -30318,7 +28460,7 @@
       </p:sp>
       <p:sp>
         <p:nvSpPr>
-          <p:cNvPr id="23" name="Text 21"/>
+          <p:cNvPr id="24" name="Text 22"/>
           <p:cNvSpPr/>
           <p:nvPr/>
         </p:nvSpPr>
@@ -30349,7 +28491,7 @@
                 <a:ea typeface="Trebuchet MS" pitchFamily="34" charset="-122"/>
                 <a:cs typeface="Trebuchet MS" pitchFamily="34" charset="-120"/>
               </a:rPr>
-              <a:t>d</a:t>
+              <a:t>ation</a:t>
             </a:r>
             <a:endParaRPr lang="en-US" sz="1300" dirty="0"/>
           </a:p>
@@ -30357,7 +28499,7 @@
       </p:sp>
       <p:sp>
         <p:nvSpPr>
-          <p:cNvPr id="24" name="Text 22"/>
+          <p:cNvPr id="25" name="Text 23"/>
           <p:cNvSpPr/>
           <p:nvPr/>
         </p:nvSpPr>
@@ -30388,48 +28530,9 @@
                 <a:ea typeface="Calibri" pitchFamily="34" charset="-122"/>
                 <a:cs typeface="Calibri" pitchFamily="34" charset="-120"/>
               </a:rPr>
-              <a:t>past tense</a:t>
+              <a:t>the act or state of</a:t>
             </a:r>
             <a:endParaRPr lang="en-US" sz="850" dirty="0"/>
-          </a:p>
-        </p:txBody>
-      </p:sp>
-      <p:sp>
-        <p:nvSpPr>
-          <p:cNvPr id="25" name="Text 23"/>
-          <p:cNvSpPr/>
-          <p:nvPr/>
-        </p:nvSpPr>
-        <p:spPr>
-          <a:xfrm>
-            <a:off x="6519672" y="2752344"/>
-            <a:ext cx="1828800" cy="182880"/>
-          </a:xfrm>
-          <a:prstGeom prst="rect">
-            <a:avLst/>
-          </a:prstGeom>
-          <a:noFill/>
-          <a:ln/>
-        </p:spPr>
-        <p:txBody>
-          <a:bodyPr wrap="square" lIns="0" tIns="0" rIns="0" bIns="0" rtlCol="0" anchor="t"/>
-          <a:lstStyle/>
-          <a:p>
-            <a:pPr algn="ctr" indent="0" marL="0">
-              <a:buNone/>
-            </a:pPr>
-            <a:r>
-              <a:rPr lang="en-US" sz="700" i="1" dirty="0">
-                <a:solidFill>
-                  <a:srgbClr val="94A3B8"/>
-                </a:solidFill>
-                <a:latin typeface="Calibri" pitchFamily="34" charset="0"/>
-                <a:ea typeface="Calibri" pitchFamily="34" charset="-122"/>
-                <a:cs typeface="Calibri" pitchFamily="34" charset="-120"/>
-              </a:rPr>
-              <a:t>'e' dropped before vowel suffix</a:t>
-            </a:r>
-            <a:endParaRPr lang="en-US" sz="700" dirty="0"/>
           </a:p>
         </p:txBody>
       </p:sp>
@@ -31122,7 +29225,7 @@
                 <a:ea typeface="Trebuchet MS" pitchFamily="34" charset="-122"/>
                 <a:cs typeface="Trebuchet MS" pitchFamily="34" charset="-120"/>
               </a:rPr>
-              <a:t>inspired</a:t>
+              <a:t>inspiration</a:t>
             </a:r>
             <a:endParaRPr lang="en-US" sz="2800" dirty="0"/>
           </a:p>
@@ -31412,7 +29515,7 @@
                 <a:ea typeface="Calibri" pitchFamily="34" charset="-122"/>
                 <a:cs typeface="Calibri" pitchFamily="34" charset="-120"/>
               </a:rPr>
-              <a:t>breathe</a:t>
+              <a:t>breathe, breath</a:t>
             </a:r>
             <a:endParaRPr lang="en-US" sz="850" dirty="0"/>
           </a:p>
@@ -31420,7 +29523,46 @@
       </p:sp>
       <p:sp>
         <p:nvSpPr>
-          <p:cNvPr id="22" name="Shape 20"/>
+          <p:cNvPr id="22" name="Text 20"/>
+          <p:cNvSpPr/>
+          <p:nvPr/>
+        </p:nvSpPr>
+        <p:spPr>
+          <a:xfrm>
+            <a:off x="4370832" y="2752344"/>
+            <a:ext cx="1828800" cy="182880"/>
+          </a:xfrm>
+          <a:prstGeom prst="rect">
+            <a:avLst/>
+          </a:prstGeom>
+          <a:noFill/>
+          <a:ln/>
+        </p:spPr>
+        <p:txBody>
+          <a:bodyPr wrap="square" lIns="0" tIns="0" rIns="0" bIns="0" rtlCol="0" anchor="t"/>
+          <a:lstStyle/>
+          <a:p>
+            <a:pPr algn="ctr" indent="0" marL="0">
+              <a:buNone/>
+            </a:pPr>
+            <a:r>
+              <a:rPr lang="en-US" sz="700" i="1" dirty="0">
+                <a:solidFill>
+                  <a:srgbClr val="94A3B8"/>
+                </a:solidFill>
+                <a:latin typeface="Calibri" pitchFamily="34" charset="0"/>
+                <a:ea typeface="Calibri" pitchFamily="34" charset="-122"/>
+                <a:cs typeface="Calibri" pitchFamily="34" charset="-120"/>
+              </a:rPr>
+              <a:t>'e' dropped before vowel suffix</a:t>
+            </a:r>
+            <a:endParaRPr lang="en-US" sz="700" dirty="0"/>
+          </a:p>
+        </p:txBody>
+      </p:sp>
+      <p:sp>
+        <p:nvSpPr>
+          <p:cNvPr id="23" name="Shape 21"/>
           <p:cNvSpPr/>
           <p:nvPr/>
         </p:nvSpPr>
@@ -31454,7 +29596,7 @@
       </p:sp>
       <p:sp>
         <p:nvSpPr>
-          <p:cNvPr id="23" name="Text 21"/>
+          <p:cNvPr id="24" name="Text 22"/>
           <p:cNvSpPr/>
           <p:nvPr/>
         </p:nvSpPr>
@@ -31485,7 +29627,7 @@
                 <a:ea typeface="Trebuchet MS" pitchFamily="34" charset="-122"/>
                 <a:cs typeface="Trebuchet MS" pitchFamily="34" charset="-120"/>
               </a:rPr>
-              <a:t>d</a:t>
+              <a:t>ation</a:t>
             </a:r>
             <a:endParaRPr lang="en-US" sz="1300" dirty="0"/>
           </a:p>
@@ -31493,7 +29635,7 @@
       </p:sp>
       <p:sp>
         <p:nvSpPr>
-          <p:cNvPr id="24" name="Text 22"/>
+          <p:cNvPr id="25" name="Text 23"/>
           <p:cNvSpPr/>
           <p:nvPr/>
         </p:nvSpPr>
@@ -31524,48 +29666,9 @@
                 <a:ea typeface="Calibri" pitchFamily="34" charset="-122"/>
                 <a:cs typeface="Calibri" pitchFamily="34" charset="-120"/>
               </a:rPr>
-              <a:t>past tense</a:t>
+              <a:t>the act or state of</a:t>
             </a:r>
             <a:endParaRPr lang="en-US" sz="850" dirty="0"/>
-          </a:p>
-        </p:txBody>
-      </p:sp>
-      <p:sp>
-        <p:nvSpPr>
-          <p:cNvPr id="25" name="Text 23"/>
-          <p:cNvSpPr/>
-          <p:nvPr/>
-        </p:nvSpPr>
-        <p:spPr>
-          <a:xfrm>
-            <a:off x="6519672" y="2752344"/>
-            <a:ext cx="1828800" cy="182880"/>
-          </a:xfrm>
-          <a:prstGeom prst="rect">
-            <a:avLst/>
-          </a:prstGeom>
-          <a:noFill/>
-          <a:ln/>
-        </p:spPr>
-        <p:txBody>
-          <a:bodyPr wrap="square" lIns="0" tIns="0" rIns="0" bIns="0" rtlCol="0" anchor="t"/>
-          <a:lstStyle/>
-          <a:p>
-            <a:pPr algn="ctr" indent="0" marL="0">
-              <a:buNone/>
-            </a:pPr>
-            <a:r>
-              <a:rPr lang="en-US" sz="700" i="1" dirty="0">
-                <a:solidFill>
-                  <a:srgbClr val="94A3B8"/>
-                </a:solidFill>
-                <a:latin typeface="Calibri" pitchFamily="34" charset="0"/>
-                <a:ea typeface="Calibri" pitchFamily="34" charset="-122"/>
-                <a:cs typeface="Calibri" pitchFamily="34" charset="-120"/>
-              </a:rPr>
-              <a:t>'e' dropped before vowel suffix</a:t>
-            </a:r>
-            <a:endParaRPr lang="en-US" sz="700" dirty="0"/>
           </a:p>
         </p:txBody>
       </p:sp>
@@ -31670,8 +29773,8 @@
         </p:nvSpPr>
         <p:spPr>
           <a:xfrm>
-            <a:off x="2999232" y="3364992"/>
-            <a:ext cx="1645920" cy="475488"/>
+            <a:off x="1975104" y="3364992"/>
+            <a:ext cx="1554480" cy="475488"/>
           </a:xfrm>
           <a:prstGeom prst="rect">
             <a:avLst>
@@ -31697,8 +29800,8 @@
         </p:nvSpPr>
         <p:spPr>
           <a:xfrm>
-            <a:off x="2999232" y="3364992"/>
-            <a:ext cx="1645920" cy="475488"/>
+            <a:off x="1975104" y="3364992"/>
+            <a:ext cx="1554480" cy="475488"/>
           </a:xfrm>
           <a:prstGeom prst="rect">
             <a:avLst/>
@@ -31736,8 +29839,8 @@
         </p:nvSpPr>
         <p:spPr>
           <a:xfrm>
-            <a:off x="4645152" y="3364992"/>
-            <a:ext cx="1097280" cy="475488"/>
+            <a:off x="3529584" y="3364992"/>
+            <a:ext cx="73152" cy="475488"/>
           </a:xfrm>
           <a:prstGeom prst="rect">
             <a:avLst/>
@@ -31775,8 +29878,8 @@
         </p:nvSpPr>
         <p:spPr>
           <a:xfrm>
-            <a:off x="5742432" y="3364992"/>
-            <a:ext cx="1645920" cy="475488"/>
+            <a:off x="3602736" y="3364992"/>
+            <a:ext cx="1554480" cy="475488"/>
           </a:xfrm>
           <a:prstGeom prst="rect">
             <a:avLst>
@@ -31802,8 +29905,8 @@
         </p:nvSpPr>
         <p:spPr>
           <a:xfrm>
-            <a:off x="5742432" y="3364992"/>
-            <a:ext cx="1645920" cy="475488"/>
+            <a:off x="3602736" y="3364992"/>
+            <a:ext cx="1554480" cy="475488"/>
           </a:xfrm>
           <a:prstGeom prst="rect">
             <a:avLst/>
@@ -31827,7 +29930,7 @@
                 <a:ea typeface="Trebuchet MS" pitchFamily="34" charset="-122"/>
                 <a:cs typeface="Trebuchet MS" pitchFamily="34" charset="-120"/>
               </a:rPr>
-              <a:t>spired</a:t>
+              <a:t>spi</a:t>
             </a:r>
             <a:endParaRPr lang="en-US" sz="1400" dirty="0"/>
           </a:p>
@@ -31835,7 +29938,217 @@
       </p:sp>
       <p:sp>
         <p:nvSpPr>
-          <p:cNvPr id="34" name="Shape 32"/>
+          <p:cNvPr id="34" name="Text 32"/>
+          <p:cNvSpPr/>
+          <p:nvPr/>
+        </p:nvSpPr>
+        <p:spPr>
+          <a:xfrm>
+            <a:off x="5157216" y="3364992"/>
+            <a:ext cx="73152" cy="475488"/>
+          </a:xfrm>
+          <a:prstGeom prst="rect">
+            <a:avLst/>
+          </a:prstGeom>
+          <a:noFill/>
+          <a:ln/>
+        </p:spPr>
+        <p:txBody>
+          <a:bodyPr wrap="square" lIns="0" tIns="0" rIns="0" bIns="0" rtlCol="0" anchor="ctr"/>
+          <a:lstStyle/>
+          <a:p>
+            <a:pPr algn="ctr" indent="0" marL="0">
+              <a:buNone/>
+            </a:pPr>
+            <a:r>
+              <a:rPr lang="en-US" sz="1600" b="1" dirty="0">
+                <a:solidFill>
+                  <a:srgbClr val="0D9488"/>
+                </a:solidFill>
+                <a:latin typeface="Trebuchet MS" pitchFamily="34" charset="0"/>
+                <a:ea typeface="Trebuchet MS" pitchFamily="34" charset="-122"/>
+                <a:cs typeface="Trebuchet MS" pitchFamily="34" charset="-120"/>
+              </a:rPr>
+              <a:t>·</a:t>
+            </a:r>
+            <a:endParaRPr lang="en-US" sz="1600" dirty="0"/>
+          </a:p>
+        </p:txBody>
+      </p:sp>
+      <p:sp>
+        <p:nvSpPr>
+          <p:cNvPr id="35" name="Shape 33"/>
+          <p:cNvSpPr/>
+          <p:nvPr/>
+        </p:nvSpPr>
+        <p:spPr>
+          <a:xfrm>
+            <a:off x="5230368" y="3364992"/>
+            <a:ext cx="1554480" cy="475488"/>
+          </a:xfrm>
+          <a:prstGeom prst="rect">
+            <a:avLst>
+              <a:gd name="adj" fmla="val 9615"/>
+            </a:avLst>
+          </a:prstGeom>
+          <a:solidFill>
+            <a:srgbClr val="FFFFFF"/>
+          </a:solidFill>
+          <a:ln w="12700">
+            <a:solidFill>
+              <a:srgbClr val="0D9488"/>
+            </a:solidFill>
+            <a:prstDash val="solid"/>
+          </a:ln>
+        </p:spPr>
+      </p:sp>
+      <p:sp>
+        <p:nvSpPr>
+          <p:cNvPr id="36" name="Text 34"/>
+          <p:cNvSpPr/>
+          <p:nvPr/>
+        </p:nvSpPr>
+        <p:spPr>
+          <a:xfrm>
+            <a:off x="5230368" y="3364992"/>
+            <a:ext cx="1554480" cy="475488"/>
+          </a:xfrm>
+          <a:prstGeom prst="rect">
+            <a:avLst/>
+          </a:prstGeom>
+          <a:noFill/>
+          <a:ln/>
+        </p:spPr>
+        <p:txBody>
+          <a:bodyPr wrap="square" lIns="0" tIns="0" rIns="0" bIns="0" rtlCol="0" anchor="ctr"/>
+          <a:lstStyle/>
+          <a:p>
+            <a:pPr algn="ctr" indent="0" marL="0">
+              <a:buNone/>
+            </a:pPr>
+            <a:r>
+              <a:rPr lang="en-US" sz="1400" b="1" dirty="0">
+                <a:solidFill>
+                  <a:srgbClr val="0D9488"/>
+                </a:solidFill>
+                <a:latin typeface="Trebuchet MS" pitchFamily="34" charset="0"/>
+                <a:ea typeface="Trebuchet MS" pitchFamily="34" charset="-122"/>
+                <a:cs typeface="Trebuchet MS" pitchFamily="34" charset="-120"/>
+              </a:rPr>
+              <a:t>ra</a:t>
+            </a:r>
+            <a:endParaRPr lang="en-US" sz="1400" dirty="0"/>
+          </a:p>
+        </p:txBody>
+      </p:sp>
+      <p:sp>
+        <p:nvSpPr>
+          <p:cNvPr id="37" name="Text 35"/>
+          <p:cNvSpPr/>
+          <p:nvPr/>
+        </p:nvSpPr>
+        <p:spPr>
+          <a:xfrm>
+            <a:off x="6784848" y="3364992"/>
+            <a:ext cx="73152" cy="475488"/>
+          </a:xfrm>
+          <a:prstGeom prst="rect">
+            <a:avLst/>
+          </a:prstGeom>
+          <a:noFill/>
+          <a:ln/>
+        </p:spPr>
+        <p:txBody>
+          <a:bodyPr wrap="square" lIns="0" tIns="0" rIns="0" bIns="0" rtlCol="0" anchor="ctr"/>
+          <a:lstStyle/>
+          <a:p>
+            <a:pPr algn="ctr" indent="0" marL="0">
+              <a:buNone/>
+            </a:pPr>
+            <a:r>
+              <a:rPr lang="en-US" sz="1600" b="1" dirty="0">
+                <a:solidFill>
+                  <a:srgbClr val="0D9488"/>
+                </a:solidFill>
+                <a:latin typeface="Trebuchet MS" pitchFamily="34" charset="0"/>
+                <a:ea typeface="Trebuchet MS" pitchFamily="34" charset="-122"/>
+                <a:cs typeface="Trebuchet MS" pitchFamily="34" charset="-120"/>
+              </a:rPr>
+              <a:t>·</a:t>
+            </a:r>
+            <a:endParaRPr lang="en-US" sz="1600" dirty="0"/>
+          </a:p>
+        </p:txBody>
+      </p:sp>
+      <p:sp>
+        <p:nvSpPr>
+          <p:cNvPr id="38" name="Shape 36"/>
+          <p:cNvSpPr/>
+          <p:nvPr/>
+        </p:nvSpPr>
+        <p:spPr>
+          <a:xfrm>
+            <a:off x="6858000" y="3364992"/>
+            <a:ext cx="1554480" cy="475488"/>
+          </a:xfrm>
+          <a:prstGeom prst="rect">
+            <a:avLst>
+              <a:gd name="adj" fmla="val 9615"/>
+            </a:avLst>
+          </a:prstGeom>
+          <a:solidFill>
+            <a:srgbClr val="FFFFFF"/>
+          </a:solidFill>
+          <a:ln w="12700">
+            <a:solidFill>
+              <a:srgbClr val="0D9488"/>
+            </a:solidFill>
+            <a:prstDash val="solid"/>
+          </a:ln>
+        </p:spPr>
+      </p:sp>
+      <p:sp>
+        <p:nvSpPr>
+          <p:cNvPr id="39" name="Text 37"/>
+          <p:cNvSpPr/>
+          <p:nvPr/>
+        </p:nvSpPr>
+        <p:spPr>
+          <a:xfrm>
+            <a:off x="6858000" y="3364992"/>
+            <a:ext cx="1554480" cy="475488"/>
+          </a:xfrm>
+          <a:prstGeom prst="rect">
+            <a:avLst/>
+          </a:prstGeom>
+          <a:noFill/>
+          <a:ln/>
+        </p:spPr>
+        <p:txBody>
+          <a:bodyPr wrap="square" lIns="0" tIns="0" rIns="0" bIns="0" rtlCol="0" anchor="ctr"/>
+          <a:lstStyle/>
+          <a:p>
+            <a:pPr algn="ctr" indent="0" marL="0">
+              <a:buNone/>
+            </a:pPr>
+            <a:r>
+              <a:rPr lang="en-US" sz="1400" b="1" dirty="0">
+                <a:solidFill>
+                  <a:srgbClr val="0D9488"/>
+                </a:solidFill>
+                <a:latin typeface="Trebuchet MS" pitchFamily="34" charset="0"/>
+                <a:ea typeface="Trebuchet MS" pitchFamily="34" charset="-122"/>
+                <a:cs typeface="Trebuchet MS" pitchFamily="34" charset="-120"/>
+              </a:rPr>
+              <a:t>tion</a:t>
+            </a:r>
+            <a:endParaRPr lang="en-US" sz="1400" dirty="0"/>
+          </a:p>
+        </p:txBody>
+      </p:sp>
+      <p:sp>
+        <p:nvSpPr>
+          <p:cNvPr id="40" name="Shape 38"/>
           <p:cNvSpPr/>
           <p:nvPr/>
         </p:nvSpPr>
@@ -31862,7 +30175,7 @@
       </p:sp>
       <p:sp>
         <p:nvSpPr>
-          <p:cNvPr id="35" name="Text 33"/>
+          <p:cNvPr id="41" name="Text 39"/>
           <p:cNvSpPr/>
           <p:nvPr/>
         </p:nvSpPr>
@@ -31901,7 +30214,7 @@
       </p:sp>
       <p:sp>
         <p:nvSpPr>
-          <p:cNvPr id="36" name="Shape 34"/>
+          <p:cNvPr id="42" name="Shape 40"/>
           <p:cNvSpPr/>
           <p:nvPr/>
         </p:nvSpPr>
@@ -31928,7 +30241,7 @@
       </p:sp>
       <p:sp>
         <p:nvSpPr>
-          <p:cNvPr id="37" name="Text 35"/>
+          <p:cNvPr id="43" name="Text 41"/>
           <p:cNvSpPr/>
           <p:nvPr/>
         </p:nvSpPr>
@@ -32390,7 +30703,7 @@
                 <a:ea typeface="Trebuchet MS" pitchFamily="34" charset="-122"/>
                 <a:cs typeface="Trebuchet MS" pitchFamily="34" charset="-120"/>
               </a:rPr>
-              <a:t>inspired</a:t>
+              <a:t>inspiration</a:t>
             </a:r>
             <a:endParaRPr lang="en-US" sz="2800" dirty="0"/>
           </a:p>
@@ -32680,7 +30993,7 @@
                 <a:ea typeface="Calibri" pitchFamily="34" charset="-122"/>
                 <a:cs typeface="Calibri" pitchFamily="34" charset="-120"/>
               </a:rPr>
-              <a:t>breathe</a:t>
+              <a:t>breathe, breath</a:t>
             </a:r>
             <a:endParaRPr lang="en-US" sz="850" dirty="0"/>
           </a:p>
@@ -32688,7 +31001,46 @@
       </p:sp>
       <p:sp>
         <p:nvSpPr>
-          <p:cNvPr id="22" name="Shape 20"/>
+          <p:cNvPr id="22" name="Text 20"/>
+          <p:cNvSpPr/>
+          <p:nvPr/>
+        </p:nvSpPr>
+        <p:spPr>
+          <a:xfrm>
+            <a:off x="4370832" y="2752344"/>
+            <a:ext cx="1828800" cy="182880"/>
+          </a:xfrm>
+          <a:prstGeom prst="rect">
+            <a:avLst/>
+          </a:prstGeom>
+          <a:noFill/>
+          <a:ln/>
+        </p:spPr>
+        <p:txBody>
+          <a:bodyPr wrap="square" lIns="0" tIns="0" rIns="0" bIns="0" rtlCol="0" anchor="t"/>
+          <a:lstStyle/>
+          <a:p>
+            <a:pPr algn="ctr" indent="0" marL="0">
+              <a:buNone/>
+            </a:pPr>
+            <a:r>
+              <a:rPr lang="en-US" sz="700" i="1" dirty="0">
+                <a:solidFill>
+                  <a:srgbClr val="94A3B8"/>
+                </a:solidFill>
+                <a:latin typeface="Calibri" pitchFamily="34" charset="0"/>
+                <a:ea typeface="Calibri" pitchFamily="34" charset="-122"/>
+                <a:cs typeface="Calibri" pitchFamily="34" charset="-120"/>
+              </a:rPr>
+              <a:t>'e' dropped before vowel suffix</a:t>
+            </a:r>
+            <a:endParaRPr lang="en-US" sz="700" dirty="0"/>
+          </a:p>
+        </p:txBody>
+      </p:sp>
+      <p:sp>
+        <p:nvSpPr>
+          <p:cNvPr id="23" name="Shape 21"/>
           <p:cNvSpPr/>
           <p:nvPr/>
         </p:nvSpPr>
@@ -32722,7 +31074,7 @@
       </p:sp>
       <p:sp>
         <p:nvSpPr>
-          <p:cNvPr id="23" name="Text 21"/>
+          <p:cNvPr id="24" name="Text 22"/>
           <p:cNvSpPr/>
           <p:nvPr/>
         </p:nvSpPr>
@@ -32753,7 +31105,7 @@
                 <a:ea typeface="Trebuchet MS" pitchFamily="34" charset="-122"/>
                 <a:cs typeface="Trebuchet MS" pitchFamily="34" charset="-120"/>
               </a:rPr>
-              <a:t>d</a:t>
+              <a:t>ation</a:t>
             </a:r>
             <a:endParaRPr lang="en-US" sz="1300" dirty="0"/>
           </a:p>
@@ -32761,7 +31113,7 @@
       </p:sp>
       <p:sp>
         <p:nvSpPr>
-          <p:cNvPr id="24" name="Text 22"/>
+          <p:cNvPr id="25" name="Text 23"/>
           <p:cNvSpPr/>
           <p:nvPr/>
         </p:nvSpPr>
@@ -32792,7 +31144,7 @@
                 <a:ea typeface="Calibri" pitchFamily="34" charset="-122"/>
                 <a:cs typeface="Calibri" pitchFamily="34" charset="-120"/>
               </a:rPr>
-              <a:t>past tense</a:t>
+              <a:t>the act or state of</a:t>
             </a:r>
             <a:endParaRPr lang="en-US" sz="850" dirty="0"/>
           </a:p>
@@ -32800,14 +31152,1109 @@
       </p:sp>
       <p:sp>
         <p:nvSpPr>
-          <p:cNvPr id="25" name="Text 23"/>
-          <p:cNvSpPr/>
-          <p:nvPr/>
-        </p:nvSpPr>
-        <p:spPr>
-          <a:xfrm>
-            <a:off x="6519672" y="2752344"/>
-            <a:ext cx="1828800" cy="182880"/>
+          <p:cNvPr id="26" name="Shape 24"/>
+          <p:cNvSpPr/>
+          <p:nvPr/>
+        </p:nvSpPr>
+        <p:spPr>
+          <a:xfrm>
+            <a:off x="365760" y="3273552"/>
+            <a:ext cx="1371600" cy="658368"/>
+          </a:xfrm>
+          <a:prstGeom prst="rect">
+            <a:avLst>
+              <a:gd name="adj" fmla="val 8333"/>
+            </a:avLst>
+          </a:prstGeom>
+          <a:solidFill>
+            <a:srgbClr val="E2E8F0"/>
+          </a:solidFill>
+          <a:ln w="12700">
+            <a:solidFill>
+              <a:srgbClr val="E2E8F0"/>
+            </a:solidFill>
+            <a:prstDash val="solid"/>
+          </a:ln>
+        </p:spPr>
+      </p:sp>
+      <p:sp>
+        <p:nvSpPr>
+          <p:cNvPr id="27" name="Text 25"/>
+          <p:cNvSpPr/>
+          <p:nvPr/>
+        </p:nvSpPr>
+        <p:spPr>
+          <a:xfrm>
+            <a:off x="365760" y="3273552"/>
+            <a:ext cx="1371600" cy="658368"/>
+          </a:xfrm>
+          <a:prstGeom prst="rect">
+            <a:avLst/>
+          </a:prstGeom>
+          <a:noFill/>
+          <a:ln/>
+        </p:spPr>
+        <p:txBody>
+          <a:bodyPr wrap="square" lIns="0" tIns="0" rIns="0" bIns="0" rtlCol="0" anchor="ctr"/>
+          <a:lstStyle/>
+          <a:p>
+            <a:pPr algn="ctr" indent="0" marL="0">
+              <a:buNone/>
+            </a:pPr>
+            <a:r>
+              <a:rPr lang="en-US" sz="1100" b="1" dirty="0">
+                <a:solidFill>
+                  <a:srgbClr val="475569"/>
+                </a:solidFill>
+                <a:latin typeface="Trebuchet MS" pitchFamily="34" charset="0"/>
+                <a:ea typeface="Trebuchet MS" pitchFamily="34" charset="-122"/>
+                <a:cs typeface="Trebuchet MS" pitchFamily="34" charset="-120"/>
+              </a:rPr>
+              <a:t>Syllables</a:t>
+            </a:r>
+            <a:endParaRPr lang="en-US" sz="1100" dirty="0"/>
+          </a:p>
+        </p:txBody>
+      </p:sp>
+      <p:sp>
+        <p:nvSpPr>
+          <p:cNvPr id="28" name="Shape 26"/>
+          <p:cNvSpPr/>
+          <p:nvPr/>
+        </p:nvSpPr>
+        <p:spPr>
+          <a:xfrm>
+            <a:off x="1874520" y="3273552"/>
+            <a:ext cx="6903720" cy="658368"/>
+          </a:xfrm>
+          <a:prstGeom prst="rect">
+            <a:avLst>
+              <a:gd name="adj" fmla="val 8333"/>
+            </a:avLst>
+          </a:prstGeom>
+          <a:solidFill>
+            <a:srgbClr val="CCFBF1"/>
+          </a:solidFill>
+          <a:ln w="12700">
+            <a:solidFill>
+              <a:srgbClr val="0D9488"/>
+            </a:solidFill>
+            <a:prstDash val="solid"/>
+          </a:ln>
+        </p:spPr>
+      </p:sp>
+      <p:sp>
+        <p:nvSpPr>
+          <p:cNvPr id="29" name="Shape 27"/>
+          <p:cNvSpPr/>
+          <p:nvPr/>
+        </p:nvSpPr>
+        <p:spPr>
+          <a:xfrm>
+            <a:off x="1975104" y="3364992"/>
+            <a:ext cx="1554480" cy="475488"/>
+          </a:xfrm>
+          <a:prstGeom prst="rect">
+            <a:avLst>
+              <a:gd name="adj" fmla="val 9615"/>
+            </a:avLst>
+          </a:prstGeom>
+          <a:solidFill>
+            <a:srgbClr val="FFFFFF"/>
+          </a:solidFill>
+          <a:ln w="12700">
+            <a:solidFill>
+              <a:srgbClr val="0D9488"/>
+            </a:solidFill>
+            <a:prstDash val="solid"/>
+          </a:ln>
+        </p:spPr>
+      </p:sp>
+      <p:sp>
+        <p:nvSpPr>
+          <p:cNvPr id="30" name="Text 28"/>
+          <p:cNvSpPr/>
+          <p:nvPr/>
+        </p:nvSpPr>
+        <p:spPr>
+          <a:xfrm>
+            <a:off x="1975104" y="3364992"/>
+            <a:ext cx="1554480" cy="475488"/>
+          </a:xfrm>
+          <a:prstGeom prst="rect">
+            <a:avLst/>
+          </a:prstGeom>
+          <a:noFill/>
+          <a:ln/>
+        </p:spPr>
+        <p:txBody>
+          <a:bodyPr wrap="square" lIns="0" tIns="0" rIns="0" bIns="0" rtlCol="0" anchor="ctr"/>
+          <a:lstStyle/>
+          <a:p>
+            <a:pPr algn="ctr" indent="0" marL="0">
+              <a:buNone/>
+            </a:pPr>
+            <a:r>
+              <a:rPr lang="en-US" sz="1400" b="1" dirty="0">
+                <a:solidFill>
+                  <a:srgbClr val="0D9488"/>
+                </a:solidFill>
+                <a:latin typeface="Trebuchet MS" pitchFamily="34" charset="0"/>
+                <a:ea typeface="Trebuchet MS" pitchFamily="34" charset="-122"/>
+                <a:cs typeface="Trebuchet MS" pitchFamily="34" charset="-120"/>
+              </a:rPr>
+              <a:t>in</a:t>
+            </a:r>
+            <a:endParaRPr lang="en-US" sz="1400" dirty="0"/>
+          </a:p>
+        </p:txBody>
+      </p:sp>
+      <p:sp>
+        <p:nvSpPr>
+          <p:cNvPr id="31" name="Text 29"/>
+          <p:cNvSpPr/>
+          <p:nvPr/>
+        </p:nvSpPr>
+        <p:spPr>
+          <a:xfrm>
+            <a:off x="3529584" y="3364992"/>
+            <a:ext cx="73152" cy="475488"/>
+          </a:xfrm>
+          <a:prstGeom prst="rect">
+            <a:avLst/>
+          </a:prstGeom>
+          <a:noFill/>
+          <a:ln/>
+        </p:spPr>
+        <p:txBody>
+          <a:bodyPr wrap="square" lIns="0" tIns="0" rIns="0" bIns="0" rtlCol="0" anchor="ctr"/>
+          <a:lstStyle/>
+          <a:p>
+            <a:pPr algn="ctr" indent="0" marL="0">
+              <a:buNone/>
+            </a:pPr>
+            <a:r>
+              <a:rPr lang="en-US" sz="1600" b="1" dirty="0">
+                <a:solidFill>
+                  <a:srgbClr val="0D9488"/>
+                </a:solidFill>
+                <a:latin typeface="Trebuchet MS" pitchFamily="34" charset="0"/>
+                <a:ea typeface="Trebuchet MS" pitchFamily="34" charset="-122"/>
+                <a:cs typeface="Trebuchet MS" pitchFamily="34" charset="-120"/>
+              </a:rPr>
+              <a:t>·</a:t>
+            </a:r>
+            <a:endParaRPr lang="en-US" sz="1600" dirty="0"/>
+          </a:p>
+        </p:txBody>
+      </p:sp>
+      <p:sp>
+        <p:nvSpPr>
+          <p:cNvPr id="32" name="Shape 30"/>
+          <p:cNvSpPr/>
+          <p:nvPr/>
+        </p:nvSpPr>
+        <p:spPr>
+          <a:xfrm>
+            <a:off x="3602736" y="3364992"/>
+            <a:ext cx="1554480" cy="475488"/>
+          </a:xfrm>
+          <a:prstGeom prst="rect">
+            <a:avLst>
+              <a:gd name="adj" fmla="val 9615"/>
+            </a:avLst>
+          </a:prstGeom>
+          <a:solidFill>
+            <a:srgbClr val="FFFFFF"/>
+          </a:solidFill>
+          <a:ln w="12700">
+            <a:solidFill>
+              <a:srgbClr val="0D9488"/>
+            </a:solidFill>
+            <a:prstDash val="solid"/>
+          </a:ln>
+        </p:spPr>
+      </p:sp>
+      <p:sp>
+        <p:nvSpPr>
+          <p:cNvPr id="33" name="Text 31"/>
+          <p:cNvSpPr/>
+          <p:nvPr/>
+        </p:nvSpPr>
+        <p:spPr>
+          <a:xfrm>
+            <a:off x="3602736" y="3364992"/>
+            <a:ext cx="1554480" cy="475488"/>
+          </a:xfrm>
+          <a:prstGeom prst="rect">
+            <a:avLst/>
+          </a:prstGeom>
+          <a:noFill/>
+          <a:ln/>
+        </p:spPr>
+        <p:txBody>
+          <a:bodyPr wrap="square" lIns="0" tIns="0" rIns="0" bIns="0" rtlCol="0" anchor="ctr"/>
+          <a:lstStyle/>
+          <a:p>
+            <a:pPr algn="ctr" indent="0" marL="0">
+              <a:buNone/>
+            </a:pPr>
+            <a:r>
+              <a:rPr lang="en-US" sz="1400" b="1" dirty="0">
+                <a:solidFill>
+                  <a:srgbClr val="0D9488"/>
+                </a:solidFill>
+                <a:latin typeface="Trebuchet MS" pitchFamily="34" charset="0"/>
+                <a:ea typeface="Trebuchet MS" pitchFamily="34" charset="-122"/>
+                <a:cs typeface="Trebuchet MS" pitchFamily="34" charset="-120"/>
+              </a:rPr>
+              <a:t>spi</a:t>
+            </a:r>
+            <a:endParaRPr lang="en-US" sz="1400" dirty="0"/>
+          </a:p>
+        </p:txBody>
+      </p:sp>
+      <p:sp>
+        <p:nvSpPr>
+          <p:cNvPr id="34" name="Text 32"/>
+          <p:cNvSpPr/>
+          <p:nvPr/>
+        </p:nvSpPr>
+        <p:spPr>
+          <a:xfrm>
+            <a:off x="5157216" y="3364992"/>
+            <a:ext cx="73152" cy="475488"/>
+          </a:xfrm>
+          <a:prstGeom prst="rect">
+            <a:avLst/>
+          </a:prstGeom>
+          <a:noFill/>
+          <a:ln/>
+        </p:spPr>
+        <p:txBody>
+          <a:bodyPr wrap="square" lIns="0" tIns="0" rIns="0" bIns="0" rtlCol="0" anchor="ctr"/>
+          <a:lstStyle/>
+          <a:p>
+            <a:pPr algn="ctr" indent="0" marL="0">
+              <a:buNone/>
+            </a:pPr>
+            <a:r>
+              <a:rPr lang="en-US" sz="1600" b="1" dirty="0">
+                <a:solidFill>
+                  <a:srgbClr val="0D9488"/>
+                </a:solidFill>
+                <a:latin typeface="Trebuchet MS" pitchFamily="34" charset="0"/>
+                <a:ea typeface="Trebuchet MS" pitchFamily="34" charset="-122"/>
+                <a:cs typeface="Trebuchet MS" pitchFamily="34" charset="-120"/>
+              </a:rPr>
+              <a:t>·</a:t>
+            </a:r>
+            <a:endParaRPr lang="en-US" sz="1600" dirty="0"/>
+          </a:p>
+        </p:txBody>
+      </p:sp>
+      <p:sp>
+        <p:nvSpPr>
+          <p:cNvPr id="35" name="Shape 33"/>
+          <p:cNvSpPr/>
+          <p:nvPr/>
+        </p:nvSpPr>
+        <p:spPr>
+          <a:xfrm>
+            <a:off x="5230368" y="3364992"/>
+            <a:ext cx="1554480" cy="475488"/>
+          </a:xfrm>
+          <a:prstGeom prst="rect">
+            <a:avLst>
+              <a:gd name="adj" fmla="val 9615"/>
+            </a:avLst>
+          </a:prstGeom>
+          <a:solidFill>
+            <a:srgbClr val="FFFFFF"/>
+          </a:solidFill>
+          <a:ln w="12700">
+            <a:solidFill>
+              <a:srgbClr val="0D9488"/>
+            </a:solidFill>
+            <a:prstDash val="solid"/>
+          </a:ln>
+        </p:spPr>
+      </p:sp>
+      <p:sp>
+        <p:nvSpPr>
+          <p:cNvPr id="36" name="Text 34"/>
+          <p:cNvSpPr/>
+          <p:nvPr/>
+        </p:nvSpPr>
+        <p:spPr>
+          <a:xfrm>
+            <a:off x="5230368" y="3364992"/>
+            <a:ext cx="1554480" cy="475488"/>
+          </a:xfrm>
+          <a:prstGeom prst="rect">
+            <a:avLst/>
+          </a:prstGeom>
+          <a:noFill/>
+          <a:ln/>
+        </p:spPr>
+        <p:txBody>
+          <a:bodyPr wrap="square" lIns="0" tIns="0" rIns="0" bIns="0" rtlCol="0" anchor="ctr"/>
+          <a:lstStyle/>
+          <a:p>
+            <a:pPr algn="ctr" indent="0" marL="0">
+              <a:buNone/>
+            </a:pPr>
+            <a:r>
+              <a:rPr lang="en-US" sz="1400" b="1" dirty="0">
+                <a:solidFill>
+                  <a:srgbClr val="0D9488"/>
+                </a:solidFill>
+                <a:latin typeface="Trebuchet MS" pitchFamily="34" charset="0"/>
+                <a:ea typeface="Trebuchet MS" pitchFamily="34" charset="-122"/>
+                <a:cs typeface="Trebuchet MS" pitchFamily="34" charset="-120"/>
+              </a:rPr>
+              <a:t>ra</a:t>
+            </a:r>
+            <a:endParaRPr lang="en-US" sz="1400" dirty="0"/>
+          </a:p>
+        </p:txBody>
+      </p:sp>
+      <p:sp>
+        <p:nvSpPr>
+          <p:cNvPr id="37" name="Text 35"/>
+          <p:cNvSpPr/>
+          <p:nvPr/>
+        </p:nvSpPr>
+        <p:spPr>
+          <a:xfrm>
+            <a:off x="6784848" y="3364992"/>
+            <a:ext cx="73152" cy="475488"/>
+          </a:xfrm>
+          <a:prstGeom prst="rect">
+            <a:avLst/>
+          </a:prstGeom>
+          <a:noFill/>
+          <a:ln/>
+        </p:spPr>
+        <p:txBody>
+          <a:bodyPr wrap="square" lIns="0" tIns="0" rIns="0" bIns="0" rtlCol="0" anchor="ctr"/>
+          <a:lstStyle/>
+          <a:p>
+            <a:pPr algn="ctr" indent="0" marL="0">
+              <a:buNone/>
+            </a:pPr>
+            <a:r>
+              <a:rPr lang="en-US" sz="1600" b="1" dirty="0">
+                <a:solidFill>
+                  <a:srgbClr val="0D9488"/>
+                </a:solidFill>
+                <a:latin typeface="Trebuchet MS" pitchFamily="34" charset="0"/>
+                <a:ea typeface="Trebuchet MS" pitchFamily="34" charset="-122"/>
+                <a:cs typeface="Trebuchet MS" pitchFamily="34" charset="-120"/>
+              </a:rPr>
+              <a:t>·</a:t>
+            </a:r>
+            <a:endParaRPr lang="en-US" sz="1600" dirty="0"/>
+          </a:p>
+        </p:txBody>
+      </p:sp>
+      <p:sp>
+        <p:nvSpPr>
+          <p:cNvPr id="38" name="Shape 36"/>
+          <p:cNvSpPr/>
+          <p:nvPr/>
+        </p:nvSpPr>
+        <p:spPr>
+          <a:xfrm>
+            <a:off x="6858000" y="3364992"/>
+            <a:ext cx="1554480" cy="475488"/>
+          </a:xfrm>
+          <a:prstGeom prst="rect">
+            <a:avLst>
+              <a:gd name="adj" fmla="val 9615"/>
+            </a:avLst>
+          </a:prstGeom>
+          <a:solidFill>
+            <a:srgbClr val="FFFFFF"/>
+          </a:solidFill>
+          <a:ln w="12700">
+            <a:solidFill>
+              <a:srgbClr val="0D9488"/>
+            </a:solidFill>
+            <a:prstDash val="solid"/>
+          </a:ln>
+        </p:spPr>
+      </p:sp>
+      <p:sp>
+        <p:nvSpPr>
+          <p:cNvPr id="39" name="Text 37"/>
+          <p:cNvSpPr/>
+          <p:nvPr/>
+        </p:nvSpPr>
+        <p:spPr>
+          <a:xfrm>
+            <a:off x="6858000" y="3364992"/>
+            <a:ext cx="1554480" cy="475488"/>
+          </a:xfrm>
+          <a:prstGeom prst="rect">
+            <a:avLst/>
+          </a:prstGeom>
+          <a:noFill/>
+          <a:ln/>
+        </p:spPr>
+        <p:txBody>
+          <a:bodyPr wrap="square" lIns="0" tIns="0" rIns="0" bIns="0" rtlCol="0" anchor="ctr"/>
+          <a:lstStyle/>
+          <a:p>
+            <a:pPr algn="ctr" indent="0" marL="0">
+              <a:buNone/>
+            </a:pPr>
+            <a:r>
+              <a:rPr lang="en-US" sz="1400" b="1" dirty="0">
+                <a:solidFill>
+                  <a:srgbClr val="0D9488"/>
+                </a:solidFill>
+                <a:latin typeface="Trebuchet MS" pitchFamily="34" charset="0"/>
+                <a:ea typeface="Trebuchet MS" pitchFamily="34" charset="-122"/>
+                <a:cs typeface="Trebuchet MS" pitchFamily="34" charset="-120"/>
+              </a:rPr>
+              <a:t>tion</a:t>
+            </a:r>
+            <a:endParaRPr lang="en-US" sz="1400" dirty="0"/>
+          </a:p>
+        </p:txBody>
+      </p:sp>
+      <p:sp>
+        <p:nvSpPr>
+          <p:cNvPr id="40" name="Shape 38"/>
+          <p:cNvSpPr/>
+          <p:nvPr/>
+        </p:nvSpPr>
+        <p:spPr>
+          <a:xfrm>
+            <a:off x="365760" y="4096512"/>
+            <a:ext cx="1371600" cy="804672"/>
+          </a:xfrm>
+          <a:prstGeom prst="rect">
+            <a:avLst>
+              <a:gd name="adj" fmla="val 6818"/>
+            </a:avLst>
+          </a:prstGeom>
+          <a:solidFill>
+            <a:srgbClr val="E2E8F0"/>
+          </a:solidFill>
+          <a:ln w="12700">
+            <a:solidFill>
+              <a:srgbClr val="E2E8F0"/>
+            </a:solidFill>
+            <a:prstDash val="solid"/>
+          </a:ln>
+        </p:spPr>
+      </p:sp>
+      <p:sp>
+        <p:nvSpPr>
+          <p:cNvPr id="41" name="Text 39"/>
+          <p:cNvSpPr/>
+          <p:nvPr/>
+        </p:nvSpPr>
+        <p:spPr>
+          <a:xfrm>
+            <a:off x="365760" y="4096512"/>
+            <a:ext cx="1371600" cy="804672"/>
+          </a:xfrm>
+          <a:prstGeom prst="rect">
+            <a:avLst/>
+          </a:prstGeom>
+          <a:noFill/>
+          <a:ln/>
+        </p:spPr>
+        <p:txBody>
+          <a:bodyPr wrap="square" lIns="0" tIns="0" rIns="0" bIns="0" rtlCol="0" anchor="ctr"/>
+          <a:lstStyle/>
+          <a:p>
+            <a:pPr algn="ctr" indent="0" marL="0">
+              <a:buNone/>
+            </a:pPr>
+            <a:r>
+              <a:rPr lang="en-US" sz="1100" b="1" dirty="0">
+                <a:solidFill>
+                  <a:srgbClr val="475569"/>
+                </a:solidFill>
+                <a:latin typeface="Trebuchet MS" pitchFamily="34" charset="0"/>
+                <a:ea typeface="Trebuchet MS" pitchFamily="34" charset="-122"/>
+                <a:cs typeface="Trebuchet MS" pitchFamily="34" charset="-120"/>
+              </a:rPr>
+              <a:t>Phonemes</a:t>
+            </a:r>
+            <a:endParaRPr lang="en-US" sz="1100" dirty="0"/>
+          </a:p>
+        </p:txBody>
+      </p:sp>
+      <p:sp>
+        <p:nvSpPr>
+          <p:cNvPr id="42" name="Shape 40"/>
+          <p:cNvSpPr/>
+          <p:nvPr/>
+        </p:nvSpPr>
+        <p:spPr>
+          <a:xfrm>
+            <a:off x="1874520" y="4096512"/>
+            <a:ext cx="6903720" cy="804672"/>
+          </a:xfrm>
+          <a:prstGeom prst="rect">
+            <a:avLst>
+              <a:gd name="adj" fmla="val 6818"/>
+            </a:avLst>
+          </a:prstGeom>
+          <a:solidFill>
+            <a:srgbClr val="FCE7F3"/>
+          </a:solidFill>
+          <a:ln w="12700">
+            <a:solidFill>
+              <a:srgbClr val="DB2777"/>
+            </a:solidFill>
+            <a:prstDash val="solid"/>
+          </a:ln>
+        </p:spPr>
+      </p:sp>
+      <p:sp>
+        <p:nvSpPr>
+          <p:cNvPr id="43" name="Shape 41"/>
+          <p:cNvSpPr/>
+          <p:nvPr/>
+        </p:nvSpPr>
+        <p:spPr>
+          <a:xfrm>
+            <a:off x="1951828" y="4169664"/>
+            <a:ext cx="603504" cy="384048"/>
+          </a:xfrm>
+          <a:prstGeom prst="rect">
+            <a:avLst>
+              <a:gd name="adj" fmla="val 9524"/>
+            </a:avLst>
+          </a:prstGeom>
+          <a:solidFill>
+            <a:srgbClr val="FFFFFF"/>
+          </a:solidFill>
+          <a:ln w="12700">
+            <a:solidFill>
+              <a:srgbClr val="DB2777"/>
+            </a:solidFill>
+            <a:prstDash val="solid"/>
+          </a:ln>
+        </p:spPr>
+      </p:sp>
+      <p:sp>
+        <p:nvSpPr>
+          <p:cNvPr id="44" name="Text 42"/>
+          <p:cNvSpPr/>
+          <p:nvPr/>
+        </p:nvSpPr>
+        <p:spPr>
+          <a:xfrm>
+            <a:off x="1951828" y="4169664"/>
+            <a:ext cx="603504" cy="384048"/>
+          </a:xfrm>
+          <a:prstGeom prst="rect">
+            <a:avLst/>
+          </a:prstGeom>
+          <a:noFill/>
+          <a:ln/>
+        </p:spPr>
+        <p:txBody>
+          <a:bodyPr wrap="square" lIns="0" tIns="0" rIns="0" bIns="0" rtlCol="0" anchor="ctr"/>
+          <a:lstStyle/>
+          <a:p>
+            <a:pPr algn="ctr" indent="0" marL="0">
+              <a:buNone/>
+            </a:pPr>
+            <a:r>
+              <a:rPr lang="en-US" sz="900" b="1" dirty="0">
+                <a:solidFill>
+                  <a:srgbClr val="9D174D"/>
+                </a:solidFill>
+                <a:latin typeface="Trebuchet MS" pitchFamily="34" charset="0"/>
+                <a:ea typeface="Trebuchet MS" pitchFamily="34" charset="-122"/>
+                <a:cs typeface="Trebuchet MS" pitchFamily="34" charset="-120"/>
+              </a:rPr>
+              <a:t>i</a:t>
+            </a:r>
+            <a:endParaRPr lang="en-US" sz="900" dirty="0"/>
+          </a:p>
+        </p:txBody>
+      </p:sp>
+      <p:sp>
+        <p:nvSpPr>
+          <p:cNvPr id="45" name="Shape 43"/>
+          <p:cNvSpPr/>
+          <p:nvPr/>
+        </p:nvSpPr>
+        <p:spPr>
+          <a:xfrm>
+            <a:off x="2605209" y="4169664"/>
+            <a:ext cx="603504" cy="384048"/>
+          </a:xfrm>
+          <a:prstGeom prst="rect">
+            <a:avLst>
+              <a:gd name="adj" fmla="val 9524"/>
+            </a:avLst>
+          </a:prstGeom>
+          <a:solidFill>
+            <a:srgbClr val="FFFFFF"/>
+          </a:solidFill>
+          <a:ln w="12700">
+            <a:solidFill>
+              <a:srgbClr val="DB2777"/>
+            </a:solidFill>
+            <a:prstDash val="solid"/>
+          </a:ln>
+        </p:spPr>
+      </p:sp>
+      <p:sp>
+        <p:nvSpPr>
+          <p:cNvPr id="46" name="Text 44"/>
+          <p:cNvSpPr/>
+          <p:nvPr/>
+        </p:nvSpPr>
+        <p:spPr>
+          <a:xfrm>
+            <a:off x="2605209" y="4169664"/>
+            <a:ext cx="603504" cy="384048"/>
+          </a:xfrm>
+          <a:prstGeom prst="rect">
+            <a:avLst/>
+          </a:prstGeom>
+          <a:noFill/>
+          <a:ln/>
+        </p:spPr>
+        <p:txBody>
+          <a:bodyPr wrap="square" lIns="0" tIns="0" rIns="0" bIns="0" rtlCol="0" anchor="ctr"/>
+          <a:lstStyle/>
+          <a:p>
+            <a:pPr algn="ctr" indent="0" marL="0">
+              <a:buNone/>
+            </a:pPr>
+            <a:r>
+              <a:rPr lang="en-US" sz="900" b="1" dirty="0">
+                <a:solidFill>
+                  <a:srgbClr val="9D174D"/>
+                </a:solidFill>
+                <a:latin typeface="Trebuchet MS" pitchFamily="34" charset="0"/>
+                <a:ea typeface="Trebuchet MS" pitchFamily="34" charset="-122"/>
+                <a:cs typeface="Trebuchet MS" pitchFamily="34" charset="-120"/>
+              </a:rPr>
+              <a:t>n</a:t>
+            </a:r>
+            <a:endParaRPr lang="en-US" sz="900" dirty="0"/>
+          </a:p>
+        </p:txBody>
+      </p:sp>
+      <p:sp>
+        <p:nvSpPr>
+          <p:cNvPr id="47" name="Shape 45"/>
+          <p:cNvSpPr/>
+          <p:nvPr/>
+        </p:nvSpPr>
+        <p:spPr>
+          <a:xfrm>
+            <a:off x="3258589" y="4169664"/>
+            <a:ext cx="603504" cy="384048"/>
+          </a:xfrm>
+          <a:prstGeom prst="rect">
+            <a:avLst>
+              <a:gd name="adj" fmla="val 9524"/>
+            </a:avLst>
+          </a:prstGeom>
+          <a:solidFill>
+            <a:srgbClr val="FFFFFF"/>
+          </a:solidFill>
+          <a:ln w="12700">
+            <a:solidFill>
+              <a:srgbClr val="DB2777"/>
+            </a:solidFill>
+            <a:prstDash val="solid"/>
+          </a:ln>
+        </p:spPr>
+      </p:sp>
+      <p:sp>
+        <p:nvSpPr>
+          <p:cNvPr id="48" name="Text 46"/>
+          <p:cNvSpPr/>
+          <p:nvPr/>
+        </p:nvSpPr>
+        <p:spPr>
+          <a:xfrm>
+            <a:off x="3258589" y="4169664"/>
+            <a:ext cx="603504" cy="384048"/>
+          </a:xfrm>
+          <a:prstGeom prst="rect">
+            <a:avLst/>
+          </a:prstGeom>
+          <a:noFill/>
+          <a:ln/>
+        </p:spPr>
+        <p:txBody>
+          <a:bodyPr wrap="square" lIns="0" tIns="0" rIns="0" bIns="0" rtlCol="0" anchor="ctr"/>
+          <a:lstStyle/>
+          <a:p>
+            <a:pPr algn="ctr" indent="0" marL="0">
+              <a:buNone/>
+            </a:pPr>
+            <a:r>
+              <a:rPr lang="en-US" sz="900" b="1" dirty="0">
+                <a:solidFill>
+                  <a:srgbClr val="9D174D"/>
+                </a:solidFill>
+                <a:latin typeface="Trebuchet MS" pitchFamily="34" charset="0"/>
+                <a:ea typeface="Trebuchet MS" pitchFamily="34" charset="-122"/>
+                <a:cs typeface="Trebuchet MS" pitchFamily="34" charset="-120"/>
+              </a:rPr>
+              <a:t>s</a:t>
+            </a:r>
+            <a:endParaRPr lang="en-US" sz="900" dirty="0"/>
+          </a:p>
+        </p:txBody>
+      </p:sp>
+      <p:sp>
+        <p:nvSpPr>
+          <p:cNvPr id="49" name="Shape 47"/>
+          <p:cNvSpPr/>
+          <p:nvPr/>
+        </p:nvSpPr>
+        <p:spPr>
+          <a:xfrm>
+            <a:off x="3911969" y="4169664"/>
+            <a:ext cx="603504" cy="384048"/>
+          </a:xfrm>
+          <a:prstGeom prst="rect">
+            <a:avLst>
+              <a:gd name="adj" fmla="val 9524"/>
+            </a:avLst>
+          </a:prstGeom>
+          <a:solidFill>
+            <a:srgbClr val="FFFFFF"/>
+          </a:solidFill>
+          <a:ln w="12700">
+            <a:solidFill>
+              <a:srgbClr val="DB2777"/>
+            </a:solidFill>
+            <a:prstDash val="solid"/>
+          </a:ln>
+        </p:spPr>
+      </p:sp>
+      <p:sp>
+        <p:nvSpPr>
+          <p:cNvPr id="50" name="Text 48"/>
+          <p:cNvSpPr/>
+          <p:nvPr/>
+        </p:nvSpPr>
+        <p:spPr>
+          <a:xfrm>
+            <a:off x="3911969" y="4169664"/>
+            <a:ext cx="603504" cy="384048"/>
+          </a:xfrm>
+          <a:prstGeom prst="rect">
+            <a:avLst/>
+          </a:prstGeom>
+          <a:noFill/>
+          <a:ln/>
+        </p:spPr>
+        <p:txBody>
+          <a:bodyPr wrap="square" lIns="0" tIns="0" rIns="0" bIns="0" rtlCol="0" anchor="ctr"/>
+          <a:lstStyle/>
+          <a:p>
+            <a:pPr algn="ctr" indent="0" marL="0">
+              <a:buNone/>
+            </a:pPr>
+            <a:r>
+              <a:rPr lang="en-US" sz="900" b="1" dirty="0">
+                <a:solidFill>
+                  <a:srgbClr val="9D174D"/>
+                </a:solidFill>
+                <a:latin typeface="Trebuchet MS" pitchFamily="34" charset="0"/>
+                <a:ea typeface="Trebuchet MS" pitchFamily="34" charset="-122"/>
+                <a:cs typeface="Trebuchet MS" pitchFamily="34" charset="-120"/>
+              </a:rPr>
+              <a:t>p</a:t>
+            </a:r>
+            <a:endParaRPr lang="en-US" sz="900" dirty="0"/>
+          </a:p>
+        </p:txBody>
+      </p:sp>
+      <p:sp>
+        <p:nvSpPr>
+          <p:cNvPr id="51" name="Shape 49"/>
+          <p:cNvSpPr/>
+          <p:nvPr/>
+        </p:nvSpPr>
+        <p:spPr>
+          <a:xfrm>
+            <a:off x="4565350" y="4169664"/>
+            <a:ext cx="603504" cy="384048"/>
+          </a:xfrm>
+          <a:prstGeom prst="rect">
+            <a:avLst>
+              <a:gd name="adj" fmla="val 9524"/>
+            </a:avLst>
+          </a:prstGeom>
+          <a:solidFill>
+            <a:srgbClr val="FFFFFF"/>
+          </a:solidFill>
+          <a:ln w="12700">
+            <a:solidFill>
+              <a:srgbClr val="DB2777"/>
+            </a:solidFill>
+            <a:prstDash val="solid"/>
+          </a:ln>
+        </p:spPr>
+      </p:sp>
+      <p:sp>
+        <p:nvSpPr>
+          <p:cNvPr id="52" name="Text 50"/>
+          <p:cNvSpPr/>
+          <p:nvPr/>
+        </p:nvSpPr>
+        <p:spPr>
+          <a:xfrm>
+            <a:off x="4565350" y="4169664"/>
+            <a:ext cx="603504" cy="384048"/>
+          </a:xfrm>
+          <a:prstGeom prst="rect">
+            <a:avLst/>
+          </a:prstGeom>
+          <a:noFill/>
+          <a:ln/>
+        </p:spPr>
+        <p:txBody>
+          <a:bodyPr wrap="square" lIns="0" tIns="0" rIns="0" bIns="0" rtlCol="0" anchor="ctr"/>
+          <a:lstStyle/>
+          <a:p>
+            <a:pPr algn="ctr" indent="0" marL="0">
+              <a:buNone/>
+            </a:pPr>
+            <a:r>
+              <a:rPr lang="en-US" sz="900" b="1" dirty="0">
+                <a:solidFill>
+                  <a:srgbClr val="9D174D"/>
+                </a:solidFill>
+                <a:latin typeface="Trebuchet MS" pitchFamily="34" charset="0"/>
+                <a:ea typeface="Trebuchet MS" pitchFamily="34" charset="-122"/>
+                <a:cs typeface="Trebuchet MS" pitchFamily="34" charset="-120"/>
+              </a:rPr>
+              <a:t>i</a:t>
+            </a:r>
+            <a:endParaRPr lang="en-US" sz="900" dirty="0"/>
+          </a:p>
+        </p:txBody>
+      </p:sp>
+      <p:sp>
+        <p:nvSpPr>
+          <p:cNvPr id="53" name="Shape 51"/>
+          <p:cNvSpPr/>
+          <p:nvPr/>
+        </p:nvSpPr>
+        <p:spPr>
+          <a:xfrm>
+            <a:off x="5218730" y="4169664"/>
+            <a:ext cx="603504" cy="384048"/>
+          </a:xfrm>
+          <a:prstGeom prst="rect">
+            <a:avLst>
+              <a:gd name="adj" fmla="val 9524"/>
+            </a:avLst>
+          </a:prstGeom>
+          <a:solidFill>
+            <a:srgbClr val="FFFFFF"/>
+          </a:solidFill>
+          <a:ln w="12700">
+            <a:solidFill>
+              <a:srgbClr val="DB2777"/>
+            </a:solidFill>
+            <a:prstDash val="solid"/>
+          </a:ln>
+        </p:spPr>
+      </p:sp>
+      <p:sp>
+        <p:nvSpPr>
+          <p:cNvPr id="54" name="Text 52"/>
+          <p:cNvSpPr/>
+          <p:nvPr/>
+        </p:nvSpPr>
+        <p:spPr>
+          <a:xfrm>
+            <a:off x="5218730" y="4169664"/>
+            <a:ext cx="603504" cy="384048"/>
+          </a:xfrm>
+          <a:prstGeom prst="rect">
+            <a:avLst/>
+          </a:prstGeom>
+          <a:noFill/>
+          <a:ln/>
+        </p:spPr>
+        <p:txBody>
+          <a:bodyPr wrap="square" lIns="0" tIns="0" rIns="0" bIns="0" rtlCol="0" anchor="ctr"/>
+          <a:lstStyle/>
+          <a:p>
+            <a:pPr algn="ctr" indent="0" marL="0">
+              <a:buNone/>
+            </a:pPr>
+            <a:r>
+              <a:rPr lang="en-US" sz="900" b="1" dirty="0">
+                <a:solidFill>
+                  <a:srgbClr val="9D174D"/>
+                </a:solidFill>
+                <a:latin typeface="Trebuchet MS" pitchFamily="34" charset="0"/>
+                <a:ea typeface="Trebuchet MS" pitchFamily="34" charset="-122"/>
+                <a:cs typeface="Trebuchet MS" pitchFamily="34" charset="-120"/>
+              </a:rPr>
+              <a:t>r</a:t>
+            </a:r>
+            <a:endParaRPr lang="en-US" sz="900" dirty="0"/>
+          </a:p>
+        </p:txBody>
+      </p:sp>
+      <p:sp>
+        <p:nvSpPr>
+          <p:cNvPr id="55" name="Shape 53"/>
+          <p:cNvSpPr/>
+          <p:nvPr/>
+        </p:nvSpPr>
+        <p:spPr>
+          <a:xfrm>
+            <a:off x="5872111" y="4169664"/>
+            <a:ext cx="603504" cy="384048"/>
+          </a:xfrm>
+          <a:prstGeom prst="rect">
+            <a:avLst>
+              <a:gd name="adj" fmla="val 9524"/>
+            </a:avLst>
+          </a:prstGeom>
+          <a:solidFill>
+            <a:srgbClr val="FFFFFF"/>
+          </a:solidFill>
+          <a:ln w="12700">
+            <a:solidFill>
+              <a:srgbClr val="DB2777"/>
+            </a:solidFill>
+            <a:prstDash val="solid"/>
+          </a:ln>
+        </p:spPr>
+      </p:sp>
+      <p:sp>
+        <p:nvSpPr>
+          <p:cNvPr id="56" name="Text 54"/>
+          <p:cNvSpPr/>
+          <p:nvPr/>
+        </p:nvSpPr>
+        <p:spPr>
+          <a:xfrm>
+            <a:off x="5872111" y="4169664"/>
+            <a:ext cx="603504" cy="384048"/>
+          </a:xfrm>
+          <a:prstGeom prst="rect">
+            <a:avLst/>
+          </a:prstGeom>
+          <a:noFill/>
+          <a:ln/>
+        </p:spPr>
+        <p:txBody>
+          <a:bodyPr wrap="square" lIns="0" tIns="0" rIns="0" bIns="0" rtlCol="0" anchor="ctr"/>
+          <a:lstStyle/>
+          <a:p>
+            <a:pPr algn="ctr" indent="0" marL="0">
+              <a:buNone/>
+            </a:pPr>
+            <a:r>
+              <a:rPr lang="en-US" sz="900" b="1" dirty="0">
+                <a:solidFill>
+                  <a:srgbClr val="9D174D"/>
+                </a:solidFill>
+                <a:latin typeface="Trebuchet MS" pitchFamily="34" charset="0"/>
+                <a:ea typeface="Trebuchet MS" pitchFamily="34" charset="-122"/>
+                <a:cs typeface="Trebuchet MS" pitchFamily="34" charset="-120"/>
+              </a:rPr>
+              <a:t>a</a:t>
+            </a:r>
+            <a:endParaRPr lang="en-US" sz="900" dirty="0"/>
+          </a:p>
+        </p:txBody>
+      </p:sp>
+      <p:sp>
+        <p:nvSpPr>
+          <p:cNvPr id="57" name="Shape 55"/>
+          <p:cNvSpPr/>
+          <p:nvPr/>
+        </p:nvSpPr>
+        <p:spPr>
+          <a:xfrm>
+            <a:off x="6525491" y="4169664"/>
+            <a:ext cx="603504" cy="384048"/>
+          </a:xfrm>
+          <a:prstGeom prst="rect">
+            <a:avLst>
+              <a:gd name="adj" fmla="val 9524"/>
+            </a:avLst>
+          </a:prstGeom>
+          <a:solidFill>
+            <a:srgbClr val="FFFFFF"/>
+          </a:solidFill>
+          <a:ln w="12700">
+            <a:solidFill>
+              <a:srgbClr val="DB2777"/>
+            </a:solidFill>
+            <a:prstDash val="solid"/>
+          </a:ln>
+        </p:spPr>
+      </p:sp>
+      <p:sp>
+        <p:nvSpPr>
+          <p:cNvPr id="58" name="Text 56"/>
+          <p:cNvSpPr/>
+          <p:nvPr/>
+        </p:nvSpPr>
+        <p:spPr>
+          <a:xfrm>
+            <a:off x="6525491" y="4169664"/>
+            <a:ext cx="603504" cy="384048"/>
+          </a:xfrm>
+          <a:prstGeom prst="rect">
+            <a:avLst/>
+          </a:prstGeom>
+          <a:noFill/>
+          <a:ln/>
+        </p:spPr>
+        <p:txBody>
+          <a:bodyPr wrap="square" lIns="0" tIns="0" rIns="0" bIns="0" rtlCol="0" anchor="ctr"/>
+          <a:lstStyle/>
+          <a:p>
+            <a:pPr algn="ctr" indent="0" marL="0">
+              <a:buNone/>
+            </a:pPr>
+            <a:r>
+              <a:rPr lang="en-US" sz="900" b="1" dirty="0">
+                <a:solidFill>
+                  <a:srgbClr val="9D174D"/>
+                </a:solidFill>
+                <a:latin typeface="Trebuchet MS" pitchFamily="34" charset="0"/>
+                <a:ea typeface="Trebuchet MS" pitchFamily="34" charset="-122"/>
+                <a:cs typeface="Trebuchet MS" pitchFamily="34" charset="-120"/>
+              </a:rPr>
+              <a:t>t</a:t>
+            </a:r>
+            <a:endParaRPr lang="en-US" sz="900" dirty="0"/>
+          </a:p>
+        </p:txBody>
+      </p:sp>
+      <p:sp>
+        <p:nvSpPr>
+          <p:cNvPr id="59" name="Text 57"/>
+          <p:cNvSpPr/>
+          <p:nvPr/>
+        </p:nvSpPr>
+        <p:spPr>
+          <a:xfrm>
+            <a:off x="6525491" y="4572000"/>
+            <a:ext cx="603504" cy="219456"/>
           </a:xfrm>
           <a:prstGeom prst="rect">
             <a:avLst/>
@@ -32823,7 +32270,7 @@
               <a:buNone/>
             </a:pPr>
             <a:r>
-              <a:rPr lang="en-US" sz="700" i="1" dirty="0">
+              <a:rPr lang="en-US" sz="750" i="1" dirty="0">
                 <a:solidFill>
                   <a:srgbClr val="94A3B8"/>
                 </a:solidFill>
@@ -32831,49 +32278,49 @@
                 <a:ea typeface="Calibri" pitchFamily="34" charset="-122"/>
                 <a:cs typeface="Calibri" pitchFamily="34" charset="-120"/>
               </a:rPr>
-              <a:t>'e' dropped before vowel suffix</a:t>
-            </a:r>
-            <a:endParaRPr lang="en-US" sz="700" dirty="0"/>
-          </a:p>
-        </p:txBody>
-      </p:sp>
-      <p:sp>
-        <p:nvSpPr>
-          <p:cNvPr id="26" name="Shape 24"/>
-          <p:cNvSpPr/>
-          <p:nvPr/>
-        </p:nvSpPr>
-        <p:spPr>
-          <a:xfrm>
-            <a:off x="365760" y="3273552"/>
-            <a:ext cx="1371600" cy="658368"/>
+              <a:t>/sh/</a:t>
+            </a:r>
+            <a:endParaRPr lang="en-US" sz="750" dirty="0"/>
+          </a:p>
+        </p:txBody>
+      </p:sp>
+      <p:sp>
+        <p:nvSpPr>
+          <p:cNvPr id="60" name="Shape 58"/>
+          <p:cNvSpPr/>
+          <p:nvPr/>
+        </p:nvSpPr>
+        <p:spPr>
+          <a:xfrm>
+            <a:off x="7178871" y="4169664"/>
+            <a:ext cx="603504" cy="384048"/>
           </a:xfrm>
           <a:prstGeom prst="rect">
             <a:avLst>
-              <a:gd name="adj" fmla="val 8333"/>
+              <a:gd name="adj" fmla="val 9524"/>
             </a:avLst>
           </a:prstGeom>
           <a:solidFill>
-            <a:srgbClr val="E2E8F0"/>
-          </a:solidFill>
-          <a:ln w="12700">
-            <a:solidFill>
-              <a:srgbClr val="E2E8F0"/>
-            </a:solidFill>
-            <a:prstDash val="solid"/>
-          </a:ln>
-        </p:spPr>
-      </p:sp>
-      <p:sp>
-        <p:nvSpPr>
-          <p:cNvPr id="27" name="Text 25"/>
-          <p:cNvSpPr/>
-          <p:nvPr/>
-        </p:nvSpPr>
-        <p:spPr>
-          <a:xfrm>
-            <a:off x="365760" y="3273552"/>
-            <a:ext cx="1371600" cy="658368"/>
+            <a:srgbClr val="FFFFFF"/>
+          </a:solidFill>
+          <a:ln w="12700">
+            <a:solidFill>
+              <a:srgbClr val="DB2777"/>
+            </a:solidFill>
+            <a:prstDash val="solid"/>
+          </a:ln>
+        </p:spPr>
+      </p:sp>
+      <p:sp>
+        <p:nvSpPr>
+          <p:cNvPr id="61" name="Text 59"/>
+          <p:cNvSpPr/>
+          <p:nvPr/>
+        </p:nvSpPr>
+        <p:spPr>
+          <a:xfrm>
+            <a:off x="7178871" y="4169664"/>
+            <a:ext cx="603504" cy="384048"/>
           </a:xfrm>
           <a:prstGeom prst="rect">
             <a:avLst/>
@@ -32889,84 +32336,57 @@
               <a:buNone/>
             </a:pPr>
             <a:r>
-              <a:rPr lang="en-US" sz="1100" b="1" dirty="0">
-                <a:solidFill>
-                  <a:srgbClr val="475569"/>
+              <a:rPr lang="en-US" sz="900" b="1" dirty="0">
+                <a:solidFill>
+                  <a:srgbClr val="9D174D"/>
                 </a:solidFill>
                 <a:latin typeface="Trebuchet MS" pitchFamily="34" charset="0"/>
                 <a:ea typeface="Trebuchet MS" pitchFamily="34" charset="-122"/>
                 <a:cs typeface="Trebuchet MS" pitchFamily="34" charset="-120"/>
               </a:rPr>
-              <a:t>Syllables</a:t>
-            </a:r>
-            <a:endParaRPr lang="en-US" sz="1100" dirty="0"/>
-          </a:p>
-        </p:txBody>
-      </p:sp>
-      <p:sp>
-        <p:nvSpPr>
-          <p:cNvPr id="28" name="Shape 26"/>
-          <p:cNvSpPr/>
-          <p:nvPr/>
-        </p:nvSpPr>
-        <p:spPr>
-          <a:xfrm>
-            <a:off x="1874520" y="3273552"/>
-            <a:ext cx="6903720" cy="658368"/>
+              <a:t>io</a:t>
+            </a:r>
+            <a:endParaRPr lang="en-US" sz="900" dirty="0"/>
+          </a:p>
+        </p:txBody>
+      </p:sp>
+      <p:sp>
+        <p:nvSpPr>
+          <p:cNvPr id="62" name="Shape 60"/>
+          <p:cNvSpPr/>
+          <p:nvPr/>
+        </p:nvSpPr>
+        <p:spPr>
+          <a:xfrm>
+            <a:off x="7832252" y="4169664"/>
+            <a:ext cx="603504" cy="384048"/>
           </a:xfrm>
           <a:prstGeom prst="rect">
             <a:avLst>
-              <a:gd name="adj" fmla="val 8333"/>
+              <a:gd name="adj" fmla="val 9524"/>
             </a:avLst>
           </a:prstGeom>
           <a:solidFill>
-            <a:srgbClr val="CCFBF1"/>
-          </a:solidFill>
-          <a:ln w="12700">
-            <a:solidFill>
-              <a:srgbClr val="0D9488"/>
-            </a:solidFill>
-            <a:prstDash val="solid"/>
-          </a:ln>
-        </p:spPr>
-      </p:sp>
-      <p:sp>
-        <p:nvSpPr>
-          <p:cNvPr id="29" name="Shape 27"/>
-          <p:cNvSpPr/>
-          <p:nvPr/>
-        </p:nvSpPr>
-        <p:spPr>
-          <a:xfrm>
-            <a:off x="2999232" y="3364992"/>
-            <a:ext cx="1645920" cy="475488"/>
-          </a:xfrm>
-          <a:prstGeom prst="rect">
-            <a:avLst>
-              <a:gd name="adj" fmla="val 9615"/>
-            </a:avLst>
-          </a:prstGeom>
-          <a:solidFill>
             <a:srgbClr val="FFFFFF"/>
           </a:solidFill>
           <a:ln w="12700">
             <a:solidFill>
-              <a:srgbClr val="0D9488"/>
-            </a:solidFill>
-            <a:prstDash val="solid"/>
-          </a:ln>
-        </p:spPr>
-      </p:sp>
-      <p:sp>
-        <p:nvSpPr>
-          <p:cNvPr id="30" name="Text 28"/>
-          <p:cNvSpPr/>
-          <p:nvPr/>
-        </p:nvSpPr>
-        <p:spPr>
-          <a:xfrm>
-            <a:off x="2999232" y="3364992"/>
-            <a:ext cx="1645920" cy="475488"/>
+              <a:srgbClr val="DB2777"/>
+            </a:solidFill>
+            <a:prstDash val="solid"/>
+          </a:ln>
+        </p:spPr>
+      </p:sp>
+      <p:sp>
+        <p:nvSpPr>
+          <p:cNvPr id="63" name="Text 61"/>
+          <p:cNvSpPr/>
+          <p:nvPr/>
+        </p:nvSpPr>
+        <p:spPr>
+          <a:xfrm>
+            <a:off x="7832252" y="4169664"/>
+            <a:ext cx="603504" cy="384048"/>
           </a:xfrm>
           <a:prstGeom prst="rect">
             <a:avLst/>
@@ -32982,675 +32402,15 @@
               <a:buNone/>
             </a:pPr>
             <a:r>
-              <a:rPr lang="en-US" sz="1400" b="1" dirty="0">
-                <a:solidFill>
-                  <a:srgbClr val="0D9488"/>
+              <a:rPr lang="en-US" sz="900" b="1" dirty="0">
+                <a:solidFill>
+                  <a:srgbClr val="9D174D"/>
                 </a:solidFill>
                 <a:latin typeface="Trebuchet MS" pitchFamily="34" charset="0"/>
                 <a:ea typeface="Trebuchet MS" pitchFamily="34" charset="-122"/>
                 <a:cs typeface="Trebuchet MS" pitchFamily="34" charset="-120"/>
               </a:rPr>
-              <a:t>in</a:t>
-            </a:r>
-            <a:endParaRPr lang="en-US" sz="1400" dirty="0"/>
-          </a:p>
-        </p:txBody>
-      </p:sp>
-      <p:sp>
-        <p:nvSpPr>
-          <p:cNvPr id="31" name="Text 29"/>
-          <p:cNvSpPr/>
-          <p:nvPr/>
-        </p:nvSpPr>
-        <p:spPr>
-          <a:xfrm>
-            <a:off x="4645152" y="3364992"/>
-            <a:ext cx="1097280" cy="475488"/>
-          </a:xfrm>
-          <a:prstGeom prst="rect">
-            <a:avLst/>
-          </a:prstGeom>
-          <a:noFill/>
-          <a:ln/>
-        </p:spPr>
-        <p:txBody>
-          <a:bodyPr wrap="square" lIns="0" tIns="0" rIns="0" bIns="0" rtlCol="0" anchor="ctr"/>
-          <a:lstStyle/>
-          <a:p>
-            <a:pPr algn="ctr" indent="0" marL="0">
-              <a:buNone/>
-            </a:pPr>
-            <a:r>
-              <a:rPr lang="en-US" sz="1600" b="1" dirty="0">
-                <a:solidFill>
-                  <a:srgbClr val="0D9488"/>
-                </a:solidFill>
-                <a:latin typeface="Trebuchet MS" pitchFamily="34" charset="0"/>
-                <a:ea typeface="Trebuchet MS" pitchFamily="34" charset="-122"/>
-                <a:cs typeface="Trebuchet MS" pitchFamily="34" charset="-120"/>
-              </a:rPr>
-              <a:t>·</a:t>
-            </a:r>
-            <a:endParaRPr lang="en-US" sz="1600" dirty="0"/>
-          </a:p>
-        </p:txBody>
-      </p:sp>
-      <p:sp>
-        <p:nvSpPr>
-          <p:cNvPr id="32" name="Shape 30"/>
-          <p:cNvSpPr/>
-          <p:nvPr/>
-        </p:nvSpPr>
-        <p:spPr>
-          <a:xfrm>
-            <a:off x="5742432" y="3364992"/>
-            <a:ext cx="1645920" cy="475488"/>
-          </a:xfrm>
-          <a:prstGeom prst="rect">
-            <a:avLst>
-              <a:gd name="adj" fmla="val 9615"/>
-            </a:avLst>
-          </a:prstGeom>
-          <a:solidFill>
-            <a:srgbClr val="FFFFFF"/>
-          </a:solidFill>
-          <a:ln w="12700">
-            <a:solidFill>
-              <a:srgbClr val="0D9488"/>
-            </a:solidFill>
-            <a:prstDash val="solid"/>
-          </a:ln>
-        </p:spPr>
-      </p:sp>
-      <p:sp>
-        <p:nvSpPr>
-          <p:cNvPr id="33" name="Text 31"/>
-          <p:cNvSpPr/>
-          <p:nvPr/>
-        </p:nvSpPr>
-        <p:spPr>
-          <a:xfrm>
-            <a:off x="5742432" y="3364992"/>
-            <a:ext cx="1645920" cy="475488"/>
-          </a:xfrm>
-          <a:prstGeom prst="rect">
-            <a:avLst/>
-          </a:prstGeom>
-          <a:noFill/>
-          <a:ln/>
-        </p:spPr>
-        <p:txBody>
-          <a:bodyPr wrap="square" lIns="0" tIns="0" rIns="0" bIns="0" rtlCol="0" anchor="ctr"/>
-          <a:lstStyle/>
-          <a:p>
-            <a:pPr algn="ctr" indent="0" marL="0">
-              <a:buNone/>
-            </a:pPr>
-            <a:r>
-              <a:rPr lang="en-US" sz="1400" b="1" dirty="0">
-                <a:solidFill>
-                  <a:srgbClr val="0D9488"/>
-                </a:solidFill>
-                <a:latin typeface="Trebuchet MS" pitchFamily="34" charset="0"/>
-                <a:ea typeface="Trebuchet MS" pitchFamily="34" charset="-122"/>
-                <a:cs typeface="Trebuchet MS" pitchFamily="34" charset="-120"/>
-              </a:rPr>
-              <a:t>spired</a:t>
-            </a:r>
-            <a:endParaRPr lang="en-US" sz="1400" dirty="0"/>
-          </a:p>
-        </p:txBody>
-      </p:sp>
-      <p:sp>
-        <p:nvSpPr>
-          <p:cNvPr id="34" name="Shape 32"/>
-          <p:cNvSpPr/>
-          <p:nvPr/>
-        </p:nvSpPr>
-        <p:spPr>
-          <a:xfrm>
-            <a:off x="365760" y="4096512"/>
-            <a:ext cx="1371600" cy="804672"/>
-          </a:xfrm>
-          <a:prstGeom prst="rect">
-            <a:avLst>
-              <a:gd name="adj" fmla="val 6818"/>
-            </a:avLst>
-          </a:prstGeom>
-          <a:solidFill>
-            <a:srgbClr val="E2E8F0"/>
-          </a:solidFill>
-          <a:ln w="12700">
-            <a:solidFill>
-              <a:srgbClr val="E2E8F0"/>
-            </a:solidFill>
-            <a:prstDash val="solid"/>
-          </a:ln>
-        </p:spPr>
-      </p:sp>
-      <p:sp>
-        <p:nvSpPr>
-          <p:cNvPr id="35" name="Text 33"/>
-          <p:cNvSpPr/>
-          <p:nvPr/>
-        </p:nvSpPr>
-        <p:spPr>
-          <a:xfrm>
-            <a:off x="365760" y="4096512"/>
-            <a:ext cx="1371600" cy="804672"/>
-          </a:xfrm>
-          <a:prstGeom prst="rect">
-            <a:avLst/>
-          </a:prstGeom>
-          <a:noFill/>
-          <a:ln/>
-        </p:spPr>
-        <p:txBody>
-          <a:bodyPr wrap="square" lIns="0" tIns="0" rIns="0" bIns="0" rtlCol="0" anchor="ctr"/>
-          <a:lstStyle/>
-          <a:p>
-            <a:pPr algn="ctr" indent="0" marL="0">
-              <a:buNone/>
-            </a:pPr>
-            <a:r>
-              <a:rPr lang="en-US" sz="1100" b="1" dirty="0">
-                <a:solidFill>
-                  <a:srgbClr val="475569"/>
-                </a:solidFill>
-                <a:latin typeface="Trebuchet MS" pitchFamily="34" charset="0"/>
-                <a:ea typeface="Trebuchet MS" pitchFamily="34" charset="-122"/>
-                <a:cs typeface="Trebuchet MS" pitchFamily="34" charset="-120"/>
-              </a:rPr>
-              <a:t>Phonemes</a:t>
-            </a:r>
-            <a:endParaRPr lang="en-US" sz="1100" dirty="0"/>
-          </a:p>
-        </p:txBody>
-      </p:sp>
-      <p:sp>
-        <p:nvSpPr>
-          <p:cNvPr id="36" name="Shape 34"/>
-          <p:cNvSpPr/>
-          <p:nvPr/>
-        </p:nvSpPr>
-        <p:spPr>
-          <a:xfrm>
-            <a:off x="1874520" y="4096512"/>
-            <a:ext cx="6903720" cy="658368"/>
-          </a:xfrm>
-          <a:prstGeom prst="rect">
-            <a:avLst>
-              <a:gd name="adj" fmla="val 8333"/>
-            </a:avLst>
-          </a:prstGeom>
-          <a:solidFill>
-            <a:srgbClr val="FCE7F3"/>
-          </a:solidFill>
-          <a:ln w="12700">
-            <a:solidFill>
-              <a:srgbClr val="DB2777"/>
-            </a:solidFill>
-            <a:prstDash val="solid"/>
-          </a:ln>
-        </p:spPr>
-      </p:sp>
-      <p:sp>
-        <p:nvSpPr>
-          <p:cNvPr id="37" name="Shape 35"/>
-          <p:cNvSpPr/>
-          <p:nvPr/>
-        </p:nvSpPr>
-        <p:spPr>
-          <a:xfrm>
-            <a:off x="2124837" y="4169664"/>
-            <a:ext cx="685800" cy="475488"/>
-          </a:xfrm>
-          <a:prstGeom prst="rect">
-            <a:avLst>
-              <a:gd name="adj" fmla="val 7692"/>
-            </a:avLst>
-          </a:prstGeom>
-          <a:solidFill>
-            <a:srgbClr val="FFFFFF"/>
-          </a:solidFill>
-          <a:ln w="12700">
-            <a:solidFill>
-              <a:srgbClr val="DB2777"/>
-            </a:solidFill>
-            <a:prstDash val="solid"/>
-          </a:ln>
-        </p:spPr>
-      </p:sp>
-      <p:sp>
-        <p:nvSpPr>
-          <p:cNvPr id="38" name="Text 36"/>
-          <p:cNvSpPr/>
-          <p:nvPr/>
-        </p:nvSpPr>
-        <p:spPr>
-          <a:xfrm>
-            <a:off x="2124837" y="4169664"/>
-            <a:ext cx="685800" cy="475488"/>
-          </a:xfrm>
-          <a:prstGeom prst="rect">
-            <a:avLst/>
-          </a:prstGeom>
-          <a:noFill/>
-          <a:ln/>
-        </p:spPr>
-        <p:txBody>
-          <a:bodyPr wrap="square" lIns="0" tIns="0" rIns="0" bIns="0" rtlCol="0" anchor="ctr"/>
-          <a:lstStyle/>
-          <a:p>
-            <a:pPr algn="ctr" indent="0" marL="0">
-              <a:buNone/>
-            </a:pPr>
-            <a:r>
-              <a:rPr lang="en-US" sz="900" b="1" dirty="0">
-                <a:solidFill>
-                  <a:srgbClr val="9D174D"/>
-                </a:solidFill>
-                <a:latin typeface="Trebuchet MS" pitchFamily="34" charset="0"/>
-                <a:ea typeface="Trebuchet MS" pitchFamily="34" charset="-122"/>
-                <a:cs typeface="Trebuchet MS" pitchFamily="34" charset="-120"/>
-              </a:rPr>
-              <a:t>i</a:t>
-            </a:r>
-            <a:endParaRPr lang="en-US" sz="900" dirty="0"/>
-          </a:p>
-        </p:txBody>
-      </p:sp>
-      <p:sp>
-        <p:nvSpPr>
-          <p:cNvPr id="39" name="Shape 37"/>
-          <p:cNvSpPr/>
-          <p:nvPr/>
-        </p:nvSpPr>
-        <p:spPr>
-          <a:xfrm>
-            <a:off x="3033522" y="4169664"/>
-            <a:ext cx="685800" cy="475488"/>
-          </a:xfrm>
-          <a:prstGeom prst="rect">
-            <a:avLst>
-              <a:gd name="adj" fmla="val 7692"/>
-            </a:avLst>
-          </a:prstGeom>
-          <a:solidFill>
-            <a:srgbClr val="FFFFFF"/>
-          </a:solidFill>
-          <a:ln w="12700">
-            <a:solidFill>
-              <a:srgbClr val="DB2777"/>
-            </a:solidFill>
-            <a:prstDash val="solid"/>
-          </a:ln>
-        </p:spPr>
-      </p:sp>
-      <p:sp>
-        <p:nvSpPr>
-          <p:cNvPr id="40" name="Text 38"/>
-          <p:cNvSpPr/>
-          <p:nvPr/>
-        </p:nvSpPr>
-        <p:spPr>
-          <a:xfrm>
-            <a:off x="3033522" y="4169664"/>
-            <a:ext cx="685800" cy="475488"/>
-          </a:xfrm>
-          <a:prstGeom prst="rect">
-            <a:avLst/>
-          </a:prstGeom>
-          <a:noFill/>
-          <a:ln/>
-        </p:spPr>
-        <p:txBody>
-          <a:bodyPr wrap="square" lIns="0" tIns="0" rIns="0" bIns="0" rtlCol="0" anchor="ctr"/>
-          <a:lstStyle/>
-          <a:p>
-            <a:pPr algn="ctr" indent="0" marL="0">
-              <a:buNone/>
-            </a:pPr>
-            <a:r>
-              <a:rPr lang="en-US" sz="900" b="1" dirty="0">
-                <a:solidFill>
-                  <a:srgbClr val="9D174D"/>
-                </a:solidFill>
-                <a:latin typeface="Trebuchet MS" pitchFamily="34" charset="0"/>
-                <a:ea typeface="Trebuchet MS" pitchFamily="34" charset="-122"/>
-                <a:cs typeface="Trebuchet MS" pitchFamily="34" charset="-120"/>
-              </a:rPr>
               <a:t>n</a:t>
-            </a:r>
-            <a:endParaRPr lang="en-US" sz="900" dirty="0"/>
-          </a:p>
-        </p:txBody>
-      </p:sp>
-      <p:sp>
-        <p:nvSpPr>
-          <p:cNvPr id="41" name="Shape 39"/>
-          <p:cNvSpPr/>
-          <p:nvPr/>
-        </p:nvSpPr>
-        <p:spPr>
-          <a:xfrm>
-            <a:off x="3942207" y="4169664"/>
-            <a:ext cx="685800" cy="475488"/>
-          </a:xfrm>
-          <a:prstGeom prst="rect">
-            <a:avLst>
-              <a:gd name="adj" fmla="val 7692"/>
-            </a:avLst>
-          </a:prstGeom>
-          <a:solidFill>
-            <a:srgbClr val="FFFFFF"/>
-          </a:solidFill>
-          <a:ln w="12700">
-            <a:solidFill>
-              <a:srgbClr val="DB2777"/>
-            </a:solidFill>
-            <a:prstDash val="solid"/>
-          </a:ln>
-        </p:spPr>
-      </p:sp>
-      <p:sp>
-        <p:nvSpPr>
-          <p:cNvPr id="42" name="Text 40"/>
-          <p:cNvSpPr/>
-          <p:nvPr/>
-        </p:nvSpPr>
-        <p:spPr>
-          <a:xfrm>
-            <a:off x="3942207" y="4169664"/>
-            <a:ext cx="685800" cy="475488"/>
-          </a:xfrm>
-          <a:prstGeom prst="rect">
-            <a:avLst/>
-          </a:prstGeom>
-          <a:noFill/>
-          <a:ln/>
-        </p:spPr>
-        <p:txBody>
-          <a:bodyPr wrap="square" lIns="0" tIns="0" rIns="0" bIns="0" rtlCol="0" anchor="ctr"/>
-          <a:lstStyle/>
-          <a:p>
-            <a:pPr algn="ctr" indent="0" marL="0">
-              <a:buNone/>
-            </a:pPr>
-            <a:r>
-              <a:rPr lang="en-US" sz="900" b="1" dirty="0">
-                <a:solidFill>
-                  <a:srgbClr val="9D174D"/>
-                </a:solidFill>
-                <a:latin typeface="Trebuchet MS" pitchFamily="34" charset="0"/>
-                <a:ea typeface="Trebuchet MS" pitchFamily="34" charset="-122"/>
-                <a:cs typeface="Trebuchet MS" pitchFamily="34" charset="-120"/>
-              </a:rPr>
-              <a:t>s</a:t>
-            </a:r>
-            <a:endParaRPr lang="en-US" sz="900" dirty="0"/>
-          </a:p>
-        </p:txBody>
-      </p:sp>
-      <p:sp>
-        <p:nvSpPr>
-          <p:cNvPr id="43" name="Shape 41"/>
-          <p:cNvSpPr/>
-          <p:nvPr/>
-        </p:nvSpPr>
-        <p:spPr>
-          <a:xfrm>
-            <a:off x="4850892" y="4169664"/>
-            <a:ext cx="685800" cy="475488"/>
-          </a:xfrm>
-          <a:prstGeom prst="rect">
-            <a:avLst>
-              <a:gd name="adj" fmla="val 7692"/>
-            </a:avLst>
-          </a:prstGeom>
-          <a:solidFill>
-            <a:srgbClr val="FFFFFF"/>
-          </a:solidFill>
-          <a:ln w="12700">
-            <a:solidFill>
-              <a:srgbClr val="DB2777"/>
-            </a:solidFill>
-            <a:prstDash val="solid"/>
-          </a:ln>
-        </p:spPr>
-      </p:sp>
-      <p:sp>
-        <p:nvSpPr>
-          <p:cNvPr id="44" name="Text 42"/>
-          <p:cNvSpPr/>
-          <p:nvPr/>
-        </p:nvSpPr>
-        <p:spPr>
-          <a:xfrm>
-            <a:off x="4850892" y="4169664"/>
-            <a:ext cx="685800" cy="475488"/>
-          </a:xfrm>
-          <a:prstGeom prst="rect">
-            <a:avLst/>
-          </a:prstGeom>
-          <a:noFill/>
-          <a:ln/>
-        </p:spPr>
-        <p:txBody>
-          <a:bodyPr wrap="square" lIns="0" tIns="0" rIns="0" bIns="0" rtlCol="0" anchor="ctr"/>
-          <a:lstStyle/>
-          <a:p>
-            <a:pPr algn="ctr" indent="0" marL="0">
-              <a:buNone/>
-            </a:pPr>
-            <a:r>
-              <a:rPr lang="en-US" sz="900" b="1" dirty="0">
-                <a:solidFill>
-                  <a:srgbClr val="9D174D"/>
-                </a:solidFill>
-                <a:latin typeface="Trebuchet MS" pitchFamily="34" charset="0"/>
-                <a:ea typeface="Trebuchet MS" pitchFamily="34" charset="-122"/>
-                <a:cs typeface="Trebuchet MS" pitchFamily="34" charset="-120"/>
-              </a:rPr>
-              <a:t>p</a:t>
-            </a:r>
-            <a:endParaRPr lang="en-US" sz="900" dirty="0"/>
-          </a:p>
-        </p:txBody>
-      </p:sp>
-      <p:sp>
-        <p:nvSpPr>
-          <p:cNvPr id="45" name="Shape 43"/>
-          <p:cNvSpPr/>
-          <p:nvPr/>
-        </p:nvSpPr>
-        <p:spPr>
-          <a:xfrm>
-            <a:off x="5759577" y="4169664"/>
-            <a:ext cx="685800" cy="475488"/>
-          </a:xfrm>
-          <a:prstGeom prst="rect">
-            <a:avLst>
-              <a:gd name="adj" fmla="val 7692"/>
-            </a:avLst>
-          </a:prstGeom>
-          <a:solidFill>
-            <a:srgbClr val="FFFFFF"/>
-          </a:solidFill>
-          <a:ln w="12700">
-            <a:solidFill>
-              <a:srgbClr val="DB2777"/>
-            </a:solidFill>
-            <a:prstDash val="solid"/>
-          </a:ln>
-        </p:spPr>
-      </p:sp>
-      <p:sp>
-        <p:nvSpPr>
-          <p:cNvPr id="46" name="Text 44"/>
-          <p:cNvSpPr/>
-          <p:nvPr/>
-        </p:nvSpPr>
-        <p:spPr>
-          <a:xfrm>
-            <a:off x="5759577" y="4169664"/>
-            <a:ext cx="685800" cy="475488"/>
-          </a:xfrm>
-          <a:prstGeom prst="rect">
-            <a:avLst/>
-          </a:prstGeom>
-          <a:noFill/>
-          <a:ln/>
-        </p:spPr>
-        <p:txBody>
-          <a:bodyPr wrap="square" lIns="0" tIns="0" rIns="0" bIns="0" rtlCol="0" anchor="ctr"/>
-          <a:lstStyle/>
-          <a:p>
-            <a:pPr algn="ctr" indent="0" marL="0">
-              <a:buNone/>
-            </a:pPr>
-            <a:r>
-              <a:rPr lang="en-US" sz="900" b="1" dirty="0">
-                <a:solidFill>
-                  <a:srgbClr val="9D174D"/>
-                </a:solidFill>
-                <a:latin typeface="Trebuchet MS" pitchFamily="34" charset="0"/>
-                <a:ea typeface="Trebuchet MS" pitchFamily="34" charset="-122"/>
-                <a:cs typeface="Trebuchet MS" pitchFamily="34" charset="-120"/>
-              </a:rPr>
-              <a:t>i</a:t>
-            </a:r>
-            <a:endParaRPr lang="en-US" sz="900" dirty="0"/>
-          </a:p>
-        </p:txBody>
-      </p:sp>
-      <p:sp>
-        <p:nvSpPr>
-          <p:cNvPr id="47" name="Shape 45"/>
-          <p:cNvSpPr/>
-          <p:nvPr/>
-        </p:nvSpPr>
-        <p:spPr>
-          <a:xfrm>
-            <a:off x="6668262" y="4169664"/>
-            <a:ext cx="685800" cy="475488"/>
-          </a:xfrm>
-          <a:prstGeom prst="rect">
-            <a:avLst>
-              <a:gd name="adj" fmla="val 7692"/>
-            </a:avLst>
-          </a:prstGeom>
-          <a:solidFill>
-            <a:srgbClr val="FFFFFF"/>
-          </a:solidFill>
-          <a:ln w="12700">
-            <a:solidFill>
-              <a:srgbClr val="DB2777"/>
-            </a:solidFill>
-            <a:prstDash val="solid"/>
-          </a:ln>
-        </p:spPr>
-      </p:sp>
-      <p:sp>
-        <p:nvSpPr>
-          <p:cNvPr id="48" name="Text 46"/>
-          <p:cNvSpPr/>
-          <p:nvPr/>
-        </p:nvSpPr>
-        <p:spPr>
-          <a:xfrm>
-            <a:off x="6668262" y="4169664"/>
-            <a:ext cx="685800" cy="475488"/>
-          </a:xfrm>
-          <a:prstGeom prst="rect">
-            <a:avLst/>
-          </a:prstGeom>
-          <a:noFill/>
-          <a:ln/>
-        </p:spPr>
-        <p:txBody>
-          <a:bodyPr wrap="square" lIns="0" tIns="0" rIns="0" bIns="0" rtlCol="0" anchor="ctr"/>
-          <a:lstStyle/>
-          <a:p>
-            <a:pPr algn="ctr" indent="0" marL="0">
-              <a:buNone/>
-            </a:pPr>
-            <a:r>
-              <a:rPr lang="en-US" sz="900" b="1" dirty="0">
-                <a:solidFill>
-                  <a:srgbClr val="9D174D"/>
-                </a:solidFill>
-                <a:latin typeface="Trebuchet MS" pitchFamily="34" charset="0"/>
-                <a:ea typeface="Trebuchet MS" pitchFamily="34" charset="-122"/>
-                <a:cs typeface="Trebuchet MS" pitchFamily="34" charset="-120"/>
-              </a:rPr>
-              <a:t>r</a:t>
-            </a:r>
-            <a:endParaRPr lang="en-US" sz="900" dirty="0"/>
-          </a:p>
-        </p:txBody>
-      </p:sp>
-      <p:sp>
-        <p:nvSpPr>
-          <p:cNvPr id="49" name="Shape 47"/>
-          <p:cNvSpPr/>
-          <p:nvPr/>
-        </p:nvSpPr>
-        <p:spPr>
-          <a:xfrm>
-            <a:off x="7576947" y="4169664"/>
-            <a:ext cx="685800" cy="475488"/>
-          </a:xfrm>
-          <a:prstGeom prst="rect">
-            <a:avLst>
-              <a:gd name="adj" fmla="val 7692"/>
-            </a:avLst>
-          </a:prstGeom>
-          <a:solidFill>
-            <a:srgbClr val="FFFFFF"/>
-          </a:solidFill>
-          <a:ln w="12700">
-            <a:solidFill>
-              <a:srgbClr val="DB2777"/>
-            </a:solidFill>
-            <a:prstDash val="solid"/>
-          </a:ln>
-        </p:spPr>
-      </p:sp>
-      <p:sp>
-        <p:nvSpPr>
-          <p:cNvPr id="50" name="Text 48"/>
-          <p:cNvSpPr/>
-          <p:nvPr/>
-        </p:nvSpPr>
-        <p:spPr>
-          <a:xfrm>
-            <a:off x="7576947" y="4169664"/>
-            <a:ext cx="685800" cy="475488"/>
-          </a:xfrm>
-          <a:prstGeom prst="rect">
-            <a:avLst/>
-          </a:prstGeom>
-          <a:noFill/>
-          <a:ln/>
-        </p:spPr>
-        <p:txBody>
-          <a:bodyPr wrap="square" lIns="0" tIns="0" rIns="0" bIns="0" rtlCol="0" anchor="ctr"/>
-          <a:lstStyle/>
-          <a:p>
-            <a:pPr algn="ctr" indent="0" marL="0">
-              <a:buNone/>
-            </a:pPr>
-            <a:r>
-              <a:rPr lang="en-US" sz="900" b="1" dirty="0">
-                <a:solidFill>
-                  <a:srgbClr val="9D174D"/>
-                </a:solidFill>
-                <a:latin typeface="Trebuchet MS" pitchFamily="34" charset="0"/>
-                <a:ea typeface="Trebuchet MS" pitchFamily="34" charset="-122"/>
-                <a:cs typeface="Trebuchet MS" pitchFamily="34" charset="-120"/>
-              </a:rPr>
-              <a:t>ed</a:t>
             </a:r>
             <a:endParaRPr lang="en-US" sz="900" dirty="0"/>
           </a:p>
@@ -35910,7 +34670,7 @@
                 <a:ea typeface="Trebuchet MS" pitchFamily="34" charset="-122"/>
                 <a:cs typeface="Trebuchet MS" pitchFamily="34" charset="-120"/>
               </a:rPr>
-              <a:t>per-</a:t>
+              <a:t>re-</a:t>
             </a:r>
             <a:endParaRPr lang="en-US" sz="1300" dirty="0"/>
           </a:p>
@@ -35999,7 +34759,7 @@
                 <a:ea typeface="Trebuchet MS" pitchFamily="34" charset="-122"/>
                 <a:cs typeface="Trebuchet MS" pitchFamily="34" charset="-120"/>
               </a:rPr>
-              <a:t>-acy</a:t>
+              <a:t>-ational</a:t>
             </a:r>
             <a:endParaRPr lang="en-US" sz="1300" dirty="0"/>
           </a:p>
@@ -36063,7 +34823,7 @@
                 <a:ea typeface="Trebuchet MS" pitchFamily="34" charset="-122"/>
                 <a:cs typeface="Trebuchet MS" pitchFamily="34" charset="-120"/>
               </a:rPr>
-              <a:t>trans-</a:t>
+              <a:t>per-</a:t>
             </a:r>
             <a:endParaRPr lang="en-US" sz="1300" dirty="0"/>
           </a:p>
@@ -36152,7 +34912,7 @@
                 <a:ea typeface="Trebuchet MS" pitchFamily="34" charset="-122"/>
                 <a:cs typeface="Trebuchet MS" pitchFamily="34" charset="-120"/>
               </a:rPr>
-              <a:t>-e</a:t>
+              <a:t>-acy</a:t>
             </a:r>
             <a:endParaRPr lang="en-US" sz="1300" dirty="0"/>
           </a:p>
@@ -36455,7 +35215,7 @@
                 <a:ea typeface="Trebuchet MS" pitchFamily="34" charset="-122"/>
                 <a:cs typeface="Trebuchet MS" pitchFamily="34" charset="-120"/>
               </a:rPr>
-              <a:t>perspire</a:t>
+              <a:t>respire</a:t>
             </a:r>
             <a:endParaRPr lang="en-US" sz="1200" dirty="0"/>
           </a:p>
@@ -36521,7 +35281,7 @@
                 <a:ea typeface="Trebuchet MS" pitchFamily="34" charset="-122"/>
                 <a:cs typeface="Trebuchet MS" pitchFamily="34" charset="-120"/>
               </a:rPr>
-              <a:t>respire</a:t>
+              <a:t>perspire</a:t>
             </a:r>
             <a:endParaRPr lang="en-US" sz="1200" dirty="0"/>
           </a:p>
@@ -36719,7 +35479,7 @@
                 <a:ea typeface="Trebuchet MS" pitchFamily="34" charset="-122"/>
                 <a:cs typeface="Trebuchet MS" pitchFamily="34" charset="-120"/>
               </a:rPr>
-              <a:t>conspiracy</a:t>
+              <a:t>expiration</a:t>
             </a:r>
             <a:endParaRPr lang="en-US" sz="1200" dirty="0"/>
           </a:p>
@@ -37907,7 +36667,7 @@
                 <a:ea typeface="Calibri" pitchFamily="34" charset="-122"/>
                 <a:cs typeface="Calibri" pitchFamily="34" charset="-120"/>
               </a:rPr>
-              <a:t>1.  The root 'spire' comes from a Latin word meaning to breathe.</a:t>
+              <a:t>1.  The root 'spire' only appears in words about buildings.</a:t>
             </a:r>
             <a:endParaRPr lang="en-US" sz="1300" dirty="0"/>
           </a:p>
@@ -37930,11 +36690,11 @@
             </a:avLst>
           </a:prstGeom>
           <a:solidFill>
-            <a:srgbClr val="DCFCE7"/>
-          </a:solidFill>
-          <a:ln w="12700">
-            <a:solidFill>
-              <a:srgbClr val="16A34A"/>
+            <a:srgbClr val="FEE2E2"/>
+          </a:solidFill>
+          <a:ln w="12700">
+            <a:solidFill>
+              <a:srgbClr val="DC2626"/>
             </a:solidFill>
             <a:prstDash val="solid"/>
           </a:ln>
@@ -37967,13 +36727,13 @@
             <a:r>
               <a:rPr lang="en-US" sz="1100" b="1" dirty="0">
                 <a:solidFill>
-                  <a:srgbClr val="16A34A"/>
+                  <a:srgbClr val="DC2626"/>
                 </a:solidFill>
                 <a:latin typeface="Trebuchet MS" pitchFamily="34" charset="0"/>
                 <a:ea typeface="Trebuchet MS" pitchFamily="34" charset="-122"/>
                 <a:cs typeface="Trebuchet MS" pitchFamily="34" charset="-120"/>
               </a:rPr>
-              <a:t>TRUE</a:t>
+              <a:t>FALSE</a:t>
             </a:r>
             <a:endParaRPr lang="en-US" sz="1100" dirty="0"/>
           </a:p>
@@ -38046,7 +36806,7 @@
                 <a:ea typeface="Calibri" pitchFamily="34" charset="-122"/>
                 <a:cs typeface="Calibri" pitchFamily="34" charset="-120"/>
               </a:rPr>
-              <a:t>2.  The word 'expire' means to start something new.</a:t>
+              <a:t>2.  The prefix 'in' in 'inspire' means into or upon.</a:t>
             </a:r>
             <a:endParaRPr lang="en-US" sz="1300" dirty="0"/>
           </a:p>
@@ -38069,11 +36829,11 @@
             </a:avLst>
           </a:prstGeom>
           <a:solidFill>
-            <a:srgbClr val="FEE2E2"/>
-          </a:solidFill>
-          <a:ln w="12700">
-            <a:solidFill>
-              <a:srgbClr val="DC2626"/>
+            <a:srgbClr val="DCFCE7"/>
+          </a:solidFill>
+          <a:ln w="12700">
+            <a:solidFill>
+              <a:srgbClr val="16A34A"/>
             </a:solidFill>
             <a:prstDash val="solid"/>
           </a:ln>
@@ -38106,13 +36866,13 @@
             <a:r>
               <a:rPr lang="en-US" sz="1100" b="1" dirty="0">
                 <a:solidFill>
-                  <a:srgbClr val="DC2626"/>
+                  <a:srgbClr val="16A34A"/>
                 </a:solidFill>
                 <a:latin typeface="Trebuchet MS" pitchFamily="34" charset="0"/>
                 <a:ea typeface="Trebuchet MS" pitchFamily="34" charset="-122"/>
                 <a:cs typeface="Trebuchet MS" pitchFamily="34" charset="-120"/>
               </a:rPr>
-              <a:t>FALSE</a:t>
+              <a:t>TRUE</a:t>
             </a:r>
             <a:endParaRPr lang="en-US" sz="1100" dirty="0"/>
           </a:p>
@@ -38185,7 +36945,7 @@
                 <a:ea typeface="Calibri" pitchFamily="34" charset="-122"/>
                 <a:cs typeface="Calibri" pitchFamily="34" charset="-120"/>
               </a:rPr>
-              <a:t>3.  The word 'inspire' contains the prefix 'in' and the root 'spire'.</a:t>
+              <a:t>3.  The word 'expire' means to start something new and fresh.</a:t>
             </a:r>
             <a:endParaRPr lang="en-US" sz="1300" dirty="0"/>
           </a:p>
@@ -38208,11 +36968,11 @@
             </a:avLst>
           </a:prstGeom>
           <a:solidFill>
-            <a:srgbClr val="DCFCE7"/>
-          </a:solidFill>
-          <a:ln w="12700">
-            <a:solidFill>
-              <a:srgbClr val="16A34A"/>
+            <a:srgbClr val="FEE2E2"/>
+          </a:solidFill>
+          <a:ln w="12700">
+            <a:solidFill>
+              <a:srgbClr val="DC2626"/>
             </a:solidFill>
             <a:prstDash val="solid"/>
           </a:ln>
@@ -38245,13 +37005,13 @@
             <a:r>
               <a:rPr lang="en-US" sz="1100" b="1" dirty="0">
                 <a:solidFill>
-                  <a:srgbClr val="16A34A"/>
+                  <a:srgbClr val="DC2626"/>
                 </a:solidFill>
                 <a:latin typeface="Trebuchet MS" pitchFamily="34" charset="0"/>
                 <a:ea typeface="Trebuchet MS" pitchFamily="34" charset="-122"/>
                 <a:cs typeface="Trebuchet MS" pitchFamily="34" charset="-120"/>
               </a:rPr>
-              <a:t>TRUE</a:t>
+              <a:t>FALSE</a:t>
             </a:r>
             <a:endParaRPr lang="en-US" sz="1100" dirty="0"/>
           </a:p>
@@ -38324,7 +37084,7 @@
                 <a:ea typeface="Calibri" pitchFamily="34" charset="-122"/>
                 <a:cs typeface="Calibri" pitchFamily="34" charset="-120"/>
               </a:rPr>
-              <a:t>4.  When you perspire, your body is releasing breath and sweat through your skin.</a:t>
+              <a:t>4.  When you perspire, you are sweating because your body is hot.</a:t>
             </a:r>
             <a:endParaRPr lang="en-US" sz="1300" dirty="0"/>
           </a:p>
@@ -38463,7 +37223,7 @@
                 <a:ea typeface="Calibri" pitchFamily="34" charset="-122"/>
                 <a:cs typeface="Calibri" pitchFamily="34" charset="-120"/>
               </a:rPr>
-              <a:t>5.  The root 'spire' is found in the word 'spider'.</a:t>
+              <a:t>5.  The root 'spire' comes from a Latin word meaning to breathe.</a:t>
             </a:r>
             <a:endParaRPr lang="en-US" sz="1300" dirty="0"/>
           </a:p>
@@ -38486,11 +37246,11 @@
             </a:avLst>
           </a:prstGeom>
           <a:solidFill>
-            <a:srgbClr val="FEE2E2"/>
-          </a:solidFill>
-          <a:ln w="12700">
-            <a:solidFill>
-              <a:srgbClr val="DC2626"/>
+            <a:srgbClr val="DCFCE7"/>
+          </a:solidFill>
+          <a:ln w="12700">
+            <a:solidFill>
+              <a:srgbClr val="16A34A"/>
             </a:solidFill>
             <a:prstDash val="solid"/>
           </a:ln>
@@ -38523,13 +37283,13 @@
             <a:r>
               <a:rPr lang="en-US" sz="1100" b="1" dirty="0">
                 <a:solidFill>
-                  <a:srgbClr val="DC2626"/>
+                  <a:srgbClr val="16A34A"/>
                 </a:solidFill>
                 <a:latin typeface="Trebuchet MS" pitchFamily="34" charset="0"/>
                 <a:ea typeface="Trebuchet MS" pitchFamily="34" charset="-122"/>
                 <a:cs typeface="Trebuchet MS" pitchFamily="34" charset="-120"/>
               </a:rPr>
-              <a:t>FALSE</a:t>
+              <a:t>TRUE</a:t>
             </a:r>
             <a:endParaRPr lang="en-US" sz="1100" dirty="0"/>
           </a:p>
@@ -39300,7 +38060,7 @@
                 <a:ea typeface="Trebuchet MS" pitchFamily="34" charset="-122"/>
                 <a:cs typeface="Trebuchet MS" pitchFamily="34" charset="-120"/>
               </a:rPr>
-              <a:t>perspire</a:t>
+              <a:t>respire</a:t>
             </a:r>
             <a:endParaRPr lang="en-US" sz="1300" dirty="0"/>
           </a:p>
@@ -39366,7 +38126,7 @@
                 <a:ea typeface="Trebuchet MS" pitchFamily="34" charset="-122"/>
                 <a:cs typeface="Trebuchet MS" pitchFamily="34" charset="-120"/>
               </a:rPr>
-              <a:t>respire</a:t>
+              <a:t>perspire</a:t>
             </a:r>
             <a:endParaRPr lang="en-US" sz="1300" dirty="0"/>
           </a:p>
@@ -40589,7 +39349,7 @@
                 <a:ea typeface="Trebuchet MS" pitchFamily="34" charset="-122"/>
                 <a:cs typeface="Trebuchet MS" pitchFamily="34" charset="-120"/>
               </a:rPr>
-              <a:t>per-</a:t>
+              <a:t>re-</a:t>
             </a:r>
             <a:endParaRPr lang="en-US" sz="1300" dirty="0"/>
           </a:p>
@@ -40678,7 +39438,7 @@
                 <a:ea typeface="Trebuchet MS" pitchFamily="34" charset="-122"/>
                 <a:cs typeface="Trebuchet MS" pitchFamily="34" charset="-120"/>
               </a:rPr>
-              <a:t>-acy</a:t>
+              <a:t>-ational</a:t>
             </a:r>
             <a:endParaRPr lang="en-US" sz="1300" dirty="0"/>
           </a:p>
@@ -40742,7 +39502,7 @@
                 <a:ea typeface="Trebuchet MS" pitchFamily="34" charset="-122"/>
                 <a:cs typeface="Trebuchet MS" pitchFamily="34" charset="-120"/>
               </a:rPr>
-              <a:t>trans-</a:t>
+              <a:t>per-</a:t>
             </a:r>
             <a:endParaRPr lang="en-US" sz="1300" dirty="0"/>
           </a:p>
@@ -40831,7 +39591,7 @@
                 <a:ea typeface="Trebuchet MS" pitchFamily="34" charset="-122"/>
                 <a:cs typeface="Trebuchet MS" pitchFamily="34" charset="-120"/>
               </a:rPr>
-              <a:t>-e</a:t>
+              <a:t>-acy</a:t>
             </a:r>
             <a:endParaRPr lang="en-US" sz="1300" dirty="0"/>
           </a:p>
@@ -41742,7 +40502,7 @@
                 <a:ea typeface="Calibri" pitchFamily="34" charset="-122"/>
                 <a:cs typeface="Calibri" pitchFamily="34" charset="-120"/>
               </a:rPr>
-              <a:t>A feeling or idea that makes you want to create or do something wonderful.</a:t>
+              <a:t>A great idea or feeling that makes you want to create or do something amazing.</a:t>
             </a:r>
             <a:endParaRPr lang="en-US" sz="1200" dirty="0"/>
           </a:p>
@@ -41881,7 +40641,7 @@
                 <a:ea typeface="Calibri" pitchFamily="34" charset="-122"/>
                 <a:cs typeface="Calibri" pitchFamily="34" charset="-120"/>
               </a:rPr>
-              <a:t>To breathe; the process of taking in oxygen and releasing carbon dioxide.</a:t>
+              <a:t>To sweat, like when you get hot after running around at sport.</a:t>
             </a:r>
             <a:endParaRPr lang="en-US" sz="1200" dirty="0"/>
           </a:p>
@@ -42020,7 +40780,7 @@
                 <a:ea typeface="Calibri" pitchFamily="34" charset="-122"/>
                 <a:cs typeface="Calibri" pitchFamily="34" charset="-120"/>
               </a:rPr>
-              <a:t>To sweat, especially when you are hot or nervous.</a:t>
+              <a:t>To breathe in and out; what living things do to get energy from oxygen.</a:t>
             </a:r>
             <a:endParaRPr lang="en-US" sz="1200" dirty="0"/>
           </a:p>
@@ -42093,7 +40853,7 @@
                 <a:ea typeface="Trebuchet MS" pitchFamily="34" charset="-122"/>
                 <a:cs typeface="Trebuchet MS" pitchFamily="34" charset="-120"/>
               </a:rPr>
-              <a:t>perspire</a:t>
+              <a:t>respire</a:t>
             </a:r>
             <a:endParaRPr lang="en-US" sz="1200" dirty="0"/>
           </a:p>
@@ -42159,7 +40919,7 @@
                 <a:ea typeface="Calibri" pitchFamily="34" charset="-122"/>
                 <a:cs typeface="Calibri" pitchFamily="34" charset="-120"/>
               </a:rPr>
-              <a:t>To have a strong hope or ambition to achieve something.</a:t>
+              <a:t>To really want to achieve something great, like aspiring to become a scientist.</a:t>
             </a:r>
             <a:endParaRPr lang="en-US" sz="1200" dirty="0"/>
           </a:p>
@@ -42232,7 +40992,7 @@
                 <a:ea typeface="Trebuchet MS" pitchFamily="34" charset="-122"/>
                 <a:cs typeface="Trebuchet MS" pitchFamily="34" charset="-120"/>
               </a:rPr>
-              <a:t>respire</a:t>
+              <a:t>perspire</a:t>
             </a:r>
             <a:endParaRPr lang="en-US" sz="1200" dirty="0"/>
           </a:p>
@@ -42298,7 +41058,7 @@
                 <a:ea typeface="Calibri" pitchFamily="34" charset="-122"/>
                 <a:cs typeface="Calibri" pitchFamily="34" charset="-120"/>
               </a:rPr>
-              <a:t>To secretly plan something with other people.</a:t>
+              <a:t>When people secretly plan something together, usually something sneaky or wrong.</a:t>
             </a:r>
             <a:endParaRPr lang="en-US" sz="1200" dirty="0"/>
           </a:p>
@@ -42437,7 +41197,7 @@
                 <a:ea typeface="Calibri" pitchFamily="34" charset="-122"/>
                 <a:cs typeface="Calibri" pitchFamily="34" charset="-120"/>
               </a:rPr>
-              <a:t>To fill someone with excitement or the desire to do something great.</a:t>
+              <a:t>To fill someone with excitement or a great idea, like a hero inspiring others to be brave.</a:t>
             </a:r>
             <a:endParaRPr lang="en-US" sz="1200" dirty="0"/>
           </a:p>
@@ -42576,7 +41336,7 @@
                 <a:ea typeface="Calibri" pitchFamily="34" charset="-122"/>
                 <a:cs typeface="Calibri" pitchFamily="34" charset="-120"/>
               </a:rPr>
-              <a:t>To come to an end, or to breathe out your last breath.</a:t>
+              <a:t>To come to an end or run out, like when food expires and is no longer safe to eat.</a:t>
             </a:r>
             <a:endParaRPr lang="en-US" sz="1200" dirty="0"/>
           </a:p>
@@ -43071,7 +41831,7 @@
                 <a:ea typeface="Calibri" pitchFamily="34" charset="-122"/>
                 <a:cs typeface="Calibri" pitchFamily="34" charset="-120"/>
               </a:rPr>
-              <a:t>The famous athlete's story was enough to inspire the whole school to try their best.</a:t>
+              <a:t>The story of the young athlete was enough to inspire the whole class to try their best.</a:t>
             </a:r>
             <a:endParaRPr lang="en-US" sz="1500" dirty="0"/>
           </a:p>
@@ -43235,7 +41995,7 @@
                 <a:ea typeface="Calibri" pitchFamily="34" charset="-122"/>
                 <a:cs typeface="Calibri" pitchFamily="34" charset="-120"/>
               </a:rPr>
-              <a:t>Make sure you check the date on the milk carton to see when it will expire.</a:t>
+              <a:t>Make sure you check the expiration date on the yoghurt before you eat it.</a:t>
             </a:r>
             <a:endParaRPr lang="en-US" sz="1500" dirty="0"/>
           </a:p>
@@ -43399,7 +42159,7 @@
                 <a:ea typeface="Calibri" pitchFamily="34" charset="-122"/>
                 <a:cs typeface="Calibri" pitchFamily="34" charset="-120"/>
               </a:rPr>
-              <a:t>She had always aspired to become a marine biologist and study sea creatures.</a:t>
+              <a:t>She had a dream to aspire to greatness, and she worked hard every single day.</a:t>
             </a:r>
             <a:endParaRPr lang="en-US" sz="1500" dirty="0"/>
           </a:p>

--- a/output/wordlabs-spire-3day.pptx
+++ b/output/wordlabs-spire-3day.pptx
@@ -4240,7 +4240,7 @@
                 <a:ea typeface="Calibri" pitchFamily="34" charset="-122"/>
                 <a:cs typeface="Calibri" pitchFamily="34" charset="-120"/>
               </a:rPr>
-              <a:t>"breathe, breath, spirit"</a:t>
+              <a:t>"breathe; live"</a:t>
             </a:r>
             <a:endParaRPr lang="en-US" sz="2200" dirty="0"/>
           </a:p>
@@ -4279,7 +4279,7 @@
                 <a:ea typeface="Calibri" pitchFamily="34" charset="-122"/>
                 <a:cs typeface="Calibri" pitchFamily="34" charset="-120"/>
               </a:rPr>
-              <a:t>Origin: Latin: spirare</a:t>
+              <a:t>Origin: Latin root</a:t>
             </a:r>
             <a:endParaRPr lang="en-US" sz="1300" dirty="0"/>
           </a:p>
@@ -5288,7 +5288,7 @@
                 <a:ea typeface="Calibri" pitchFamily="34" charset="-122"/>
                 <a:cs typeface="Calibri" pitchFamily="34" charset="-120"/>
               </a:rPr>
-              <a:t>Word Labs  •  wordlabs.app  •  Root: 'spire' = breathe, breath, spirit</a:t>
+              <a:t>Word Labs  •  wordlabs.app  •  Root: 'spire' = breathe; live</a:t>
             </a:r>
             <a:endParaRPr lang="en-US" sz="800" dirty="0"/>
           </a:p>
@@ -5622,7 +5622,7 @@
                 <a:ea typeface="Trebuchet MS" pitchFamily="34" charset="-122"/>
                 <a:cs typeface="Trebuchet MS" pitchFamily="34" charset="-120"/>
               </a:rPr>
-              <a:t>1</a:t>
+              <a:t>0</a:t>
             </a:r>
             <a:pPr algn="ctr" indent="0" marL="0">
               <a:buNone/>
@@ -5928,7 +5928,7 @@
                 <a:ea typeface="Calibri" pitchFamily="34" charset="-122"/>
                 <a:cs typeface="Calibri" pitchFamily="34" charset="-120"/>
               </a:rPr>
-              <a:t>Word Labs  •  wordlabs.app  •  Root: 'spire' = breathe, breath, spirit</a:t>
+              <a:t>Word Labs  •  wordlabs.app  •  Root: 'spire' = breathe; live</a:t>
             </a:r>
             <a:endParaRPr lang="en-US" sz="800" dirty="0"/>
           </a:p>
@@ -6040,7 +6040,7 @@
                 <a:ea typeface="Calibri" pitchFamily="34" charset="-122"/>
                 <a:cs typeface="Calibri" pitchFamily="34" charset="-120"/>
               </a:rPr>
-              <a:t>The coach hoped to </a:t>
+              <a:t>All living things need to </a:t>
             </a:r>
             <a:pPr algn="l" indent="0" marL="0">
               <a:buNone/>
@@ -6057,7 +6057,7 @@
                 <a:ea typeface="Calibri" pitchFamily="34" charset="-122"/>
                 <a:cs typeface="Calibri" pitchFamily="34" charset="-120"/>
               </a:rPr>
-              <a:t>inspire</a:t>
+              <a:t>respire</a:t>
             </a:r>
             <a:pPr algn="l" indent="0" marL="0">
               <a:buNone/>
@@ -6071,7 +6071,38 @@
                 <a:ea typeface="Calibri" pitchFamily="34" charset="-122"/>
                 <a:cs typeface="Calibri" pitchFamily="34" charset="-120"/>
               </a:rPr>
-              <a:t> his team, and their hard work left him full of admiration.</a:t>
+              <a:t> in order to survive. The two spies </a:t>
+            </a:r>
+            <a:pPr algn="l" indent="0" marL="0">
+              <a:buNone/>
+            </a:pPr>
+            <a:r>
+              <a:rPr lang="en-US" sz="1800" b="1" dirty="0">
+                <a:solidFill>
+                  <a:srgbClr val="0D9488"/>
+                </a:solidFill>
+                <a:highlight>
+                  <a:srgbClr val="CCFBF1"/>
+                </a:highlight>
+                <a:latin typeface="Calibri" pitchFamily="34" charset="0"/>
+                <a:ea typeface="Calibri" pitchFamily="34" charset="-122"/>
+                <a:cs typeface="Calibri" pitchFamily="34" charset="-120"/>
+              </a:rPr>
+              <a:t>conspire</a:t>
+            </a:r>
+            <a:pPr algn="l" indent="0" marL="0">
+              <a:buNone/>
+            </a:pPr>
+            <a:r>
+              <a:rPr lang="en-US" sz="1800" dirty="0">
+                <a:solidFill>
+                  <a:srgbClr val="0F172A"/>
+                </a:solidFill>
+                <a:latin typeface="Calibri" pitchFamily="34" charset="0"/>
+                <a:ea typeface="Calibri" pitchFamily="34" charset="-122"/>
+                <a:cs typeface="Calibri" pitchFamily="34" charset="-120"/>
+              </a:rPr>
+              <a:t>d to steal the secret documents.</a:t>
             </a:r>
             <a:endParaRPr lang="en-US" sz="1800" dirty="0"/>
           </a:p>
@@ -6226,7 +6257,7 @@
                 <a:ea typeface="Trebuchet MS" pitchFamily="34" charset="-122"/>
                 <a:cs typeface="Trebuchet MS" pitchFamily="34" charset="-120"/>
               </a:rPr>
-              <a:t>inspire</a:t>
+              <a:t>respire</a:t>
             </a:r>
             <a:endParaRPr lang="en-US" sz="1400" dirty="0"/>
           </a:p>
@@ -6354,7 +6385,7 @@
                 <a:ea typeface="Trebuchet MS" pitchFamily="34" charset="-122"/>
                 <a:cs typeface="Trebuchet MS" pitchFamily="34" charset="-120"/>
               </a:rPr>
-              <a:t>aspire</a:t>
+              <a:t>conspire</a:t>
             </a:r>
             <a:endParaRPr lang="en-US" sz="1400" dirty="0"/>
           </a:p>
@@ -6685,7 +6716,7 @@
                 <a:ea typeface="Calibri" pitchFamily="34" charset="-122"/>
                 <a:cs typeface="Calibri" pitchFamily="34" charset="-120"/>
               </a:rPr>
-              <a:t>Word Labs  •  wordlabs.app  •  Root: 'spire' = breathe, breath, spirit</a:t>
+              <a:t>Word Labs  •  wordlabs.app  •  Root: 'spire' = breathe; live</a:t>
             </a:r>
             <a:endParaRPr lang="en-US" sz="800" dirty="0"/>
           </a:p>
@@ -6824,7 +6855,7 @@
                 <a:ea typeface="Trebuchet MS" pitchFamily="34" charset="-122"/>
                 <a:cs typeface="Trebuchet MS" pitchFamily="34" charset="-120"/>
               </a:rPr>
-              <a:t>inspire</a:t>
+              <a:t>respire</a:t>
             </a:r>
             <a:endParaRPr lang="en-US" sz="2800" dirty="0"/>
           </a:p>
@@ -7512,7 +7543,7 @@
                 <a:ea typeface="Calibri" pitchFamily="34" charset="-122"/>
                 <a:cs typeface="Calibri" pitchFamily="34" charset="-120"/>
               </a:rPr>
-              <a:t>Word Labs  •  wordlabs.app  •  Root: 'spire' = breathe, breath, spirit</a:t>
+              <a:t>Word Labs  •  wordlabs.app  •  Root: 'spire' = breathe; live</a:t>
             </a:r>
             <a:endParaRPr lang="en-US" sz="800" dirty="0"/>
           </a:p>
@@ -7651,7 +7682,7 @@
                 <a:ea typeface="Trebuchet MS" pitchFamily="34" charset="-122"/>
                 <a:cs typeface="Trebuchet MS" pitchFamily="34" charset="-120"/>
               </a:rPr>
-              <a:t>inspire</a:t>
+              <a:t>respire</a:t>
             </a:r>
             <a:endParaRPr lang="en-US" sz="2800" dirty="0"/>
           </a:p>
@@ -7790,7 +7821,7 @@
                 <a:ea typeface="Trebuchet MS" pitchFamily="34" charset="-122"/>
                 <a:cs typeface="Trebuchet MS" pitchFamily="34" charset="-120"/>
               </a:rPr>
-              <a:t>in</a:t>
+              <a:t>re</a:t>
             </a:r>
             <a:endParaRPr lang="en-US" sz="1300" dirty="0"/>
           </a:p>
@@ -7829,7 +7860,7 @@
                 <a:ea typeface="Calibri" pitchFamily="34" charset="-122"/>
                 <a:cs typeface="Calibri" pitchFamily="34" charset="-120"/>
               </a:rPr>
-              <a:t>into, upon</a:t>
+              <a:t>again</a:t>
             </a:r>
             <a:endParaRPr lang="en-US" sz="850" dirty="0"/>
           </a:p>
@@ -7941,7 +7972,7 @@
                 <a:ea typeface="Calibri" pitchFamily="34" charset="-122"/>
                 <a:cs typeface="Calibri" pitchFamily="34" charset="-120"/>
               </a:rPr>
-              <a:t>breathe, breath</a:t>
+              <a:t>breathe; live</a:t>
             </a:r>
             <a:endParaRPr lang="en-US" sz="850" dirty="0"/>
           </a:p>
@@ -8497,7 +8528,7 @@
                 <a:ea typeface="Calibri" pitchFamily="34" charset="-122"/>
                 <a:cs typeface="Calibri" pitchFamily="34" charset="-120"/>
               </a:rPr>
-              <a:t>Word Labs  •  wordlabs.app  •  Root: 'spire' = breathe, breath, spirit</a:t>
+              <a:t>Word Labs  •  wordlabs.app  •  Root: 'spire' = breathe; live</a:t>
             </a:r>
             <a:endParaRPr lang="en-US" sz="800" dirty="0"/>
           </a:p>
@@ -8636,7 +8667,7 @@
                 <a:ea typeface="Trebuchet MS" pitchFamily="34" charset="-122"/>
                 <a:cs typeface="Trebuchet MS" pitchFamily="34" charset="-120"/>
               </a:rPr>
-              <a:t>inspire</a:t>
+              <a:t>respire</a:t>
             </a:r>
             <a:endParaRPr lang="en-US" sz="2800" dirty="0"/>
           </a:p>
@@ -8775,7 +8806,7 @@
                 <a:ea typeface="Trebuchet MS" pitchFamily="34" charset="-122"/>
                 <a:cs typeface="Trebuchet MS" pitchFamily="34" charset="-120"/>
               </a:rPr>
-              <a:t>in</a:t>
+              <a:t>re</a:t>
             </a:r>
             <a:endParaRPr lang="en-US" sz="1300" dirty="0"/>
           </a:p>
@@ -8814,7 +8845,7 @@
                 <a:ea typeface="Calibri" pitchFamily="34" charset="-122"/>
                 <a:cs typeface="Calibri" pitchFamily="34" charset="-120"/>
               </a:rPr>
-              <a:t>into, upon</a:t>
+              <a:t>again</a:t>
             </a:r>
             <a:endParaRPr lang="en-US" sz="850" dirty="0"/>
           </a:p>
@@ -8926,7 +8957,7 @@
                 <a:ea typeface="Calibri" pitchFamily="34" charset="-122"/>
                 <a:cs typeface="Calibri" pitchFamily="34" charset="-120"/>
               </a:rPr>
-              <a:t>breathe, breath</a:t>
+              <a:t>breathe; live</a:t>
             </a:r>
             <a:endParaRPr lang="en-US" sz="850" dirty="0"/>
           </a:p>
@@ -9085,7 +9116,7 @@
                 <a:ea typeface="Trebuchet MS" pitchFamily="34" charset="-122"/>
                 <a:cs typeface="Trebuchet MS" pitchFamily="34" charset="-120"/>
               </a:rPr>
-              <a:t>in</a:t>
+              <a:t>re</a:t>
             </a:r>
             <a:endParaRPr lang="en-US" sz="1400" dirty="0"/>
           </a:p>
@@ -9614,7 +9645,7 @@
                 <a:ea typeface="Calibri" pitchFamily="34" charset="-122"/>
                 <a:cs typeface="Calibri" pitchFamily="34" charset="-120"/>
               </a:rPr>
-              <a:t>Word Labs  •  wordlabs.app  •  Root: 'spire' = breathe, breath, spirit</a:t>
+              <a:t>Word Labs  •  wordlabs.app  •  Root: 'spire' = breathe; live</a:t>
             </a:r>
             <a:endParaRPr lang="en-US" sz="800" dirty="0"/>
           </a:p>
@@ -9753,7 +9784,7 @@
                 <a:ea typeface="Trebuchet MS" pitchFamily="34" charset="-122"/>
                 <a:cs typeface="Trebuchet MS" pitchFamily="34" charset="-120"/>
               </a:rPr>
-              <a:t>inspire</a:t>
+              <a:t>respire</a:t>
             </a:r>
             <a:endParaRPr lang="en-US" sz="2800" dirty="0"/>
           </a:p>
@@ -9892,7 +9923,7 @@
                 <a:ea typeface="Trebuchet MS" pitchFamily="34" charset="-122"/>
                 <a:cs typeface="Trebuchet MS" pitchFamily="34" charset="-120"/>
               </a:rPr>
-              <a:t>in</a:t>
+              <a:t>re</a:t>
             </a:r>
             <a:endParaRPr lang="en-US" sz="1300" dirty="0"/>
           </a:p>
@@ -9931,7 +9962,7 @@
                 <a:ea typeface="Calibri" pitchFamily="34" charset="-122"/>
                 <a:cs typeface="Calibri" pitchFamily="34" charset="-120"/>
               </a:rPr>
-              <a:t>into, upon</a:t>
+              <a:t>again</a:t>
             </a:r>
             <a:endParaRPr lang="en-US" sz="850" dirty="0"/>
           </a:p>
@@ -10043,7 +10074,7 @@
                 <a:ea typeface="Calibri" pitchFamily="34" charset="-122"/>
                 <a:cs typeface="Calibri" pitchFamily="34" charset="-120"/>
               </a:rPr>
-              <a:t>breathe, breath</a:t>
+              <a:t>breathe; live</a:t>
             </a:r>
             <a:endParaRPr lang="en-US" sz="850" dirty="0"/>
           </a:p>
@@ -10202,7 +10233,7 @@
                 <a:ea typeface="Trebuchet MS" pitchFamily="34" charset="-122"/>
                 <a:cs typeface="Trebuchet MS" pitchFamily="34" charset="-120"/>
               </a:rPr>
-              <a:t>in</a:t>
+              <a:t>re</a:t>
             </a:r>
             <a:endParaRPr lang="en-US" sz="1400" dirty="0"/>
           </a:p>
@@ -10466,7 +10497,7 @@
                 <a:ea typeface="Trebuchet MS" pitchFamily="34" charset="-122"/>
                 <a:cs typeface="Trebuchet MS" pitchFamily="34" charset="-120"/>
               </a:rPr>
-              <a:t>i</a:t>
+              <a:t>r</a:t>
             </a:r>
             <a:endParaRPr lang="en-US" sz="900" dirty="0"/>
           </a:p>
@@ -10532,7 +10563,7 @@
                 <a:ea typeface="Trebuchet MS" pitchFamily="34" charset="-122"/>
                 <a:cs typeface="Trebuchet MS" pitchFamily="34" charset="-120"/>
               </a:rPr>
-              <a:t>n</a:t>
+              <a:t>e</a:t>
             </a:r>
             <a:endParaRPr lang="en-US" sz="900" dirty="0"/>
           </a:p>
@@ -10730,7 +10761,7 @@
                 <a:ea typeface="Trebuchet MS" pitchFamily="34" charset="-122"/>
                 <a:cs typeface="Trebuchet MS" pitchFamily="34" charset="-120"/>
               </a:rPr>
-              <a:t>i</a:t>
+              <a:t>i_e</a:t>
             </a:r>
             <a:endParaRPr lang="en-US" sz="900" dirty="0"/>
           </a:p>
@@ -10796,7 +10827,7 @@
                 <a:ea typeface="Trebuchet MS" pitchFamily="34" charset="-122"/>
                 <a:cs typeface="Trebuchet MS" pitchFamily="34" charset="-120"/>
               </a:rPr>
-              <a:t>re</a:t>
+              <a:t>r</a:t>
             </a:r>
             <a:endParaRPr lang="en-US" sz="900" dirty="0"/>
           </a:p>
@@ -11088,7 +11119,7 @@
                 <a:ea typeface="Calibri" pitchFamily="34" charset="-122"/>
                 <a:cs typeface="Calibri" pitchFamily="34" charset="-120"/>
               </a:rPr>
-              <a:t>Word Labs  •  wordlabs.app  •  Root: 'spire' = breathe, breath, spirit</a:t>
+              <a:t>Word Labs  •  wordlabs.app  •  Root: 'spire' = breathe; live</a:t>
             </a:r>
             <a:endParaRPr lang="en-US" sz="800" dirty="0"/>
           </a:p>
@@ -11227,7 +11258,7 @@
                 <a:ea typeface="Trebuchet MS" pitchFamily="34" charset="-122"/>
                 <a:cs typeface="Trebuchet MS" pitchFamily="34" charset="-120"/>
               </a:rPr>
-              <a:t>aspire</a:t>
+              <a:t>conspire</a:t>
             </a:r>
             <a:endParaRPr lang="en-US" sz="2800" dirty="0"/>
           </a:p>
@@ -11915,7 +11946,7 @@
                 <a:ea typeface="Calibri" pitchFamily="34" charset="-122"/>
                 <a:cs typeface="Calibri" pitchFamily="34" charset="-120"/>
               </a:rPr>
-              <a:t>Word Labs  •  wordlabs.app  •  Root: 'spire' = breathe, breath, spirit</a:t>
+              <a:t>Word Labs  •  wordlabs.app  •  Root: 'spire' = breathe; live</a:t>
             </a:r>
             <a:endParaRPr lang="en-US" sz="800" dirty="0"/>
           </a:p>
@@ -12054,7 +12085,7 @@
                 <a:ea typeface="Trebuchet MS" pitchFamily="34" charset="-122"/>
                 <a:cs typeface="Trebuchet MS" pitchFamily="34" charset="-120"/>
               </a:rPr>
-              <a:t>aspire</a:t>
+              <a:t>conspire</a:t>
             </a:r>
             <a:endParaRPr lang="en-US" sz="2800" dirty="0"/>
           </a:p>
@@ -12193,7 +12224,7 @@
                 <a:ea typeface="Trebuchet MS" pitchFamily="34" charset="-122"/>
                 <a:cs typeface="Trebuchet MS" pitchFamily="34" charset="-120"/>
               </a:rPr>
-              <a:t>a</a:t>
+              <a:t>con</a:t>
             </a:r>
             <a:endParaRPr lang="en-US" sz="1300" dirty="0"/>
           </a:p>
@@ -12232,7 +12263,7 @@
                 <a:ea typeface="Calibri" pitchFamily="34" charset="-122"/>
                 <a:cs typeface="Calibri" pitchFamily="34" charset="-120"/>
               </a:rPr>
-              <a:t>to, toward</a:t>
+              <a:t>with or together</a:t>
             </a:r>
             <a:endParaRPr lang="en-US" sz="850" dirty="0"/>
           </a:p>
@@ -12344,7 +12375,7 @@
                 <a:ea typeface="Calibri" pitchFamily="34" charset="-122"/>
                 <a:cs typeface="Calibri" pitchFamily="34" charset="-120"/>
               </a:rPr>
-              <a:t>breathe, breath</a:t>
+              <a:t>breathe; live</a:t>
             </a:r>
             <a:endParaRPr lang="en-US" sz="850" dirty="0"/>
           </a:p>
@@ -12900,7 +12931,7 @@
                 <a:ea typeface="Calibri" pitchFamily="34" charset="-122"/>
                 <a:cs typeface="Calibri" pitchFamily="34" charset="-120"/>
               </a:rPr>
-              <a:t>Word Labs  •  wordlabs.app  •  Root: 'spire' = breathe, breath, spirit</a:t>
+              <a:t>Word Labs  •  wordlabs.app  •  Root: 'spire' = breathe; live</a:t>
             </a:r>
             <a:endParaRPr lang="en-US" sz="800" dirty="0"/>
           </a:p>
@@ -13039,7 +13070,7 @@
                 <a:ea typeface="Trebuchet MS" pitchFamily="34" charset="-122"/>
                 <a:cs typeface="Trebuchet MS" pitchFamily="34" charset="-120"/>
               </a:rPr>
-              <a:t>aspire</a:t>
+              <a:t>conspire</a:t>
             </a:r>
             <a:endParaRPr lang="en-US" sz="2800" dirty="0"/>
           </a:p>
@@ -13178,7 +13209,7 @@
                 <a:ea typeface="Trebuchet MS" pitchFamily="34" charset="-122"/>
                 <a:cs typeface="Trebuchet MS" pitchFamily="34" charset="-120"/>
               </a:rPr>
-              <a:t>a</a:t>
+              <a:t>con</a:t>
             </a:r>
             <a:endParaRPr lang="en-US" sz="1300" dirty="0"/>
           </a:p>
@@ -13217,7 +13248,7 @@
                 <a:ea typeface="Calibri" pitchFamily="34" charset="-122"/>
                 <a:cs typeface="Calibri" pitchFamily="34" charset="-120"/>
               </a:rPr>
-              <a:t>to, toward</a:t>
+              <a:t>with or together</a:t>
             </a:r>
             <a:endParaRPr lang="en-US" sz="850" dirty="0"/>
           </a:p>
@@ -13329,7 +13360,7 @@
                 <a:ea typeface="Calibri" pitchFamily="34" charset="-122"/>
                 <a:cs typeface="Calibri" pitchFamily="34" charset="-120"/>
               </a:rPr>
-              <a:t>breathe, breath</a:t>
+              <a:t>breathe; live</a:t>
             </a:r>
             <a:endParaRPr lang="en-US" sz="850" dirty="0"/>
           </a:p>
@@ -13488,7 +13519,7 @@
                 <a:ea typeface="Trebuchet MS" pitchFamily="34" charset="-122"/>
                 <a:cs typeface="Trebuchet MS" pitchFamily="34" charset="-120"/>
               </a:rPr>
-              <a:t>a</a:t>
+              <a:t>con</a:t>
             </a:r>
             <a:endParaRPr lang="en-US" sz="1400" dirty="0"/>
           </a:p>
@@ -13926,7 +13957,7 @@
                 <a:ea typeface="Calibri" pitchFamily="34" charset="-122"/>
                 <a:cs typeface="Calibri" pitchFamily="34" charset="-120"/>
               </a:rPr>
-              <a:t>Root 'spire' — breathe, breath, spirit</a:t>
+              <a:t>Root 'spire' — breathe; live</a:t>
             </a:r>
             <a:endParaRPr lang="en-US" sz="1600" dirty="0"/>
           </a:p>
@@ -14282,7 +14313,7 @@
                 <a:ea typeface="Calibri" pitchFamily="34" charset="-122"/>
                 <a:cs typeface="Calibri" pitchFamily="34" charset="-120"/>
               </a:rPr>
-              <a:t>Word Labs  •  wordlabs.app  •  Root: 'spire' = breathe, breath, spirit</a:t>
+              <a:t>Word Labs  •  wordlabs.app  •  Root: 'spire' = breathe; live</a:t>
             </a:r>
             <a:endParaRPr lang="en-US" sz="800" dirty="0"/>
           </a:p>
@@ -14421,7 +14452,7 @@
                 <a:ea typeface="Trebuchet MS" pitchFamily="34" charset="-122"/>
                 <a:cs typeface="Trebuchet MS" pitchFamily="34" charset="-120"/>
               </a:rPr>
-              <a:t>aspire</a:t>
+              <a:t>conspire</a:t>
             </a:r>
             <a:endParaRPr lang="en-US" sz="2800" dirty="0"/>
           </a:p>
@@ -14560,7 +14591,7 @@
                 <a:ea typeface="Trebuchet MS" pitchFamily="34" charset="-122"/>
                 <a:cs typeface="Trebuchet MS" pitchFamily="34" charset="-120"/>
               </a:rPr>
-              <a:t>a</a:t>
+              <a:t>con</a:t>
             </a:r>
             <a:endParaRPr lang="en-US" sz="1300" dirty="0"/>
           </a:p>
@@ -14599,7 +14630,7 @@
                 <a:ea typeface="Calibri" pitchFamily="34" charset="-122"/>
                 <a:cs typeface="Calibri" pitchFamily="34" charset="-120"/>
               </a:rPr>
-              <a:t>to, toward</a:t>
+              <a:t>with or together</a:t>
             </a:r>
             <a:endParaRPr lang="en-US" sz="850" dirty="0"/>
           </a:p>
@@ -14711,7 +14742,7 @@
                 <a:ea typeface="Calibri" pitchFamily="34" charset="-122"/>
                 <a:cs typeface="Calibri" pitchFamily="34" charset="-120"/>
               </a:rPr>
-              <a:t>breathe, breath</a:t>
+              <a:t>breathe; live</a:t>
             </a:r>
             <a:endParaRPr lang="en-US" sz="850" dirty="0"/>
           </a:p>
@@ -14870,7 +14901,7 @@
                 <a:ea typeface="Trebuchet MS" pitchFamily="34" charset="-122"/>
                 <a:cs typeface="Trebuchet MS" pitchFamily="34" charset="-120"/>
               </a:rPr>
-              <a:t>a</a:t>
+              <a:t>con</a:t>
             </a:r>
             <a:endParaRPr lang="en-US" sz="1400" dirty="0"/>
           </a:p>
@@ -15082,7 +15113,7 @@
         </p:nvSpPr>
         <p:spPr>
           <a:xfrm>
-            <a:off x="2427732" y="4169664"/>
+            <a:off x="2124837" y="4169664"/>
             <a:ext cx="685800" cy="475488"/>
           </a:xfrm>
           <a:prstGeom prst="rect">
@@ -15109,7 +15140,7 @@
         </p:nvSpPr>
         <p:spPr>
           <a:xfrm>
-            <a:off x="2427732" y="4169664"/>
+            <a:off x="2124837" y="4169664"/>
             <a:ext cx="685800" cy="475488"/>
           </a:xfrm>
           <a:prstGeom prst="rect">
@@ -15134,7 +15165,7 @@
                 <a:ea typeface="Trebuchet MS" pitchFamily="34" charset="-122"/>
                 <a:cs typeface="Trebuchet MS" pitchFamily="34" charset="-120"/>
               </a:rPr>
-              <a:t>a</a:t>
+              <a:t>c</a:t>
             </a:r>
             <a:endParaRPr lang="en-US" sz="900" dirty="0"/>
           </a:p>
@@ -15148,7 +15179,7 @@
         </p:nvSpPr>
         <p:spPr>
           <a:xfrm>
-            <a:off x="3639312" y="4169664"/>
+            <a:off x="3033522" y="4169664"/>
             <a:ext cx="685800" cy="475488"/>
           </a:xfrm>
           <a:prstGeom prst="rect">
@@ -15175,7 +15206,7 @@
         </p:nvSpPr>
         <p:spPr>
           <a:xfrm>
-            <a:off x="3639312" y="4169664"/>
+            <a:off x="3033522" y="4169664"/>
             <a:ext cx="685800" cy="475488"/>
           </a:xfrm>
           <a:prstGeom prst="rect">
@@ -15200,7 +15231,7 @@
                 <a:ea typeface="Trebuchet MS" pitchFamily="34" charset="-122"/>
                 <a:cs typeface="Trebuchet MS" pitchFamily="34" charset="-120"/>
               </a:rPr>
-              <a:t>s</a:t>
+              <a:t>o</a:t>
             </a:r>
             <a:endParaRPr lang="en-US" sz="900" dirty="0"/>
           </a:p>
@@ -15214,7 +15245,7 @@
         </p:nvSpPr>
         <p:spPr>
           <a:xfrm>
-            <a:off x="4850892" y="4169664"/>
+            <a:off x="3942207" y="4169664"/>
             <a:ext cx="685800" cy="475488"/>
           </a:xfrm>
           <a:prstGeom prst="rect">
@@ -15241,7 +15272,7 @@
         </p:nvSpPr>
         <p:spPr>
           <a:xfrm>
-            <a:off x="4850892" y="4169664"/>
+            <a:off x="3942207" y="4169664"/>
             <a:ext cx="685800" cy="475488"/>
           </a:xfrm>
           <a:prstGeom prst="rect">
@@ -15266,7 +15297,7 @@
                 <a:ea typeface="Trebuchet MS" pitchFamily="34" charset="-122"/>
                 <a:cs typeface="Trebuchet MS" pitchFamily="34" charset="-120"/>
               </a:rPr>
-              <a:t>p</a:t>
+              <a:t>n</a:t>
             </a:r>
             <a:endParaRPr lang="en-US" sz="900" dirty="0"/>
           </a:p>
@@ -15280,7 +15311,7 @@
         </p:nvSpPr>
         <p:spPr>
           <a:xfrm>
-            <a:off x="6062472" y="4169664"/>
+            <a:off x="4850892" y="4169664"/>
             <a:ext cx="685800" cy="475488"/>
           </a:xfrm>
           <a:prstGeom prst="rect">
@@ -15307,7 +15338,7 @@
         </p:nvSpPr>
         <p:spPr>
           <a:xfrm>
-            <a:off x="6062472" y="4169664"/>
+            <a:off x="4850892" y="4169664"/>
             <a:ext cx="685800" cy="475488"/>
           </a:xfrm>
           <a:prstGeom prst="rect">
@@ -15332,7 +15363,7 @@
                 <a:ea typeface="Trebuchet MS" pitchFamily="34" charset="-122"/>
                 <a:cs typeface="Trebuchet MS" pitchFamily="34" charset="-120"/>
               </a:rPr>
-              <a:t>i</a:t>
+              <a:t>s</a:t>
             </a:r>
             <a:endParaRPr lang="en-US" sz="900" dirty="0"/>
           </a:p>
@@ -15346,7 +15377,7 @@
         </p:nvSpPr>
         <p:spPr>
           <a:xfrm>
-            <a:off x="7274052" y="4169664"/>
+            <a:off x="5759577" y="4169664"/>
             <a:ext cx="685800" cy="475488"/>
           </a:xfrm>
           <a:prstGeom prst="rect">
@@ -15373,7 +15404,7 @@
         </p:nvSpPr>
         <p:spPr>
           <a:xfrm>
-            <a:off x="7274052" y="4169664"/>
+            <a:off x="5759577" y="4169664"/>
             <a:ext cx="685800" cy="475488"/>
           </a:xfrm>
           <a:prstGeom prst="rect">
@@ -15398,7 +15429,139 @@
                 <a:ea typeface="Trebuchet MS" pitchFamily="34" charset="-122"/>
                 <a:cs typeface="Trebuchet MS" pitchFamily="34" charset="-120"/>
               </a:rPr>
-              <a:t>re</a:t>
+              <a:t>p</a:t>
+            </a:r>
+            <a:endParaRPr lang="en-US" sz="900" dirty="0"/>
+          </a:p>
+        </p:txBody>
+      </p:sp>
+      <p:sp>
+        <p:nvSpPr>
+          <p:cNvPr id="43" name="Shape 41"/>
+          <p:cNvSpPr/>
+          <p:nvPr/>
+        </p:nvSpPr>
+        <p:spPr>
+          <a:xfrm>
+            <a:off x="6668262" y="4169664"/>
+            <a:ext cx="685800" cy="475488"/>
+          </a:xfrm>
+          <a:prstGeom prst="rect">
+            <a:avLst>
+              <a:gd name="adj" fmla="val 7692"/>
+            </a:avLst>
+          </a:prstGeom>
+          <a:solidFill>
+            <a:srgbClr val="FFFFFF"/>
+          </a:solidFill>
+          <a:ln w="12700">
+            <a:solidFill>
+              <a:srgbClr val="DB2777"/>
+            </a:solidFill>
+            <a:prstDash val="solid"/>
+          </a:ln>
+        </p:spPr>
+      </p:sp>
+      <p:sp>
+        <p:nvSpPr>
+          <p:cNvPr id="44" name="Text 42"/>
+          <p:cNvSpPr/>
+          <p:nvPr/>
+        </p:nvSpPr>
+        <p:spPr>
+          <a:xfrm>
+            <a:off x="6668262" y="4169664"/>
+            <a:ext cx="685800" cy="475488"/>
+          </a:xfrm>
+          <a:prstGeom prst="rect">
+            <a:avLst/>
+          </a:prstGeom>
+          <a:noFill/>
+          <a:ln/>
+        </p:spPr>
+        <p:txBody>
+          <a:bodyPr wrap="square" lIns="0" tIns="0" rIns="0" bIns="0" rtlCol="0" anchor="ctr"/>
+          <a:lstStyle/>
+          <a:p>
+            <a:pPr algn="ctr" indent="0" marL="0">
+              <a:buNone/>
+            </a:pPr>
+            <a:r>
+              <a:rPr lang="en-US" sz="900" b="1" dirty="0">
+                <a:solidFill>
+                  <a:srgbClr val="9D174D"/>
+                </a:solidFill>
+                <a:latin typeface="Trebuchet MS" pitchFamily="34" charset="0"/>
+                <a:ea typeface="Trebuchet MS" pitchFamily="34" charset="-122"/>
+                <a:cs typeface="Trebuchet MS" pitchFamily="34" charset="-120"/>
+              </a:rPr>
+              <a:t>i_e</a:t>
+            </a:r>
+            <a:endParaRPr lang="en-US" sz="900" dirty="0"/>
+          </a:p>
+        </p:txBody>
+      </p:sp>
+      <p:sp>
+        <p:nvSpPr>
+          <p:cNvPr id="45" name="Shape 43"/>
+          <p:cNvSpPr/>
+          <p:nvPr/>
+        </p:nvSpPr>
+        <p:spPr>
+          <a:xfrm>
+            <a:off x="7576947" y="4169664"/>
+            <a:ext cx="685800" cy="475488"/>
+          </a:xfrm>
+          <a:prstGeom prst="rect">
+            <a:avLst>
+              <a:gd name="adj" fmla="val 7692"/>
+            </a:avLst>
+          </a:prstGeom>
+          <a:solidFill>
+            <a:srgbClr val="FFFFFF"/>
+          </a:solidFill>
+          <a:ln w="12700">
+            <a:solidFill>
+              <a:srgbClr val="DB2777"/>
+            </a:solidFill>
+            <a:prstDash val="solid"/>
+          </a:ln>
+        </p:spPr>
+      </p:sp>
+      <p:sp>
+        <p:nvSpPr>
+          <p:cNvPr id="46" name="Text 44"/>
+          <p:cNvSpPr/>
+          <p:nvPr/>
+        </p:nvSpPr>
+        <p:spPr>
+          <a:xfrm>
+            <a:off x="7576947" y="4169664"/>
+            <a:ext cx="685800" cy="475488"/>
+          </a:xfrm>
+          <a:prstGeom prst="rect">
+            <a:avLst/>
+          </a:prstGeom>
+          <a:noFill/>
+          <a:ln/>
+        </p:spPr>
+        <p:txBody>
+          <a:bodyPr wrap="square" lIns="0" tIns="0" rIns="0" bIns="0" rtlCol="0" anchor="ctr"/>
+          <a:lstStyle/>
+          <a:p>
+            <a:pPr algn="ctr" indent="0" marL="0">
+              <a:buNone/>
+            </a:pPr>
+            <a:r>
+              <a:rPr lang="en-US" sz="900" b="1" dirty="0">
+                <a:solidFill>
+                  <a:srgbClr val="9D174D"/>
+                </a:solidFill>
+                <a:latin typeface="Trebuchet MS" pitchFamily="34" charset="0"/>
+                <a:ea typeface="Trebuchet MS" pitchFamily="34" charset="-122"/>
+                <a:cs typeface="Trebuchet MS" pitchFamily="34" charset="-120"/>
+              </a:rPr>
+              <a:t>r</a:t>
             </a:r>
             <a:endParaRPr lang="en-US" sz="900" dirty="0"/>
           </a:p>
@@ -15972,7 +16135,7 @@
                 <a:ea typeface="Calibri" pitchFamily="34" charset="-122"/>
                 <a:cs typeface="Calibri" pitchFamily="34" charset="-120"/>
               </a:rPr>
-              <a:t>Word Labs  •  wordlabs.app  •  Root: 'spire' = breathe, breath, spirit</a:t>
+              <a:t>Word Labs  •  wordlabs.app  •  Root: 'spire' = breathe; live</a:t>
             </a:r>
             <a:endParaRPr lang="en-US" sz="800" dirty="0"/>
           </a:p>
@@ -16306,7 +16469,7 @@
                 <a:ea typeface="Trebuchet MS" pitchFamily="34" charset="-122"/>
                 <a:cs typeface="Trebuchet MS" pitchFamily="34" charset="-120"/>
               </a:rPr>
-              <a:t>2</a:t>
+              <a:t>0</a:t>
             </a:r>
             <a:pPr algn="ctr" indent="0" marL="0">
               <a:buNone/>
@@ -16320,7 +16483,7 @@
                 <a:ea typeface="Trebuchet MS" pitchFamily="34" charset="-122"/>
                 <a:cs typeface="Trebuchet MS" pitchFamily="34" charset="-120"/>
               </a:rPr>
-              <a:t>  punctuation marks</a:t>
+              <a:t>  punctuation mark</a:t>
             </a:r>
             <a:endParaRPr lang="en-US" sz="2800" dirty="0"/>
           </a:p>
@@ -16612,7 +16775,7 @@
                 <a:ea typeface="Calibri" pitchFamily="34" charset="-122"/>
                 <a:cs typeface="Calibri" pitchFamily="34" charset="-120"/>
               </a:rPr>
-              <a:t>Word Labs  •  wordlabs.app  •  Root: 'spire' = breathe, breath, spirit</a:t>
+              <a:t>Word Labs  •  wordlabs.app  •  Root: 'spire' = breathe; live</a:t>
             </a:r>
             <a:endParaRPr lang="en-US" sz="800" dirty="0"/>
           </a:p>
@@ -16724,7 +16887,7 @@
                 <a:ea typeface="Calibri" pitchFamily="34" charset="-122"/>
                 <a:cs typeface="Calibri" pitchFamily="34" charset="-120"/>
               </a:rPr>
-              <a:t>After they chose to </a:t>
+              <a:t>Asthma is a common </a:t>
             </a:r>
             <a:pPr algn="l" indent="0" marL="0">
               <a:buNone/>
@@ -16741,7 +16904,7 @@
                 <a:ea typeface="Calibri" pitchFamily="34" charset="-122"/>
                 <a:cs typeface="Calibri" pitchFamily="34" charset="-120"/>
               </a:rPr>
-              <a:t>conspire</a:t>
+              <a:t>respiratory</a:t>
             </a:r>
             <a:pPr algn="l" indent="0" marL="0">
               <a:buNone/>
@@ -16755,7 +16918,7 @@
                 <a:ea typeface="Calibri" pitchFamily="34" charset="-122"/>
                 <a:cs typeface="Calibri" pitchFamily="34" charset="-120"/>
               </a:rPr>
-              <a:t> against the rules, their actions caused the project to </a:t>
+              <a:t> condition that affects the lungs. Many students </a:t>
             </a:r>
             <a:pPr algn="l" indent="0" marL="0">
               <a:buNone/>
@@ -16772,7 +16935,7 @@
                 <a:ea typeface="Calibri" pitchFamily="34" charset="-122"/>
                 <a:cs typeface="Calibri" pitchFamily="34" charset="-120"/>
               </a:rPr>
-              <a:t>expire</a:t>
+              <a:t>aspire</a:t>
             </a:r>
             <a:pPr algn="l" indent="0" marL="0">
               <a:buNone/>
@@ -16786,7 +16949,7 @@
                 <a:ea typeface="Calibri" pitchFamily="34" charset="-122"/>
                 <a:cs typeface="Calibri" pitchFamily="34" charset="-120"/>
               </a:rPr>
-              <a:t>, and everyone stopped feeling any </a:t>
+              <a:t> to become scientists one day. Her </a:t>
             </a:r>
             <a:pPr algn="l" indent="0" marL="0">
               <a:buNone/>
@@ -16803,7 +16966,7 @@
                 <a:ea typeface="Calibri" pitchFamily="34" charset="-122"/>
                 <a:cs typeface="Calibri" pitchFamily="34" charset="-120"/>
               </a:rPr>
-              <a:t>inspiration</a:t>
+              <a:t>aspirations</a:t>
             </a:r>
             <a:pPr algn="l" indent="0" marL="0">
               <a:buNone/>
@@ -16817,7 +16980,7 @@
                 <a:ea typeface="Calibri" pitchFamily="34" charset="-122"/>
                 <a:cs typeface="Calibri" pitchFamily="34" charset="-120"/>
               </a:rPr>
-              <a:t>.</a:t>
+              <a:t> are to become a doctor and help people.</a:t>
             </a:r>
             <a:endParaRPr lang="en-US" sz="1800" dirty="0"/>
           </a:p>
@@ -16972,7 +17135,7 @@
                 <a:ea typeface="Trebuchet MS" pitchFamily="34" charset="-122"/>
                 <a:cs typeface="Trebuchet MS" pitchFamily="34" charset="-120"/>
               </a:rPr>
-              <a:t>conspire</a:t>
+              <a:t>respiratory</a:t>
             </a:r>
             <a:endParaRPr lang="en-US" sz="1400" dirty="0"/>
           </a:p>
@@ -17100,7 +17263,7 @@
                 <a:ea typeface="Trebuchet MS" pitchFamily="34" charset="-122"/>
                 <a:cs typeface="Trebuchet MS" pitchFamily="34" charset="-120"/>
               </a:rPr>
-              <a:t>expire</a:t>
+              <a:t>aspire</a:t>
             </a:r>
             <a:endParaRPr lang="en-US" sz="1400" dirty="0"/>
           </a:p>
@@ -17228,7 +17391,7 @@
                 <a:ea typeface="Trebuchet MS" pitchFamily="34" charset="-122"/>
                 <a:cs typeface="Trebuchet MS" pitchFamily="34" charset="-120"/>
               </a:rPr>
-              <a:t>inspiration</a:t>
+              <a:t>aspirations</a:t>
             </a:r>
             <a:endParaRPr lang="en-US" sz="1400" dirty="0"/>
           </a:p>
@@ -17559,7 +17722,7 @@
                 <a:ea typeface="Calibri" pitchFamily="34" charset="-122"/>
                 <a:cs typeface="Calibri" pitchFamily="34" charset="-120"/>
               </a:rPr>
-              <a:t>Word Labs  •  wordlabs.app  •  Root: 'spire' = breathe, breath, spirit</a:t>
+              <a:t>Word Labs  •  wordlabs.app  •  Root: 'spire' = breathe; live</a:t>
             </a:r>
             <a:endParaRPr lang="en-US" sz="800" dirty="0"/>
           </a:p>
@@ -17698,7 +17861,7 @@
                 <a:ea typeface="Trebuchet MS" pitchFamily="34" charset="-122"/>
                 <a:cs typeface="Trebuchet MS" pitchFamily="34" charset="-120"/>
               </a:rPr>
-              <a:t>conspire</a:t>
+              <a:t>respiratory</a:t>
             </a:r>
             <a:endParaRPr lang="en-US" sz="2800" dirty="0"/>
           </a:p>
@@ -18386,7 +18549,7 @@
                 <a:ea typeface="Calibri" pitchFamily="34" charset="-122"/>
                 <a:cs typeface="Calibri" pitchFamily="34" charset="-120"/>
               </a:rPr>
-              <a:t>Word Labs  •  wordlabs.app  •  Root: 'spire' = breathe, breath, spirit</a:t>
+              <a:t>Word Labs  •  wordlabs.app  •  Root: 'spire' = breathe; live</a:t>
             </a:r>
             <a:endParaRPr lang="en-US" sz="800" dirty="0"/>
           </a:p>
@@ -18525,7 +18688,7 @@
                 <a:ea typeface="Trebuchet MS" pitchFamily="34" charset="-122"/>
                 <a:cs typeface="Trebuchet MS" pitchFamily="34" charset="-120"/>
               </a:rPr>
-              <a:t>conspire</a:t>
+              <a:t>respiratory</a:t>
             </a:r>
             <a:endParaRPr lang="en-US" sz="2800" dirty="0"/>
           </a:p>
@@ -18605,8 +18768,8 @@
         </p:nvSpPr>
         <p:spPr>
           <a:xfrm>
-            <a:off x="2938272" y="2258568"/>
-            <a:ext cx="1828800" cy="292608"/>
+            <a:off x="1989734" y="2258568"/>
+            <a:ext cx="1581912" cy="292608"/>
           </a:xfrm>
           <a:prstGeom prst="rect">
             <a:avLst>
@@ -18639,8 +18802,8 @@
         </p:nvSpPr>
         <p:spPr>
           <a:xfrm>
-            <a:off x="2938272" y="2258568"/>
-            <a:ext cx="1828800" cy="292608"/>
+            <a:off x="1989734" y="2258568"/>
+            <a:ext cx="1581912" cy="292608"/>
           </a:xfrm>
           <a:prstGeom prst="rect">
             <a:avLst/>
@@ -18664,7 +18827,7 @@
                 <a:ea typeface="Trebuchet MS" pitchFamily="34" charset="-122"/>
                 <a:cs typeface="Trebuchet MS" pitchFamily="34" charset="-120"/>
               </a:rPr>
-              <a:t>con</a:t>
+              <a:t>re</a:t>
             </a:r>
             <a:endParaRPr lang="en-US" sz="1300" dirty="0"/>
           </a:p>
@@ -18678,8 +18841,8 @@
         </p:nvSpPr>
         <p:spPr>
           <a:xfrm>
-            <a:off x="2938272" y="2569464"/>
-            <a:ext cx="1828800" cy="201168"/>
+            <a:off x="1989734" y="2569464"/>
+            <a:ext cx="1581912" cy="201168"/>
           </a:xfrm>
           <a:prstGeom prst="rect">
             <a:avLst/>
@@ -18703,7 +18866,7 @@
                 <a:ea typeface="Calibri" pitchFamily="34" charset="-122"/>
                 <a:cs typeface="Calibri" pitchFamily="34" charset="-120"/>
               </a:rPr>
-              <a:t>together, with</a:t>
+              <a:t>again</a:t>
             </a:r>
             <a:endParaRPr lang="en-US" sz="850" dirty="0"/>
           </a:p>
@@ -18717,8 +18880,8 @@
         </p:nvSpPr>
         <p:spPr>
           <a:xfrm>
-            <a:off x="5803392" y="2258568"/>
-            <a:ext cx="1828800" cy="292608"/>
+            <a:off x="3659429" y="2258568"/>
+            <a:ext cx="1581912" cy="292608"/>
           </a:xfrm>
           <a:prstGeom prst="rect">
             <a:avLst>
@@ -18751,8 +18914,8 @@
         </p:nvSpPr>
         <p:spPr>
           <a:xfrm>
-            <a:off x="5803392" y="2258568"/>
-            <a:ext cx="1828800" cy="292608"/>
+            <a:off x="3659429" y="2258568"/>
+            <a:ext cx="1581912" cy="292608"/>
           </a:xfrm>
           <a:prstGeom prst="rect">
             <a:avLst/>
@@ -18790,8 +18953,8 @@
         </p:nvSpPr>
         <p:spPr>
           <a:xfrm>
-            <a:off x="5803392" y="2569464"/>
-            <a:ext cx="1828800" cy="201168"/>
+            <a:off x="3659429" y="2569464"/>
+            <a:ext cx="1581912" cy="201168"/>
           </a:xfrm>
           <a:prstGeom prst="rect">
             <a:avLst/>
@@ -18815,7 +18978,7 @@
                 <a:ea typeface="Calibri" pitchFamily="34" charset="-122"/>
                 <a:cs typeface="Calibri" pitchFamily="34" charset="-120"/>
               </a:rPr>
-              <a:t>breathe, breath</a:t>
+              <a:t>breathe; live</a:t>
             </a:r>
             <a:endParaRPr lang="en-US" sz="850" dirty="0"/>
           </a:p>
@@ -18824,6 +18987,230 @@
       <p:sp>
         <p:nvSpPr>
           <p:cNvPr id="22" name="Shape 20"/>
+          <p:cNvSpPr/>
+          <p:nvPr/>
+        </p:nvSpPr>
+        <p:spPr>
+          <a:xfrm>
+            <a:off x="5329123" y="2258568"/>
+            <a:ext cx="1581912" cy="292608"/>
+          </a:xfrm>
+          <a:prstGeom prst="rect">
+            <a:avLst>
+              <a:gd name="adj" fmla="val 25000"/>
+            </a:avLst>
+          </a:prstGeom>
+          <a:solidFill>
+            <a:srgbClr val="FCE7F3"/>
+          </a:solidFill>
+          <a:ln w="19050">
+            <a:solidFill>
+              <a:srgbClr val="DB2777"/>
+            </a:solidFill>
+            <a:prstDash val="solid"/>
+          </a:ln>
+          <a:effectLst>
+            <a:outerShdw sx="100000" sy="100000" kx="0" ky="0" algn="bl" rotWithShape="0" blurRad="101600" dist="38100" dir="8100000">
+              <a:srgbClr val="000000">
+                <a:alpha val="12000"/>
+              </a:srgbClr>
+            </a:outerShdw>
+          </a:effectLst>
+        </p:spPr>
+      </p:sp>
+      <p:sp>
+        <p:nvSpPr>
+          <p:cNvPr id="23" name="Text 21"/>
+          <p:cNvSpPr/>
+          <p:nvPr/>
+        </p:nvSpPr>
+        <p:spPr>
+          <a:xfrm>
+            <a:off x="5329123" y="2258568"/>
+            <a:ext cx="1581912" cy="292608"/>
+          </a:xfrm>
+          <a:prstGeom prst="rect">
+            <a:avLst/>
+          </a:prstGeom>
+          <a:noFill/>
+          <a:ln/>
+        </p:spPr>
+        <p:txBody>
+          <a:bodyPr wrap="square" lIns="0" tIns="0" rIns="0" bIns="0" rtlCol="0" anchor="ctr"/>
+          <a:lstStyle/>
+          <a:p>
+            <a:pPr algn="ctr" indent="0" marL="0">
+              <a:buNone/>
+            </a:pPr>
+            <a:r>
+              <a:rPr lang="en-US" sz="1300" b="1" dirty="0">
+                <a:solidFill>
+                  <a:srgbClr val="9D174D"/>
+                </a:solidFill>
+                <a:latin typeface="Trebuchet MS" pitchFamily="34" charset="0"/>
+                <a:ea typeface="Trebuchet MS" pitchFamily="34" charset="-122"/>
+                <a:cs typeface="Trebuchet MS" pitchFamily="34" charset="-120"/>
+              </a:rPr>
+              <a:t>ate</a:t>
+            </a:r>
+            <a:endParaRPr lang="en-US" sz="1300" dirty="0"/>
+          </a:p>
+        </p:txBody>
+      </p:sp>
+      <p:sp>
+        <p:nvSpPr>
+          <p:cNvPr id="24" name="Text 22"/>
+          <p:cNvSpPr/>
+          <p:nvPr/>
+        </p:nvSpPr>
+        <p:spPr>
+          <a:xfrm>
+            <a:off x="5329123" y="2569464"/>
+            <a:ext cx="1581912" cy="201168"/>
+          </a:xfrm>
+          <a:prstGeom prst="rect">
+            <a:avLst/>
+          </a:prstGeom>
+          <a:noFill/>
+          <a:ln/>
+        </p:spPr>
+        <p:txBody>
+          <a:bodyPr wrap="square" lIns="0" tIns="0" rIns="0" bIns="0" rtlCol="0" anchor="t"/>
+          <a:lstStyle/>
+          <a:p>
+            <a:pPr algn="ctr" indent="0" marL="0">
+              <a:buNone/>
+            </a:pPr>
+            <a:r>
+              <a:rPr lang="en-US" sz="850" dirty="0">
+                <a:solidFill>
+                  <a:srgbClr val="475569"/>
+                </a:solidFill>
+                <a:latin typeface="Calibri" pitchFamily="34" charset="0"/>
+                <a:ea typeface="Calibri" pitchFamily="34" charset="-122"/>
+                <a:cs typeface="Calibri" pitchFamily="34" charset="-120"/>
+              </a:rPr>
+              <a:t>to make; to become</a:t>
+            </a:r>
+            <a:endParaRPr lang="en-US" sz="850" dirty="0"/>
+          </a:p>
+        </p:txBody>
+      </p:sp>
+      <p:sp>
+        <p:nvSpPr>
+          <p:cNvPr id="25" name="Shape 23"/>
+          <p:cNvSpPr/>
+          <p:nvPr/>
+        </p:nvSpPr>
+        <p:spPr>
+          <a:xfrm>
+            <a:off x="6998818" y="2258568"/>
+            <a:ext cx="1581912" cy="292608"/>
+          </a:xfrm>
+          <a:prstGeom prst="rect">
+            <a:avLst>
+              <a:gd name="adj" fmla="val 25000"/>
+            </a:avLst>
+          </a:prstGeom>
+          <a:solidFill>
+            <a:srgbClr val="FCE7F3"/>
+          </a:solidFill>
+          <a:ln w="19050">
+            <a:solidFill>
+              <a:srgbClr val="DB2777"/>
+            </a:solidFill>
+            <a:prstDash val="solid"/>
+          </a:ln>
+          <a:effectLst>
+            <a:outerShdw sx="100000" sy="100000" kx="0" ky="0" algn="bl" rotWithShape="0" blurRad="101600" dist="38100" dir="8100000">
+              <a:srgbClr val="000000">
+                <a:alpha val="12000"/>
+              </a:srgbClr>
+            </a:outerShdw>
+          </a:effectLst>
+        </p:spPr>
+      </p:sp>
+      <p:sp>
+        <p:nvSpPr>
+          <p:cNvPr id="26" name="Text 24"/>
+          <p:cNvSpPr/>
+          <p:nvPr/>
+        </p:nvSpPr>
+        <p:spPr>
+          <a:xfrm>
+            <a:off x="6998818" y="2258568"/>
+            <a:ext cx="1581912" cy="292608"/>
+          </a:xfrm>
+          <a:prstGeom prst="rect">
+            <a:avLst/>
+          </a:prstGeom>
+          <a:noFill/>
+          <a:ln/>
+        </p:spPr>
+        <p:txBody>
+          <a:bodyPr wrap="square" lIns="0" tIns="0" rIns="0" bIns="0" rtlCol="0" anchor="ctr"/>
+          <a:lstStyle/>
+          <a:p>
+            <a:pPr algn="ctr" indent="0" marL="0">
+              <a:buNone/>
+            </a:pPr>
+            <a:r>
+              <a:rPr lang="en-US" sz="1300" b="1" dirty="0">
+                <a:solidFill>
+                  <a:srgbClr val="9D174D"/>
+                </a:solidFill>
+                <a:latin typeface="Trebuchet MS" pitchFamily="34" charset="0"/>
+                <a:ea typeface="Trebuchet MS" pitchFamily="34" charset="-122"/>
+                <a:cs typeface="Trebuchet MS" pitchFamily="34" charset="-120"/>
+              </a:rPr>
+              <a:t>ory</a:t>
+            </a:r>
+            <a:endParaRPr lang="en-US" sz="1300" dirty="0"/>
+          </a:p>
+        </p:txBody>
+      </p:sp>
+      <p:sp>
+        <p:nvSpPr>
+          <p:cNvPr id="27" name="Text 25"/>
+          <p:cNvSpPr/>
+          <p:nvPr/>
+        </p:nvSpPr>
+        <p:spPr>
+          <a:xfrm>
+            <a:off x="6998818" y="2569464"/>
+            <a:ext cx="1581912" cy="201168"/>
+          </a:xfrm>
+          <a:prstGeom prst="rect">
+            <a:avLst/>
+          </a:prstGeom>
+          <a:noFill/>
+          <a:ln/>
+        </p:spPr>
+        <p:txBody>
+          <a:bodyPr wrap="square" lIns="0" tIns="0" rIns="0" bIns="0" rtlCol="0" anchor="t"/>
+          <a:lstStyle/>
+          <a:p>
+            <a:pPr algn="ctr" indent="0" marL="0">
+              <a:buNone/>
+            </a:pPr>
+            <a:r>
+              <a:rPr lang="en-US" sz="850" dirty="0">
+                <a:solidFill>
+                  <a:srgbClr val="475569"/>
+                </a:solidFill>
+                <a:latin typeface="Calibri" pitchFamily="34" charset="0"/>
+                <a:ea typeface="Calibri" pitchFamily="34" charset="-122"/>
+                <a:cs typeface="Calibri" pitchFamily="34" charset="-120"/>
+              </a:rPr>
+              <a:t>a place of; characterised by</a:t>
+            </a:r>
+            <a:endParaRPr lang="en-US" sz="850" dirty="0"/>
+          </a:p>
+        </p:txBody>
+      </p:sp>
+      <p:sp>
+        <p:nvSpPr>
+          <p:cNvPr id="28" name="Shape 26"/>
           <p:cNvSpPr/>
           <p:nvPr/>
         </p:nvSpPr>
@@ -18850,7 +19237,7 @@
       </p:sp>
       <p:sp>
         <p:nvSpPr>
-          <p:cNvPr id="23" name="Text 21"/>
+          <p:cNvPr id="29" name="Text 27"/>
           <p:cNvSpPr/>
           <p:nvPr/>
         </p:nvSpPr>
@@ -18889,7 +19276,7 @@
       </p:sp>
       <p:sp>
         <p:nvSpPr>
-          <p:cNvPr id="24" name="Shape 22"/>
+          <p:cNvPr id="30" name="Shape 28"/>
           <p:cNvSpPr/>
           <p:nvPr/>
         </p:nvSpPr>
@@ -18916,7 +19303,7 @@
       </p:sp>
       <p:sp>
         <p:nvSpPr>
-          <p:cNvPr id="25" name="Text 23"/>
+          <p:cNvPr id="31" name="Text 29"/>
           <p:cNvSpPr/>
           <p:nvPr/>
         </p:nvSpPr>
@@ -18955,7 +19342,7 @@
       </p:sp>
       <p:sp>
         <p:nvSpPr>
-          <p:cNvPr id="26" name="Shape 24"/>
+          <p:cNvPr id="32" name="Shape 30"/>
           <p:cNvSpPr/>
           <p:nvPr/>
         </p:nvSpPr>
@@ -18982,7 +19369,7 @@
       </p:sp>
       <p:sp>
         <p:nvSpPr>
-          <p:cNvPr id="27" name="Text 25"/>
+          <p:cNvPr id="33" name="Text 31"/>
           <p:cNvSpPr/>
           <p:nvPr/>
         </p:nvSpPr>
@@ -19021,7 +19408,7 @@
       </p:sp>
       <p:sp>
         <p:nvSpPr>
-          <p:cNvPr id="28" name="Shape 26"/>
+          <p:cNvPr id="34" name="Shape 32"/>
           <p:cNvSpPr/>
           <p:nvPr/>
         </p:nvSpPr>
@@ -19048,7 +19435,7 @@
       </p:sp>
       <p:sp>
         <p:nvSpPr>
-          <p:cNvPr id="29" name="Text 27"/>
+          <p:cNvPr id="35" name="Text 33"/>
           <p:cNvSpPr/>
           <p:nvPr/>
         </p:nvSpPr>
@@ -19371,7 +19758,7 @@
                 <a:ea typeface="Calibri" pitchFamily="34" charset="-122"/>
                 <a:cs typeface="Calibri" pitchFamily="34" charset="-120"/>
               </a:rPr>
-              <a:t>Word Labs  •  wordlabs.app  •  Root: 'spire' = breathe, breath, spirit</a:t>
+              <a:t>Word Labs  •  wordlabs.app  •  Root: 'spire' = breathe; live</a:t>
             </a:r>
             <a:endParaRPr lang="en-US" sz="800" dirty="0"/>
           </a:p>
@@ -19510,7 +19897,7 @@
                 <a:ea typeface="Trebuchet MS" pitchFamily="34" charset="-122"/>
                 <a:cs typeface="Trebuchet MS" pitchFamily="34" charset="-120"/>
               </a:rPr>
-              <a:t>conspire</a:t>
+              <a:t>respiratory</a:t>
             </a:r>
             <a:endParaRPr lang="en-US" sz="2800" dirty="0"/>
           </a:p>
@@ -19590,8 +19977,8 @@
         </p:nvSpPr>
         <p:spPr>
           <a:xfrm>
-            <a:off x="2938272" y="2258568"/>
-            <a:ext cx="1828800" cy="292608"/>
+            <a:off x="1989734" y="2258568"/>
+            <a:ext cx="1581912" cy="292608"/>
           </a:xfrm>
           <a:prstGeom prst="rect">
             <a:avLst>
@@ -19624,8 +20011,8 @@
         </p:nvSpPr>
         <p:spPr>
           <a:xfrm>
-            <a:off x="2938272" y="2258568"/>
-            <a:ext cx="1828800" cy="292608"/>
+            <a:off x="1989734" y="2258568"/>
+            <a:ext cx="1581912" cy="292608"/>
           </a:xfrm>
           <a:prstGeom prst="rect">
             <a:avLst/>
@@ -19649,7 +20036,7 @@
                 <a:ea typeface="Trebuchet MS" pitchFamily="34" charset="-122"/>
                 <a:cs typeface="Trebuchet MS" pitchFamily="34" charset="-120"/>
               </a:rPr>
-              <a:t>con</a:t>
+              <a:t>re</a:t>
             </a:r>
             <a:endParaRPr lang="en-US" sz="1300" dirty="0"/>
           </a:p>
@@ -19663,8 +20050,8 @@
         </p:nvSpPr>
         <p:spPr>
           <a:xfrm>
-            <a:off x="2938272" y="2569464"/>
-            <a:ext cx="1828800" cy="201168"/>
+            <a:off x="1989734" y="2569464"/>
+            <a:ext cx="1581912" cy="201168"/>
           </a:xfrm>
           <a:prstGeom prst="rect">
             <a:avLst/>
@@ -19688,7 +20075,7 @@
                 <a:ea typeface="Calibri" pitchFamily="34" charset="-122"/>
                 <a:cs typeface="Calibri" pitchFamily="34" charset="-120"/>
               </a:rPr>
-              <a:t>together, with</a:t>
+              <a:t>again</a:t>
             </a:r>
             <a:endParaRPr lang="en-US" sz="850" dirty="0"/>
           </a:p>
@@ -19702,8 +20089,8 @@
         </p:nvSpPr>
         <p:spPr>
           <a:xfrm>
-            <a:off x="5803392" y="2258568"/>
-            <a:ext cx="1828800" cy="292608"/>
+            <a:off x="3659429" y="2258568"/>
+            <a:ext cx="1581912" cy="292608"/>
           </a:xfrm>
           <a:prstGeom prst="rect">
             <a:avLst>
@@ -19736,8 +20123,8 @@
         </p:nvSpPr>
         <p:spPr>
           <a:xfrm>
-            <a:off x="5803392" y="2258568"/>
-            <a:ext cx="1828800" cy="292608"/>
+            <a:off x="3659429" y="2258568"/>
+            <a:ext cx="1581912" cy="292608"/>
           </a:xfrm>
           <a:prstGeom prst="rect">
             <a:avLst/>
@@ -19775,8 +20162,8 @@
         </p:nvSpPr>
         <p:spPr>
           <a:xfrm>
-            <a:off x="5803392" y="2569464"/>
-            <a:ext cx="1828800" cy="201168"/>
+            <a:off x="3659429" y="2569464"/>
+            <a:ext cx="1581912" cy="201168"/>
           </a:xfrm>
           <a:prstGeom prst="rect">
             <a:avLst/>
@@ -19800,7 +20187,7 @@
                 <a:ea typeface="Calibri" pitchFamily="34" charset="-122"/>
                 <a:cs typeface="Calibri" pitchFamily="34" charset="-120"/>
               </a:rPr>
-              <a:t>breathe, breath</a:t>
+              <a:t>breathe; live</a:t>
             </a:r>
             <a:endParaRPr lang="en-US" sz="850" dirty="0"/>
           </a:p>
@@ -19809,6 +20196,230 @@
       <p:sp>
         <p:nvSpPr>
           <p:cNvPr id="22" name="Shape 20"/>
+          <p:cNvSpPr/>
+          <p:nvPr/>
+        </p:nvSpPr>
+        <p:spPr>
+          <a:xfrm>
+            <a:off x="5329123" y="2258568"/>
+            <a:ext cx="1581912" cy="292608"/>
+          </a:xfrm>
+          <a:prstGeom prst="rect">
+            <a:avLst>
+              <a:gd name="adj" fmla="val 25000"/>
+            </a:avLst>
+          </a:prstGeom>
+          <a:solidFill>
+            <a:srgbClr val="FCE7F3"/>
+          </a:solidFill>
+          <a:ln w="19050">
+            <a:solidFill>
+              <a:srgbClr val="DB2777"/>
+            </a:solidFill>
+            <a:prstDash val="solid"/>
+          </a:ln>
+          <a:effectLst>
+            <a:outerShdw sx="100000" sy="100000" kx="0" ky="0" algn="bl" rotWithShape="0" blurRad="101600" dist="38100" dir="8100000">
+              <a:srgbClr val="000000">
+                <a:alpha val="12000"/>
+              </a:srgbClr>
+            </a:outerShdw>
+          </a:effectLst>
+        </p:spPr>
+      </p:sp>
+      <p:sp>
+        <p:nvSpPr>
+          <p:cNvPr id="23" name="Text 21"/>
+          <p:cNvSpPr/>
+          <p:nvPr/>
+        </p:nvSpPr>
+        <p:spPr>
+          <a:xfrm>
+            <a:off x="5329123" y="2258568"/>
+            <a:ext cx="1581912" cy="292608"/>
+          </a:xfrm>
+          <a:prstGeom prst="rect">
+            <a:avLst/>
+          </a:prstGeom>
+          <a:noFill/>
+          <a:ln/>
+        </p:spPr>
+        <p:txBody>
+          <a:bodyPr wrap="square" lIns="0" tIns="0" rIns="0" bIns="0" rtlCol="0" anchor="ctr"/>
+          <a:lstStyle/>
+          <a:p>
+            <a:pPr algn="ctr" indent="0" marL="0">
+              <a:buNone/>
+            </a:pPr>
+            <a:r>
+              <a:rPr lang="en-US" sz="1300" b="1" dirty="0">
+                <a:solidFill>
+                  <a:srgbClr val="9D174D"/>
+                </a:solidFill>
+                <a:latin typeface="Trebuchet MS" pitchFamily="34" charset="0"/>
+                <a:ea typeface="Trebuchet MS" pitchFamily="34" charset="-122"/>
+                <a:cs typeface="Trebuchet MS" pitchFamily="34" charset="-120"/>
+              </a:rPr>
+              <a:t>ate</a:t>
+            </a:r>
+            <a:endParaRPr lang="en-US" sz="1300" dirty="0"/>
+          </a:p>
+        </p:txBody>
+      </p:sp>
+      <p:sp>
+        <p:nvSpPr>
+          <p:cNvPr id="24" name="Text 22"/>
+          <p:cNvSpPr/>
+          <p:nvPr/>
+        </p:nvSpPr>
+        <p:spPr>
+          <a:xfrm>
+            <a:off x="5329123" y="2569464"/>
+            <a:ext cx="1581912" cy="201168"/>
+          </a:xfrm>
+          <a:prstGeom prst="rect">
+            <a:avLst/>
+          </a:prstGeom>
+          <a:noFill/>
+          <a:ln/>
+        </p:spPr>
+        <p:txBody>
+          <a:bodyPr wrap="square" lIns="0" tIns="0" rIns="0" bIns="0" rtlCol="0" anchor="t"/>
+          <a:lstStyle/>
+          <a:p>
+            <a:pPr algn="ctr" indent="0" marL="0">
+              <a:buNone/>
+            </a:pPr>
+            <a:r>
+              <a:rPr lang="en-US" sz="850" dirty="0">
+                <a:solidFill>
+                  <a:srgbClr val="475569"/>
+                </a:solidFill>
+                <a:latin typeface="Calibri" pitchFamily="34" charset="0"/>
+                <a:ea typeface="Calibri" pitchFamily="34" charset="-122"/>
+                <a:cs typeface="Calibri" pitchFamily="34" charset="-120"/>
+              </a:rPr>
+              <a:t>to make; to become</a:t>
+            </a:r>
+            <a:endParaRPr lang="en-US" sz="850" dirty="0"/>
+          </a:p>
+        </p:txBody>
+      </p:sp>
+      <p:sp>
+        <p:nvSpPr>
+          <p:cNvPr id="25" name="Shape 23"/>
+          <p:cNvSpPr/>
+          <p:nvPr/>
+        </p:nvSpPr>
+        <p:spPr>
+          <a:xfrm>
+            <a:off x="6998818" y="2258568"/>
+            <a:ext cx="1581912" cy="292608"/>
+          </a:xfrm>
+          <a:prstGeom prst="rect">
+            <a:avLst>
+              <a:gd name="adj" fmla="val 25000"/>
+            </a:avLst>
+          </a:prstGeom>
+          <a:solidFill>
+            <a:srgbClr val="FCE7F3"/>
+          </a:solidFill>
+          <a:ln w="19050">
+            <a:solidFill>
+              <a:srgbClr val="DB2777"/>
+            </a:solidFill>
+            <a:prstDash val="solid"/>
+          </a:ln>
+          <a:effectLst>
+            <a:outerShdw sx="100000" sy="100000" kx="0" ky="0" algn="bl" rotWithShape="0" blurRad="101600" dist="38100" dir="8100000">
+              <a:srgbClr val="000000">
+                <a:alpha val="12000"/>
+              </a:srgbClr>
+            </a:outerShdw>
+          </a:effectLst>
+        </p:spPr>
+      </p:sp>
+      <p:sp>
+        <p:nvSpPr>
+          <p:cNvPr id="26" name="Text 24"/>
+          <p:cNvSpPr/>
+          <p:nvPr/>
+        </p:nvSpPr>
+        <p:spPr>
+          <a:xfrm>
+            <a:off x="6998818" y="2258568"/>
+            <a:ext cx="1581912" cy="292608"/>
+          </a:xfrm>
+          <a:prstGeom prst="rect">
+            <a:avLst/>
+          </a:prstGeom>
+          <a:noFill/>
+          <a:ln/>
+        </p:spPr>
+        <p:txBody>
+          <a:bodyPr wrap="square" lIns="0" tIns="0" rIns="0" bIns="0" rtlCol="0" anchor="ctr"/>
+          <a:lstStyle/>
+          <a:p>
+            <a:pPr algn="ctr" indent="0" marL="0">
+              <a:buNone/>
+            </a:pPr>
+            <a:r>
+              <a:rPr lang="en-US" sz="1300" b="1" dirty="0">
+                <a:solidFill>
+                  <a:srgbClr val="9D174D"/>
+                </a:solidFill>
+                <a:latin typeface="Trebuchet MS" pitchFamily="34" charset="0"/>
+                <a:ea typeface="Trebuchet MS" pitchFamily="34" charset="-122"/>
+                <a:cs typeface="Trebuchet MS" pitchFamily="34" charset="-120"/>
+              </a:rPr>
+              <a:t>ory</a:t>
+            </a:r>
+            <a:endParaRPr lang="en-US" sz="1300" dirty="0"/>
+          </a:p>
+        </p:txBody>
+      </p:sp>
+      <p:sp>
+        <p:nvSpPr>
+          <p:cNvPr id="27" name="Text 25"/>
+          <p:cNvSpPr/>
+          <p:nvPr/>
+        </p:nvSpPr>
+        <p:spPr>
+          <a:xfrm>
+            <a:off x="6998818" y="2569464"/>
+            <a:ext cx="1581912" cy="201168"/>
+          </a:xfrm>
+          <a:prstGeom prst="rect">
+            <a:avLst/>
+          </a:prstGeom>
+          <a:noFill/>
+          <a:ln/>
+        </p:spPr>
+        <p:txBody>
+          <a:bodyPr wrap="square" lIns="0" tIns="0" rIns="0" bIns="0" rtlCol="0" anchor="t"/>
+          <a:lstStyle/>
+          <a:p>
+            <a:pPr algn="ctr" indent="0" marL="0">
+              <a:buNone/>
+            </a:pPr>
+            <a:r>
+              <a:rPr lang="en-US" sz="850" dirty="0">
+                <a:solidFill>
+                  <a:srgbClr val="475569"/>
+                </a:solidFill>
+                <a:latin typeface="Calibri" pitchFamily="34" charset="0"/>
+                <a:ea typeface="Calibri" pitchFamily="34" charset="-122"/>
+                <a:cs typeface="Calibri" pitchFamily="34" charset="-120"/>
+              </a:rPr>
+              <a:t>a place of; characterised by</a:t>
+            </a:r>
+            <a:endParaRPr lang="en-US" sz="850" dirty="0"/>
+          </a:p>
+        </p:txBody>
+      </p:sp>
+      <p:sp>
+        <p:nvSpPr>
+          <p:cNvPr id="28" name="Shape 26"/>
           <p:cNvSpPr/>
           <p:nvPr/>
         </p:nvSpPr>
@@ -19835,7 +20446,7 @@
       </p:sp>
       <p:sp>
         <p:nvSpPr>
-          <p:cNvPr id="23" name="Text 21"/>
+          <p:cNvPr id="29" name="Text 27"/>
           <p:cNvSpPr/>
           <p:nvPr/>
         </p:nvSpPr>
@@ -19874,7 +20485,7 @@
       </p:sp>
       <p:sp>
         <p:nvSpPr>
-          <p:cNvPr id="24" name="Shape 22"/>
+          <p:cNvPr id="30" name="Shape 28"/>
           <p:cNvSpPr/>
           <p:nvPr/>
         </p:nvSpPr>
@@ -19901,14 +20512,14 @@
       </p:sp>
       <p:sp>
         <p:nvSpPr>
-          <p:cNvPr id="25" name="Shape 23"/>
-          <p:cNvSpPr/>
-          <p:nvPr/>
-        </p:nvSpPr>
-        <p:spPr>
-          <a:xfrm>
-            <a:off x="2999232" y="3364992"/>
-            <a:ext cx="1645920" cy="475488"/>
+          <p:cNvPr id="31" name="Shape 29"/>
+          <p:cNvSpPr/>
+          <p:nvPr/>
+        </p:nvSpPr>
+        <p:spPr>
+          <a:xfrm>
+            <a:off x="1978152" y="3364992"/>
+            <a:ext cx="1225296" cy="475488"/>
           </a:xfrm>
           <a:prstGeom prst="rect">
             <a:avLst>
@@ -19928,14 +20539,14 @@
       </p:sp>
       <p:sp>
         <p:nvSpPr>
-          <p:cNvPr id="26" name="Text 24"/>
-          <p:cNvSpPr/>
-          <p:nvPr/>
-        </p:nvSpPr>
-        <p:spPr>
-          <a:xfrm>
-            <a:off x="2999232" y="3364992"/>
-            <a:ext cx="1645920" cy="475488"/>
+          <p:cNvPr id="32" name="Text 30"/>
+          <p:cNvSpPr/>
+          <p:nvPr/>
+        </p:nvSpPr>
+        <p:spPr>
+          <a:xfrm>
+            <a:off x="1978152" y="3364992"/>
+            <a:ext cx="1225296" cy="475488"/>
           </a:xfrm>
           <a:prstGeom prst="rect">
             <a:avLst/>
@@ -19959,7 +20570,7 @@
                 <a:ea typeface="Trebuchet MS" pitchFamily="34" charset="-122"/>
                 <a:cs typeface="Trebuchet MS" pitchFamily="34" charset="-120"/>
               </a:rPr>
-              <a:t>con</a:t>
+              <a:t>res</a:t>
             </a:r>
             <a:endParaRPr lang="en-US" sz="1400" dirty="0"/>
           </a:p>
@@ -19967,14 +20578,14 @@
       </p:sp>
       <p:sp>
         <p:nvSpPr>
-          <p:cNvPr id="27" name="Text 25"/>
-          <p:cNvSpPr/>
-          <p:nvPr/>
-        </p:nvSpPr>
-        <p:spPr>
-          <a:xfrm>
-            <a:off x="4645152" y="3364992"/>
-            <a:ext cx="1097280" cy="475488"/>
+          <p:cNvPr id="33" name="Text 31"/>
+          <p:cNvSpPr/>
+          <p:nvPr/>
+        </p:nvSpPr>
+        <p:spPr>
+          <a:xfrm>
+            <a:off x="3203448" y="3364992"/>
+            <a:ext cx="76200" cy="475488"/>
           </a:xfrm>
           <a:prstGeom prst="rect">
             <a:avLst/>
@@ -20006,14 +20617,14 @@
       </p:sp>
       <p:sp>
         <p:nvSpPr>
-          <p:cNvPr id="28" name="Shape 26"/>
-          <p:cNvSpPr/>
-          <p:nvPr/>
-        </p:nvSpPr>
-        <p:spPr>
-          <a:xfrm>
-            <a:off x="5742432" y="3364992"/>
-            <a:ext cx="1645920" cy="475488"/>
+          <p:cNvPr id="34" name="Shape 32"/>
+          <p:cNvSpPr/>
+          <p:nvPr/>
+        </p:nvSpPr>
+        <p:spPr>
+          <a:xfrm>
+            <a:off x="3279648" y="3364992"/>
+            <a:ext cx="1225296" cy="475488"/>
           </a:xfrm>
           <a:prstGeom prst="rect">
             <a:avLst>
@@ -20033,14 +20644,14 @@
       </p:sp>
       <p:sp>
         <p:nvSpPr>
-          <p:cNvPr id="29" name="Text 27"/>
-          <p:cNvSpPr/>
-          <p:nvPr/>
-        </p:nvSpPr>
-        <p:spPr>
-          <a:xfrm>
-            <a:off x="5742432" y="3364992"/>
-            <a:ext cx="1645920" cy="475488"/>
+          <p:cNvPr id="35" name="Text 33"/>
+          <p:cNvSpPr/>
+          <p:nvPr/>
+        </p:nvSpPr>
+        <p:spPr>
+          <a:xfrm>
+            <a:off x="3279648" y="3364992"/>
+            <a:ext cx="1225296" cy="475488"/>
           </a:xfrm>
           <a:prstGeom prst="rect">
             <a:avLst/>
@@ -20064,7 +20675,7 @@
                 <a:ea typeface="Trebuchet MS" pitchFamily="34" charset="-122"/>
                 <a:cs typeface="Trebuchet MS" pitchFamily="34" charset="-120"/>
               </a:rPr>
-              <a:t>spire</a:t>
+              <a:t>pi</a:t>
             </a:r>
             <a:endParaRPr lang="en-US" sz="1400" dirty="0"/>
           </a:p>
@@ -20072,7 +20683,322 @@
       </p:sp>
       <p:sp>
         <p:nvSpPr>
-          <p:cNvPr id="30" name="Shape 28"/>
+          <p:cNvPr id="36" name="Text 34"/>
+          <p:cNvSpPr/>
+          <p:nvPr/>
+        </p:nvSpPr>
+        <p:spPr>
+          <a:xfrm>
+            <a:off x="4504944" y="3364992"/>
+            <a:ext cx="76200" cy="475488"/>
+          </a:xfrm>
+          <a:prstGeom prst="rect">
+            <a:avLst/>
+          </a:prstGeom>
+          <a:noFill/>
+          <a:ln/>
+        </p:spPr>
+        <p:txBody>
+          <a:bodyPr wrap="square" lIns="0" tIns="0" rIns="0" bIns="0" rtlCol="0" anchor="ctr"/>
+          <a:lstStyle/>
+          <a:p>
+            <a:pPr algn="ctr" indent="0" marL="0">
+              <a:buNone/>
+            </a:pPr>
+            <a:r>
+              <a:rPr lang="en-US" sz="1600" b="1" dirty="0">
+                <a:solidFill>
+                  <a:srgbClr val="0D9488"/>
+                </a:solidFill>
+                <a:latin typeface="Trebuchet MS" pitchFamily="34" charset="0"/>
+                <a:ea typeface="Trebuchet MS" pitchFamily="34" charset="-122"/>
+                <a:cs typeface="Trebuchet MS" pitchFamily="34" charset="-120"/>
+              </a:rPr>
+              <a:t>·</a:t>
+            </a:r>
+            <a:endParaRPr lang="en-US" sz="1600" dirty="0"/>
+          </a:p>
+        </p:txBody>
+      </p:sp>
+      <p:sp>
+        <p:nvSpPr>
+          <p:cNvPr id="37" name="Shape 35"/>
+          <p:cNvSpPr/>
+          <p:nvPr/>
+        </p:nvSpPr>
+        <p:spPr>
+          <a:xfrm>
+            <a:off x="4581144" y="3364992"/>
+            <a:ext cx="1225296" cy="475488"/>
+          </a:xfrm>
+          <a:prstGeom prst="rect">
+            <a:avLst>
+              <a:gd name="adj" fmla="val 9615"/>
+            </a:avLst>
+          </a:prstGeom>
+          <a:solidFill>
+            <a:srgbClr val="FFFFFF"/>
+          </a:solidFill>
+          <a:ln w="12700">
+            <a:solidFill>
+              <a:srgbClr val="0D9488"/>
+            </a:solidFill>
+            <a:prstDash val="solid"/>
+          </a:ln>
+        </p:spPr>
+      </p:sp>
+      <p:sp>
+        <p:nvSpPr>
+          <p:cNvPr id="38" name="Text 36"/>
+          <p:cNvSpPr/>
+          <p:nvPr/>
+        </p:nvSpPr>
+        <p:spPr>
+          <a:xfrm>
+            <a:off x="4581144" y="3364992"/>
+            <a:ext cx="1225296" cy="475488"/>
+          </a:xfrm>
+          <a:prstGeom prst="rect">
+            <a:avLst/>
+          </a:prstGeom>
+          <a:noFill/>
+          <a:ln/>
+        </p:spPr>
+        <p:txBody>
+          <a:bodyPr wrap="square" lIns="0" tIns="0" rIns="0" bIns="0" rtlCol="0" anchor="ctr"/>
+          <a:lstStyle/>
+          <a:p>
+            <a:pPr algn="ctr" indent="0" marL="0">
+              <a:buNone/>
+            </a:pPr>
+            <a:r>
+              <a:rPr lang="en-US" sz="1400" b="1" dirty="0">
+                <a:solidFill>
+                  <a:srgbClr val="0D9488"/>
+                </a:solidFill>
+                <a:latin typeface="Trebuchet MS" pitchFamily="34" charset="0"/>
+                <a:ea typeface="Trebuchet MS" pitchFamily="34" charset="-122"/>
+                <a:cs typeface="Trebuchet MS" pitchFamily="34" charset="-120"/>
+              </a:rPr>
+              <a:t>ra</a:t>
+            </a:r>
+            <a:endParaRPr lang="en-US" sz="1400" dirty="0"/>
+          </a:p>
+        </p:txBody>
+      </p:sp>
+      <p:sp>
+        <p:nvSpPr>
+          <p:cNvPr id="39" name="Text 37"/>
+          <p:cNvSpPr/>
+          <p:nvPr/>
+        </p:nvSpPr>
+        <p:spPr>
+          <a:xfrm>
+            <a:off x="5806440" y="3364992"/>
+            <a:ext cx="76200" cy="475488"/>
+          </a:xfrm>
+          <a:prstGeom prst="rect">
+            <a:avLst/>
+          </a:prstGeom>
+          <a:noFill/>
+          <a:ln/>
+        </p:spPr>
+        <p:txBody>
+          <a:bodyPr wrap="square" lIns="0" tIns="0" rIns="0" bIns="0" rtlCol="0" anchor="ctr"/>
+          <a:lstStyle/>
+          <a:p>
+            <a:pPr algn="ctr" indent="0" marL="0">
+              <a:buNone/>
+            </a:pPr>
+            <a:r>
+              <a:rPr lang="en-US" sz="1600" b="1" dirty="0">
+                <a:solidFill>
+                  <a:srgbClr val="0D9488"/>
+                </a:solidFill>
+                <a:latin typeface="Trebuchet MS" pitchFamily="34" charset="0"/>
+                <a:ea typeface="Trebuchet MS" pitchFamily="34" charset="-122"/>
+                <a:cs typeface="Trebuchet MS" pitchFamily="34" charset="-120"/>
+              </a:rPr>
+              <a:t>·</a:t>
+            </a:r>
+            <a:endParaRPr lang="en-US" sz="1600" dirty="0"/>
+          </a:p>
+        </p:txBody>
+      </p:sp>
+      <p:sp>
+        <p:nvSpPr>
+          <p:cNvPr id="40" name="Shape 38"/>
+          <p:cNvSpPr/>
+          <p:nvPr/>
+        </p:nvSpPr>
+        <p:spPr>
+          <a:xfrm>
+            <a:off x="5882640" y="3364992"/>
+            <a:ext cx="1225296" cy="475488"/>
+          </a:xfrm>
+          <a:prstGeom prst="rect">
+            <a:avLst>
+              <a:gd name="adj" fmla="val 9615"/>
+            </a:avLst>
+          </a:prstGeom>
+          <a:solidFill>
+            <a:srgbClr val="FFFFFF"/>
+          </a:solidFill>
+          <a:ln w="12700">
+            <a:solidFill>
+              <a:srgbClr val="0D9488"/>
+            </a:solidFill>
+            <a:prstDash val="solid"/>
+          </a:ln>
+        </p:spPr>
+      </p:sp>
+      <p:sp>
+        <p:nvSpPr>
+          <p:cNvPr id="41" name="Text 39"/>
+          <p:cNvSpPr/>
+          <p:nvPr/>
+        </p:nvSpPr>
+        <p:spPr>
+          <a:xfrm>
+            <a:off x="5882640" y="3364992"/>
+            <a:ext cx="1225296" cy="475488"/>
+          </a:xfrm>
+          <a:prstGeom prst="rect">
+            <a:avLst/>
+          </a:prstGeom>
+          <a:noFill/>
+          <a:ln/>
+        </p:spPr>
+        <p:txBody>
+          <a:bodyPr wrap="square" lIns="0" tIns="0" rIns="0" bIns="0" rtlCol="0" anchor="ctr"/>
+          <a:lstStyle/>
+          <a:p>
+            <a:pPr algn="ctr" indent="0" marL="0">
+              <a:buNone/>
+            </a:pPr>
+            <a:r>
+              <a:rPr lang="en-US" sz="1400" b="1" dirty="0">
+                <a:solidFill>
+                  <a:srgbClr val="0D9488"/>
+                </a:solidFill>
+                <a:latin typeface="Trebuchet MS" pitchFamily="34" charset="0"/>
+                <a:ea typeface="Trebuchet MS" pitchFamily="34" charset="-122"/>
+                <a:cs typeface="Trebuchet MS" pitchFamily="34" charset="-120"/>
+              </a:rPr>
+              <a:t>to</a:t>
+            </a:r>
+            <a:endParaRPr lang="en-US" sz="1400" dirty="0"/>
+          </a:p>
+        </p:txBody>
+      </p:sp>
+      <p:sp>
+        <p:nvSpPr>
+          <p:cNvPr id="42" name="Text 40"/>
+          <p:cNvSpPr/>
+          <p:nvPr/>
+        </p:nvSpPr>
+        <p:spPr>
+          <a:xfrm>
+            <a:off x="7107936" y="3364992"/>
+            <a:ext cx="76200" cy="475488"/>
+          </a:xfrm>
+          <a:prstGeom prst="rect">
+            <a:avLst/>
+          </a:prstGeom>
+          <a:noFill/>
+          <a:ln/>
+        </p:spPr>
+        <p:txBody>
+          <a:bodyPr wrap="square" lIns="0" tIns="0" rIns="0" bIns="0" rtlCol="0" anchor="ctr"/>
+          <a:lstStyle/>
+          <a:p>
+            <a:pPr algn="ctr" indent="0" marL="0">
+              <a:buNone/>
+            </a:pPr>
+            <a:r>
+              <a:rPr lang="en-US" sz="1600" b="1" dirty="0">
+                <a:solidFill>
+                  <a:srgbClr val="0D9488"/>
+                </a:solidFill>
+                <a:latin typeface="Trebuchet MS" pitchFamily="34" charset="0"/>
+                <a:ea typeface="Trebuchet MS" pitchFamily="34" charset="-122"/>
+                <a:cs typeface="Trebuchet MS" pitchFamily="34" charset="-120"/>
+              </a:rPr>
+              <a:t>·</a:t>
+            </a:r>
+            <a:endParaRPr lang="en-US" sz="1600" dirty="0"/>
+          </a:p>
+        </p:txBody>
+      </p:sp>
+      <p:sp>
+        <p:nvSpPr>
+          <p:cNvPr id="43" name="Shape 41"/>
+          <p:cNvSpPr/>
+          <p:nvPr/>
+        </p:nvSpPr>
+        <p:spPr>
+          <a:xfrm>
+            <a:off x="7184136" y="3364992"/>
+            <a:ext cx="1225296" cy="475488"/>
+          </a:xfrm>
+          <a:prstGeom prst="rect">
+            <a:avLst>
+              <a:gd name="adj" fmla="val 9615"/>
+            </a:avLst>
+          </a:prstGeom>
+          <a:solidFill>
+            <a:srgbClr val="FFFFFF"/>
+          </a:solidFill>
+          <a:ln w="12700">
+            <a:solidFill>
+              <a:srgbClr val="0D9488"/>
+            </a:solidFill>
+            <a:prstDash val="solid"/>
+          </a:ln>
+        </p:spPr>
+      </p:sp>
+      <p:sp>
+        <p:nvSpPr>
+          <p:cNvPr id="44" name="Text 42"/>
+          <p:cNvSpPr/>
+          <p:nvPr/>
+        </p:nvSpPr>
+        <p:spPr>
+          <a:xfrm>
+            <a:off x="7184136" y="3364992"/>
+            <a:ext cx="1225296" cy="475488"/>
+          </a:xfrm>
+          <a:prstGeom prst="rect">
+            <a:avLst/>
+          </a:prstGeom>
+          <a:noFill/>
+          <a:ln/>
+        </p:spPr>
+        <p:txBody>
+          <a:bodyPr wrap="square" lIns="0" tIns="0" rIns="0" bIns="0" rtlCol="0" anchor="ctr"/>
+          <a:lstStyle/>
+          <a:p>
+            <a:pPr algn="ctr" indent="0" marL="0">
+              <a:buNone/>
+            </a:pPr>
+            <a:r>
+              <a:rPr lang="en-US" sz="1400" b="1" dirty="0">
+                <a:solidFill>
+                  <a:srgbClr val="0D9488"/>
+                </a:solidFill>
+                <a:latin typeface="Trebuchet MS" pitchFamily="34" charset="0"/>
+                <a:ea typeface="Trebuchet MS" pitchFamily="34" charset="-122"/>
+                <a:cs typeface="Trebuchet MS" pitchFamily="34" charset="-120"/>
+              </a:rPr>
+              <a:t>ry</a:t>
+            </a:r>
+            <a:endParaRPr lang="en-US" sz="1400" dirty="0"/>
+          </a:p>
+        </p:txBody>
+      </p:sp>
+      <p:sp>
+        <p:nvSpPr>
+          <p:cNvPr id="45" name="Shape 43"/>
           <p:cNvSpPr/>
           <p:nvPr/>
         </p:nvSpPr>
@@ -20099,7 +21025,7 @@
       </p:sp>
       <p:sp>
         <p:nvSpPr>
-          <p:cNvPr id="31" name="Text 29"/>
+          <p:cNvPr id="46" name="Text 44"/>
           <p:cNvSpPr/>
           <p:nvPr/>
         </p:nvSpPr>
@@ -20138,7 +21064,7 @@
       </p:sp>
       <p:sp>
         <p:nvSpPr>
-          <p:cNvPr id="32" name="Shape 30"/>
+          <p:cNvPr id="47" name="Shape 45"/>
           <p:cNvSpPr/>
           <p:nvPr/>
         </p:nvSpPr>
@@ -20165,7 +21091,7 @@
       </p:sp>
       <p:sp>
         <p:nvSpPr>
-          <p:cNvPr id="33" name="Text 31"/>
+          <p:cNvPr id="48" name="Text 46"/>
           <p:cNvSpPr/>
           <p:nvPr/>
         </p:nvSpPr>
@@ -20488,7 +21414,7 @@
                 <a:ea typeface="Calibri" pitchFamily="34" charset="-122"/>
                 <a:cs typeface="Calibri" pitchFamily="34" charset="-120"/>
               </a:rPr>
-              <a:t>Word Labs  •  wordlabs.app  •  Root: 'spire' = breathe, breath, spirit</a:t>
+              <a:t>Word Labs  •  wordlabs.app  •  Root: 'spire' = breathe; live</a:t>
             </a:r>
             <a:endParaRPr lang="en-US" sz="800" dirty="0"/>
           </a:p>
@@ -20627,7 +21553,7 @@
                 <a:ea typeface="Trebuchet MS" pitchFamily="34" charset="-122"/>
                 <a:cs typeface="Trebuchet MS" pitchFamily="34" charset="-120"/>
               </a:rPr>
-              <a:t>conspire</a:t>
+              <a:t>respiratory</a:t>
             </a:r>
             <a:endParaRPr lang="en-US" sz="2800" dirty="0"/>
           </a:p>
@@ -20707,8 +21633,8 @@
         </p:nvSpPr>
         <p:spPr>
           <a:xfrm>
-            <a:off x="2938272" y="2258568"/>
-            <a:ext cx="1828800" cy="292608"/>
+            <a:off x="1989734" y="2258568"/>
+            <a:ext cx="1581912" cy="292608"/>
           </a:xfrm>
           <a:prstGeom prst="rect">
             <a:avLst>
@@ -20741,8 +21667,8 @@
         </p:nvSpPr>
         <p:spPr>
           <a:xfrm>
-            <a:off x="2938272" y="2258568"/>
-            <a:ext cx="1828800" cy="292608"/>
+            <a:off x="1989734" y="2258568"/>
+            <a:ext cx="1581912" cy="292608"/>
           </a:xfrm>
           <a:prstGeom prst="rect">
             <a:avLst/>
@@ -20766,7 +21692,7 @@
                 <a:ea typeface="Trebuchet MS" pitchFamily="34" charset="-122"/>
                 <a:cs typeface="Trebuchet MS" pitchFamily="34" charset="-120"/>
               </a:rPr>
-              <a:t>con</a:t>
+              <a:t>re</a:t>
             </a:r>
             <a:endParaRPr lang="en-US" sz="1300" dirty="0"/>
           </a:p>
@@ -20780,8 +21706,8 @@
         </p:nvSpPr>
         <p:spPr>
           <a:xfrm>
-            <a:off x="2938272" y="2569464"/>
-            <a:ext cx="1828800" cy="201168"/>
+            <a:off x="1989734" y="2569464"/>
+            <a:ext cx="1581912" cy="201168"/>
           </a:xfrm>
           <a:prstGeom prst="rect">
             <a:avLst/>
@@ -20805,7 +21731,7 @@
                 <a:ea typeface="Calibri" pitchFamily="34" charset="-122"/>
                 <a:cs typeface="Calibri" pitchFamily="34" charset="-120"/>
               </a:rPr>
-              <a:t>together, with</a:t>
+              <a:t>again</a:t>
             </a:r>
             <a:endParaRPr lang="en-US" sz="850" dirty="0"/>
           </a:p>
@@ -20819,8 +21745,8 @@
         </p:nvSpPr>
         <p:spPr>
           <a:xfrm>
-            <a:off x="5803392" y="2258568"/>
-            <a:ext cx="1828800" cy="292608"/>
+            <a:off x="3659429" y="2258568"/>
+            <a:ext cx="1581912" cy="292608"/>
           </a:xfrm>
           <a:prstGeom prst="rect">
             <a:avLst>
@@ -20853,8 +21779,8 @@
         </p:nvSpPr>
         <p:spPr>
           <a:xfrm>
-            <a:off x="5803392" y="2258568"/>
-            <a:ext cx="1828800" cy="292608"/>
+            <a:off x="3659429" y="2258568"/>
+            <a:ext cx="1581912" cy="292608"/>
           </a:xfrm>
           <a:prstGeom prst="rect">
             <a:avLst/>
@@ -20892,8 +21818,8 @@
         </p:nvSpPr>
         <p:spPr>
           <a:xfrm>
-            <a:off x="5803392" y="2569464"/>
-            <a:ext cx="1828800" cy="201168"/>
+            <a:off x="3659429" y="2569464"/>
+            <a:ext cx="1581912" cy="201168"/>
           </a:xfrm>
           <a:prstGeom prst="rect">
             <a:avLst/>
@@ -20917,7 +21843,7 @@
                 <a:ea typeface="Calibri" pitchFamily="34" charset="-122"/>
                 <a:cs typeface="Calibri" pitchFamily="34" charset="-120"/>
               </a:rPr>
-              <a:t>breathe, breath</a:t>
+              <a:t>breathe; live</a:t>
             </a:r>
             <a:endParaRPr lang="en-US" sz="850" dirty="0"/>
           </a:p>
@@ -20926,6 +21852,230 @@
       <p:sp>
         <p:nvSpPr>
           <p:cNvPr id="22" name="Shape 20"/>
+          <p:cNvSpPr/>
+          <p:nvPr/>
+        </p:nvSpPr>
+        <p:spPr>
+          <a:xfrm>
+            <a:off x="5329123" y="2258568"/>
+            <a:ext cx="1581912" cy="292608"/>
+          </a:xfrm>
+          <a:prstGeom prst="rect">
+            <a:avLst>
+              <a:gd name="adj" fmla="val 25000"/>
+            </a:avLst>
+          </a:prstGeom>
+          <a:solidFill>
+            <a:srgbClr val="FCE7F3"/>
+          </a:solidFill>
+          <a:ln w="19050">
+            <a:solidFill>
+              <a:srgbClr val="DB2777"/>
+            </a:solidFill>
+            <a:prstDash val="solid"/>
+          </a:ln>
+          <a:effectLst>
+            <a:outerShdw sx="100000" sy="100000" kx="0" ky="0" algn="bl" rotWithShape="0" blurRad="101600" dist="38100" dir="8100000">
+              <a:srgbClr val="000000">
+                <a:alpha val="12000"/>
+              </a:srgbClr>
+            </a:outerShdw>
+          </a:effectLst>
+        </p:spPr>
+      </p:sp>
+      <p:sp>
+        <p:nvSpPr>
+          <p:cNvPr id="23" name="Text 21"/>
+          <p:cNvSpPr/>
+          <p:nvPr/>
+        </p:nvSpPr>
+        <p:spPr>
+          <a:xfrm>
+            <a:off x="5329123" y="2258568"/>
+            <a:ext cx="1581912" cy="292608"/>
+          </a:xfrm>
+          <a:prstGeom prst="rect">
+            <a:avLst/>
+          </a:prstGeom>
+          <a:noFill/>
+          <a:ln/>
+        </p:spPr>
+        <p:txBody>
+          <a:bodyPr wrap="square" lIns="0" tIns="0" rIns="0" bIns="0" rtlCol="0" anchor="ctr"/>
+          <a:lstStyle/>
+          <a:p>
+            <a:pPr algn="ctr" indent="0" marL="0">
+              <a:buNone/>
+            </a:pPr>
+            <a:r>
+              <a:rPr lang="en-US" sz="1300" b="1" dirty="0">
+                <a:solidFill>
+                  <a:srgbClr val="9D174D"/>
+                </a:solidFill>
+                <a:latin typeface="Trebuchet MS" pitchFamily="34" charset="0"/>
+                <a:ea typeface="Trebuchet MS" pitchFamily="34" charset="-122"/>
+                <a:cs typeface="Trebuchet MS" pitchFamily="34" charset="-120"/>
+              </a:rPr>
+              <a:t>ate</a:t>
+            </a:r>
+            <a:endParaRPr lang="en-US" sz="1300" dirty="0"/>
+          </a:p>
+        </p:txBody>
+      </p:sp>
+      <p:sp>
+        <p:nvSpPr>
+          <p:cNvPr id="24" name="Text 22"/>
+          <p:cNvSpPr/>
+          <p:nvPr/>
+        </p:nvSpPr>
+        <p:spPr>
+          <a:xfrm>
+            <a:off x="5329123" y="2569464"/>
+            <a:ext cx="1581912" cy="201168"/>
+          </a:xfrm>
+          <a:prstGeom prst="rect">
+            <a:avLst/>
+          </a:prstGeom>
+          <a:noFill/>
+          <a:ln/>
+        </p:spPr>
+        <p:txBody>
+          <a:bodyPr wrap="square" lIns="0" tIns="0" rIns="0" bIns="0" rtlCol="0" anchor="t"/>
+          <a:lstStyle/>
+          <a:p>
+            <a:pPr algn="ctr" indent="0" marL="0">
+              <a:buNone/>
+            </a:pPr>
+            <a:r>
+              <a:rPr lang="en-US" sz="850" dirty="0">
+                <a:solidFill>
+                  <a:srgbClr val="475569"/>
+                </a:solidFill>
+                <a:latin typeface="Calibri" pitchFamily="34" charset="0"/>
+                <a:ea typeface="Calibri" pitchFamily="34" charset="-122"/>
+                <a:cs typeface="Calibri" pitchFamily="34" charset="-120"/>
+              </a:rPr>
+              <a:t>to make; to become</a:t>
+            </a:r>
+            <a:endParaRPr lang="en-US" sz="850" dirty="0"/>
+          </a:p>
+        </p:txBody>
+      </p:sp>
+      <p:sp>
+        <p:nvSpPr>
+          <p:cNvPr id="25" name="Shape 23"/>
+          <p:cNvSpPr/>
+          <p:nvPr/>
+        </p:nvSpPr>
+        <p:spPr>
+          <a:xfrm>
+            <a:off x="6998818" y="2258568"/>
+            <a:ext cx="1581912" cy="292608"/>
+          </a:xfrm>
+          <a:prstGeom prst="rect">
+            <a:avLst>
+              <a:gd name="adj" fmla="val 25000"/>
+            </a:avLst>
+          </a:prstGeom>
+          <a:solidFill>
+            <a:srgbClr val="FCE7F3"/>
+          </a:solidFill>
+          <a:ln w="19050">
+            <a:solidFill>
+              <a:srgbClr val="DB2777"/>
+            </a:solidFill>
+            <a:prstDash val="solid"/>
+          </a:ln>
+          <a:effectLst>
+            <a:outerShdw sx="100000" sy="100000" kx="0" ky="0" algn="bl" rotWithShape="0" blurRad="101600" dist="38100" dir="8100000">
+              <a:srgbClr val="000000">
+                <a:alpha val="12000"/>
+              </a:srgbClr>
+            </a:outerShdw>
+          </a:effectLst>
+        </p:spPr>
+      </p:sp>
+      <p:sp>
+        <p:nvSpPr>
+          <p:cNvPr id="26" name="Text 24"/>
+          <p:cNvSpPr/>
+          <p:nvPr/>
+        </p:nvSpPr>
+        <p:spPr>
+          <a:xfrm>
+            <a:off x="6998818" y="2258568"/>
+            <a:ext cx="1581912" cy="292608"/>
+          </a:xfrm>
+          <a:prstGeom prst="rect">
+            <a:avLst/>
+          </a:prstGeom>
+          <a:noFill/>
+          <a:ln/>
+        </p:spPr>
+        <p:txBody>
+          <a:bodyPr wrap="square" lIns="0" tIns="0" rIns="0" bIns="0" rtlCol="0" anchor="ctr"/>
+          <a:lstStyle/>
+          <a:p>
+            <a:pPr algn="ctr" indent="0" marL="0">
+              <a:buNone/>
+            </a:pPr>
+            <a:r>
+              <a:rPr lang="en-US" sz="1300" b="1" dirty="0">
+                <a:solidFill>
+                  <a:srgbClr val="9D174D"/>
+                </a:solidFill>
+                <a:latin typeface="Trebuchet MS" pitchFamily="34" charset="0"/>
+                <a:ea typeface="Trebuchet MS" pitchFamily="34" charset="-122"/>
+                <a:cs typeface="Trebuchet MS" pitchFamily="34" charset="-120"/>
+              </a:rPr>
+              <a:t>ory</a:t>
+            </a:r>
+            <a:endParaRPr lang="en-US" sz="1300" dirty="0"/>
+          </a:p>
+        </p:txBody>
+      </p:sp>
+      <p:sp>
+        <p:nvSpPr>
+          <p:cNvPr id="27" name="Text 25"/>
+          <p:cNvSpPr/>
+          <p:nvPr/>
+        </p:nvSpPr>
+        <p:spPr>
+          <a:xfrm>
+            <a:off x="6998818" y="2569464"/>
+            <a:ext cx="1581912" cy="201168"/>
+          </a:xfrm>
+          <a:prstGeom prst="rect">
+            <a:avLst/>
+          </a:prstGeom>
+          <a:noFill/>
+          <a:ln/>
+        </p:spPr>
+        <p:txBody>
+          <a:bodyPr wrap="square" lIns="0" tIns="0" rIns="0" bIns="0" rtlCol="0" anchor="t"/>
+          <a:lstStyle/>
+          <a:p>
+            <a:pPr algn="ctr" indent="0" marL="0">
+              <a:buNone/>
+            </a:pPr>
+            <a:r>
+              <a:rPr lang="en-US" sz="850" dirty="0">
+                <a:solidFill>
+                  <a:srgbClr val="475569"/>
+                </a:solidFill>
+                <a:latin typeface="Calibri" pitchFamily="34" charset="0"/>
+                <a:ea typeface="Calibri" pitchFamily="34" charset="-122"/>
+                <a:cs typeface="Calibri" pitchFamily="34" charset="-120"/>
+              </a:rPr>
+              <a:t>a place of; characterised by</a:t>
+            </a:r>
+            <a:endParaRPr lang="en-US" sz="850" dirty="0"/>
+          </a:p>
+        </p:txBody>
+      </p:sp>
+      <p:sp>
+        <p:nvSpPr>
+          <p:cNvPr id="28" name="Shape 26"/>
           <p:cNvSpPr/>
           <p:nvPr/>
         </p:nvSpPr>
@@ -20952,7 +22102,7 @@
       </p:sp>
       <p:sp>
         <p:nvSpPr>
-          <p:cNvPr id="23" name="Text 21"/>
+          <p:cNvPr id="29" name="Text 27"/>
           <p:cNvSpPr/>
           <p:nvPr/>
         </p:nvSpPr>
@@ -20991,7 +22141,7 @@
       </p:sp>
       <p:sp>
         <p:nvSpPr>
-          <p:cNvPr id="24" name="Shape 22"/>
+          <p:cNvPr id="30" name="Shape 28"/>
           <p:cNvSpPr/>
           <p:nvPr/>
         </p:nvSpPr>
@@ -21018,14 +22168,14 @@
       </p:sp>
       <p:sp>
         <p:nvSpPr>
-          <p:cNvPr id="25" name="Shape 23"/>
-          <p:cNvSpPr/>
-          <p:nvPr/>
-        </p:nvSpPr>
-        <p:spPr>
-          <a:xfrm>
-            <a:off x="2999232" y="3364992"/>
-            <a:ext cx="1645920" cy="475488"/>
+          <p:cNvPr id="31" name="Shape 29"/>
+          <p:cNvSpPr/>
+          <p:nvPr/>
+        </p:nvSpPr>
+        <p:spPr>
+          <a:xfrm>
+            <a:off x="1978152" y="3364992"/>
+            <a:ext cx="1225296" cy="475488"/>
           </a:xfrm>
           <a:prstGeom prst="rect">
             <a:avLst>
@@ -21045,14 +22195,14 @@
       </p:sp>
       <p:sp>
         <p:nvSpPr>
-          <p:cNvPr id="26" name="Text 24"/>
-          <p:cNvSpPr/>
-          <p:nvPr/>
-        </p:nvSpPr>
-        <p:spPr>
-          <a:xfrm>
-            <a:off x="2999232" y="3364992"/>
-            <a:ext cx="1645920" cy="475488"/>
+          <p:cNvPr id="32" name="Text 30"/>
+          <p:cNvSpPr/>
+          <p:nvPr/>
+        </p:nvSpPr>
+        <p:spPr>
+          <a:xfrm>
+            <a:off x="1978152" y="3364992"/>
+            <a:ext cx="1225296" cy="475488"/>
           </a:xfrm>
           <a:prstGeom prst="rect">
             <a:avLst/>
@@ -21076,7 +22226,7 @@
                 <a:ea typeface="Trebuchet MS" pitchFamily="34" charset="-122"/>
                 <a:cs typeface="Trebuchet MS" pitchFamily="34" charset="-120"/>
               </a:rPr>
-              <a:t>con</a:t>
+              <a:t>res</a:t>
             </a:r>
             <a:endParaRPr lang="en-US" sz="1400" dirty="0"/>
           </a:p>
@@ -21084,14 +22234,14 @@
       </p:sp>
       <p:sp>
         <p:nvSpPr>
-          <p:cNvPr id="27" name="Text 25"/>
-          <p:cNvSpPr/>
-          <p:nvPr/>
-        </p:nvSpPr>
-        <p:spPr>
-          <a:xfrm>
-            <a:off x="4645152" y="3364992"/>
-            <a:ext cx="1097280" cy="475488"/>
+          <p:cNvPr id="33" name="Text 31"/>
+          <p:cNvSpPr/>
+          <p:nvPr/>
+        </p:nvSpPr>
+        <p:spPr>
+          <a:xfrm>
+            <a:off x="3203448" y="3364992"/>
+            <a:ext cx="76200" cy="475488"/>
           </a:xfrm>
           <a:prstGeom prst="rect">
             <a:avLst/>
@@ -21123,14 +22273,14 @@
       </p:sp>
       <p:sp>
         <p:nvSpPr>
-          <p:cNvPr id="28" name="Shape 26"/>
-          <p:cNvSpPr/>
-          <p:nvPr/>
-        </p:nvSpPr>
-        <p:spPr>
-          <a:xfrm>
-            <a:off x="5742432" y="3364992"/>
-            <a:ext cx="1645920" cy="475488"/>
+          <p:cNvPr id="34" name="Shape 32"/>
+          <p:cNvSpPr/>
+          <p:nvPr/>
+        </p:nvSpPr>
+        <p:spPr>
+          <a:xfrm>
+            <a:off x="3279648" y="3364992"/>
+            <a:ext cx="1225296" cy="475488"/>
           </a:xfrm>
           <a:prstGeom prst="rect">
             <a:avLst>
@@ -21150,14 +22300,14 @@
       </p:sp>
       <p:sp>
         <p:nvSpPr>
-          <p:cNvPr id="29" name="Text 27"/>
-          <p:cNvSpPr/>
-          <p:nvPr/>
-        </p:nvSpPr>
-        <p:spPr>
-          <a:xfrm>
-            <a:off x="5742432" y="3364992"/>
-            <a:ext cx="1645920" cy="475488"/>
+          <p:cNvPr id="35" name="Text 33"/>
+          <p:cNvSpPr/>
+          <p:nvPr/>
+        </p:nvSpPr>
+        <p:spPr>
+          <a:xfrm>
+            <a:off x="3279648" y="3364992"/>
+            <a:ext cx="1225296" cy="475488"/>
           </a:xfrm>
           <a:prstGeom prst="rect">
             <a:avLst/>
@@ -21181,7 +22331,7 @@
                 <a:ea typeface="Trebuchet MS" pitchFamily="34" charset="-122"/>
                 <a:cs typeface="Trebuchet MS" pitchFamily="34" charset="-120"/>
               </a:rPr>
-              <a:t>spire</a:t>
+              <a:t>pi</a:t>
             </a:r>
             <a:endParaRPr lang="en-US" sz="1400" dirty="0"/>
           </a:p>
@@ -21189,7 +22339,322 @@
       </p:sp>
       <p:sp>
         <p:nvSpPr>
-          <p:cNvPr id="30" name="Shape 28"/>
+          <p:cNvPr id="36" name="Text 34"/>
+          <p:cNvSpPr/>
+          <p:nvPr/>
+        </p:nvSpPr>
+        <p:spPr>
+          <a:xfrm>
+            <a:off x="4504944" y="3364992"/>
+            <a:ext cx="76200" cy="475488"/>
+          </a:xfrm>
+          <a:prstGeom prst="rect">
+            <a:avLst/>
+          </a:prstGeom>
+          <a:noFill/>
+          <a:ln/>
+        </p:spPr>
+        <p:txBody>
+          <a:bodyPr wrap="square" lIns="0" tIns="0" rIns="0" bIns="0" rtlCol="0" anchor="ctr"/>
+          <a:lstStyle/>
+          <a:p>
+            <a:pPr algn="ctr" indent="0" marL="0">
+              <a:buNone/>
+            </a:pPr>
+            <a:r>
+              <a:rPr lang="en-US" sz="1600" b="1" dirty="0">
+                <a:solidFill>
+                  <a:srgbClr val="0D9488"/>
+                </a:solidFill>
+                <a:latin typeface="Trebuchet MS" pitchFamily="34" charset="0"/>
+                <a:ea typeface="Trebuchet MS" pitchFamily="34" charset="-122"/>
+                <a:cs typeface="Trebuchet MS" pitchFamily="34" charset="-120"/>
+              </a:rPr>
+              <a:t>·</a:t>
+            </a:r>
+            <a:endParaRPr lang="en-US" sz="1600" dirty="0"/>
+          </a:p>
+        </p:txBody>
+      </p:sp>
+      <p:sp>
+        <p:nvSpPr>
+          <p:cNvPr id="37" name="Shape 35"/>
+          <p:cNvSpPr/>
+          <p:nvPr/>
+        </p:nvSpPr>
+        <p:spPr>
+          <a:xfrm>
+            <a:off x="4581144" y="3364992"/>
+            <a:ext cx="1225296" cy="475488"/>
+          </a:xfrm>
+          <a:prstGeom prst="rect">
+            <a:avLst>
+              <a:gd name="adj" fmla="val 9615"/>
+            </a:avLst>
+          </a:prstGeom>
+          <a:solidFill>
+            <a:srgbClr val="FFFFFF"/>
+          </a:solidFill>
+          <a:ln w="12700">
+            <a:solidFill>
+              <a:srgbClr val="0D9488"/>
+            </a:solidFill>
+            <a:prstDash val="solid"/>
+          </a:ln>
+        </p:spPr>
+      </p:sp>
+      <p:sp>
+        <p:nvSpPr>
+          <p:cNvPr id="38" name="Text 36"/>
+          <p:cNvSpPr/>
+          <p:nvPr/>
+        </p:nvSpPr>
+        <p:spPr>
+          <a:xfrm>
+            <a:off x="4581144" y="3364992"/>
+            <a:ext cx="1225296" cy="475488"/>
+          </a:xfrm>
+          <a:prstGeom prst="rect">
+            <a:avLst/>
+          </a:prstGeom>
+          <a:noFill/>
+          <a:ln/>
+        </p:spPr>
+        <p:txBody>
+          <a:bodyPr wrap="square" lIns="0" tIns="0" rIns="0" bIns="0" rtlCol="0" anchor="ctr"/>
+          <a:lstStyle/>
+          <a:p>
+            <a:pPr algn="ctr" indent="0" marL="0">
+              <a:buNone/>
+            </a:pPr>
+            <a:r>
+              <a:rPr lang="en-US" sz="1400" b="1" dirty="0">
+                <a:solidFill>
+                  <a:srgbClr val="0D9488"/>
+                </a:solidFill>
+                <a:latin typeface="Trebuchet MS" pitchFamily="34" charset="0"/>
+                <a:ea typeface="Trebuchet MS" pitchFamily="34" charset="-122"/>
+                <a:cs typeface="Trebuchet MS" pitchFamily="34" charset="-120"/>
+              </a:rPr>
+              <a:t>ra</a:t>
+            </a:r>
+            <a:endParaRPr lang="en-US" sz="1400" dirty="0"/>
+          </a:p>
+        </p:txBody>
+      </p:sp>
+      <p:sp>
+        <p:nvSpPr>
+          <p:cNvPr id="39" name="Text 37"/>
+          <p:cNvSpPr/>
+          <p:nvPr/>
+        </p:nvSpPr>
+        <p:spPr>
+          <a:xfrm>
+            <a:off x="5806440" y="3364992"/>
+            <a:ext cx="76200" cy="475488"/>
+          </a:xfrm>
+          <a:prstGeom prst="rect">
+            <a:avLst/>
+          </a:prstGeom>
+          <a:noFill/>
+          <a:ln/>
+        </p:spPr>
+        <p:txBody>
+          <a:bodyPr wrap="square" lIns="0" tIns="0" rIns="0" bIns="0" rtlCol="0" anchor="ctr"/>
+          <a:lstStyle/>
+          <a:p>
+            <a:pPr algn="ctr" indent="0" marL="0">
+              <a:buNone/>
+            </a:pPr>
+            <a:r>
+              <a:rPr lang="en-US" sz="1600" b="1" dirty="0">
+                <a:solidFill>
+                  <a:srgbClr val="0D9488"/>
+                </a:solidFill>
+                <a:latin typeface="Trebuchet MS" pitchFamily="34" charset="0"/>
+                <a:ea typeface="Trebuchet MS" pitchFamily="34" charset="-122"/>
+                <a:cs typeface="Trebuchet MS" pitchFamily="34" charset="-120"/>
+              </a:rPr>
+              <a:t>·</a:t>
+            </a:r>
+            <a:endParaRPr lang="en-US" sz="1600" dirty="0"/>
+          </a:p>
+        </p:txBody>
+      </p:sp>
+      <p:sp>
+        <p:nvSpPr>
+          <p:cNvPr id="40" name="Shape 38"/>
+          <p:cNvSpPr/>
+          <p:nvPr/>
+        </p:nvSpPr>
+        <p:spPr>
+          <a:xfrm>
+            <a:off x="5882640" y="3364992"/>
+            <a:ext cx="1225296" cy="475488"/>
+          </a:xfrm>
+          <a:prstGeom prst="rect">
+            <a:avLst>
+              <a:gd name="adj" fmla="val 9615"/>
+            </a:avLst>
+          </a:prstGeom>
+          <a:solidFill>
+            <a:srgbClr val="FFFFFF"/>
+          </a:solidFill>
+          <a:ln w="12700">
+            <a:solidFill>
+              <a:srgbClr val="0D9488"/>
+            </a:solidFill>
+            <a:prstDash val="solid"/>
+          </a:ln>
+        </p:spPr>
+      </p:sp>
+      <p:sp>
+        <p:nvSpPr>
+          <p:cNvPr id="41" name="Text 39"/>
+          <p:cNvSpPr/>
+          <p:nvPr/>
+        </p:nvSpPr>
+        <p:spPr>
+          <a:xfrm>
+            <a:off x="5882640" y="3364992"/>
+            <a:ext cx="1225296" cy="475488"/>
+          </a:xfrm>
+          <a:prstGeom prst="rect">
+            <a:avLst/>
+          </a:prstGeom>
+          <a:noFill/>
+          <a:ln/>
+        </p:spPr>
+        <p:txBody>
+          <a:bodyPr wrap="square" lIns="0" tIns="0" rIns="0" bIns="0" rtlCol="0" anchor="ctr"/>
+          <a:lstStyle/>
+          <a:p>
+            <a:pPr algn="ctr" indent="0" marL="0">
+              <a:buNone/>
+            </a:pPr>
+            <a:r>
+              <a:rPr lang="en-US" sz="1400" b="1" dirty="0">
+                <a:solidFill>
+                  <a:srgbClr val="0D9488"/>
+                </a:solidFill>
+                <a:latin typeface="Trebuchet MS" pitchFamily="34" charset="0"/>
+                <a:ea typeface="Trebuchet MS" pitchFamily="34" charset="-122"/>
+                <a:cs typeface="Trebuchet MS" pitchFamily="34" charset="-120"/>
+              </a:rPr>
+              <a:t>to</a:t>
+            </a:r>
+            <a:endParaRPr lang="en-US" sz="1400" dirty="0"/>
+          </a:p>
+        </p:txBody>
+      </p:sp>
+      <p:sp>
+        <p:nvSpPr>
+          <p:cNvPr id="42" name="Text 40"/>
+          <p:cNvSpPr/>
+          <p:nvPr/>
+        </p:nvSpPr>
+        <p:spPr>
+          <a:xfrm>
+            <a:off x="7107936" y="3364992"/>
+            <a:ext cx="76200" cy="475488"/>
+          </a:xfrm>
+          <a:prstGeom prst="rect">
+            <a:avLst/>
+          </a:prstGeom>
+          <a:noFill/>
+          <a:ln/>
+        </p:spPr>
+        <p:txBody>
+          <a:bodyPr wrap="square" lIns="0" tIns="0" rIns="0" bIns="0" rtlCol="0" anchor="ctr"/>
+          <a:lstStyle/>
+          <a:p>
+            <a:pPr algn="ctr" indent="0" marL="0">
+              <a:buNone/>
+            </a:pPr>
+            <a:r>
+              <a:rPr lang="en-US" sz="1600" b="1" dirty="0">
+                <a:solidFill>
+                  <a:srgbClr val="0D9488"/>
+                </a:solidFill>
+                <a:latin typeface="Trebuchet MS" pitchFamily="34" charset="0"/>
+                <a:ea typeface="Trebuchet MS" pitchFamily="34" charset="-122"/>
+                <a:cs typeface="Trebuchet MS" pitchFamily="34" charset="-120"/>
+              </a:rPr>
+              <a:t>·</a:t>
+            </a:r>
+            <a:endParaRPr lang="en-US" sz="1600" dirty="0"/>
+          </a:p>
+        </p:txBody>
+      </p:sp>
+      <p:sp>
+        <p:nvSpPr>
+          <p:cNvPr id="43" name="Shape 41"/>
+          <p:cNvSpPr/>
+          <p:nvPr/>
+        </p:nvSpPr>
+        <p:spPr>
+          <a:xfrm>
+            <a:off x="7184136" y="3364992"/>
+            <a:ext cx="1225296" cy="475488"/>
+          </a:xfrm>
+          <a:prstGeom prst="rect">
+            <a:avLst>
+              <a:gd name="adj" fmla="val 9615"/>
+            </a:avLst>
+          </a:prstGeom>
+          <a:solidFill>
+            <a:srgbClr val="FFFFFF"/>
+          </a:solidFill>
+          <a:ln w="12700">
+            <a:solidFill>
+              <a:srgbClr val="0D9488"/>
+            </a:solidFill>
+            <a:prstDash val="solid"/>
+          </a:ln>
+        </p:spPr>
+      </p:sp>
+      <p:sp>
+        <p:nvSpPr>
+          <p:cNvPr id="44" name="Text 42"/>
+          <p:cNvSpPr/>
+          <p:nvPr/>
+        </p:nvSpPr>
+        <p:spPr>
+          <a:xfrm>
+            <a:off x="7184136" y="3364992"/>
+            <a:ext cx="1225296" cy="475488"/>
+          </a:xfrm>
+          <a:prstGeom prst="rect">
+            <a:avLst/>
+          </a:prstGeom>
+          <a:noFill/>
+          <a:ln/>
+        </p:spPr>
+        <p:txBody>
+          <a:bodyPr wrap="square" lIns="0" tIns="0" rIns="0" bIns="0" rtlCol="0" anchor="ctr"/>
+          <a:lstStyle/>
+          <a:p>
+            <a:pPr algn="ctr" indent="0" marL="0">
+              <a:buNone/>
+            </a:pPr>
+            <a:r>
+              <a:rPr lang="en-US" sz="1400" b="1" dirty="0">
+                <a:solidFill>
+                  <a:srgbClr val="0D9488"/>
+                </a:solidFill>
+                <a:latin typeface="Trebuchet MS" pitchFamily="34" charset="0"/>
+                <a:ea typeface="Trebuchet MS" pitchFamily="34" charset="-122"/>
+                <a:cs typeface="Trebuchet MS" pitchFamily="34" charset="-120"/>
+              </a:rPr>
+              <a:t>ry</a:t>
+            </a:r>
+            <a:endParaRPr lang="en-US" sz="1400" dirty="0"/>
+          </a:p>
+        </p:txBody>
+      </p:sp>
+      <p:sp>
+        <p:nvSpPr>
+          <p:cNvPr id="45" name="Shape 43"/>
           <p:cNvSpPr/>
           <p:nvPr/>
         </p:nvSpPr>
@@ -21216,7 +22681,7 @@
       </p:sp>
       <p:sp>
         <p:nvSpPr>
-          <p:cNvPr id="31" name="Text 29"/>
+          <p:cNvPr id="46" name="Text 44"/>
           <p:cNvSpPr/>
           <p:nvPr/>
         </p:nvSpPr>
@@ -21255,18 +22720,18 @@
       </p:sp>
       <p:sp>
         <p:nvSpPr>
-          <p:cNvPr id="32" name="Shape 30"/>
+          <p:cNvPr id="47" name="Shape 45"/>
           <p:cNvSpPr/>
           <p:nvPr/>
         </p:nvSpPr>
         <p:spPr>
           <a:xfrm>
             <a:off x="1874520" y="4096512"/>
-            <a:ext cx="6903720" cy="804672"/>
+            <a:ext cx="6903720" cy="658368"/>
           </a:xfrm>
           <a:prstGeom prst="rect">
             <a:avLst>
-              <a:gd name="adj" fmla="val 6818"/>
+              <a:gd name="adj" fmla="val 8333"/>
             </a:avLst>
           </a:prstGeom>
           <a:solidFill>
@@ -21282,18 +22747,18 @@
       </p:sp>
       <p:sp>
         <p:nvSpPr>
-          <p:cNvPr id="33" name="Shape 31"/>
-          <p:cNvSpPr/>
-          <p:nvPr/>
-        </p:nvSpPr>
-        <p:spPr>
-          <a:xfrm>
-            <a:off x="2124837" y="4169664"/>
-            <a:ext cx="685800" cy="384048"/>
+          <p:cNvPr id="48" name="Shape 46"/>
+          <p:cNvSpPr/>
+          <p:nvPr/>
+        </p:nvSpPr>
+        <p:spPr>
+          <a:xfrm>
+            <a:off x="1952244" y="4169664"/>
+            <a:ext cx="543652" cy="475488"/>
           </a:xfrm>
           <a:prstGeom prst="rect">
             <a:avLst>
-              <a:gd name="adj" fmla="val 9524"/>
+              <a:gd name="adj" fmla="val 7692"/>
             </a:avLst>
           </a:prstGeom>
           <a:solidFill>
@@ -21309,14 +22774,14 @@
       </p:sp>
       <p:sp>
         <p:nvSpPr>
-          <p:cNvPr id="34" name="Text 32"/>
-          <p:cNvSpPr/>
-          <p:nvPr/>
-        </p:nvSpPr>
-        <p:spPr>
-          <a:xfrm>
-            <a:off x="2124837" y="4169664"/>
-            <a:ext cx="685800" cy="384048"/>
+          <p:cNvPr id="49" name="Text 47"/>
+          <p:cNvSpPr/>
+          <p:nvPr/>
+        </p:nvSpPr>
+        <p:spPr>
+          <a:xfrm>
+            <a:off x="1952244" y="4169664"/>
+            <a:ext cx="543652" cy="475488"/>
           </a:xfrm>
           <a:prstGeom prst="rect">
             <a:avLst/>
@@ -21340,7 +22805,7 @@
                 <a:ea typeface="Trebuchet MS" pitchFamily="34" charset="-122"/>
                 <a:cs typeface="Trebuchet MS" pitchFamily="34" charset="-120"/>
               </a:rPr>
-              <a:t>c</a:t>
+              <a:t>r</a:t>
             </a:r>
             <a:endParaRPr lang="en-US" sz="900" dirty="0"/>
           </a:p>
@@ -21348,57 +22813,18 @@
       </p:sp>
       <p:sp>
         <p:nvSpPr>
-          <p:cNvPr id="35" name="Text 33"/>
-          <p:cNvSpPr/>
-          <p:nvPr/>
-        </p:nvSpPr>
-        <p:spPr>
-          <a:xfrm>
-            <a:off x="2124837" y="4572000"/>
-            <a:ext cx="685800" cy="219456"/>
-          </a:xfrm>
-          <a:prstGeom prst="rect">
-            <a:avLst/>
-          </a:prstGeom>
-          <a:noFill/>
-          <a:ln/>
-        </p:spPr>
-        <p:txBody>
-          <a:bodyPr wrap="square" lIns="0" tIns="0" rIns="0" bIns="0" rtlCol="0" anchor="t"/>
-          <a:lstStyle/>
-          <a:p>
-            <a:pPr algn="ctr" indent="0" marL="0">
-              <a:buNone/>
-            </a:pPr>
-            <a:r>
-              <a:rPr lang="en-US" sz="750" i="1" dirty="0">
-                <a:solidFill>
-                  <a:srgbClr val="94A3B8"/>
-                </a:solidFill>
-                <a:latin typeface="Calibri" pitchFamily="34" charset="0"/>
-                <a:ea typeface="Calibri" pitchFamily="34" charset="-122"/>
-                <a:cs typeface="Calibri" pitchFamily="34" charset="-120"/>
-              </a:rPr>
-              <a:t>/k/</a:t>
-            </a:r>
-            <a:endParaRPr lang="en-US" sz="750" dirty="0"/>
-          </a:p>
-        </p:txBody>
-      </p:sp>
-      <p:sp>
-        <p:nvSpPr>
-          <p:cNvPr id="36" name="Shape 34"/>
-          <p:cNvSpPr/>
-          <p:nvPr/>
-        </p:nvSpPr>
-        <p:spPr>
-          <a:xfrm>
-            <a:off x="3033522" y="4169664"/>
-            <a:ext cx="685800" cy="384048"/>
+          <p:cNvPr id="50" name="Shape 48"/>
+          <p:cNvSpPr/>
+          <p:nvPr/>
+        </p:nvSpPr>
+        <p:spPr>
+          <a:xfrm>
+            <a:off x="2546188" y="4169664"/>
+            <a:ext cx="543652" cy="475488"/>
           </a:xfrm>
           <a:prstGeom prst="rect">
             <a:avLst>
-              <a:gd name="adj" fmla="val 9524"/>
+              <a:gd name="adj" fmla="val 7692"/>
             </a:avLst>
           </a:prstGeom>
           <a:solidFill>
@@ -21414,14 +22840,14 @@
       </p:sp>
       <p:sp>
         <p:nvSpPr>
-          <p:cNvPr id="37" name="Text 35"/>
-          <p:cNvSpPr/>
-          <p:nvPr/>
-        </p:nvSpPr>
-        <p:spPr>
-          <a:xfrm>
-            <a:off x="3033522" y="4169664"/>
-            <a:ext cx="685800" cy="384048"/>
+          <p:cNvPr id="51" name="Text 49"/>
+          <p:cNvSpPr/>
+          <p:nvPr/>
+        </p:nvSpPr>
+        <p:spPr>
+          <a:xfrm>
+            <a:off x="2546188" y="4169664"/>
+            <a:ext cx="543652" cy="475488"/>
           </a:xfrm>
           <a:prstGeom prst="rect">
             <a:avLst/>
@@ -21445,7 +22871,7 @@
                 <a:ea typeface="Trebuchet MS" pitchFamily="34" charset="-122"/>
                 <a:cs typeface="Trebuchet MS" pitchFamily="34" charset="-120"/>
               </a:rPr>
-              <a:t>o</a:t>
+              <a:t>e</a:t>
             </a:r>
             <a:endParaRPr lang="en-US" sz="900" dirty="0"/>
           </a:p>
@@ -21453,18 +22879,18 @@
       </p:sp>
       <p:sp>
         <p:nvSpPr>
-          <p:cNvPr id="38" name="Shape 36"/>
-          <p:cNvSpPr/>
-          <p:nvPr/>
-        </p:nvSpPr>
-        <p:spPr>
-          <a:xfrm>
-            <a:off x="3942207" y="4169664"/>
-            <a:ext cx="685800" cy="384048"/>
+          <p:cNvPr id="52" name="Shape 50"/>
+          <p:cNvSpPr/>
+          <p:nvPr/>
+        </p:nvSpPr>
+        <p:spPr>
+          <a:xfrm>
+            <a:off x="3140133" y="4169664"/>
+            <a:ext cx="543652" cy="475488"/>
           </a:xfrm>
           <a:prstGeom prst="rect">
             <a:avLst>
-              <a:gd name="adj" fmla="val 9524"/>
+              <a:gd name="adj" fmla="val 7692"/>
             </a:avLst>
           </a:prstGeom>
           <a:solidFill>
@@ -21480,14 +22906,14 @@
       </p:sp>
       <p:sp>
         <p:nvSpPr>
-          <p:cNvPr id="39" name="Text 37"/>
-          <p:cNvSpPr/>
-          <p:nvPr/>
-        </p:nvSpPr>
-        <p:spPr>
-          <a:xfrm>
-            <a:off x="3942207" y="4169664"/>
-            <a:ext cx="685800" cy="384048"/>
+          <p:cNvPr id="53" name="Text 51"/>
+          <p:cNvSpPr/>
+          <p:nvPr/>
+        </p:nvSpPr>
+        <p:spPr>
+          <a:xfrm>
+            <a:off x="3140133" y="4169664"/>
+            <a:ext cx="543652" cy="475488"/>
           </a:xfrm>
           <a:prstGeom prst="rect">
             <a:avLst/>
@@ -21511,7 +22937,7 @@
                 <a:ea typeface="Trebuchet MS" pitchFamily="34" charset="-122"/>
                 <a:cs typeface="Trebuchet MS" pitchFamily="34" charset="-120"/>
               </a:rPr>
-              <a:t>n</a:t>
+              <a:t>s</a:t>
             </a:r>
             <a:endParaRPr lang="en-US" sz="900" dirty="0"/>
           </a:p>
@@ -21519,18 +22945,18 @@
       </p:sp>
       <p:sp>
         <p:nvSpPr>
-          <p:cNvPr id="40" name="Shape 38"/>
-          <p:cNvSpPr/>
-          <p:nvPr/>
-        </p:nvSpPr>
-        <p:spPr>
-          <a:xfrm>
-            <a:off x="4850892" y="4169664"/>
-            <a:ext cx="685800" cy="384048"/>
+          <p:cNvPr id="54" name="Shape 52"/>
+          <p:cNvSpPr/>
+          <p:nvPr/>
+        </p:nvSpPr>
+        <p:spPr>
+          <a:xfrm>
+            <a:off x="3734077" y="4169664"/>
+            <a:ext cx="543652" cy="475488"/>
           </a:xfrm>
           <a:prstGeom prst="rect">
             <a:avLst>
-              <a:gd name="adj" fmla="val 9524"/>
+              <a:gd name="adj" fmla="val 7692"/>
             </a:avLst>
           </a:prstGeom>
           <a:solidFill>
@@ -21546,14 +22972,14 @@
       </p:sp>
       <p:sp>
         <p:nvSpPr>
-          <p:cNvPr id="41" name="Text 39"/>
-          <p:cNvSpPr/>
-          <p:nvPr/>
-        </p:nvSpPr>
-        <p:spPr>
-          <a:xfrm>
-            <a:off x="4850892" y="4169664"/>
-            <a:ext cx="685800" cy="384048"/>
+          <p:cNvPr id="55" name="Text 53"/>
+          <p:cNvSpPr/>
+          <p:nvPr/>
+        </p:nvSpPr>
+        <p:spPr>
+          <a:xfrm>
+            <a:off x="3734077" y="4169664"/>
+            <a:ext cx="543652" cy="475488"/>
           </a:xfrm>
           <a:prstGeom prst="rect">
             <a:avLst/>
@@ -21577,7 +23003,7 @@
                 <a:ea typeface="Trebuchet MS" pitchFamily="34" charset="-122"/>
                 <a:cs typeface="Trebuchet MS" pitchFamily="34" charset="-120"/>
               </a:rPr>
-              <a:t>s</a:t>
+              <a:t>p</a:t>
             </a:r>
             <a:endParaRPr lang="en-US" sz="900" dirty="0"/>
           </a:p>
@@ -21585,18 +23011,18 @@
       </p:sp>
       <p:sp>
         <p:nvSpPr>
-          <p:cNvPr id="42" name="Shape 40"/>
-          <p:cNvSpPr/>
-          <p:nvPr/>
-        </p:nvSpPr>
-        <p:spPr>
-          <a:xfrm>
-            <a:off x="5759577" y="4169664"/>
-            <a:ext cx="685800" cy="384048"/>
+          <p:cNvPr id="56" name="Shape 54"/>
+          <p:cNvSpPr/>
+          <p:nvPr/>
+        </p:nvSpPr>
+        <p:spPr>
+          <a:xfrm>
+            <a:off x="4328021" y="4169664"/>
+            <a:ext cx="543652" cy="475488"/>
           </a:xfrm>
           <a:prstGeom prst="rect">
             <a:avLst>
-              <a:gd name="adj" fmla="val 9524"/>
+              <a:gd name="adj" fmla="val 7692"/>
             </a:avLst>
           </a:prstGeom>
           <a:solidFill>
@@ -21612,14 +23038,14 @@
       </p:sp>
       <p:sp>
         <p:nvSpPr>
-          <p:cNvPr id="43" name="Text 41"/>
-          <p:cNvSpPr/>
-          <p:nvPr/>
-        </p:nvSpPr>
-        <p:spPr>
-          <a:xfrm>
-            <a:off x="5759577" y="4169664"/>
-            <a:ext cx="685800" cy="384048"/>
+          <p:cNvPr id="57" name="Text 55"/>
+          <p:cNvSpPr/>
+          <p:nvPr/>
+        </p:nvSpPr>
+        <p:spPr>
+          <a:xfrm>
+            <a:off x="4328021" y="4169664"/>
+            <a:ext cx="543652" cy="475488"/>
           </a:xfrm>
           <a:prstGeom prst="rect">
             <a:avLst/>
@@ -21643,7 +23069,7 @@
                 <a:ea typeface="Trebuchet MS" pitchFamily="34" charset="-122"/>
                 <a:cs typeface="Trebuchet MS" pitchFamily="34" charset="-120"/>
               </a:rPr>
-              <a:t>p</a:t>
+              <a:t>i</a:t>
             </a:r>
             <a:endParaRPr lang="en-US" sz="900" dirty="0"/>
           </a:p>
@@ -21651,18 +23077,18 @@
       </p:sp>
       <p:sp>
         <p:nvSpPr>
-          <p:cNvPr id="44" name="Shape 42"/>
-          <p:cNvSpPr/>
-          <p:nvPr/>
-        </p:nvSpPr>
-        <p:spPr>
-          <a:xfrm>
-            <a:off x="6668262" y="4169664"/>
-            <a:ext cx="685800" cy="384048"/>
+          <p:cNvPr id="58" name="Shape 56"/>
+          <p:cNvSpPr/>
+          <p:nvPr/>
+        </p:nvSpPr>
+        <p:spPr>
+          <a:xfrm>
+            <a:off x="4921966" y="4169664"/>
+            <a:ext cx="543652" cy="475488"/>
           </a:xfrm>
           <a:prstGeom prst="rect">
             <a:avLst>
-              <a:gd name="adj" fmla="val 9524"/>
+              <a:gd name="adj" fmla="val 7692"/>
             </a:avLst>
           </a:prstGeom>
           <a:solidFill>
@@ -21678,14 +23104,14 @@
       </p:sp>
       <p:sp>
         <p:nvSpPr>
-          <p:cNvPr id="45" name="Text 43"/>
-          <p:cNvSpPr/>
-          <p:nvPr/>
-        </p:nvSpPr>
-        <p:spPr>
-          <a:xfrm>
-            <a:off x="6668262" y="4169664"/>
-            <a:ext cx="685800" cy="384048"/>
+          <p:cNvPr id="59" name="Text 57"/>
+          <p:cNvSpPr/>
+          <p:nvPr/>
+        </p:nvSpPr>
+        <p:spPr>
+          <a:xfrm>
+            <a:off x="4921966" y="4169664"/>
+            <a:ext cx="543652" cy="475488"/>
           </a:xfrm>
           <a:prstGeom prst="rect">
             <a:avLst/>
@@ -21709,7 +23135,7 @@
                 <a:ea typeface="Trebuchet MS" pitchFamily="34" charset="-122"/>
                 <a:cs typeface="Trebuchet MS" pitchFamily="34" charset="-120"/>
               </a:rPr>
-              <a:t>i</a:t>
+              <a:t>r</a:t>
             </a:r>
             <a:endParaRPr lang="en-US" sz="900" dirty="0"/>
           </a:p>
@@ -21717,18 +23143,18 @@
       </p:sp>
       <p:sp>
         <p:nvSpPr>
-          <p:cNvPr id="46" name="Shape 44"/>
-          <p:cNvSpPr/>
-          <p:nvPr/>
-        </p:nvSpPr>
-        <p:spPr>
-          <a:xfrm>
-            <a:off x="7576947" y="4169664"/>
-            <a:ext cx="685800" cy="384048"/>
+          <p:cNvPr id="60" name="Shape 58"/>
+          <p:cNvSpPr/>
+          <p:nvPr/>
+        </p:nvSpPr>
+        <p:spPr>
+          <a:xfrm>
+            <a:off x="5515910" y="4169664"/>
+            <a:ext cx="543652" cy="475488"/>
           </a:xfrm>
           <a:prstGeom prst="rect">
             <a:avLst>
-              <a:gd name="adj" fmla="val 9524"/>
+              <a:gd name="adj" fmla="val 7692"/>
             </a:avLst>
           </a:prstGeom>
           <a:solidFill>
@@ -21744,14 +23170,14 @@
       </p:sp>
       <p:sp>
         <p:nvSpPr>
-          <p:cNvPr id="47" name="Text 45"/>
-          <p:cNvSpPr/>
-          <p:nvPr/>
-        </p:nvSpPr>
-        <p:spPr>
-          <a:xfrm>
-            <a:off x="7576947" y="4169664"/>
-            <a:ext cx="685800" cy="384048"/>
+          <p:cNvPr id="61" name="Text 59"/>
+          <p:cNvSpPr/>
+          <p:nvPr/>
+        </p:nvSpPr>
+        <p:spPr>
+          <a:xfrm>
+            <a:off x="5515910" y="4169664"/>
+            <a:ext cx="543652" cy="475488"/>
           </a:xfrm>
           <a:prstGeom prst="rect">
             <a:avLst/>
@@ -21775,7 +23201,271 @@
                 <a:ea typeface="Trebuchet MS" pitchFamily="34" charset="-122"/>
                 <a:cs typeface="Trebuchet MS" pitchFamily="34" charset="-120"/>
               </a:rPr>
-              <a:t>re</a:t>
+              <a:t>a</a:t>
+            </a:r>
+            <a:endParaRPr lang="en-US" sz="900" dirty="0"/>
+          </a:p>
+        </p:txBody>
+      </p:sp>
+      <p:sp>
+        <p:nvSpPr>
+          <p:cNvPr id="62" name="Shape 60"/>
+          <p:cNvSpPr/>
+          <p:nvPr/>
+        </p:nvSpPr>
+        <p:spPr>
+          <a:xfrm>
+            <a:off x="6109855" y="4169664"/>
+            <a:ext cx="543652" cy="475488"/>
+          </a:xfrm>
+          <a:prstGeom prst="rect">
+            <a:avLst>
+              <a:gd name="adj" fmla="val 7692"/>
+            </a:avLst>
+          </a:prstGeom>
+          <a:solidFill>
+            <a:srgbClr val="FFFFFF"/>
+          </a:solidFill>
+          <a:ln w="12700">
+            <a:solidFill>
+              <a:srgbClr val="DB2777"/>
+            </a:solidFill>
+            <a:prstDash val="solid"/>
+          </a:ln>
+        </p:spPr>
+      </p:sp>
+      <p:sp>
+        <p:nvSpPr>
+          <p:cNvPr id="63" name="Text 61"/>
+          <p:cNvSpPr/>
+          <p:nvPr/>
+        </p:nvSpPr>
+        <p:spPr>
+          <a:xfrm>
+            <a:off x="6109855" y="4169664"/>
+            <a:ext cx="543652" cy="475488"/>
+          </a:xfrm>
+          <a:prstGeom prst="rect">
+            <a:avLst/>
+          </a:prstGeom>
+          <a:noFill/>
+          <a:ln/>
+        </p:spPr>
+        <p:txBody>
+          <a:bodyPr wrap="square" lIns="0" tIns="0" rIns="0" bIns="0" rtlCol="0" anchor="ctr"/>
+          <a:lstStyle/>
+          <a:p>
+            <a:pPr algn="ctr" indent="0" marL="0">
+              <a:buNone/>
+            </a:pPr>
+            <a:r>
+              <a:rPr lang="en-US" sz="900" b="1" dirty="0">
+                <a:solidFill>
+                  <a:srgbClr val="9D174D"/>
+                </a:solidFill>
+                <a:latin typeface="Trebuchet MS" pitchFamily="34" charset="0"/>
+                <a:ea typeface="Trebuchet MS" pitchFamily="34" charset="-122"/>
+                <a:cs typeface="Trebuchet MS" pitchFamily="34" charset="-120"/>
+              </a:rPr>
+              <a:t>t</a:t>
+            </a:r>
+            <a:endParaRPr lang="en-US" sz="900" dirty="0"/>
+          </a:p>
+        </p:txBody>
+      </p:sp>
+      <p:sp>
+        <p:nvSpPr>
+          <p:cNvPr id="64" name="Shape 62"/>
+          <p:cNvSpPr/>
+          <p:nvPr/>
+        </p:nvSpPr>
+        <p:spPr>
+          <a:xfrm>
+            <a:off x="6703799" y="4169664"/>
+            <a:ext cx="543652" cy="475488"/>
+          </a:xfrm>
+          <a:prstGeom prst="rect">
+            <a:avLst>
+              <a:gd name="adj" fmla="val 7692"/>
+            </a:avLst>
+          </a:prstGeom>
+          <a:solidFill>
+            <a:srgbClr val="FFFFFF"/>
+          </a:solidFill>
+          <a:ln w="12700">
+            <a:solidFill>
+              <a:srgbClr val="DB2777"/>
+            </a:solidFill>
+            <a:prstDash val="solid"/>
+          </a:ln>
+        </p:spPr>
+      </p:sp>
+      <p:sp>
+        <p:nvSpPr>
+          <p:cNvPr id="65" name="Text 63"/>
+          <p:cNvSpPr/>
+          <p:nvPr/>
+        </p:nvSpPr>
+        <p:spPr>
+          <a:xfrm>
+            <a:off x="6703799" y="4169664"/>
+            <a:ext cx="543652" cy="475488"/>
+          </a:xfrm>
+          <a:prstGeom prst="rect">
+            <a:avLst/>
+          </a:prstGeom>
+          <a:noFill/>
+          <a:ln/>
+        </p:spPr>
+        <p:txBody>
+          <a:bodyPr wrap="square" lIns="0" tIns="0" rIns="0" bIns="0" rtlCol="0" anchor="ctr"/>
+          <a:lstStyle/>
+          <a:p>
+            <a:pPr algn="ctr" indent="0" marL="0">
+              <a:buNone/>
+            </a:pPr>
+            <a:r>
+              <a:rPr lang="en-US" sz="900" b="1" dirty="0">
+                <a:solidFill>
+                  <a:srgbClr val="9D174D"/>
+                </a:solidFill>
+                <a:latin typeface="Trebuchet MS" pitchFamily="34" charset="0"/>
+                <a:ea typeface="Trebuchet MS" pitchFamily="34" charset="-122"/>
+                <a:cs typeface="Trebuchet MS" pitchFamily="34" charset="-120"/>
+              </a:rPr>
+              <a:t>o</a:t>
+            </a:r>
+            <a:endParaRPr lang="en-US" sz="900" dirty="0"/>
+          </a:p>
+        </p:txBody>
+      </p:sp>
+      <p:sp>
+        <p:nvSpPr>
+          <p:cNvPr id="66" name="Shape 64"/>
+          <p:cNvSpPr/>
+          <p:nvPr/>
+        </p:nvSpPr>
+        <p:spPr>
+          <a:xfrm>
+            <a:off x="7297743" y="4169664"/>
+            <a:ext cx="543652" cy="475488"/>
+          </a:xfrm>
+          <a:prstGeom prst="rect">
+            <a:avLst>
+              <a:gd name="adj" fmla="val 7692"/>
+            </a:avLst>
+          </a:prstGeom>
+          <a:solidFill>
+            <a:srgbClr val="FFFFFF"/>
+          </a:solidFill>
+          <a:ln w="12700">
+            <a:solidFill>
+              <a:srgbClr val="DB2777"/>
+            </a:solidFill>
+            <a:prstDash val="solid"/>
+          </a:ln>
+        </p:spPr>
+      </p:sp>
+      <p:sp>
+        <p:nvSpPr>
+          <p:cNvPr id="67" name="Text 65"/>
+          <p:cNvSpPr/>
+          <p:nvPr/>
+        </p:nvSpPr>
+        <p:spPr>
+          <a:xfrm>
+            <a:off x="7297743" y="4169664"/>
+            <a:ext cx="543652" cy="475488"/>
+          </a:xfrm>
+          <a:prstGeom prst="rect">
+            <a:avLst/>
+          </a:prstGeom>
+          <a:noFill/>
+          <a:ln/>
+        </p:spPr>
+        <p:txBody>
+          <a:bodyPr wrap="square" lIns="0" tIns="0" rIns="0" bIns="0" rtlCol="0" anchor="ctr"/>
+          <a:lstStyle/>
+          <a:p>
+            <a:pPr algn="ctr" indent="0" marL="0">
+              <a:buNone/>
+            </a:pPr>
+            <a:r>
+              <a:rPr lang="en-US" sz="900" b="1" dirty="0">
+                <a:solidFill>
+                  <a:srgbClr val="9D174D"/>
+                </a:solidFill>
+                <a:latin typeface="Trebuchet MS" pitchFamily="34" charset="0"/>
+                <a:ea typeface="Trebuchet MS" pitchFamily="34" charset="-122"/>
+                <a:cs typeface="Trebuchet MS" pitchFamily="34" charset="-120"/>
+              </a:rPr>
+              <a:t>r</a:t>
+            </a:r>
+            <a:endParaRPr lang="en-US" sz="900" dirty="0"/>
+          </a:p>
+        </p:txBody>
+      </p:sp>
+      <p:sp>
+        <p:nvSpPr>
+          <p:cNvPr id="68" name="Shape 66"/>
+          <p:cNvSpPr/>
+          <p:nvPr/>
+        </p:nvSpPr>
+        <p:spPr>
+          <a:xfrm>
+            <a:off x="7891688" y="4169664"/>
+            <a:ext cx="543652" cy="475488"/>
+          </a:xfrm>
+          <a:prstGeom prst="rect">
+            <a:avLst>
+              <a:gd name="adj" fmla="val 7692"/>
+            </a:avLst>
+          </a:prstGeom>
+          <a:solidFill>
+            <a:srgbClr val="FFFFFF"/>
+          </a:solidFill>
+          <a:ln w="12700">
+            <a:solidFill>
+              <a:srgbClr val="DB2777"/>
+            </a:solidFill>
+            <a:prstDash val="solid"/>
+          </a:ln>
+        </p:spPr>
+      </p:sp>
+      <p:sp>
+        <p:nvSpPr>
+          <p:cNvPr id="69" name="Text 67"/>
+          <p:cNvSpPr/>
+          <p:nvPr/>
+        </p:nvSpPr>
+        <p:spPr>
+          <a:xfrm>
+            <a:off x="7891688" y="4169664"/>
+            <a:ext cx="543652" cy="475488"/>
+          </a:xfrm>
+          <a:prstGeom prst="rect">
+            <a:avLst/>
+          </a:prstGeom>
+          <a:noFill/>
+          <a:ln/>
+        </p:spPr>
+        <p:txBody>
+          <a:bodyPr wrap="square" lIns="0" tIns="0" rIns="0" bIns="0" rtlCol="0" anchor="ctr"/>
+          <a:lstStyle/>
+          <a:p>
+            <a:pPr algn="ctr" indent="0" marL="0">
+              <a:buNone/>
+            </a:pPr>
+            <a:r>
+              <a:rPr lang="en-US" sz="900" b="1" dirty="0">
+                <a:solidFill>
+                  <a:srgbClr val="9D174D"/>
+                </a:solidFill>
+                <a:latin typeface="Trebuchet MS" pitchFamily="34" charset="0"/>
+                <a:ea typeface="Trebuchet MS" pitchFamily="34" charset="-122"/>
+                <a:cs typeface="Trebuchet MS" pitchFamily="34" charset="-120"/>
+              </a:rPr>
+              <a:t>y</a:t>
             </a:r>
             <a:endParaRPr lang="en-US" sz="900" dirty="0"/>
           </a:p>
@@ -22067,7 +23757,7 @@
                 <a:ea typeface="Calibri" pitchFamily="34" charset="-122"/>
                 <a:cs typeface="Calibri" pitchFamily="34" charset="-120"/>
               </a:rPr>
-              <a:t>Word Labs  •  wordlabs.app  •  Root: 'spire' = breathe, breath, spirit</a:t>
+              <a:t>Word Labs  •  wordlabs.app  •  Root: 'spire' = breathe; live</a:t>
             </a:r>
             <a:endParaRPr lang="en-US" sz="800" dirty="0"/>
           </a:p>
@@ -22206,7 +23896,7 @@
                 <a:ea typeface="Trebuchet MS" pitchFamily="34" charset="-122"/>
                 <a:cs typeface="Trebuchet MS" pitchFamily="34" charset="-120"/>
               </a:rPr>
-              <a:t>expire</a:t>
+              <a:t>aspire</a:t>
             </a:r>
             <a:endParaRPr lang="en-US" sz="2800" dirty="0"/>
           </a:p>
@@ -22894,7 +24584,7 @@
                 <a:ea typeface="Calibri" pitchFamily="34" charset="-122"/>
                 <a:cs typeface="Calibri" pitchFamily="34" charset="-120"/>
               </a:rPr>
-              <a:t>Word Labs  •  wordlabs.app  •  Root: 'spire' = breathe, breath, spirit</a:t>
+              <a:t>Word Labs  •  wordlabs.app  •  Root: 'spire' = breathe; live</a:t>
             </a:r>
             <a:endParaRPr lang="en-US" sz="800" dirty="0"/>
           </a:p>
@@ -23033,7 +24723,7 @@
                 <a:ea typeface="Trebuchet MS" pitchFamily="34" charset="-122"/>
                 <a:cs typeface="Trebuchet MS" pitchFamily="34" charset="-120"/>
               </a:rPr>
-              <a:t>expire</a:t>
+              <a:t>aspire</a:t>
             </a:r>
             <a:endParaRPr lang="en-US" sz="2800" dirty="0"/>
           </a:p>
@@ -23172,7 +24862,7 @@
                 <a:ea typeface="Trebuchet MS" pitchFamily="34" charset="-122"/>
                 <a:cs typeface="Trebuchet MS" pitchFamily="34" charset="-120"/>
               </a:rPr>
-              <a:t>ex</a:t>
+              <a:t>a</a:t>
             </a:r>
             <a:endParaRPr lang="en-US" sz="1300" dirty="0"/>
           </a:p>
@@ -23211,7 +24901,7 @@
                 <a:ea typeface="Calibri" pitchFamily="34" charset="-122"/>
                 <a:cs typeface="Calibri" pitchFamily="34" charset="-120"/>
               </a:rPr>
-              <a:t>out, away</a:t>
+              <a:t>not; without</a:t>
             </a:r>
             <a:endParaRPr lang="en-US" sz="850" dirty="0"/>
           </a:p>
@@ -23323,7 +25013,7 @@
                 <a:ea typeface="Calibri" pitchFamily="34" charset="-122"/>
                 <a:cs typeface="Calibri" pitchFamily="34" charset="-120"/>
               </a:rPr>
-              <a:t>breathe, breath</a:t>
+              <a:t>breathe; live</a:t>
             </a:r>
             <a:endParaRPr lang="en-US" sz="850" dirty="0"/>
           </a:p>
@@ -23879,7 +25569,7 @@
                 <a:ea typeface="Calibri" pitchFamily="34" charset="-122"/>
                 <a:cs typeface="Calibri" pitchFamily="34" charset="-120"/>
               </a:rPr>
-              <a:t>Word Labs  •  wordlabs.app  •  Root: 'spire' = breathe, breath, spirit</a:t>
+              <a:t>Word Labs  •  wordlabs.app  •  Root: 'spire' = breathe; live</a:t>
             </a:r>
             <a:endParaRPr lang="en-US" sz="800" dirty="0"/>
           </a:p>
@@ -23952,7 +25642,7 @@
                 <a:ea typeface="Trebuchet MS" pitchFamily="34" charset="-122"/>
                 <a:cs typeface="Trebuchet MS" pitchFamily="34" charset="-120"/>
               </a:rPr>
-              <a:t>We are learning that the root 'spire' means 'breathe, breath, spirit'.</a:t>
+              <a:t>We are learning that the root 'spire' means 'breathe; live'.</a:t>
             </a:r>
             <a:endParaRPr lang="en-US" sz="2000" dirty="0"/>
           </a:p>
@@ -24598,7 +26288,7 @@
                 <a:ea typeface="Calibri" pitchFamily="34" charset="-122"/>
                 <a:cs typeface="Calibri" pitchFamily="34" charset="-120"/>
               </a:rPr>
-              <a:t>Word Labs  •  wordlabs.app  •  Root: 'spire' = breathe, breath, spirit</a:t>
+              <a:t>Word Labs  •  wordlabs.app  •  Root: 'spire' = breathe; live</a:t>
             </a:r>
             <a:endParaRPr lang="en-US" sz="800" dirty="0"/>
           </a:p>
@@ -24737,7 +26427,7 @@
                 <a:ea typeface="Trebuchet MS" pitchFamily="34" charset="-122"/>
                 <a:cs typeface="Trebuchet MS" pitchFamily="34" charset="-120"/>
               </a:rPr>
-              <a:t>expire</a:t>
+              <a:t>aspire</a:t>
             </a:r>
             <a:endParaRPr lang="en-US" sz="2800" dirty="0"/>
           </a:p>
@@ -24876,7 +26566,7 @@
                 <a:ea typeface="Trebuchet MS" pitchFamily="34" charset="-122"/>
                 <a:cs typeface="Trebuchet MS" pitchFamily="34" charset="-120"/>
               </a:rPr>
-              <a:t>ex</a:t>
+              <a:t>a</a:t>
             </a:r>
             <a:endParaRPr lang="en-US" sz="1300" dirty="0"/>
           </a:p>
@@ -24915,7 +26605,7 @@
                 <a:ea typeface="Calibri" pitchFamily="34" charset="-122"/>
                 <a:cs typeface="Calibri" pitchFamily="34" charset="-120"/>
               </a:rPr>
-              <a:t>out, away</a:t>
+              <a:t>not; without</a:t>
             </a:r>
             <a:endParaRPr lang="en-US" sz="850" dirty="0"/>
           </a:p>
@@ -25027,7 +26717,7 @@
                 <a:ea typeface="Calibri" pitchFamily="34" charset="-122"/>
                 <a:cs typeface="Calibri" pitchFamily="34" charset="-120"/>
               </a:rPr>
-              <a:t>breathe, breath</a:t>
+              <a:t>breathe; live</a:t>
             </a:r>
             <a:endParaRPr lang="en-US" sz="850" dirty="0"/>
           </a:p>
@@ -25186,7 +26876,7 @@
                 <a:ea typeface="Trebuchet MS" pitchFamily="34" charset="-122"/>
                 <a:cs typeface="Trebuchet MS" pitchFamily="34" charset="-120"/>
               </a:rPr>
-              <a:t>ex</a:t>
+              <a:t>as</a:t>
             </a:r>
             <a:endParaRPr lang="en-US" sz="1400" dirty="0"/>
           </a:p>
@@ -25715,7 +27405,7 @@
                 <a:ea typeface="Calibri" pitchFamily="34" charset="-122"/>
                 <a:cs typeface="Calibri" pitchFamily="34" charset="-120"/>
               </a:rPr>
-              <a:t>Word Labs  •  wordlabs.app  •  Root: 'spire' = breathe, breath, spirit</a:t>
+              <a:t>Word Labs  •  wordlabs.app  •  Root: 'spire' = breathe; live</a:t>
             </a:r>
             <a:endParaRPr lang="en-US" sz="800" dirty="0"/>
           </a:p>
@@ -25854,7 +27544,7 @@
                 <a:ea typeface="Trebuchet MS" pitchFamily="34" charset="-122"/>
                 <a:cs typeface="Trebuchet MS" pitchFamily="34" charset="-120"/>
               </a:rPr>
-              <a:t>expire</a:t>
+              <a:t>aspire</a:t>
             </a:r>
             <a:endParaRPr lang="en-US" sz="2800" dirty="0"/>
           </a:p>
@@ -25993,7 +27683,7 @@
                 <a:ea typeface="Trebuchet MS" pitchFamily="34" charset="-122"/>
                 <a:cs typeface="Trebuchet MS" pitchFamily="34" charset="-120"/>
               </a:rPr>
-              <a:t>ex</a:t>
+              <a:t>a</a:t>
             </a:r>
             <a:endParaRPr lang="en-US" sz="1300" dirty="0"/>
           </a:p>
@@ -26032,7 +27722,7 @@
                 <a:ea typeface="Calibri" pitchFamily="34" charset="-122"/>
                 <a:cs typeface="Calibri" pitchFamily="34" charset="-120"/>
               </a:rPr>
-              <a:t>out, away</a:t>
+              <a:t>not; without</a:t>
             </a:r>
             <a:endParaRPr lang="en-US" sz="850" dirty="0"/>
           </a:p>
@@ -26144,7 +27834,7 @@
                 <a:ea typeface="Calibri" pitchFamily="34" charset="-122"/>
                 <a:cs typeface="Calibri" pitchFamily="34" charset="-120"/>
               </a:rPr>
-              <a:t>breathe, breath</a:t>
+              <a:t>breathe; live</a:t>
             </a:r>
             <a:endParaRPr lang="en-US" sz="850" dirty="0"/>
           </a:p>
@@ -26303,7 +27993,7 @@
                 <a:ea typeface="Trebuchet MS" pitchFamily="34" charset="-122"/>
                 <a:cs typeface="Trebuchet MS" pitchFamily="34" charset="-120"/>
               </a:rPr>
-              <a:t>ex</a:t>
+              <a:t>as</a:t>
             </a:r>
             <a:endParaRPr lang="en-US" sz="1400" dirty="0"/>
           </a:p>
@@ -26567,7 +28257,7 @@
                 <a:ea typeface="Trebuchet MS" pitchFamily="34" charset="-122"/>
                 <a:cs typeface="Trebuchet MS" pitchFamily="34" charset="-120"/>
               </a:rPr>
-              <a:t>e</a:t>
+              <a:t>a</a:t>
             </a:r>
             <a:endParaRPr lang="en-US" sz="900" dirty="0"/>
           </a:p>
@@ -26633,7 +28323,7 @@
                 <a:ea typeface="Trebuchet MS" pitchFamily="34" charset="-122"/>
                 <a:cs typeface="Trebuchet MS" pitchFamily="34" charset="-120"/>
               </a:rPr>
-              <a:t>x</a:t>
+              <a:t>s</a:t>
             </a:r>
             <a:endParaRPr lang="en-US" sz="900" dirty="0"/>
           </a:p>
@@ -26765,7 +28455,7 @@
                 <a:ea typeface="Trebuchet MS" pitchFamily="34" charset="-122"/>
                 <a:cs typeface="Trebuchet MS" pitchFamily="34" charset="-120"/>
               </a:rPr>
-              <a:t>i</a:t>
+              <a:t>i_e</a:t>
             </a:r>
             <a:endParaRPr lang="en-US" sz="900" dirty="0"/>
           </a:p>
@@ -26831,7 +28521,7 @@
                 <a:ea typeface="Trebuchet MS" pitchFamily="34" charset="-122"/>
                 <a:cs typeface="Trebuchet MS" pitchFamily="34" charset="-120"/>
               </a:rPr>
-              <a:t>re</a:t>
+              <a:t>r</a:t>
             </a:r>
             <a:endParaRPr lang="en-US" sz="900" dirty="0"/>
           </a:p>
@@ -27123,7 +28813,7 @@
                 <a:ea typeface="Calibri" pitchFamily="34" charset="-122"/>
                 <a:cs typeface="Calibri" pitchFamily="34" charset="-120"/>
               </a:rPr>
-              <a:t>Word Labs  •  wordlabs.app  •  Root: 'spire' = breathe, breath, spirit</a:t>
+              <a:t>Word Labs  •  wordlabs.app  •  Root: 'spire' = breathe; live</a:t>
             </a:r>
             <a:endParaRPr lang="en-US" sz="800" dirty="0"/>
           </a:p>
@@ -27262,7 +28952,7 @@
                 <a:ea typeface="Trebuchet MS" pitchFamily="34" charset="-122"/>
                 <a:cs typeface="Trebuchet MS" pitchFamily="34" charset="-120"/>
               </a:rPr>
-              <a:t>inspiration</a:t>
+              <a:t>aspirations</a:t>
             </a:r>
             <a:endParaRPr lang="en-US" sz="2800" dirty="0"/>
           </a:p>
@@ -27950,7 +29640,7 @@
                 <a:ea typeface="Calibri" pitchFamily="34" charset="-122"/>
                 <a:cs typeface="Calibri" pitchFamily="34" charset="-120"/>
               </a:rPr>
-              <a:t>Word Labs  •  wordlabs.app  •  Root: 'spire' = breathe, breath, spirit</a:t>
+              <a:t>Word Labs  •  wordlabs.app  •  Root: 'spire' = breathe; live</a:t>
             </a:r>
             <a:endParaRPr lang="en-US" sz="800" dirty="0"/>
           </a:p>
@@ -28089,7 +29779,7 @@
                 <a:ea typeface="Trebuchet MS" pitchFamily="34" charset="-122"/>
                 <a:cs typeface="Trebuchet MS" pitchFamily="34" charset="-120"/>
               </a:rPr>
-              <a:t>inspiration</a:t>
+              <a:t>aspirations</a:t>
             </a:r>
             <a:endParaRPr lang="en-US" sz="2800" dirty="0"/>
           </a:p>
@@ -28169,8 +29859,8 @@
         </p:nvSpPr>
         <p:spPr>
           <a:xfrm>
-            <a:off x="2221992" y="2258568"/>
-            <a:ext cx="1828800" cy="292608"/>
+            <a:off x="1989734" y="2258568"/>
+            <a:ext cx="1581912" cy="292608"/>
           </a:xfrm>
           <a:prstGeom prst="rect">
             <a:avLst>
@@ -28203,8 +29893,8 @@
         </p:nvSpPr>
         <p:spPr>
           <a:xfrm>
-            <a:off x="2221992" y="2258568"/>
-            <a:ext cx="1828800" cy="292608"/>
+            <a:off x="1989734" y="2258568"/>
+            <a:ext cx="1581912" cy="292608"/>
           </a:xfrm>
           <a:prstGeom prst="rect">
             <a:avLst/>
@@ -28228,7 +29918,7 @@
                 <a:ea typeface="Trebuchet MS" pitchFamily="34" charset="-122"/>
                 <a:cs typeface="Trebuchet MS" pitchFamily="34" charset="-120"/>
               </a:rPr>
-              <a:t>in</a:t>
+              <a:t>a</a:t>
             </a:r>
             <a:endParaRPr lang="en-US" sz="1300" dirty="0"/>
           </a:p>
@@ -28242,8 +29932,8 @@
         </p:nvSpPr>
         <p:spPr>
           <a:xfrm>
-            <a:off x="2221992" y="2569464"/>
-            <a:ext cx="1828800" cy="201168"/>
+            <a:off x="1989734" y="2569464"/>
+            <a:ext cx="1581912" cy="201168"/>
           </a:xfrm>
           <a:prstGeom prst="rect">
             <a:avLst/>
@@ -28267,7 +29957,7 @@
                 <a:ea typeface="Calibri" pitchFamily="34" charset="-122"/>
                 <a:cs typeface="Calibri" pitchFamily="34" charset="-120"/>
               </a:rPr>
-              <a:t>into, upon</a:t>
+              <a:t>not; without</a:t>
             </a:r>
             <a:endParaRPr lang="en-US" sz="850" dirty="0"/>
           </a:p>
@@ -28281,8 +29971,8 @@
         </p:nvSpPr>
         <p:spPr>
           <a:xfrm>
-            <a:off x="4370832" y="2258568"/>
-            <a:ext cx="1828800" cy="292608"/>
+            <a:off x="3659429" y="2258568"/>
+            <a:ext cx="1581912" cy="292608"/>
           </a:xfrm>
           <a:prstGeom prst="rect">
             <a:avLst>
@@ -28315,8 +30005,8 @@
         </p:nvSpPr>
         <p:spPr>
           <a:xfrm>
-            <a:off x="4370832" y="2258568"/>
-            <a:ext cx="1828800" cy="292608"/>
+            <a:off x="3659429" y="2258568"/>
+            <a:ext cx="1581912" cy="292608"/>
           </a:xfrm>
           <a:prstGeom prst="rect">
             <a:avLst/>
@@ -28354,8 +30044,8 @@
         </p:nvSpPr>
         <p:spPr>
           <a:xfrm>
-            <a:off x="4370832" y="2569464"/>
-            <a:ext cx="1828800" cy="201168"/>
+            <a:off x="3659429" y="2569464"/>
+            <a:ext cx="1581912" cy="201168"/>
           </a:xfrm>
           <a:prstGeom prst="rect">
             <a:avLst/>
@@ -28379,7 +30069,7 @@
                 <a:ea typeface="Calibri" pitchFamily="34" charset="-122"/>
                 <a:cs typeface="Calibri" pitchFamily="34" charset="-120"/>
               </a:rPr>
-              <a:t>breathe, breath</a:t>
+              <a:t>breathe; live</a:t>
             </a:r>
             <a:endParaRPr lang="en-US" sz="850" dirty="0"/>
           </a:p>
@@ -28387,53 +30077,14 @@
       </p:sp>
       <p:sp>
         <p:nvSpPr>
-          <p:cNvPr id="22" name="Text 20"/>
-          <p:cNvSpPr/>
-          <p:nvPr/>
-        </p:nvSpPr>
-        <p:spPr>
-          <a:xfrm>
-            <a:off x="4370832" y="2752344"/>
-            <a:ext cx="1828800" cy="182880"/>
-          </a:xfrm>
-          <a:prstGeom prst="rect">
-            <a:avLst/>
-          </a:prstGeom>
-          <a:noFill/>
-          <a:ln/>
-        </p:spPr>
-        <p:txBody>
-          <a:bodyPr wrap="square" lIns="0" tIns="0" rIns="0" bIns="0" rtlCol="0" anchor="t"/>
-          <a:lstStyle/>
-          <a:p>
-            <a:pPr algn="ctr" indent="0" marL="0">
-              <a:buNone/>
-            </a:pPr>
-            <a:r>
-              <a:rPr lang="en-US" sz="700" i="1" dirty="0">
-                <a:solidFill>
-                  <a:srgbClr val="94A3B8"/>
-                </a:solidFill>
-                <a:latin typeface="Calibri" pitchFamily="34" charset="0"/>
-                <a:ea typeface="Calibri" pitchFamily="34" charset="-122"/>
-                <a:cs typeface="Calibri" pitchFamily="34" charset="-120"/>
-              </a:rPr>
-              <a:t>'e' dropped before vowel suffix</a:t>
-            </a:r>
-            <a:endParaRPr lang="en-US" sz="700" dirty="0"/>
-          </a:p>
-        </p:txBody>
-      </p:sp>
-      <p:sp>
-        <p:nvSpPr>
-          <p:cNvPr id="23" name="Shape 21"/>
-          <p:cNvSpPr/>
-          <p:nvPr/>
-        </p:nvSpPr>
-        <p:spPr>
-          <a:xfrm>
-            <a:off x="6519672" y="2258568"/>
-            <a:ext cx="1828800" cy="292608"/>
+          <p:cNvPr id="22" name="Shape 20"/>
+          <p:cNvSpPr/>
+          <p:nvPr/>
+        </p:nvSpPr>
+        <p:spPr>
+          <a:xfrm>
+            <a:off x="5329123" y="2258568"/>
+            <a:ext cx="1581912" cy="292608"/>
           </a:xfrm>
           <a:prstGeom prst="rect">
             <a:avLst>
@@ -28460,14 +30111,14 @@
       </p:sp>
       <p:sp>
         <p:nvSpPr>
-          <p:cNvPr id="24" name="Text 22"/>
-          <p:cNvSpPr/>
-          <p:nvPr/>
-        </p:nvSpPr>
-        <p:spPr>
-          <a:xfrm>
-            <a:off x="6519672" y="2258568"/>
-            <a:ext cx="1828800" cy="292608"/>
+          <p:cNvPr id="23" name="Text 21"/>
+          <p:cNvSpPr/>
+          <p:nvPr/>
+        </p:nvSpPr>
+        <p:spPr>
+          <a:xfrm>
+            <a:off x="5329123" y="2258568"/>
+            <a:ext cx="1581912" cy="292608"/>
           </a:xfrm>
           <a:prstGeom prst="rect">
             <a:avLst/>
@@ -28499,14 +30150,14 @@
       </p:sp>
       <p:sp>
         <p:nvSpPr>
-          <p:cNvPr id="25" name="Text 23"/>
-          <p:cNvSpPr/>
-          <p:nvPr/>
-        </p:nvSpPr>
-        <p:spPr>
-          <a:xfrm>
-            <a:off x="6519672" y="2569464"/>
-            <a:ext cx="1828800" cy="201168"/>
+          <p:cNvPr id="24" name="Text 22"/>
+          <p:cNvSpPr/>
+          <p:nvPr/>
+        </p:nvSpPr>
+        <p:spPr>
+          <a:xfrm>
+            <a:off x="5329123" y="2569464"/>
+            <a:ext cx="1581912" cy="201168"/>
           </a:xfrm>
           <a:prstGeom prst="rect">
             <a:avLst/>
@@ -28530,7 +30181,7 @@
                 <a:ea typeface="Calibri" pitchFamily="34" charset="-122"/>
                 <a:cs typeface="Calibri" pitchFamily="34" charset="-120"/>
               </a:rPr>
-              <a:t>the act or state of</a:t>
+              <a:t>act or process of</a:t>
             </a:r>
             <a:endParaRPr lang="en-US" sz="850" dirty="0"/>
           </a:p>
@@ -28538,7 +30189,119 @@
       </p:sp>
       <p:sp>
         <p:nvSpPr>
-          <p:cNvPr id="26" name="Shape 24"/>
+          <p:cNvPr id="25" name="Shape 23"/>
+          <p:cNvSpPr/>
+          <p:nvPr/>
+        </p:nvSpPr>
+        <p:spPr>
+          <a:xfrm>
+            <a:off x="6998818" y="2258568"/>
+            <a:ext cx="1581912" cy="292608"/>
+          </a:xfrm>
+          <a:prstGeom prst="rect">
+            <a:avLst>
+              <a:gd name="adj" fmla="val 25000"/>
+            </a:avLst>
+          </a:prstGeom>
+          <a:solidFill>
+            <a:srgbClr val="FCE7F3"/>
+          </a:solidFill>
+          <a:ln w="19050">
+            <a:solidFill>
+              <a:srgbClr val="DB2777"/>
+            </a:solidFill>
+            <a:prstDash val="solid"/>
+          </a:ln>
+          <a:effectLst>
+            <a:outerShdw sx="100000" sy="100000" kx="0" ky="0" algn="bl" rotWithShape="0" blurRad="101600" dist="38100" dir="8100000">
+              <a:srgbClr val="000000">
+                <a:alpha val="12000"/>
+              </a:srgbClr>
+            </a:outerShdw>
+          </a:effectLst>
+        </p:spPr>
+      </p:sp>
+      <p:sp>
+        <p:nvSpPr>
+          <p:cNvPr id="26" name="Text 24"/>
+          <p:cNvSpPr/>
+          <p:nvPr/>
+        </p:nvSpPr>
+        <p:spPr>
+          <a:xfrm>
+            <a:off x="6998818" y="2258568"/>
+            <a:ext cx="1581912" cy="292608"/>
+          </a:xfrm>
+          <a:prstGeom prst="rect">
+            <a:avLst/>
+          </a:prstGeom>
+          <a:noFill/>
+          <a:ln/>
+        </p:spPr>
+        <p:txBody>
+          <a:bodyPr wrap="square" lIns="0" tIns="0" rIns="0" bIns="0" rtlCol="0" anchor="ctr"/>
+          <a:lstStyle/>
+          <a:p>
+            <a:pPr algn="ctr" indent="0" marL="0">
+              <a:buNone/>
+            </a:pPr>
+            <a:r>
+              <a:rPr lang="en-US" sz="1300" b="1" dirty="0">
+                <a:solidFill>
+                  <a:srgbClr val="9D174D"/>
+                </a:solidFill>
+                <a:latin typeface="Trebuchet MS" pitchFamily="34" charset="0"/>
+                <a:ea typeface="Trebuchet MS" pitchFamily="34" charset="-122"/>
+                <a:cs typeface="Trebuchet MS" pitchFamily="34" charset="-120"/>
+              </a:rPr>
+              <a:t>s</a:t>
+            </a:r>
+            <a:endParaRPr lang="en-US" sz="1300" dirty="0"/>
+          </a:p>
+        </p:txBody>
+      </p:sp>
+      <p:sp>
+        <p:nvSpPr>
+          <p:cNvPr id="27" name="Text 25"/>
+          <p:cNvSpPr/>
+          <p:nvPr/>
+        </p:nvSpPr>
+        <p:spPr>
+          <a:xfrm>
+            <a:off x="6998818" y="2569464"/>
+            <a:ext cx="1581912" cy="201168"/>
+          </a:xfrm>
+          <a:prstGeom prst="rect">
+            <a:avLst/>
+          </a:prstGeom>
+          <a:noFill/>
+          <a:ln/>
+        </p:spPr>
+        <p:txBody>
+          <a:bodyPr wrap="square" lIns="0" tIns="0" rIns="0" bIns="0" rtlCol="0" anchor="t"/>
+          <a:lstStyle/>
+          <a:p>
+            <a:pPr algn="ctr" indent="0" marL="0">
+              <a:buNone/>
+            </a:pPr>
+            <a:r>
+              <a:rPr lang="en-US" sz="850" dirty="0">
+                <a:solidFill>
+                  <a:srgbClr val="475569"/>
+                </a:solidFill>
+                <a:latin typeface="Calibri" pitchFamily="34" charset="0"/>
+                <a:ea typeface="Calibri" pitchFamily="34" charset="-122"/>
+                <a:cs typeface="Calibri" pitchFamily="34" charset="-120"/>
+              </a:rPr>
+              <a:t>plural or present tense</a:t>
+            </a:r>
+            <a:endParaRPr lang="en-US" sz="850" dirty="0"/>
+          </a:p>
+        </p:txBody>
+      </p:sp>
+      <p:sp>
+        <p:nvSpPr>
+          <p:cNvPr id="28" name="Shape 26"/>
           <p:cNvSpPr/>
           <p:nvPr/>
         </p:nvSpPr>
@@ -28565,7 +30328,7 @@
       </p:sp>
       <p:sp>
         <p:nvSpPr>
-          <p:cNvPr id="27" name="Text 25"/>
+          <p:cNvPr id="29" name="Text 27"/>
           <p:cNvSpPr/>
           <p:nvPr/>
         </p:nvSpPr>
@@ -28604,7 +30367,7 @@
       </p:sp>
       <p:sp>
         <p:nvSpPr>
-          <p:cNvPr id="28" name="Shape 26"/>
+          <p:cNvPr id="30" name="Shape 28"/>
           <p:cNvSpPr/>
           <p:nvPr/>
         </p:nvSpPr>
@@ -28631,7 +30394,7 @@
       </p:sp>
       <p:sp>
         <p:nvSpPr>
-          <p:cNvPr id="29" name="Text 27"/>
+          <p:cNvPr id="31" name="Text 29"/>
           <p:cNvSpPr/>
           <p:nvPr/>
         </p:nvSpPr>
@@ -28670,7 +30433,7 @@
       </p:sp>
       <p:sp>
         <p:nvSpPr>
-          <p:cNvPr id="30" name="Shape 28"/>
+          <p:cNvPr id="32" name="Shape 30"/>
           <p:cNvSpPr/>
           <p:nvPr/>
         </p:nvSpPr>
@@ -28697,7 +30460,7 @@
       </p:sp>
       <p:sp>
         <p:nvSpPr>
-          <p:cNvPr id="31" name="Text 29"/>
+          <p:cNvPr id="33" name="Text 31"/>
           <p:cNvSpPr/>
           <p:nvPr/>
         </p:nvSpPr>
@@ -28736,7 +30499,7 @@
       </p:sp>
       <p:sp>
         <p:nvSpPr>
-          <p:cNvPr id="32" name="Shape 30"/>
+          <p:cNvPr id="34" name="Shape 32"/>
           <p:cNvSpPr/>
           <p:nvPr/>
         </p:nvSpPr>
@@ -28763,7 +30526,7 @@
       </p:sp>
       <p:sp>
         <p:nvSpPr>
-          <p:cNvPr id="33" name="Text 31"/>
+          <p:cNvPr id="35" name="Text 33"/>
           <p:cNvSpPr/>
           <p:nvPr/>
         </p:nvSpPr>
@@ -29086,7 +30849,7 @@
                 <a:ea typeface="Calibri" pitchFamily="34" charset="-122"/>
                 <a:cs typeface="Calibri" pitchFamily="34" charset="-120"/>
               </a:rPr>
-              <a:t>Word Labs  •  wordlabs.app  •  Root: 'spire' = breathe, breath, spirit</a:t>
+              <a:t>Word Labs  •  wordlabs.app  •  Root: 'spire' = breathe; live</a:t>
             </a:r>
             <a:endParaRPr lang="en-US" sz="800" dirty="0"/>
           </a:p>
@@ -29225,7 +30988,7 @@
                 <a:ea typeface="Trebuchet MS" pitchFamily="34" charset="-122"/>
                 <a:cs typeface="Trebuchet MS" pitchFamily="34" charset="-120"/>
               </a:rPr>
-              <a:t>inspiration</a:t>
+              <a:t>aspirations</a:t>
             </a:r>
             <a:endParaRPr lang="en-US" sz="2800" dirty="0"/>
           </a:p>
@@ -29305,8 +31068,8 @@
         </p:nvSpPr>
         <p:spPr>
           <a:xfrm>
-            <a:off x="2221992" y="2258568"/>
-            <a:ext cx="1828800" cy="292608"/>
+            <a:off x="1989734" y="2258568"/>
+            <a:ext cx="1581912" cy="292608"/>
           </a:xfrm>
           <a:prstGeom prst="rect">
             <a:avLst>
@@ -29339,8 +31102,8 @@
         </p:nvSpPr>
         <p:spPr>
           <a:xfrm>
-            <a:off x="2221992" y="2258568"/>
-            <a:ext cx="1828800" cy="292608"/>
+            <a:off x="1989734" y="2258568"/>
+            <a:ext cx="1581912" cy="292608"/>
           </a:xfrm>
           <a:prstGeom prst="rect">
             <a:avLst/>
@@ -29364,7 +31127,7 @@
                 <a:ea typeface="Trebuchet MS" pitchFamily="34" charset="-122"/>
                 <a:cs typeface="Trebuchet MS" pitchFamily="34" charset="-120"/>
               </a:rPr>
-              <a:t>in</a:t>
+              <a:t>a</a:t>
             </a:r>
             <a:endParaRPr lang="en-US" sz="1300" dirty="0"/>
           </a:p>
@@ -29378,8 +31141,8 @@
         </p:nvSpPr>
         <p:spPr>
           <a:xfrm>
-            <a:off x="2221992" y="2569464"/>
-            <a:ext cx="1828800" cy="201168"/>
+            <a:off x="1989734" y="2569464"/>
+            <a:ext cx="1581912" cy="201168"/>
           </a:xfrm>
           <a:prstGeom prst="rect">
             <a:avLst/>
@@ -29403,7 +31166,7 @@
                 <a:ea typeface="Calibri" pitchFamily="34" charset="-122"/>
                 <a:cs typeface="Calibri" pitchFamily="34" charset="-120"/>
               </a:rPr>
-              <a:t>into, upon</a:t>
+              <a:t>not; without</a:t>
             </a:r>
             <a:endParaRPr lang="en-US" sz="850" dirty="0"/>
           </a:p>
@@ -29417,8 +31180,8 @@
         </p:nvSpPr>
         <p:spPr>
           <a:xfrm>
-            <a:off x="4370832" y="2258568"/>
-            <a:ext cx="1828800" cy="292608"/>
+            <a:off x="3659429" y="2258568"/>
+            <a:ext cx="1581912" cy="292608"/>
           </a:xfrm>
           <a:prstGeom prst="rect">
             <a:avLst>
@@ -29451,8 +31214,8 @@
         </p:nvSpPr>
         <p:spPr>
           <a:xfrm>
-            <a:off x="4370832" y="2258568"/>
-            <a:ext cx="1828800" cy="292608"/>
+            <a:off x="3659429" y="2258568"/>
+            <a:ext cx="1581912" cy="292608"/>
           </a:xfrm>
           <a:prstGeom prst="rect">
             <a:avLst/>
@@ -29490,8 +31253,8 @@
         </p:nvSpPr>
         <p:spPr>
           <a:xfrm>
-            <a:off x="4370832" y="2569464"/>
-            <a:ext cx="1828800" cy="201168"/>
+            <a:off x="3659429" y="2569464"/>
+            <a:ext cx="1581912" cy="201168"/>
           </a:xfrm>
           <a:prstGeom prst="rect">
             <a:avLst/>
@@ -29515,7 +31278,7 @@
                 <a:ea typeface="Calibri" pitchFamily="34" charset="-122"/>
                 <a:cs typeface="Calibri" pitchFamily="34" charset="-120"/>
               </a:rPr>
-              <a:t>breathe, breath</a:t>
+              <a:t>breathe; live</a:t>
             </a:r>
             <a:endParaRPr lang="en-US" sz="850" dirty="0"/>
           </a:p>
@@ -29523,53 +31286,14 @@
       </p:sp>
       <p:sp>
         <p:nvSpPr>
-          <p:cNvPr id="22" name="Text 20"/>
-          <p:cNvSpPr/>
-          <p:nvPr/>
-        </p:nvSpPr>
-        <p:spPr>
-          <a:xfrm>
-            <a:off x="4370832" y="2752344"/>
-            <a:ext cx="1828800" cy="182880"/>
-          </a:xfrm>
-          <a:prstGeom prst="rect">
-            <a:avLst/>
-          </a:prstGeom>
-          <a:noFill/>
-          <a:ln/>
-        </p:spPr>
-        <p:txBody>
-          <a:bodyPr wrap="square" lIns="0" tIns="0" rIns="0" bIns="0" rtlCol="0" anchor="t"/>
-          <a:lstStyle/>
-          <a:p>
-            <a:pPr algn="ctr" indent="0" marL="0">
-              <a:buNone/>
-            </a:pPr>
-            <a:r>
-              <a:rPr lang="en-US" sz="700" i="1" dirty="0">
-                <a:solidFill>
-                  <a:srgbClr val="94A3B8"/>
-                </a:solidFill>
-                <a:latin typeface="Calibri" pitchFamily="34" charset="0"/>
-                <a:ea typeface="Calibri" pitchFamily="34" charset="-122"/>
-                <a:cs typeface="Calibri" pitchFamily="34" charset="-120"/>
-              </a:rPr>
-              <a:t>'e' dropped before vowel suffix</a:t>
-            </a:r>
-            <a:endParaRPr lang="en-US" sz="700" dirty="0"/>
-          </a:p>
-        </p:txBody>
-      </p:sp>
-      <p:sp>
-        <p:nvSpPr>
-          <p:cNvPr id="23" name="Shape 21"/>
-          <p:cNvSpPr/>
-          <p:nvPr/>
-        </p:nvSpPr>
-        <p:spPr>
-          <a:xfrm>
-            <a:off x="6519672" y="2258568"/>
-            <a:ext cx="1828800" cy="292608"/>
+          <p:cNvPr id="22" name="Shape 20"/>
+          <p:cNvSpPr/>
+          <p:nvPr/>
+        </p:nvSpPr>
+        <p:spPr>
+          <a:xfrm>
+            <a:off x="5329123" y="2258568"/>
+            <a:ext cx="1581912" cy="292608"/>
           </a:xfrm>
           <a:prstGeom prst="rect">
             <a:avLst>
@@ -29596,14 +31320,14 @@
       </p:sp>
       <p:sp>
         <p:nvSpPr>
-          <p:cNvPr id="24" name="Text 22"/>
-          <p:cNvSpPr/>
-          <p:nvPr/>
-        </p:nvSpPr>
-        <p:spPr>
-          <a:xfrm>
-            <a:off x="6519672" y="2258568"/>
-            <a:ext cx="1828800" cy="292608"/>
+          <p:cNvPr id="23" name="Text 21"/>
+          <p:cNvSpPr/>
+          <p:nvPr/>
+        </p:nvSpPr>
+        <p:spPr>
+          <a:xfrm>
+            <a:off x="5329123" y="2258568"/>
+            <a:ext cx="1581912" cy="292608"/>
           </a:xfrm>
           <a:prstGeom prst="rect">
             <a:avLst/>
@@ -29635,14 +31359,14 @@
       </p:sp>
       <p:sp>
         <p:nvSpPr>
-          <p:cNvPr id="25" name="Text 23"/>
-          <p:cNvSpPr/>
-          <p:nvPr/>
-        </p:nvSpPr>
-        <p:spPr>
-          <a:xfrm>
-            <a:off x="6519672" y="2569464"/>
-            <a:ext cx="1828800" cy="201168"/>
+          <p:cNvPr id="24" name="Text 22"/>
+          <p:cNvSpPr/>
+          <p:nvPr/>
+        </p:nvSpPr>
+        <p:spPr>
+          <a:xfrm>
+            <a:off x="5329123" y="2569464"/>
+            <a:ext cx="1581912" cy="201168"/>
           </a:xfrm>
           <a:prstGeom prst="rect">
             <a:avLst/>
@@ -29666,7 +31390,7 @@
                 <a:ea typeface="Calibri" pitchFamily="34" charset="-122"/>
                 <a:cs typeface="Calibri" pitchFamily="34" charset="-120"/>
               </a:rPr>
-              <a:t>the act or state of</a:t>
+              <a:t>act or process of</a:t>
             </a:r>
             <a:endParaRPr lang="en-US" sz="850" dirty="0"/>
           </a:p>
@@ -29674,7 +31398,119 @@
       </p:sp>
       <p:sp>
         <p:nvSpPr>
-          <p:cNvPr id="26" name="Shape 24"/>
+          <p:cNvPr id="25" name="Shape 23"/>
+          <p:cNvSpPr/>
+          <p:nvPr/>
+        </p:nvSpPr>
+        <p:spPr>
+          <a:xfrm>
+            <a:off x="6998818" y="2258568"/>
+            <a:ext cx="1581912" cy="292608"/>
+          </a:xfrm>
+          <a:prstGeom prst="rect">
+            <a:avLst>
+              <a:gd name="adj" fmla="val 25000"/>
+            </a:avLst>
+          </a:prstGeom>
+          <a:solidFill>
+            <a:srgbClr val="FCE7F3"/>
+          </a:solidFill>
+          <a:ln w="19050">
+            <a:solidFill>
+              <a:srgbClr val="DB2777"/>
+            </a:solidFill>
+            <a:prstDash val="solid"/>
+          </a:ln>
+          <a:effectLst>
+            <a:outerShdw sx="100000" sy="100000" kx="0" ky="0" algn="bl" rotWithShape="0" blurRad="101600" dist="38100" dir="8100000">
+              <a:srgbClr val="000000">
+                <a:alpha val="12000"/>
+              </a:srgbClr>
+            </a:outerShdw>
+          </a:effectLst>
+        </p:spPr>
+      </p:sp>
+      <p:sp>
+        <p:nvSpPr>
+          <p:cNvPr id="26" name="Text 24"/>
+          <p:cNvSpPr/>
+          <p:nvPr/>
+        </p:nvSpPr>
+        <p:spPr>
+          <a:xfrm>
+            <a:off x="6998818" y="2258568"/>
+            <a:ext cx="1581912" cy="292608"/>
+          </a:xfrm>
+          <a:prstGeom prst="rect">
+            <a:avLst/>
+          </a:prstGeom>
+          <a:noFill/>
+          <a:ln/>
+        </p:spPr>
+        <p:txBody>
+          <a:bodyPr wrap="square" lIns="0" tIns="0" rIns="0" bIns="0" rtlCol="0" anchor="ctr"/>
+          <a:lstStyle/>
+          <a:p>
+            <a:pPr algn="ctr" indent="0" marL="0">
+              <a:buNone/>
+            </a:pPr>
+            <a:r>
+              <a:rPr lang="en-US" sz="1300" b="1" dirty="0">
+                <a:solidFill>
+                  <a:srgbClr val="9D174D"/>
+                </a:solidFill>
+                <a:latin typeface="Trebuchet MS" pitchFamily="34" charset="0"/>
+                <a:ea typeface="Trebuchet MS" pitchFamily="34" charset="-122"/>
+                <a:cs typeface="Trebuchet MS" pitchFamily="34" charset="-120"/>
+              </a:rPr>
+              <a:t>s</a:t>
+            </a:r>
+            <a:endParaRPr lang="en-US" sz="1300" dirty="0"/>
+          </a:p>
+        </p:txBody>
+      </p:sp>
+      <p:sp>
+        <p:nvSpPr>
+          <p:cNvPr id="27" name="Text 25"/>
+          <p:cNvSpPr/>
+          <p:nvPr/>
+        </p:nvSpPr>
+        <p:spPr>
+          <a:xfrm>
+            <a:off x="6998818" y="2569464"/>
+            <a:ext cx="1581912" cy="201168"/>
+          </a:xfrm>
+          <a:prstGeom prst="rect">
+            <a:avLst/>
+          </a:prstGeom>
+          <a:noFill/>
+          <a:ln/>
+        </p:spPr>
+        <p:txBody>
+          <a:bodyPr wrap="square" lIns="0" tIns="0" rIns="0" bIns="0" rtlCol="0" anchor="t"/>
+          <a:lstStyle/>
+          <a:p>
+            <a:pPr algn="ctr" indent="0" marL="0">
+              <a:buNone/>
+            </a:pPr>
+            <a:r>
+              <a:rPr lang="en-US" sz="850" dirty="0">
+                <a:solidFill>
+                  <a:srgbClr val="475569"/>
+                </a:solidFill>
+                <a:latin typeface="Calibri" pitchFamily="34" charset="0"/>
+                <a:ea typeface="Calibri" pitchFamily="34" charset="-122"/>
+                <a:cs typeface="Calibri" pitchFamily="34" charset="-120"/>
+              </a:rPr>
+              <a:t>plural or present tense</a:t>
+            </a:r>
+            <a:endParaRPr lang="en-US" sz="850" dirty="0"/>
+          </a:p>
+        </p:txBody>
+      </p:sp>
+      <p:sp>
+        <p:nvSpPr>
+          <p:cNvPr id="28" name="Shape 26"/>
           <p:cNvSpPr/>
           <p:nvPr/>
         </p:nvSpPr>
@@ -29701,7 +31537,7 @@
       </p:sp>
       <p:sp>
         <p:nvSpPr>
-          <p:cNvPr id="27" name="Text 25"/>
+          <p:cNvPr id="29" name="Text 27"/>
           <p:cNvSpPr/>
           <p:nvPr/>
         </p:nvSpPr>
@@ -29740,7 +31576,7 @@
       </p:sp>
       <p:sp>
         <p:nvSpPr>
-          <p:cNvPr id="28" name="Shape 26"/>
+          <p:cNvPr id="30" name="Shape 28"/>
           <p:cNvSpPr/>
           <p:nvPr/>
         </p:nvSpPr>
@@ -29767,7 +31603,7 @@
       </p:sp>
       <p:sp>
         <p:nvSpPr>
-          <p:cNvPr id="29" name="Shape 27"/>
+          <p:cNvPr id="31" name="Shape 29"/>
           <p:cNvSpPr/>
           <p:nvPr/>
         </p:nvSpPr>
@@ -29794,7 +31630,7 @@
       </p:sp>
       <p:sp>
         <p:nvSpPr>
-          <p:cNvPr id="30" name="Text 28"/>
+          <p:cNvPr id="32" name="Text 30"/>
           <p:cNvSpPr/>
           <p:nvPr/>
         </p:nvSpPr>
@@ -29825,7 +31661,7 @@
                 <a:ea typeface="Trebuchet MS" pitchFamily="34" charset="-122"/>
                 <a:cs typeface="Trebuchet MS" pitchFamily="34" charset="-120"/>
               </a:rPr>
-              <a:t>in</a:t>
+              <a:t>as</a:t>
             </a:r>
             <a:endParaRPr lang="en-US" sz="1400" dirty="0"/>
           </a:p>
@@ -29833,7 +31669,7 @@
       </p:sp>
       <p:sp>
         <p:nvSpPr>
-          <p:cNvPr id="31" name="Text 29"/>
+          <p:cNvPr id="33" name="Text 31"/>
           <p:cNvSpPr/>
           <p:nvPr/>
         </p:nvSpPr>
@@ -29872,7 +31708,7 @@
       </p:sp>
       <p:sp>
         <p:nvSpPr>
-          <p:cNvPr id="32" name="Shape 30"/>
+          <p:cNvPr id="34" name="Shape 32"/>
           <p:cNvSpPr/>
           <p:nvPr/>
         </p:nvSpPr>
@@ -29899,7 +31735,7 @@
       </p:sp>
       <p:sp>
         <p:nvSpPr>
-          <p:cNvPr id="33" name="Text 31"/>
+          <p:cNvPr id="35" name="Text 33"/>
           <p:cNvSpPr/>
           <p:nvPr/>
         </p:nvSpPr>
@@ -29930,7 +31766,7 @@
                 <a:ea typeface="Trebuchet MS" pitchFamily="34" charset="-122"/>
                 <a:cs typeface="Trebuchet MS" pitchFamily="34" charset="-120"/>
               </a:rPr>
-              <a:t>spi</a:t>
+              <a:t>pi</a:t>
             </a:r>
             <a:endParaRPr lang="en-US" sz="1400" dirty="0"/>
           </a:p>
@@ -29938,7 +31774,7 @@
       </p:sp>
       <p:sp>
         <p:nvSpPr>
-          <p:cNvPr id="34" name="Text 32"/>
+          <p:cNvPr id="36" name="Text 34"/>
           <p:cNvSpPr/>
           <p:nvPr/>
         </p:nvSpPr>
@@ -29977,7 +31813,7 @@
       </p:sp>
       <p:sp>
         <p:nvSpPr>
-          <p:cNvPr id="35" name="Shape 33"/>
+          <p:cNvPr id="37" name="Shape 35"/>
           <p:cNvSpPr/>
           <p:nvPr/>
         </p:nvSpPr>
@@ -30004,7 +31840,7 @@
       </p:sp>
       <p:sp>
         <p:nvSpPr>
-          <p:cNvPr id="36" name="Text 34"/>
+          <p:cNvPr id="38" name="Text 36"/>
           <p:cNvSpPr/>
           <p:nvPr/>
         </p:nvSpPr>
@@ -30043,7 +31879,7 @@
       </p:sp>
       <p:sp>
         <p:nvSpPr>
-          <p:cNvPr id="37" name="Text 35"/>
+          <p:cNvPr id="39" name="Text 37"/>
           <p:cNvSpPr/>
           <p:nvPr/>
         </p:nvSpPr>
@@ -30082,7 +31918,7 @@
       </p:sp>
       <p:sp>
         <p:nvSpPr>
-          <p:cNvPr id="38" name="Shape 36"/>
+          <p:cNvPr id="40" name="Shape 38"/>
           <p:cNvSpPr/>
           <p:nvPr/>
         </p:nvSpPr>
@@ -30109,7 +31945,7 @@
       </p:sp>
       <p:sp>
         <p:nvSpPr>
-          <p:cNvPr id="39" name="Text 37"/>
+          <p:cNvPr id="41" name="Text 39"/>
           <p:cNvSpPr/>
           <p:nvPr/>
         </p:nvSpPr>
@@ -30140,7 +31976,7 @@
                 <a:ea typeface="Trebuchet MS" pitchFamily="34" charset="-122"/>
                 <a:cs typeface="Trebuchet MS" pitchFamily="34" charset="-120"/>
               </a:rPr>
-              <a:t>tion</a:t>
+              <a:t>tions</a:t>
             </a:r>
             <a:endParaRPr lang="en-US" sz="1400" dirty="0"/>
           </a:p>
@@ -30148,7 +31984,7 @@
       </p:sp>
       <p:sp>
         <p:nvSpPr>
-          <p:cNvPr id="40" name="Shape 38"/>
+          <p:cNvPr id="42" name="Shape 40"/>
           <p:cNvSpPr/>
           <p:nvPr/>
         </p:nvSpPr>
@@ -30175,7 +32011,7 @@
       </p:sp>
       <p:sp>
         <p:nvSpPr>
-          <p:cNvPr id="41" name="Text 39"/>
+          <p:cNvPr id="43" name="Text 41"/>
           <p:cNvSpPr/>
           <p:nvPr/>
         </p:nvSpPr>
@@ -30214,7 +32050,7 @@
       </p:sp>
       <p:sp>
         <p:nvSpPr>
-          <p:cNvPr id="42" name="Shape 40"/>
+          <p:cNvPr id="44" name="Shape 42"/>
           <p:cNvSpPr/>
           <p:nvPr/>
         </p:nvSpPr>
@@ -30241,7 +32077,7 @@
       </p:sp>
       <p:sp>
         <p:nvSpPr>
-          <p:cNvPr id="43" name="Text 41"/>
+          <p:cNvPr id="45" name="Text 43"/>
           <p:cNvSpPr/>
           <p:nvPr/>
         </p:nvSpPr>
@@ -30564,7 +32400,7 @@
                 <a:ea typeface="Calibri" pitchFamily="34" charset="-122"/>
                 <a:cs typeface="Calibri" pitchFamily="34" charset="-120"/>
               </a:rPr>
-              <a:t>Word Labs  •  wordlabs.app  •  Root: 'spire' = breathe, breath, spirit</a:t>
+              <a:t>Word Labs  •  wordlabs.app  •  Root: 'spire' = breathe; live</a:t>
             </a:r>
             <a:endParaRPr lang="en-US" sz="800" dirty="0"/>
           </a:p>
@@ -30703,7 +32539,7 @@
                 <a:ea typeface="Trebuchet MS" pitchFamily="34" charset="-122"/>
                 <a:cs typeface="Trebuchet MS" pitchFamily="34" charset="-120"/>
               </a:rPr>
-              <a:t>inspiration</a:t>
+              <a:t>aspirations</a:t>
             </a:r>
             <a:endParaRPr lang="en-US" sz="2800" dirty="0"/>
           </a:p>
@@ -30783,8 +32619,8 @@
         </p:nvSpPr>
         <p:spPr>
           <a:xfrm>
-            <a:off x="2221992" y="2258568"/>
-            <a:ext cx="1828800" cy="292608"/>
+            <a:off x="1989734" y="2258568"/>
+            <a:ext cx="1581912" cy="292608"/>
           </a:xfrm>
           <a:prstGeom prst="rect">
             <a:avLst>
@@ -30817,8 +32653,8 @@
         </p:nvSpPr>
         <p:spPr>
           <a:xfrm>
-            <a:off x="2221992" y="2258568"/>
-            <a:ext cx="1828800" cy="292608"/>
+            <a:off x="1989734" y="2258568"/>
+            <a:ext cx="1581912" cy="292608"/>
           </a:xfrm>
           <a:prstGeom prst="rect">
             <a:avLst/>
@@ -30842,7 +32678,7 @@
                 <a:ea typeface="Trebuchet MS" pitchFamily="34" charset="-122"/>
                 <a:cs typeface="Trebuchet MS" pitchFamily="34" charset="-120"/>
               </a:rPr>
-              <a:t>in</a:t>
+              <a:t>a</a:t>
             </a:r>
             <a:endParaRPr lang="en-US" sz="1300" dirty="0"/>
           </a:p>
@@ -30856,8 +32692,8 @@
         </p:nvSpPr>
         <p:spPr>
           <a:xfrm>
-            <a:off x="2221992" y="2569464"/>
-            <a:ext cx="1828800" cy="201168"/>
+            <a:off x="1989734" y="2569464"/>
+            <a:ext cx="1581912" cy="201168"/>
           </a:xfrm>
           <a:prstGeom prst="rect">
             <a:avLst/>
@@ -30881,7 +32717,7 @@
                 <a:ea typeface="Calibri" pitchFamily="34" charset="-122"/>
                 <a:cs typeface="Calibri" pitchFamily="34" charset="-120"/>
               </a:rPr>
-              <a:t>into, upon</a:t>
+              <a:t>not; without</a:t>
             </a:r>
             <a:endParaRPr lang="en-US" sz="850" dirty="0"/>
           </a:p>
@@ -30895,8 +32731,8 @@
         </p:nvSpPr>
         <p:spPr>
           <a:xfrm>
-            <a:off x="4370832" y="2258568"/>
-            <a:ext cx="1828800" cy="292608"/>
+            <a:off x="3659429" y="2258568"/>
+            <a:ext cx="1581912" cy="292608"/>
           </a:xfrm>
           <a:prstGeom prst="rect">
             <a:avLst>
@@ -30929,8 +32765,8 @@
         </p:nvSpPr>
         <p:spPr>
           <a:xfrm>
-            <a:off x="4370832" y="2258568"/>
-            <a:ext cx="1828800" cy="292608"/>
+            <a:off x="3659429" y="2258568"/>
+            <a:ext cx="1581912" cy="292608"/>
           </a:xfrm>
           <a:prstGeom prst="rect">
             <a:avLst/>
@@ -30968,8 +32804,8 @@
         </p:nvSpPr>
         <p:spPr>
           <a:xfrm>
-            <a:off x="4370832" y="2569464"/>
-            <a:ext cx="1828800" cy="201168"/>
+            <a:off x="3659429" y="2569464"/>
+            <a:ext cx="1581912" cy="201168"/>
           </a:xfrm>
           <a:prstGeom prst="rect">
             <a:avLst/>
@@ -30993,7 +32829,7 @@
                 <a:ea typeface="Calibri" pitchFamily="34" charset="-122"/>
                 <a:cs typeface="Calibri" pitchFamily="34" charset="-120"/>
               </a:rPr>
-              <a:t>breathe, breath</a:t>
+              <a:t>breathe; live</a:t>
             </a:r>
             <a:endParaRPr lang="en-US" sz="850" dirty="0"/>
           </a:p>
@@ -31001,53 +32837,14 @@
       </p:sp>
       <p:sp>
         <p:nvSpPr>
-          <p:cNvPr id="22" name="Text 20"/>
-          <p:cNvSpPr/>
-          <p:nvPr/>
-        </p:nvSpPr>
-        <p:spPr>
-          <a:xfrm>
-            <a:off x="4370832" y="2752344"/>
-            <a:ext cx="1828800" cy="182880"/>
-          </a:xfrm>
-          <a:prstGeom prst="rect">
-            <a:avLst/>
-          </a:prstGeom>
-          <a:noFill/>
-          <a:ln/>
-        </p:spPr>
-        <p:txBody>
-          <a:bodyPr wrap="square" lIns="0" tIns="0" rIns="0" bIns="0" rtlCol="0" anchor="t"/>
-          <a:lstStyle/>
-          <a:p>
-            <a:pPr algn="ctr" indent="0" marL="0">
-              <a:buNone/>
-            </a:pPr>
-            <a:r>
-              <a:rPr lang="en-US" sz="700" i="1" dirty="0">
-                <a:solidFill>
-                  <a:srgbClr val="94A3B8"/>
-                </a:solidFill>
-                <a:latin typeface="Calibri" pitchFamily="34" charset="0"/>
-                <a:ea typeface="Calibri" pitchFamily="34" charset="-122"/>
-                <a:cs typeface="Calibri" pitchFamily="34" charset="-120"/>
-              </a:rPr>
-              <a:t>'e' dropped before vowel suffix</a:t>
-            </a:r>
-            <a:endParaRPr lang="en-US" sz="700" dirty="0"/>
-          </a:p>
-        </p:txBody>
-      </p:sp>
-      <p:sp>
-        <p:nvSpPr>
-          <p:cNvPr id="23" name="Shape 21"/>
-          <p:cNvSpPr/>
-          <p:nvPr/>
-        </p:nvSpPr>
-        <p:spPr>
-          <a:xfrm>
-            <a:off x="6519672" y="2258568"/>
-            <a:ext cx="1828800" cy="292608"/>
+          <p:cNvPr id="22" name="Shape 20"/>
+          <p:cNvSpPr/>
+          <p:nvPr/>
+        </p:nvSpPr>
+        <p:spPr>
+          <a:xfrm>
+            <a:off x="5329123" y="2258568"/>
+            <a:ext cx="1581912" cy="292608"/>
           </a:xfrm>
           <a:prstGeom prst="rect">
             <a:avLst>
@@ -31074,14 +32871,14 @@
       </p:sp>
       <p:sp>
         <p:nvSpPr>
-          <p:cNvPr id="24" name="Text 22"/>
-          <p:cNvSpPr/>
-          <p:nvPr/>
-        </p:nvSpPr>
-        <p:spPr>
-          <a:xfrm>
-            <a:off x="6519672" y="2258568"/>
-            <a:ext cx="1828800" cy="292608"/>
+          <p:cNvPr id="23" name="Text 21"/>
+          <p:cNvSpPr/>
+          <p:nvPr/>
+        </p:nvSpPr>
+        <p:spPr>
+          <a:xfrm>
+            <a:off x="5329123" y="2258568"/>
+            <a:ext cx="1581912" cy="292608"/>
           </a:xfrm>
           <a:prstGeom prst="rect">
             <a:avLst/>
@@ -31113,14 +32910,14 @@
       </p:sp>
       <p:sp>
         <p:nvSpPr>
-          <p:cNvPr id="25" name="Text 23"/>
-          <p:cNvSpPr/>
-          <p:nvPr/>
-        </p:nvSpPr>
-        <p:spPr>
-          <a:xfrm>
-            <a:off x="6519672" y="2569464"/>
-            <a:ext cx="1828800" cy="201168"/>
+          <p:cNvPr id="24" name="Text 22"/>
+          <p:cNvSpPr/>
+          <p:nvPr/>
+        </p:nvSpPr>
+        <p:spPr>
+          <a:xfrm>
+            <a:off x="5329123" y="2569464"/>
+            <a:ext cx="1581912" cy="201168"/>
           </a:xfrm>
           <a:prstGeom prst="rect">
             <a:avLst/>
@@ -31144,7 +32941,7 @@
                 <a:ea typeface="Calibri" pitchFamily="34" charset="-122"/>
                 <a:cs typeface="Calibri" pitchFamily="34" charset="-120"/>
               </a:rPr>
-              <a:t>the act or state of</a:t>
+              <a:t>act or process of</a:t>
             </a:r>
             <a:endParaRPr lang="en-US" sz="850" dirty="0"/>
           </a:p>
@@ -31152,7 +32949,119 @@
       </p:sp>
       <p:sp>
         <p:nvSpPr>
-          <p:cNvPr id="26" name="Shape 24"/>
+          <p:cNvPr id="25" name="Shape 23"/>
+          <p:cNvSpPr/>
+          <p:nvPr/>
+        </p:nvSpPr>
+        <p:spPr>
+          <a:xfrm>
+            <a:off x="6998818" y="2258568"/>
+            <a:ext cx="1581912" cy="292608"/>
+          </a:xfrm>
+          <a:prstGeom prst="rect">
+            <a:avLst>
+              <a:gd name="adj" fmla="val 25000"/>
+            </a:avLst>
+          </a:prstGeom>
+          <a:solidFill>
+            <a:srgbClr val="FCE7F3"/>
+          </a:solidFill>
+          <a:ln w="19050">
+            <a:solidFill>
+              <a:srgbClr val="DB2777"/>
+            </a:solidFill>
+            <a:prstDash val="solid"/>
+          </a:ln>
+          <a:effectLst>
+            <a:outerShdw sx="100000" sy="100000" kx="0" ky="0" algn="bl" rotWithShape="0" blurRad="101600" dist="38100" dir="8100000">
+              <a:srgbClr val="000000">
+                <a:alpha val="12000"/>
+              </a:srgbClr>
+            </a:outerShdw>
+          </a:effectLst>
+        </p:spPr>
+      </p:sp>
+      <p:sp>
+        <p:nvSpPr>
+          <p:cNvPr id="26" name="Text 24"/>
+          <p:cNvSpPr/>
+          <p:nvPr/>
+        </p:nvSpPr>
+        <p:spPr>
+          <a:xfrm>
+            <a:off x="6998818" y="2258568"/>
+            <a:ext cx="1581912" cy="292608"/>
+          </a:xfrm>
+          <a:prstGeom prst="rect">
+            <a:avLst/>
+          </a:prstGeom>
+          <a:noFill/>
+          <a:ln/>
+        </p:spPr>
+        <p:txBody>
+          <a:bodyPr wrap="square" lIns="0" tIns="0" rIns="0" bIns="0" rtlCol="0" anchor="ctr"/>
+          <a:lstStyle/>
+          <a:p>
+            <a:pPr algn="ctr" indent="0" marL="0">
+              <a:buNone/>
+            </a:pPr>
+            <a:r>
+              <a:rPr lang="en-US" sz="1300" b="1" dirty="0">
+                <a:solidFill>
+                  <a:srgbClr val="9D174D"/>
+                </a:solidFill>
+                <a:latin typeface="Trebuchet MS" pitchFamily="34" charset="0"/>
+                <a:ea typeface="Trebuchet MS" pitchFamily="34" charset="-122"/>
+                <a:cs typeface="Trebuchet MS" pitchFamily="34" charset="-120"/>
+              </a:rPr>
+              <a:t>s</a:t>
+            </a:r>
+            <a:endParaRPr lang="en-US" sz="1300" dirty="0"/>
+          </a:p>
+        </p:txBody>
+      </p:sp>
+      <p:sp>
+        <p:nvSpPr>
+          <p:cNvPr id="27" name="Text 25"/>
+          <p:cNvSpPr/>
+          <p:nvPr/>
+        </p:nvSpPr>
+        <p:spPr>
+          <a:xfrm>
+            <a:off x="6998818" y="2569464"/>
+            <a:ext cx="1581912" cy="201168"/>
+          </a:xfrm>
+          <a:prstGeom prst="rect">
+            <a:avLst/>
+          </a:prstGeom>
+          <a:noFill/>
+          <a:ln/>
+        </p:spPr>
+        <p:txBody>
+          <a:bodyPr wrap="square" lIns="0" tIns="0" rIns="0" bIns="0" rtlCol="0" anchor="t"/>
+          <a:lstStyle/>
+          <a:p>
+            <a:pPr algn="ctr" indent="0" marL="0">
+              <a:buNone/>
+            </a:pPr>
+            <a:r>
+              <a:rPr lang="en-US" sz="850" dirty="0">
+                <a:solidFill>
+                  <a:srgbClr val="475569"/>
+                </a:solidFill>
+                <a:latin typeface="Calibri" pitchFamily="34" charset="0"/>
+                <a:ea typeface="Calibri" pitchFamily="34" charset="-122"/>
+                <a:cs typeface="Calibri" pitchFamily="34" charset="-120"/>
+              </a:rPr>
+              <a:t>plural or present tense</a:t>
+            </a:r>
+            <a:endParaRPr lang="en-US" sz="850" dirty="0"/>
+          </a:p>
+        </p:txBody>
+      </p:sp>
+      <p:sp>
+        <p:nvSpPr>
+          <p:cNvPr id="28" name="Shape 26"/>
           <p:cNvSpPr/>
           <p:nvPr/>
         </p:nvSpPr>
@@ -31179,7 +33088,7 @@
       </p:sp>
       <p:sp>
         <p:nvSpPr>
-          <p:cNvPr id="27" name="Text 25"/>
+          <p:cNvPr id="29" name="Text 27"/>
           <p:cNvSpPr/>
           <p:nvPr/>
         </p:nvSpPr>
@@ -31218,7 +33127,7 @@
       </p:sp>
       <p:sp>
         <p:nvSpPr>
-          <p:cNvPr id="28" name="Shape 26"/>
+          <p:cNvPr id="30" name="Shape 28"/>
           <p:cNvSpPr/>
           <p:nvPr/>
         </p:nvSpPr>
@@ -31245,7 +33154,7 @@
       </p:sp>
       <p:sp>
         <p:nvSpPr>
-          <p:cNvPr id="29" name="Shape 27"/>
+          <p:cNvPr id="31" name="Shape 29"/>
           <p:cNvSpPr/>
           <p:nvPr/>
         </p:nvSpPr>
@@ -31272,7 +33181,7 @@
       </p:sp>
       <p:sp>
         <p:nvSpPr>
-          <p:cNvPr id="30" name="Text 28"/>
+          <p:cNvPr id="32" name="Text 30"/>
           <p:cNvSpPr/>
           <p:nvPr/>
         </p:nvSpPr>
@@ -31303,7 +33212,7 @@
                 <a:ea typeface="Trebuchet MS" pitchFamily="34" charset="-122"/>
                 <a:cs typeface="Trebuchet MS" pitchFamily="34" charset="-120"/>
               </a:rPr>
-              <a:t>in</a:t>
+              <a:t>as</a:t>
             </a:r>
             <a:endParaRPr lang="en-US" sz="1400" dirty="0"/>
           </a:p>
@@ -31311,7 +33220,7 @@
       </p:sp>
       <p:sp>
         <p:nvSpPr>
-          <p:cNvPr id="31" name="Text 29"/>
+          <p:cNvPr id="33" name="Text 31"/>
           <p:cNvSpPr/>
           <p:nvPr/>
         </p:nvSpPr>
@@ -31350,7 +33259,7 @@
       </p:sp>
       <p:sp>
         <p:nvSpPr>
-          <p:cNvPr id="32" name="Shape 30"/>
+          <p:cNvPr id="34" name="Shape 32"/>
           <p:cNvSpPr/>
           <p:nvPr/>
         </p:nvSpPr>
@@ -31377,7 +33286,7 @@
       </p:sp>
       <p:sp>
         <p:nvSpPr>
-          <p:cNvPr id="33" name="Text 31"/>
+          <p:cNvPr id="35" name="Text 33"/>
           <p:cNvSpPr/>
           <p:nvPr/>
         </p:nvSpPr>
@@ -31408,7 +33317,7 @@
                 <a:ea typeface="Trebuchet MS" pitchFamily="34" charset="-122"/>
                 <a:cs typeface="Trebuchet MS" pitchFamily="34" charset="-120"/>
               </a:rPr>
-              <a:t>spi</a:t>
+              <a:t>pi</a:t>
             </a:r>
             <a:endParaRPr lang="en-US" sz="1400" dirty="0"/>
           </a:p>
@@ -31416,7 +33325,7 @@
       </p:sp>
       <p:sp>
         <p:nvSpPr>
-          <p:cNvPr id="34" name="Text 32"/>
+          <p:cNvPr id="36" name="Text 34"/>
           <p:cNvSpPr/>
           <p:nvPr/>
         </p:nvSpPr>
@@ -31455,7 +33364,7 @@
       </p:sp>
       <p:sp>
         <p:nvSpPr>
-          <p:cNvPr id="35" name="Shape 33"/>
+          <p:cNvPr id="37" name="Shape 35"/>
           <p:cNvSpPr/>
           <p:nvPr/>
         </p:nvSpPr>
@@ -31482,7 +33391,7 @@
       </p:sp>
       <p:sp>
         <p:nvSpPr>
-          <p:cNvPr id="36" name="Text 34"/>
+          <p:cNvPr id="38" name="Text 36"/>
           <p:cNvSpPr/>
           <p:nvPr/>
         </p:nvSpPr>
@@ -31521,7 +33430,7 @@
       </p:sp>
       <p:sp>
         <p:nvSpPr>
-          <p:cNvPr id="37" name="Text 35"/>
+          <p:cNvPr id="39" name="Text 37"/>
           <p:cNvSpPr/>
           <p:nvPr/>
         </p:nvSpPr>
@@ -31560,7 +33469,7 @@
       </p:sp>
       <p:sp>
         <p:nvSpPr>
-          <p:cNvPr id="38" name="Shape 36"/>
+          <p:cNvPr id="40" name="Shape 38"/>
           <p:cNvSpPr/>
           <p:nvPr/>
         </p:nvSpPr>
@@ -31587,7 +33496,7 @@
       </p:sp>
       <p:sp>
         <p:nvSpPr>
-          <p:cNvPr id="39" name="Text 37"/>
+          <p:cNvPr id="41" name="Text 39"/>
           <p:cNvSpPr/>
           <p:nvPr/>
         </p:nvSpPr>
@@ -31618,7 +33527,7 @@
                 <a:ea typeface="Trebuchet MS" pitchFamily="34" charset="-122"/>
                 <a:cs typeface="Trebuchet MS" pitchFamily="34" charset="-120"/>
               </a:rPr>
-              <a:t>tion</a:t>
+              <a:t>tions</a:t>
             </a:r>
             <a:endParaRPr lang="en-US" sz="1400" dirty="0"/>
           </a:p>
@@ -31626,7 +33535,7 @@
       </p:sp>
       <p:sp>
         <p:nvSpPr>
-          <p:cNvPr id="40" name="Shape 38"/>
+          <p:cNvPr id="42" name="Shape 40"/>
           <p:cNvSpPr/>
           <p:nvPr/>
         </p:nvSpPr>
@@ -31653,7 +33562,7 @@
       </p:sp>
       <p:sp>
         <p:nvSpPr>
-          <p:cNvPr id="41" name="Text 39"/>
+          <p:cNvPr id="43" name="Text 41"/>
           <p:cNvSpPr/>
           <p:nvPr/>
         </p:nvSpPr>
@@ -31692,18 +33601,18 @@
       </p:sp>
       <p:sp>
         <p:nvSpPr>
-          <p:cNvPr id="42" name="Shape 40"/>
+          <p:cNvPr id="44" name="Shape 42"/>
           <p:cNvSpPr/>
           <p:nvPr/>
         </p:nvSpPr>
         <p:spPr>
           <a:xfrm>
             <a:off x="1874520" y="4096512"/>
-            <a:ext cx="6903720" cy="804672"/>
+            <a:ext cx="6903720" cy="658368"/>
           </a:xfrm>
           <a:prstGeom prst="rect">
             <a:avLst>
-              <a:gd name="adj" fmla="val 6818"/>
+              <a:gd name="adj" fmla="val 8333"/>
             </a:avLst>
           </a:prstGeom>
           <a:solidFill>
@@ -31719,18 +33628,18 @@
       </p:sp>
       <p:sp>
         <p:nvSpPr>
-          <p:cNvPr id="43" name="Shape 41"/>
+          <p:cNvPr id="45" name="Shape 43"/>
           <p:cNvSpPr/>
           <p:nvPr/>
         </p:nvSpPr>
         <p:spPr>
           <a:xfrm>
             <a:off x="1951828" y="4169664"/>
-            <a:ext cx="603504" cy="384048"/>
+            <a:ext cx="603504" cy="475488"/>
           </a:xfrm>
           <a:prstGeom prst="rect">
             <a:avLst>
-              <a:gd name="adj" fmla="val 9524"/>
+              <a:gd name="adj" fmla="val 7692"/>
             </a:avLst>
           </a:prstGeom>
           <a:solidFill>
@@ -31746,14 +33655,14 @@
       </p:sp>
       <p:sp>
         <p:nvSpPr>
-          <p:cNvPr id="44" name="Text 42"/>
+          <p:cNvPr id="46" name="Text 44"/>
           <p:cNvSpPr/>
           <p:nvPr/>
         </p:nvSpPr>
         <p:spPr>
           <a:xfrm>
             <a:off x="1951828" y="4169664"/>
-            <a:ext cx="603504" cy="384048"/>
+            <a:ext cx="603504" cy="475488"/>
           </a:xfrm>
           <a:prstGeom prst="rect">
             <a:avLst/>
@@ -31777,7 +33686,7 @@
                 <a:ea typeface="Trebuchet MS" pitchFamily="34" charset="-122"/>
                 <a:cs typeface="Trebuchet MS" pitchFamily="34" charset="-120"/>
               </a:rPr>
-              <a:t>i</a:t>
+              <a:t>a</a:t>
             </a:r>
             <a:endParaRPr lang="en-US" sz="900" dirty="0"/>
           </a:p>
@@ -31785,18 +33694,18 @@
       </p:sp>
       <p:sp>
         <p:nvSpPr>
-          <p:cNvPr id="45" name="Shape 43"/>
+          <p:cNvPr id="47" name="Shape 45"/>
           <p:cNvSpPr/>
           <p:nvPr/>
         </p:nvSpPr>
         <p:spPr>
           <a:xfrm>
             <a:off x="2605209" y="4169664"/>
-            <a:ext cx="603504" cy="384048"/>
+            <a:ext cx="603504" cy="475488"/>
           </a:xfrm>
           <a:prstGeom prst="rect">
             <a:avLst>
-              <a:gd name="adj" fmla="val 9524"/>
+              <a:gd name="adj" fmla="val 7692"/>
             </a:avLst>
           </a:prstGeom>
           <a:solidFill>
@@ -31812,14 +33721,14 @@
       </p:sp>
       <p:sp>
         <p:nvSpPr>
-          <p:cNvPr id="46" name="Text 44"/>
+          <p:cNvPr id="48" name="Text 46"/>
           <p:cNvSpPr/>
           <p:nvPr/>
         </p:nvSpPr>
         <p:spPr>
           <a:xfrm>
             <a:off x="2605209" y="4169664"/>
-            <a:ext cx="603504" cy="384048"/>
+            <a:ext cx="603504" cy="475488"/>
           </a:xfrm>
           <a:prstGeom prst="rect">
             <a:avLst/>
@@ -31843,7 +33752,7 @@
                 <a:ea typeface="Trebuchet MS" pitchFamily="34" charset="-122"/>
                 <a:cs typeface="Trebuchet MS" pitchFamily="34" charset="-120"/>
               </a:rPr>
-              <a:t>n</a:t>
+              <a:t>s</a:t>
             </a:r>
             <a:endParaRPr lang="en-US" sz="900" dirty="0"/>
           </a:p>
@@ -31851,18 +33760,18 @@
       </p:sp>
       <p:sp>
         <p:nvSpPr>
-          <p:cNvPr id="47" name="Shape 45"/>
+          <p:cNvPr id="49" name="Shape 47"/>
           <p:cNvSpPr/>
           <p:nvPr/>
         </p:nvSpPr>
         <p:spPr>
           <a:xfrm>
             <a:off x="3258589" y="4169664"/>
-            <a:ext cx="603504" cy="384048"/>
+            <a:ext cx="603504" cy="475488"/>
           </a:xfrm>
           <a:prstGeom prst="rect">
             <a:avLst>
-              <a:gd name="adj" fmla="val 9524"/>
+              <a:gd name="adj" fmla="val 7692"/>
             </a:avLst>
           </a:prstGeom>
           <a:solidFill>
@@ -31878,14 +33787,14 @@
       </p:sp>
       <p:sp>
         <p:nvSpPr>
-          <p:cNvPr id="48" name="Text 46"/>
+          <p:cNvPr id="50" name="Text 48"/>
           <p:cNvSpPr/>
           <p:nvPr/>
         </p:nvSpPr>
         <p:spPr>
           <a:xfrm>
             <a:off x="3258589" y="4169664"/>
-            <a:ext cx="603504" cy="384048"/>
+            <a:ext cx="603504" cy="475488"/>
           </a:xfrm>
           <a:prstGeom prst="rect">
             <a:avLst/>
@@ -31909,7 +33818,7 @@
                 <a:ea typeface="Trebuchet MS" pitchFamily="34" charset="-122"/>
                 <a:cs typeface="Trebuchet MS" pitchFamily="34" charset="-120"/>
               </a:rPr>
-              <a:t>s</a:t>
+              <a:t>p</a:t>
             </a:r>
             <a:endParaRPr lang="en-US" sz="900" dirty="0"/>
           </a:p>
@@ -31917,18 +33826,18 @@
       </p:sp>
       <p:sp>
         <p:nvSpPr>
-          <p:cNvPr id="49" name="Shape 47"/>
+          <p:cNvPr id="51" name="Shape 49"/>
           <p:cNvSpPr/>
           <p:nvPr/>
         </p:nvSpPr>
         <p:spPr>
           <a:xfrm>
             <a:off x="3911969" y="4169664"/>
-            <a:ext cx="603504" cy="384048"/>
+            <a:ext cx="603504" cy="475488"/>
           </a:xfrm>
           <a:prstGeom prst="rect">
             <a:avLst>
-              <a:gd name="adj" fmla="val 9524"/>
+              <a:gd name="adj" fmla="val 7692"/>
             </a:avLst>
           </a:prstGeom>
           <a:solidFill>
@@ -31944,14 +33853,14 @@
       </p:sp>
       <p:sp>
         <p:nvSpPr>
-          <p:cNvPr id="50" name="Text 48"/>
+          <p:cNvPr id="52" name="Text 50"/>
           <p:cNvSpPr/>
           <p:nvPr/>
         </p:nvSpPr>
         <p:spPr>
           <a:xfrm>
             <a:off x="3911969" y="4169664"/>
-            <a:ext cx="603504" cy="384048"/>
+            <a:ext cx="603504" cy="475488"/>
           </a:xfrm>
           <a:prstGeom prst="rect">
             <a:avLst/>
@@ -31975,7 +33884,7 @@
                 <a:ea typeface="Trebuchet MS" pitchFamily="34" charset="-122"/>
                 <a:cs typeface="Trebuchet MS" pitchFamily="34" charset="-120"/>
               </a:rPr>
-              <a:t>p</a:t>
+              <a:t>i</a:t>
             </a:r>
             <a:endParaRPr lang="en-US" sz="900" dirty="0"/>
           </a:p>
@@ -31983,18 +33892,18 @@
       </p:sp>
       <p:sp>
         <p:nvSpPr>
-          <p:cNvPr id="51" name="Shape 49"/>
+          <p:cNvPr id="53" name="Shape 51"/>
           <p:cNvSpPr/>
           <p:nvPr/>
         </p:nvSpPr>
         <p:spPr>
           <a:xfrm>
             <a:off x="4565350" y="4169664"/>
-            <a:ext cx="603504" cy="384048"/>
+            <a:ext cx="603504" cy="475488"/>
           </a:xfrm>
           <a:prstGeom prst="rect">
             <a:avLst>
-              <a:gd name="adj" fmla="val 9524"/>
+              <a:gd name="adj" fmla="val 7692"/>
             </a:avLst>
           </a:prstGeom>
           <a:solidFill>
@@ -32010,14 +33919,14 @@
       </p:sp>
       <p:sp>
         <p:nvSpPr>
-          <p:cNvPr id="52" name="Text 50"/>
+          <p:cNvPr id="54" name="Text 52"/>
           <p:cNvSpPr/>
           <p:nvPr/>
         </p:nvSpPr>
         <p:spPr>
           <a:xfrm>
             <a:off x="4565350" y="4169664"/>
-            <a:ext cx="603504" cy="384048"/>
+            <a:ext cx="603504" cy="475488"/>
           </a:xfrm>
           <a:prstGeom prst="rect">
             <a:avLst/>
@@ -32041,7 +33950,7 @@
                 <a:ea typeface="Trebuchet MS" pitchFamily="34" charset="-122"/>
                 <a:cs typeface="Trebuchet MS" pitchFamily="34" charset="-120"/>
               </a:rPr>
-              <a:t>i</a:t>
+              <a:t>r</a:t>
             </a:r>
             <a:endParaRPr lang="en-US" sz="900" dirty="0"/>
           </a:p>
@@ -32049,18 +33958,18 @@
       </p:sp>
       <p:sp>
         <p:nvSpPr>
-          <p:cNvPr id="53" name="Shape 51"/>
+          <p:cNvPr id="55" name="Shape 53"/>
           <p:cNvSpPr/>
           <p:nvPr/>
         </p:nvSpPr>
         <p:spPr>
           <a:xfrm>
             <a:off x="5218730" y="4169664"/>
-            <a:ext cx="603504" cy="384048"/>
+            <a:ext cx="603504" cy="475488"/>
           </a:xfrm>
           <a:prstGeom prst="rect">
             <a:avLst>
-              <a:gd name="adj" fmla="val 9524"/>
+              <a:gd name="adj" fmla="val 7692"/>
             </a:avLst>
           </a:prstGeom>
           <a:solidFill>
@@ -32076,14 +33985,14 @@
       </p:sp>
       <p:sp>
         <p:nvSpPr>
-          <p:cNvPr id="54" name="Text 52"/>
+          <p:cNvPr id="56" name="Text 54"/>
           <p:cNvSpPr/>
           <p:nvPr/>
         </p:nvSpPr>
         <p:spPr>
           <a:xfrm>
             <a:off x="5218730" y="4169664"/>
-            <a:ext cx="603504" cy="384048"/>
+            <a:ext cx="603504" cy="475488"/>
           </a:xfrm>
           <a:prstGeom prst="rect">
             <a:avLst/>
@@ -32107,7 +34016,7 @@
                 <a:ea typeface="Trebuchet MS" pitchFamily="34" charset="-122"/>
                 <a:cs typeface="Trebuchet MS" pitchFamily="34" charset="-120"/>
               </a:rPr>
-              <a:t>r</a:t>
+              <a:t>a</a:t>
             </a:r>
             <a:endParaRPr lang="en-US" sz="900" dirty="0"/>
           </a:p>
@@ -32115,18 +34024,18 @@
       </p:sp>
       <p:sp>
         <p:nvSpPr>
-          <p:cNvPr id="55" name="Shape 53"/>
+          <p:cNvPr id="57" name="Shape 55"/>
           <p:cNvSpPr/>
           <p:nvPr/>
         </p:nvSpPr>
         <p:spPr>
           <a:xfrm>
             <a:off x="5872111" y="4169664"/>
-            <a:ext cx="603504" cy="384048"/>
+            <a:ext cx="603504" cy="475488"/>
           </a:xfrm>
           <a:prstGeom prst="rect">
             <a:avLst>
-              <a:gd name="adj" fmla="val 9524"/>
+              <a:gd name="adj" fmla="val 7692"/>
             </a:avLst>
           </a:prstGeom>
           <a:solidFill>
@@ -32142,14 +34051,14 @@
       </p:sp>
       <p:sp>
         <p:nvSpPr>
-          <p:cNvPr id="56" name="Text 54"/>
+          <p:cNvPr id="58" name="Text 56"/>
           <p:cNvSpPr/>
           <p:nvPr/>
         </p:nvSpPr>
         <p:spPr>
           <a:xfrm>
             <a:off x="5872111" y="4169664"/>
-            <a:ext cx="603504" cy="384048"/>
+            <a:ext cx="603504" cy="475488"/>
           </a:xfrm>
           <a:prstGeom prst="rect">
             <a:avLst/>
@@ -32173,7 +34082,7 @@
                 <a:ea typeface="Trebuchet MS" pitchFamily="34" charset="-122"/>
                 <a:cs typeface="Trebuchet MS" pitchFamily="34" charset="-120"/>
               </a:rPr>
-              <a:t>a</a:t>
+              <a:t>ti</a:t>
             </a:r>
             <a:endParaRPr lang="en-US" sz="900" dirty="0"/>
           </a:p>
@@ -32181,18 +34090,18 @@
       </p:sp>
       <p:sp>
         <p:nvSpPr>
-          <p:cNvPr id="57" name="Shape 55"/>
+          <p:cNvPr id="59" name="Shape 57"/>
           <p:cNvSpPr/>
           <p:nvPr/>
         </p:nvSpPr>
         <p:spPr>
           <a:xfrm>
             <a:off x="6525491" y="4169664"/>
-            <a:ext cx="603504" cy="384048"/>
+            <a:ext cx="603504" cy="475488"/>
           </a:xfrm>
           <a:prstGeom prst="rect">
             <a:avLst>
-              <a:gd name="adj" fmla="val 9524"/>
+              <a:gd name="adj" fmla="val 7692"/>
             </a:avLst>
           </a:prstGeom>
           <a:solidFill>
@@ -32208,14 +34117,14 @@
       </p:sp>
       <p:sp>
         <p:nvSpPr>
-          <p:cNvPr id="58" name="Text 56"/>
+          <p:cNvPr id="60" name="Text 58"/>
           <p:cNvSpPr/>
           <p:nvPr/>
         </p:nvSpPr>
         <p:spPr>
           <a:xfrm>
             <a:off x="6525491" y="4169664"/>
-            <a:ext cx="603504" cy="384048"/>
+            <a:ext cx="603504" cy="475488"/>
           </a:xfrm>
           <a:prstGeom prst="rect">
             <a:avLst/>
@@ -32239,7 +34148,7 @@
                 <a:ea typeface="Trebuchet MS" pitchFamily="34" charset="-122"/>
                 <a:cs typeface="Trebuchet MS" pitchFamily="34" charset="-120"/>
               </a:rPr>
-              <a:t>t</a:t>
+              <a:t>o</a:t>
             </a:r>
             <a:endParaRPr lang="en-US" sz="900" dirty="0"/>
           </a:p>
@@ -32247,57 +34156,18 @@
       </p:sp>
       <p:sp>
         <p:nvSpPr>
-          <p:cNvPr id="59" name="Text 57"/>
-          <p:cNvSpPr/>
-          <p:nvPr/>
-        </p:nvSpPr>
-        <p:spPr>
-          <a:xfrm>
-            <a:off x="6525491" y="4572000"/>
-            <a:ext cx="603504" cy="219456"/>
-          </a:xfrm>
-          <a:prstGeom prst="rect">
-            <a:avLst/>
-          </a:prstGeom>
-          <a:noFill/>
-          <a:ln/>
-        </p:spPr>
-        <p:txBody>
-          <a:bodyPr wrap="square" lIns="0" tIns="0" rIns="0" bIns="0" rtlCol="0" anchor="t"/>
-          <a:lstStyle/>
-          <a:p>
-            <a:pPr algn="ctr" indent="0" marL="0">
-              <a:buNone/>
-            </a:pPr>
-            <a:r>
-              <a:rPr lang="en-US" sz="750" i="1" dirty="0">
-                <a:solidFill>
-                  <a:srgbClr val="94A3B8"/>
-                </a:solidFill>
-                <a:latin typeface="Calibri" pitchFamily="34" charset="0"/>
-                <a:ea typeface="Calibri" pitchFamily="34" charset="-122"/>
-                <a:cs typeface="Calibri" pitchFamily="34" charset="-120"/>
-              </a:rPr>
-              <a:t>/sh/</a:t>
-            </a:r>
-            <a:endParaRPr lang="en-US" sz="750" dirty="0"/>
-          </a:p>
-        </p:txBody>
-      </p:sp>
-      <p:sp>
-        <p:nvSpPr>
-          <p:cNvPr id="60" name="Shape 58"/>
+          <p:cNvPr id="61" name="Shape 59"/>
           <p:cNvSpPr/>
           <p:nvPr/>
         </p:nvSpPr>
         <p:spPr>
           <a:xfrm>
             <a:off x="7178871" y="4169664"/>
-            <a:ext cx="603504" cy="384048"/>
+            <a:ext cx="603504" cy="475488"/>
           </a:xfrm>
           <a:prstGeom prst="rect">
             <a:avLst>
-              <a:gd name="adj" fmla="val 9524"/>
+              <a:gd name="adj" fmla="val 7692"/>
             </a:avLst>
           </a:prstGeom>
           <a:solidFill>
@@ -32313,14 +34183,14 @@
       </p:sp>
       <p:sp>
         <p:nvSpPr>
-          <p:cNvPr id="61" name="Text 59"/>
+          <p:cNvPr id="62" name="Text 60"/>
           <p:cNvSpPr/>
           <p:nvPr/>
         </p:nvSpPr>
         <p:spPr>
           <a:xfrm>
             <a:off x="7178871" y="4169664"/>
-            <a:ext cx="603504" cy="384048"/>
+            <a:ext cx="603504" cy="475488"/>
           </a:xfrm>
           <a:prstGeom prst="rect">
             <a:avLst/>
@@ -32344,7 +34214,7 @@
                 <a:ea typeface="Trebuchet MS" pitchFamily="34" charset="-122"/>
                 <a:cs typeface="Trebuchet MS" pitchFamily="34" charset="-120"/>
               </a:rPr>
-              <a:t>io</a:t>
+              <a:t>n</a:t>
             </a:r>
             <a:endParaRPr lang="en-US" sz="900" dirty="0"/>
           </a:p>
@@ -32352,18 +34222,18 @@
       </p:sp>
       <p:sp>
         <p:nvSpPr>
-          <p:cNvPr id="62" name="Shape 60"/>
+          <p:cNvPr id="63" name="Shape 61"/>
           <p:cNvSpPr/>
           <p:nvPr/>
         </p:nvSpPr>
         <p:spPr>
           <a:xfrm>
             <a:off x="7832252" y="4169664"/>
-            <a:ext cx="603504" cy="384048"/>
+            <a:ext cx="603504" cy="475488"/>
           </a:xfrm>
           <a:prstGeom prst="rect">
             <a:avLst>
-              <a:gd name="adj" fmla="val 9524"/>
+              <a:gd name="adj" fmla="val 7692"/>
             </a:avLst>
           </a:prstGeom>
           <a:solidFill>
@@ -32379,14 +34249,14 @@
       </p:sp>
       <p:sp>
         <p:nvSpPr>
-          <p:cNvPr id="63" name="Text 61"/>
+          <p:cNvPr id="64" name="Text 62"/>
           <p:cNvSpPr/>
           <p:nvPr/>
         </p:nvSpPr>
         <p:spPr>
           <a:xfrm>
             <a:off x="7832252" y="4169664"/>
-            <a:ext cx="603504" cy="384048"/>
+            <a:ext cx="603504" cy="475488"/>
           </a:xfrm>
           <a:prstGeom prst="rect">
             <a:avLst/>
@@ -32410,7 +34280,7 @@
                 <a:ea typeface="Trebuchet MS" pitchFamily="34" charset="-122"/>
                 <a:cs typeface="Trebuchet MS" pitchFamily="34" charset="-120"/>
               </a:rPr>
-              <a:t>n</a:t>
+              <a:t>s</a:t>
             </a:r>
             <a:endParaRPr lang="en-US" sz="900" dirty="0"/>
           </a:p>
@@ -32702,7 +34572,7 @@
                 <a:ea typeface="Calibri" pitchFamily="34" charset="-122"/>
                 <a:cs typeface="Calibri" pitchFamily="34" charset="-120"/>
               </a:rPr>
-              <a:t>Word Labs  •  wordlabs.app  •  Root: 'spire' = breathe, breath, spirit</a:t>
+              <a:t>Word Labs  •  wordlabs.app  •  Root: 'spire' = breathe; live</a:t>
             </a:r>
             <a:endParaRPr lang="en-US" sz="800" dirty="0"/>
           </a:p>
@@ -33871,7 +35741,7 @@
                 <a:ea typeface="Calibri" pitchFamily="34" charset="-122"/>
                 <a:cs typeface="Calibri" pitchFamily="34" charset="-120"/>
               </a:rPr>
-              <a:t>Word Labs  •  wordlabs.app  •  Root: 'spire' = breathe, breath, spirit</a:t>
+              <a:t>Word Labs  •  wordlabs.app  •  Root: 'spire' = breathe; live</a:t>
             </a:r>
             <a:endParaRPr lang="en-US" sz="800" dirty="0"/>
           </a:p>
@@ -34172,7 +36042,7 @@
                 <a:ea typeface="Trebuchet MS" pitchFamily="34" charset="-122"/>
                 <a:cs typeface="Trebuchet MS" pitchFamily="34" charset="-120"/>
               </a:rPr>
-              <a:t>in-</a:t>
+              <a:t>a-</a:t>
             </a:r>
             <a:endParaRPr lang="en-US" sz="1300" dirty="0"/>
           </a:p>
@@ -34364,7 +36234,7 @@
                 <a:ea typeface="Trebuchet MS" pitchFamily="34" charset="-122"/>
                 <a:cs typeface="Trebuchet MS" pitchFamily="34" charset="-120"/>
               </a:rPr>
-              <a:t>ex-</a:t>
+              <a:t>con-</a:t>
             </a:r>
             <a:endParaRPr lang="en-US" sz="1300" dirty="0"/>
           </a:p>
@@ -34453,7 +36323,7 @@
                 <a:ea typeface="Trebuchet MS" pitchFamily="34" charset="-122"/>
                 <a:cs typeface="Trebuchet MS" pitchFamily="34" charset="-120"/>
               </a:rPr>
-              <a:t>-ing</a:t>
+              <a:t>-ate</a:t>
             </a:r>
             <a:endParaRPr lang="en-US" sz="1300" dirty="0"/>
           </a:p>
@@ -34517,7 +36387,7 @@
                 <a:ea typeface="Trebuchet MS" pitchFamily="34" charset="-122"/>
                 <a:cs typeface="Trebuchet MS" pitchFamily="34" charset="-120"/>
               </a:rPr>
-              <a:t>con-</a:t>
+              <a:t>re-</a:t>
             </a:r>
             <a:endParaRPr lang="en-US" sz="1300" dirty="0"/>
           </a:p>
@@ -34606,7 +36476,7 @@
                 <a:ea typeface="Trebuchet MS" pitchFamily="34" charset="-122"/>
                 <a:cs typeface="Trebuchet MS" pitchFamily="34" charset="-120"/>
               </a:rPr>
-              <a:t>-ed</a:t>
+              <a:t>-al</a:t>
             </a:r>
             <a:endParaRPr lang="en-US" sz="1300" dirty="0"/>
           </a:p>
@@ -34627,7 +36497,7 @@
             <a:avLst/>
           </a:prstGeom>
           <a:solidFill>
-            <a:srgbClr val="DDD6FE"/>
+            <a:srgbClr val="F1F5F9"/>
           </a:solidFill>
           <a:ln w="12700">
             <a:solidFill>
@@ -34639,14 +36509,64 @@
       </p:sp>
       <p:sp>
         <p:nvSpPr>
-          <p:cNvPr id="34" name="Text 32"/>
-          <p:cNvSpPr/>
-          <p:nvPr/>
-        </p:nvSpPr>
-        <p:spPr>
-          <a:xfrm>
-            <a:off x="365760" y="2825496"/>
-            <a:ext cx="2468880" cy="402336"/>
+          <p:cNvPr id="34" name="Shape 32"/>
+          <p:cNvSpPr/>
+          <p:nvPr/>
+        </p:nvSpPr>
+        <p:spPr>
+          <a:xfrm>
+            <a:off x="2971800" y="2825496"/>
+            <a:ext cx="2834640" cy="402336"/>
+          </a:xfrm>
+          <a:prstGeom prst="rect">
+            <a:avLst/>
+          </a:prstGeom>
+          <a:solidFill>
+            <a:srgbClr val="F1F5F9"/>
+          </a:solidFill>
+          <a:ln w="12700">
+            <a:solidFill>
+              <a:srgbClr val="E2E8F0"/>
+            </a:solidFill>
+            <a:prstDash val="solid"/>
+          </a:ln>
+        </p:spPr>
+      </p:sp>
+      <p:sp>
+        <p:nvSpPr>
+          <p:cNvPr id="35" name="Shape 33"/>
+          <p:cNvSpPr/>
+          <p:nvPr/>
+        </p:nvSpPr>
+        <p:spPr>
+          <a:xfrm>
+            <a:off x="5943600" y="2825496"/>
+            <a:ext cx="2834640" cy="402336"/>
+          </a:xfrm>
+          <a:prstGeom prst="rect">
+            <a:avLst/>
+          </a:prstGeom>
+          <a:solidFill>
+            <a:srgbClr val="FCE7F3"/>
+          </a:solidFill>
+          <a:ln w="12700">
+            <a:solidFill>
+              <a:srgbClr val="E2E8F0"/>
+            </a:solidFill>
+            <a:prstDash val="solid"/>
+          </a:ln>
+        </p:spPr>
+      </p:sp>
+      <p:sp>
+        <p:nvSpPr>
+          <p:cNvPr id="36" name="Text 34"/>
+          <p:cNvSpPr/>
+          <p:nvPr/>
+        </p:nvSpPr>
+        <p:spPr>
+          <a:xfrm>
+            <a:off x="5943600" y="2825496"/>
+            <a:ext cx="2834640" cy="402336"/>
           </a:xfrm>
           <a:prstGeom prst="rect">
             <a:avLst/>
@@ -34664,13 +36584,13 @@
             <a:r>
               <a:rPr lang="en-US" sz="1300" b="1" dirty="0">
                 <a:solidFill>
-                  <a:srgbClr val="4C1D95"/>
+                  <a:srgbClr val="9D174D"/>
                 </a:solidFill>
                 <a:latin typeface="Trebuchet MS" pitchFamily="34" charset="0"/>
                 <a:ea typeface="Trebuchet MS" pitchFamily="34" charset="-122"/>
                 <a:cs typeface="Trebuchet MS" pitchFamily="34" charset="-120"/>
               </a:rPr>
-              <a:t>re-</a:t>
+              <a:t>-s</a:t>
             </a:r>
             <a:endParaRPr lang="en-US" sz="1300" dirty="0"/>
           </a:p>
@@ -34678,90 +36598,40 @@
       </p:sp>
       <p:sp>
         <p:nvSpPr>
-          <p:cNvPr id="35" name="Shape 33"/>
-          <p:cNvSpPr/>
-          <p:nvPr/>
-        </p:nvSpPr>
-        <p:spPr>
-          <a:xfrm>
-            <a:off x="2971800" y="2825496"/>
-            <a:ext cx="2834640" cy="402336"/>
-          </a:xfrm>
-          <a:prstGeom prst="rect">
-            <a:avLst/>
-          </a:prstGeom>
-          <a:solidFill>
-            <a:srgbClr val="F1F5F9"/>
-          </a:solidFill>
-          <a:ln w="12700">
-            <a:solidFill>
-              <a:srgbClr val="E2E8F0"/>
-            </a:solidFill>
-            <a:prstDash val="solid"/>
-          </a:ln>
-        </p:spPr>
-      </p:sp>
-      <p:sp>
-        <p:nvSpPr>
-          <p:cNvPr id="36" name="Shape 34"/>
-          <p:cNvSpPr/>
-          <p:nvPr/>
-        </p:nvSpPr>
-        <p:spPr>
-          <a:xfrm>
-            <a:off x="5943600" y="2825496"/>
-            <a:ext cx="2834640" cy="402336"/>
-          </a:xfrm>
-          <a:prstGeom prst="rect">
-            <a:avLst/>
-          </a:prstGeom>
-          <a:solidFill>
-            <a:srgbClr val="FCE7F3"/>
-          </a:solidFill>
-          <a:ln w="12700">
-            <a:solidFill>
-              <a:srgbClr val="E2E8F0"/>
-            </a:solidFill>
-            <a:prstDash val="solid"/>
-          </a:ln>
-        </p:spPr>
-      </p:sp>
-      <p:sp>
-        <p:nvSpPr>
           <p:cNvPr id="37" name="Text 35"/>
           <p:cNvSpPr/>
           <p:nvPr/>
         </p:nvSpPr>
         <p:spPr>
           <a:xfrm>
-            <a:off x="5943600" y="2825496"/>
-            <a:ext cx="2834640" cy="402336"/>
-          </a:xfrm>
-          <a:prstGeom prst="rect">
-            <a:avLst/>
-          </a:prstGeom>
-          <a:noFill/>
-          <a:ln/>
-        </p:spPr>
-        <p:txBody>
-          <a:bodyPr wrap="square" lIns="0" tIns="0" rIns="0" bIns="0" rtlCol="0" anchor="ctr"/>
-          <a:lstStyle/>
-          <a:p>
-            <a:pPr algn="ctr" indent="0" marL="0">
-              <a:buNone/>
-            </a:pPr>
-            <a:r>
-              <a:rPr lang="en-US" sz="1300" b="1" dirty="0">
-                <a:solidFill>
-                  <a:srgbClr val="9D174D"/>
+            <a:off x="365760" y="3611880"/>
+            <a:ext cx="1828800" cy="347472"/>
+          </a:xfrm>
+          <a:prstGeom prst="rect">
+            <a:avLst/>
+          </a:prstGeom>
+          <a:noFill/>
+          <a:ln/>
+        </p:spPr>
+        <p:txBody>
+          <a:bodyPr wrap="square" lIns="0" tIns="0" rIns="0" bIns="0" rtlCol="0" anchor="ctr"/>
+          <a:lstStyle/>
+          <a:p>
+            <a:pPr algn="l" indent="0" marL="0">
+              <a:buNone/>
+            </a:pPr>
+            <a:r>
+              <a:rPr lang="en-US" sz="1200" b="1" dirty="0">
+                <a:solidFill>
+                  <a:srgbClr val="0F172A"/>
                 </a:solidFill>
                 <a:latin typeface="Trebuchet MS" pitchFamily="34" charset="0"/>
                 <a:ea typeface="Trebuchet MS" pitchFamily="34" charset="-122"/>
                 <a:cs typeface="Trebuchet MS" pitchFamily="34" charset="-120"/>
               </a:rPr>
-              <a:t>-ational</a:t>
-            </a:r>
-            <a:endParaRPr lang="en-US" sz="1300" dirty="0"/>
+              <a:t>Sample words:</a:t>
+            </a:r>
+            <a:endParaRPr lang="en-US" sz="1200" dirty="0"/>
           </a:p>
         </p:txBody>
       </p:sp>
@@ -34773,18 +36643,20 @@
         </p:nvSpPr>
         <p:spPr>
           <a:xfrm>
-            <a:off x="365760" y="3246120"/>
-            <a:ext cx="2468880" cy="402336"/>
-          </a:xfrm>
-          <a:prstGeom prst="rect">
-            <a:avLst/>
-          </a:prstGeom>
-          <a:solidFill>
-            <a:srgbClr val="DDD6FE"/>
-          </a:solidFill>
-          <a:ln w="12700">
-            <a:solidFill>
-              <a:srgbClr val="E2E8F0"/>
+            <a:off x="365760" y="4023360"/>
+            <a:ext cx="2011680" cy="402336"/>
+          </a:xfrm>
+          <a:prstGeom prst="rect">
+            <a:avLst>
+              <a:gd name="adj" fmla="val 13636"/>
+            </a:avLst>
+          </a:prstGeom>
+          <a:solidFill>
+            <a:srgbClr val="EEF2FF"/>
+          </a:solidFill>
+          <a:ln w="12700">
+            <a:solidFill>
+              <a:srgbClr val="6366F1"/>
             </a:solidFill>
             <a:prstDash val="solid"/>
           </a:ln>
@@ -34798,34 +36670,34 @@
         </p:nvSpPr>
         <p:spPr>
           <a:xfrm>
-            <a:off x="365760" y="3246120"/>
-            <a:ext cx="2468880" cy="402336"/>
-          </a:xfrm>
-          <a:prstGeom prst="rect">
-            <a:avLst/>
-          </a:prstGeom>
-          <a:noFill/>
-          <a:ln/>
-        </p:spPr>
-        <p:txBody>
-          <a:bodyPr wrap="square" lIns="0" tIns="0" rIns="0" bIns="0" rtlCol="0" anchor="ctr"/>
-          <a:lstStyle/>
-          <a:p>
-            <a:pPr algn="ctr" indent="0" marL="0">
-              <a:buNone/>
-            </a:pPr>
-            <a:r>
-              <a:rPr lang="en-US" sz="1300" b="1" dirty="0">
-                <a:solidFill>
-                  <a:srgbClr val="4C1D95"/>
+            <a:off x="365760" y="4023360"/>
+            <a:ext cx="2011680" cy="402336"/>
+          </a:xfrm>
+          <a:prstGeom prst="rect">
+            <a:avLst/>
+          </a:prstGeom>
+          <a:noFill/>
+          <a:ln/>
+        </p:spPr>
+        <p:txBody>
+          <a:bodyPr wrap="square" lIns="0" tIns="0" rIns="0" bIns="0" rtlCol="0" anchor="ctr"/>
+          <a:lstStyle/>
+          <a:p>
+            <a:pPr algn="ctr" indent="0" marL="0">
+              <a:buNone/>
+            </a:pPr>
+            <a:r>
+              <a:rPr lang="en-US" sz="1200" b="1" dirty="0">
+                <a:solidFill>
+                  <a:srgbClr val="4338CA"/>
                 </a:solidFill>
                 <a:latin typeface="Trebuchet MS" pitchFamily="34" charset="0"/>
                 <a:ea typeface="Trebuchet MS" pitchFamily="34" charset="-122"/>
                 <a:cs typeface="Trebuchet MS" pitchFamily="34" charset="-120"/>
               </a:rPr>
-              <a:t>per-</a:t>
-            </a:r>
-            <a:endParaRPr lang="en-US" sz="1300" dirty="0"/>
+              <a:t>spiral</a:t>
+            </a:r>
+            <a:endParaRPr lang="en-US" sz="1200" dirty="0"/>
           </a:p>
         </p:txBody>
       </p:sp>
@@ -34837,649 +36709,59 @@
         </p:nvSpPr>
         <p:spPr>
           <a:xfrm>
-            <a:off x="2971800" y="3246120"/>
-            <a:ext cx="2834640" cy="402336"/>
-          </a:xfrm>
-          <a:prstGeom prst="rect">
-            <a:avLst/>
-          </a:prstGeom>
-          <a:solidFill>
-            <a:srgbClr val="F8FAFC"/>
-          </a:solidFill>
-          <a:ln w="12700">
-            <a:solidFill>
-              <a:srgbClr val="E2E8F0"/>
-            </a:solidFill>
-            <a:prstDash val="solid"/>
-          </a:ln>
-        </p:spPr>
-      </p:sp>
-      <p:sp>
-        <p:nvSpPr>
-          <p:cNvPr id="41" name="Shape 39"/>
-          <p:cNvSpPr/>
-          <p:nvPr/>
-        </p:nvSpPr>
-        <p:spPr>
-          <a:xfrm>
-            <a:off x="5943600" y="3246120"/>
-            <a:ext cx="2834640" cy="402336"/>
-          </a:xfrm>
-          <a:prstGeom prst="rect">
-            <a:avLst/>
-          </a:prstGeom>
-          <a:solidFill>
-            <a:srgbClr val="FCE7F3"/>
-          </a:solidFill>
-          <a:ln w="12700">
-            <a:solidFill>
-              <a:srgbClr val="E2E8F0"/>
-            </a:solidFill>
-            <a:prstDash val="solid"/>
-          </a:ln>
-        </p:spPr>
-      </p:sp>
-      <p:sp>
-        <p:nvSpPr>
-          <p:cNvPr id="42" name="Text 40"/>
-          <p:cNvSpPr/>
-          <p:nvPr/>
-        </p:nvSpPr>
-        <p:spPr>
-          <a:xfrm>
-            <a:off x="5943600" y="3246120"/>
-            <a:ext cx="2834640" cy="402336"/>
-          </a:xfrm>
-          <a:prstGeom prst="rect">
-            <a:avLst/>
-          </a:prstGeom>
-          <a:noFill/>
-          <a:ln/>
-        </p:spPr>
-        <p:txBody>
-          <a:bodyPr wrap="square" lIns="0" tIns="0" rIns="0" bIns="0" rtlCol="0" anchor="ctr"/>
-          <a:lstStyle/>
-          <a:p>
-            <a:pPr algn="ctr" indent="0" marL="0">
-              <a:buNone/>
-            </a:pPr>
-            <a:r>
-              <a:rPr lang="en-US" sz="1300" b="1" dirty="0">
-                <a:solidFill>
-                  <a:srgbClr val="9D174D"/>
+            <a:off x="2542032" y="4023360"/>
+            <a:ext cx="2011680" cy="402336"/>
+          </a:xfrm>
+          <a:prstGeom prst="rect">
+            <a:avLst>
+              <a:gd name="adj" fmla="val 13636"/>
+            </a:avLst>
+          </a:prstGeom>
+          <a:solidFill>
+            <a:srgbClr val="EEF2FF"/>
+          </a:solidFill>
+          <a:ln w="12700">
+            <a:solidFill>
+              <a:srgbClr val="6366F1"/>
+            </a:solidFill>
+            <a:prstDash val="solid"/>
+          </a:ln>
+        </p:spPr>
+      </p:sp>
+      <p:sp>
+        <p:nvSpPr>
+          <p:cNvPr id="41" name="Text 39"/>
+          <p:cNvSpPr/>
+          <p:nvPr/>
+        </p:nvSpPr>
+        <p:spPr>
+          <a:xfrm>
+            <a:off x="2542032" y="4023360"/>
+            <a:ext cx="2011680" cy="402336"/>
+          </a:xfrm>
+          <a:prstGeom prst="rect">
+            <a:avLst/>
+          </a:prstGeom>
+          <a:noFill/>
+          <a:ln/>
+        </p:spPr>
+        <p:txBody>
+          <a:bodyPr wrap="square" lIns="0" tIns="0" rIns="0" bIns="0" rtlCol="0" anchor="ctr"/>
+          <a:lstStyle/>
+          <a:p>
+            <a:pPr algn="ctr" indent="0" marL="0">
+              <a:buNone/>
+            </a:pPr>
+            <a:r>
+              <a:rPr lang="en-US" sz="1200" b="1" dirty="0">
+                <a:solidFill>
+                  <a:srgbClr val="4338CA"/>
                 </a:solidFill>
                 <a:latin typeface="Trebuchet MS" pitchFamily="34" charset="0"/>
                 <a:ea typeface="Trebuchet MS" pitchFamily="34" charset="-122"/>
                 <a:cs typeface="Trebuchet MS" pitchFamily="34" charset="-120"/>
               </a:rPr>
-              <a:t>-acy</a:t>
-            </a:r>
-            <a:endParaRPr lang="en-US" sz="1300" dirty="0"/>
-          </a:p>
-        </p:txBody>
-      </p:sp>
-      <p:sp>
-        <p:nvSpPr>
-          <p:cNvPr id="43" name="Text 41"/>
-          <p:cNvSpPr/>
-          <p:nvPr/>
-        </p:nvSpPr>
-        <p:spPr>
-          <a:xfrm>
-            <a:off x="365760" y="3611880"/>
-            <a:ext cx="1828800" cy="347472"/>
-          </a:xfrm>
-          <a:prstGeom prst="rect">
-            <a:avLst/>
-          </a:prstGeom>
-          <a:noFill/>
-          <a:ln/>
-        </p:spPr>
-        <p:txBody>
-          <a:bodyPr wrap="square" lIns="0" tIns="0" rIns="0" bIns="0" rtlCol="0" anchor="ctr"/>
-          <a:lstStyle/>
-          <a:p>
-            <a:pPr algn="l" indent="0" marL="0">
-              <a:buNone/>
-            </a:pPr>
-            <a:r>
-              <a:rPr lang="en-US" sz="1200" b="1" dirty="0">
-                <a:solidFill>
-                  <a:srgbClr val="0F172A"/>
-                </a:solidFill>
-                <a:latin typeface="Trebuchet MS" pitchFamily="34" charset="0"/>
-                <a:ea typeface="Trebuchet MS" pitchFamily="34" charset="-122"/>
-                <a:cs typeface="Trebuchet MS" pitchFamily="34" charset="-120"/>
-              </a:rPr>
-              <a:t>Sample words:</a:t>
-            </a:r>
-            <a:endParaRPr lang="en-US" sz="1200" dirty="0"/>
-          </a:p>
-        </p:txBody>
-      </p:sp>
-      <p:sp>
-        <p:nvSpPr>
-          <p:cNvPr id="44" name="Shape 42"/>
-          <p:cNvSpPr/>
-          <p:nvPr/>
-        </p:nvSpPr>
-        <p:spPr>
-          <a:xfrm>
-            <a:off x="365760" y="4023360"/>
-            <a:ext cx="2011680" cy="402336"/>
-          </a:xfrm>
-          <a:prstGeom prst="rect">
-            <a:avLst>
-              <a:gd name="adj" fmla="val 13636"/>
-            </a:avLst>
-          </a:prstGeom>
-          <a:solidFill>
-            <a:srgbClr val="EEF2FF"/>
-          </a:solidFill>
-          <a:ln w="12700">
-            <a:solidFill>
-              <a:srgbClr val="6366F1"/>
-            </a:solidFill>
-            <a:prstDash val="solid"/>
-          </a:ln>
-        </p:spPr>
-      </p:sp>
-      <p:sp>
-        <p:nvSpPr>
-          <p:cNvPr id="45" name="Text 43"/>
-          <p:cNvSpPr/>
-          <p:nvPr/>
-        </p:nvSpPr>
-        <p:spPr>
-          <a:xfrm>
-            <a:off x="365760" y="4023360"/>
-            <a:ext cx="2011680" cy="402336"/>
-          </a:xfrm>
-          <a:prstGeom prst="rect">
-            <a:avLst/>
-          </a:prstGeom>
-          <a:noFill/>
-          <a:ln/>
-        </p:spPr>
-        <p:txBody>
-          <a:bodyPr wrap="square" lIns="0" tIns="0" rIns="0" bIns="0" rtlCol="0" anchor="ctr"/>
-          <a:lstStyle/>
-          <a:p>
-            <a:pPr algn="ctr" indent="0" marL="0">
-              <a:buNone/>
-            </a:pPr>
-            <a:r>
-              <a:rPr lang="en-US" sz="1200" b="1" dirty="0">
-                <a:solidFill>
-                  <a:srgbClr val="4338CA"/>
-                </a:solidFill>
-                <a:latin typeface="Trebuchet MS" pitchFamily="34" charset="0"/>
-                <a:ea typeface="Trebuchet MS" pitchFamily="34" charset="-122"/>
-                <a:cs typeface="Trebuchet MS" pitchFamily="34" charset="-120"/>
-              </a:rPr>
-              <a:t>inspire</a:t>
-            </a:r>
-            <a:endParaRPr lang="en-US" sz="1200" dirty="0"/>
-          </a:p>
-        </p:txBody>
-      </p:sp>
-      <p:sp>
-        <p:nvSpPr>
-          <p:cNvPr id="46" name="Shape 44"/>
-          <p:cNvSpPr/>
-          <p:nvPr/>
-        </p:nvSpPr>
-        <p:spPr>
-          <a:xfrm>
-            <a:off x="2542032" y="4023360"/>
-            <a:ext cx="2011680" cy="402336"/>
-          </a:xfrm>
-          <a:prstGeom prst="rect">
-            <a:avLst>
-              <a:gd name="adj" fmla="val 13636"/>
-            </a:avLst>
-          </a:prstGeom>
-          <a:solidFill>
-            <a:srgbClr val="EEF2FF"/>
-          </a:solidFill>
-          <a:ln w="12700">
-            <a:solidFill>
-              <a:srgbClr val="6366F1"/>
-            </a:solidFill>
-            <a:prstDash val="solid"/>
-          </a:ln>
-        </p:spPr>
-      </p:sp>
-      <p:sp>
-        <p:nvSpPr>
-          <p:cNvPr id="47" name="Text 45"/>
-          <p:cNvSpPr/>
-          <p:nvPr/>
-        </p:nvSpPr>
-        <p:spPr>
-          <a:xfrm>
-            <a:off x="2542032" y="4023360"/>
-            <a:ext cx="2011680" cy="402336"/>
-          </a:xfrm>
-          <a:prstGeom prst="rect">
-            <a:avLst/>
-          </a:prstGeom>
-          <a:noFill/>
-          <a:ln/>
-        </p:spPr>
-        <p:txBody>
-          <a:bodyPr wrap="square" lIns="0" tIns="0" rIns="0" bIns="0" rtlCol="0" anchor="ctr"/>
-          <a:lstStyle/>
-          <a:p>
-            <a:pPr algn="ctr" indent="0" marL="0">
-              <a:buNone/>
-            </a:pPr>
-            <a:r>
-              <a:rPr lang="en-US" sz="1200" b="1" dirty="0">
-                <a:solidFill>
-                  <a:srgbClr val="4338CA"/>
-                </a:solidFill>
-                <a:latin typeface="Trebuchet MS" pitchFamily="34" charset="0"/>
-                <a:ea typeface="Trebuchet MS" pitchFamily="34" charset="-122"/>
-                <a:cs typeface="Trebuchet MS" pitchFamily="34" charset="-120"/>
-              </a:rPr>
-              <a:t>expire</a:t>
-            </a:r>
-            <a:endParaRPr lang="en-US" sz="1200" dirty="0"/>
-          </a:p>
-        </p:txBody>
-      </p:sp>
-      <p:sp>
-        <p:nvSpPr>
-          <p:cNvPr id="48" name="Shape 46"/>
-          <p:cNvSpPr/>
-          <p:nvPr/>
-        </p:nvSpPr>
-        <p:spPr>
-          <a:xfrm>
-            <a:off x="4718304" y="4023360"/>
-            <a:ext cx="2011680" cy="402336"/>
-          </a:xfrm>
-          <a:prstGeom prst="rect">
-            <a:avLst>
-              <a:gd name="adj" fmla="val 13636"/>
-            </a:avLst>
-          </a:prstGeom>
-          <a:solidFill>
-            <a:srgbClr val="EEF2FF"/>
-          </a:solidFill>
-          <a:ln w="12700">
-            <a:solidFill>
-              <a:srgbClr val="6366F1"/>
-            </a:solidFill>
-            <a:prstDash val="solid"/>
-          </a:ln>
-        </p:spPr>
-      </p:sp>
-      <p:sp>
-        <p:nvSpPr>
-          <p:cNvPr id="49" name="Text 47"/>
-          <p:cNvSpPr/>
-          <p:nvPr/>
-        </p:nvSpPr>
-        <p:spPr>
-          <a:xfrm>
-            <a:off x="4718304" y="4023360"/>
-            <a:ext cx="2011680" cy="402336"/>
-          </a:xfrm>
-          <a:prstGeom prst="rect">
-            <a:avLst/>
-          </a:prstGeom>
-          <a:noFill/>
-          <a:ln/>
-        </p:spPr>
-        <p:txBody>
-          <a:bodyPr wrap="square" lIns="0" tIns="0" rIns="0" bIns="0" rtlCol="0" anchor="ctr"/>
-          <a:lstStyle/>
-          <a:p>
-            <a:pPr algn="ctr" indent="0" marL="0">
-              <a:buNone/>
-            </a:pPr>
-            <a:r>
-              <a:rPr lang="en-US" sz="1200" b="1" dirty="0">
-                <a:solidFill>
-                  <a:srgbClr val="4338CA"/>
-                </a:solidFill>
-                <a:latin typeface="Trebuchet MS" pitchFamily="34" charset="0"/>
-                <a:ea typeface="Trebuchet MS" pitchFamily="34" charset="-122"/>
-                <a:cs typeface="Trebuchet MS" pitchFamily="34" charset="-120"/>
-              </a:rPr>
-              <a:t>conspire</a:t>
-            </a:r>
-            <a:endParaRPr lang="en-US" sz="1200" dirty="0"/>
-          </a:p>
-        </p:txBody>
-      </p:sp>
-      <p:sp>
-        <p:nvSpPr>
-          <p:cNvPr id="50" name="Shape 48"/>
-          <p:cNvSpPr/>
-          <p:nvPr/>
-        </p:nvSpPr>
-        <p:spPr>
-          <a:xfrm>
-            <a:off x="6894576" y="4023360"/>
-            <a:ext cx="2011680" cy="402336"/>
-          </a:xfrm>
-          <a:prstGeom prst="rect">
-            <a:avLst>
-              <a:gd name="adj" fmla="val 13636"/>
-            </a:avLst>
-          </a:prstGeom>
-          <a:solidFill>
-            <a:srgbClr val="EEF2FF"/>
-          </a:solidFill>
-          <a:ln w="12700">
-            <a:solidFill>
-              <a:srgbClr val="6366F1"/>
-            </a:solidFill>
-            <a:prstDash val="solid"/>
-          </a:ln>
-        </p:spPr>
-      </p:sp>
-      <p:sp>
-        <p:nvSpPr>
-          <p:cNvPr id="51" name="Text 49"/>
-          <p:cNvSpPr/>
-          <p:nvPr/>
-        </p:nvSpPr>
-        <p:spPr>
-          <a:xfrm>
-            <a:off x="6894576" y="4023360"/>
-            <a:ext cx="2011680" cy="402336"/>
-          </a:xfrm>
-          <a:prstGeom prst="rect">
-            <a:avLst/>
-          </a:prstGeom>
-          <a:noFill/>
-          <a:ln/>
-        </p:spPr>
-        <p:txBody>
-          <a:bodyPr wrap="square" lIns="0" tIns="0" rIns="0" bIns="0" rtlCol="0" anchor="ctr"/>
-          <a:lstStyle/>
-          <a:p>
-            <a:pPr algn="ctr" indent="0" marL="0">
-              <a:buNone/>
-            </a:pPr>
-            <a:r>
-              <a:rPr lang="en-US" sz="1200" b="1" dirty="0">
-                <a:solidFill>
-                  <a:srgbClr val="4338CA"/>
-                </a:solidFill>
-                <a:latin typeface="Trebuchet MS" pitchFamily="34" charset="0"/>
-                <a:ea typeface="Trebuchet MS" pitchFamily="34" charset="-122"/>
-                <a:cs typeface="Trebuchet MS" pitchFamily="34" charset="-120"/>
-              </a:rPr>
-              <a:t>respire</a:t>
-            </a:r>
-            <a:endParaRPr lang="en-US" sz="1200" dirty="0"/>
-          </a:p>
-        </p:txBody>
-      </p:sp>
-      <p:sp>
-        <p:nvSpPr>
-          <p:cNvPr id="52" name="Shape 50"/>
-          <p:cNvSpPr/>
-          <p:nvPr/>
-        </p:nvSpPr>
-        <p:spPr>
-          <a:xfrm>
-            <a:off x="365760" y="4498848"/>
-            <a:ext cx="2011680" cy="402336"/>
-          </a:xfrm>
-          <a:prstGeom prst="rect">
-            <a:avLst>
-              <a:gd name="adj" fmla="val 13636"/>
-            </a:avLst>
-          </a:prstGeom>
-          <a:solidFill>
-            <a:srgbClr val="EEF2FF"/>
-          </a:solidFill>
-          <a:ln w="12700">
-            <a:solidFill>
-              <a:srgbClr val="6366F1"/>
-            </a:solidFill>
-            <a:prstDash val="solid"/>
-          </a:ln>
-        </p:spPr>
-      </p:sp>
-      <p:sp>
-        <p:nvSpPr>
-          <p:cNvPr id="53" name="Text 51"/>
-          <p:cNvSpPr/>
-          <p:nvPr/>
-        </p:nvSpPr>
-        <p:spPr>
-          <a:xfrm>
-            <a:off x="365760" y="4498848"/>
-            <a:ext cx="2011680" cy="402336"/>
-          </a:xfrm>
-          <a:prstGeom prst="rect">
-            <a:avLst/>
-          </a:prstGeom>
-          <a:noFill/>
-          <a:ln/>
-        </p:spPr>
-        <p:txBody>
-          <a:bodyPr wrap="square" lIns="0" tIns="0" rIns="0" bIns="0" rtlCol="0" anchor="ctr"/>
-          <a:lstStyle/>
-          <a:p>
-            <a:pPr algn="ctr" indent="0" marL="0">
-              <a:buNone/>
-            </a:pPr>
-            <a:r>
-              <a:rPr lang="en-US" sz="1200" b="1" dirty="0">
-                <a:solidFill>
-                  <a:srgbClr val="4338CA"/>
-                </a:solidFill>
-                <a:latin typeface="Trebuchet MS" pitchFamily="34" charset="0"/>
-                <a:ea typeface="Trebuchet MS" pitchFamily="34" charset="-122"/>
-                <a:cs typeface="Trebuchet MS" pitchFamily="34" charset="-120"/>
-              </a:rPr>
-              <a:t>perspire</a:t>
-            </a:r>
-            <a:endParaRPr lang="en-US" sz="1200" dirty="0"/>
-          </a:p>
-        </p:txBody>
-      </p:sp>
-      <p:sp>
-        <p:nvSpPr>
-          <p:cNvPr id="54" name="Shape 52"/>
-          <p:cNvSpPr/>
-          <p:nvPr/>
-        </p:nvSpPr>
-        <p:spPr>
-          <a:xfrm>
-            <a:off x="2542032" y="4498848"/>
-            <a:ext cx="2011680" cy="402336"/>
-          </a:xfrm>
-          <a:prstGeom prst="rect">
-            <a:avLst>
-              <a:gd name="adj" fmla="val 13636"/>
-            </a:avLst>
-          </a:prstGeom>
-          <a:solidFill>
-            <a:srgbClr val="EEF2FF"/>
-          </a:solidFill>
-          <a:ln w="12700">
-            <a:solidFill>
-              <a:srgbClr val="6366F1"/>
-            </a:solidFill>
-            <a:prstDash val="solid"/>
-          </a:ln>
-        </p:spPr>
-      </p:sp>
-      <p:sp>
-        <p:nvSpPr>
-          <p:cNvPr id="55" name="Text 53"/>
-          <p:cNvSpPr/>
-          <p:nvPr/>
-        </p:nvSpPr>
-        <p:spPr>
-          <a:xfrm>
-            <a:off x="2542032" y="4498848"/>
-            <a:ext cx="2011680" cy="402336"/>
-          </a:xfrm>
-          <a:prstGeom prst="rect">
-            <a:avLst/>
-          </a:prstGeom>
-          <a:noFill/>
-          <a:ln/>
-        </p:spPr>
-        <p:txBody>
-          <a:bodyPr wrap="square" lIns="0" tIns="0" rIns="0" bIns="0" rtlCol="0" anchor="ctr"/>
-          <a:lstStyle/>
-          <a:p>
-            <a:pPr algn="ctr" indent="0" marL="0">
-              <a:buNone/>
-            </a:pPr>
-            <a:r>
-              <a:rPr lang="en-US" sz="1200" b="1" dirty="0">
-                <a:solidFill>
-                  <a:srgbClr val="4338CA"/>
-                </a:solidFill>
-                <a:latin typeface="Trebuchet MS" pitchFamily="34" charset="0"/>
-                <a:ea typeface="Trebuchet MS" pitchFamily="34" charset="-122"/>
-                <a:cs typeface="Trebuchet MS" pitchFamily="34" charset="-120"/>
-              </a:rPr>
-              <a:t>aspire</a:t>
-            </a:r>
-            <a:endParaRPr lang="en-US" sz="1200" dirty="0"/>
-          </a:p>
-        </p:txBody>
-      </p:sp>
-      <p:sp>
-        <p:nvSpPr>
-          <p:cNvPr id="56" name="Shape 54"/>
-          <p:cNvSpPr/>
-          <p:nvPr/>
-        </p:nvSpPr>
-        <p:spPr>
-          <a:xfrm>
-            <a:off x="4718304" y="4498848"/>
-            <a:ext cx="2011680" cy="402336"/>
-          </a:xfrm>
-          <a:prstGeom prst="rect">
-            <a:avLst>
-              <a:gd name="adj" fmla="val 13636"/>
-            </a:avLst>
-          </a:prstGeom>
-          <a:solidFill>
-            <a:srgbClr val="EEF2FF"/>
-          </a:solidFill>
-          <a:ln w="12700">
-            <a:solidFill>
-              <a:srgbClr val="6366F1"/>
-            </a:solidFill>
-            <a:prstDash val="solid"/>
-          </a:ln>
-        </p:spPr>
-      </p:sp>
-      <p:sp>
-        <p:nvSpPr>
-          <p:cNvPr id="57" name="Text 55"/>
-          <p:cNvSpPr/>
-          <p:nvPr/>
-        </p:nvSpPr>
-        <p:spPr>
-          <a:xfrm>
-            <a:off x="4718304" y="4498848"/>
-            <a:ext cx="2011680" cy="402336"/>
-          </a:xfrm>
-          <a:prstGeom prst="rect">
-            <a:avLst/>
-          </a:prstGeom>
-          <a:noFill/>
-          <a:ln/>
-        </p:spPr>
-        <p:txBody>
-          <a:bodyPr wrap="square" lIns="0" tIns="0" rIns="0" bIns="0" rtlCol="0" anchor="ctr"/>
-          <a:lstStyle/>
-          <a:p>
-            <a:pPr algn="ctr" indent="0" marL="0">
-              <a:buNone/>
-            </a:pPr>
-            <a:r>
-              <a:rPr lang="en-US" sz="1200" b="1" dirty="0">
-                <a:solidFill>
-                  <a:srgbClr val="4338CA"/>
-                </a:solidFill>
-                <a:latin typeface="Trebuchet MS" pitchFamily="34" charset="0"/>
-                <a:ea typeface="Trebuchet MS" pitchFamily="34" charset="-122"/>
-                <a:cs typeface="Trebuchet MS" pitchFamily="34" charset="-120"/>
-              </a:rPr>
-              <a:t>inspiration</a:t>
-            </a:r>
-            <a:endParaRPr lang="en-US" sz="1200" dirty="0"/>
-          </a:p>
-        </p:txBody>
-      </p:sp>
-      <p:sp>
-        <p:nvSpPr>
-          <p:cNvPr id="58" name="Shape 56"/>
-          <p:cNvSpPr/>
-          <p:nvPr/>
-        </p:nvSpPr>
-        <p:spPr>
-          <a:xfrm>
-            <a:off x="6894576" y="4498848"/>
-            <a:ext cx="2011680" cy="402336"/>
-          </a:xfrm>
-          <a:prstGeom prst="rect">
-            <a:avLst>
-              <a:gd name="adj" fmla="val 13636"/>
-            </a:avLst>
-          </a:prstGeom>
-          <a:solidFill>
-            <a:srgbClr val="EEF2FF"/>
-          </a:solidFill>
-          <a:ln w="12700">
-            <a:solidFill>
-              <a:srgbClr val="6366F1"/>
-            </a:solidFill>
-            <a:prstDash val="solid"/>
-          </a:ln>
-        </p:spPr>
-      </p:sp>
-      <p:sp>
-        <p:nvSpPr>
-          <p:cNvPr id="59" name="Text 57"/>
-          <p:cNvSpPr/>
-          <p:nvPr/>
-        </p:nvSpPr>
-        <p:spPr>
-          <a:xfrm>
-            <a:off x="6894576" y="4498848"/>
-            <a:ext cx="2011680" cy="402336"/>
-          </a:xfrm>
-          <a:prstGeom prst="rect">
-            <a:avLst/>
-          </a:prstGeom>
-          <a:noFill/>
-          <a:ln/>
-        </p:spPr>
-        <p:txBody>
-          <a:bodyPr wrap="square" lIns="0" tIns="0" rIns="0" bIns="0" rtlCol="0" anchor="ctr"/>
-          <a:lstStyle/>
-          <a:p>
-            <a:pPr algn="ctr" indent="0" marL="0">
-              <a:buNone/>
-            </a:pPr>
-            <a:r>
-              <a:rPr lang="en-US" sz="1200" b="1" dirty="0">
-                <a:solidFill>
-                  <a:srgbClr val="4338CA"/>
-                </a:solidFill>
-                <a:latin typeface="Trebuchet MS" pitchFamily="34" charset="0"/>
-                <a:ea typeface="Trebuchet MS" pitchFamily="34" charset="-122"/>
-                <a:cs typeface="Trebuchet MS" pitchFamily="34" charset="-120"/>
-              </a:rPr>
-              <a:t>expiration</a:t>
+              <a:t>spires</a:t>
             </a:r>
             <a:endParaRPr lang="en-US" sz="1200" dirty="0"/>
           </a:p>
@@ -35771,7 +37053,7 @@
                 <a:ea typeface="Calibri" pitchFamily="34" charset="-122"/>
                 <a:cs typeface="Calibri" pitchFamily="34" charset="-120"/>
               </a:rPr>
-              <a:t>Word Labs  •  wordlabs.app  •  Root: 'spire' = breathe, breath, spirit</a:t>
+              <a:t>Word Labs  •  wordlabs.app  •  Root: 'spire' = breathe; live</a:t>
             </a:r>
             <a:endParaRPr lang="en-US" sz="800" dirty="0"/>
           </a:p>
@@ -35935,7 +37217,7 @@
                 <a:ea typeface="Calibri" pitchFamily="34" charset="-122"/>
                 <a:cs typeface="Calibri" pitchFamily="34" charset="-120"/>
               </a:rPr>
-              <a:t>The core part of a word carrying its basic meaning. For example, 'spire' means 'breathe, breath, spirit'.</a:t>
+              <a:t>The core part of a word carrying its basic meaning. For example, 'spire' means 'breathe; live'.</a:t>
             </a:r>
             <a:endParaRPr lang="en-US" sz="1350" dirty="0"/>
           </a:p>
@@ -36555,7 +37837,7 @@
                 <a:ea typeface="Calibri" pitchFamily="34" charset="-122"/>
                 <a:cs typeface="Calibri" pitchFamily="34" charset="-120"/>
               </a:rPr>
-              <a:t>Word Labs  •  wordlabs.app  •  Root: 'spire' = breathe, breath, spirit</a:t>
+              <a:t>Word Labs  •  wordlabs.app  •  Root: 'spire' = breathe; live</a:t>
             </a:r>
             <a:endParaRPr lang="en-US" sz="800" dirty="0"/>
           </a:p>
@@ -36667,7 +37949,7 @@
                 <a:ea typeface="Calibri" pitchFamily="34" charset="-122"/>
                 <a:cs typeface="Calibri" pitchFamily="34" charset="-120"/>
               </a:rPr>
-              <a:t>1.  The root 'spire' only appears in words about buildings.</a:t>
+              <a:t>1.  'spiral' means 'a curved shape that winds round and round a central point'.</a:t>
             </a:r>
             <a:endParaRPr lang="en-US" sz="1300" dirty="0"/>
           </a:p>
@@ -36690,11 +37972,11 @@
             </a:avLst>
           </a:prstGeom>
           <a:solidFill>
-            <a:srgbClr val="FEE2E2"/>
-          </a:solidFill>
-          <a:ln w="12700">
-            <a:solidFill>
-              <a:srgbClr val="DC2626"/>
+            <a:srgbClr val="DCFCE7"/>
+          </a:solidFill>
+          <a:ln w="12700">
+            <a:solidFill>
+              <a:srgbClr val="16A34A"/>
             </a:solidFill>
             <a:prstDash val="solid"/>
           </a:ln>
@@ -36727,13 +38009,13 @@
             <a:r>
               <a:rPr lang="en-US" sz="1100" b="1" dirty="0">
                 <a:solidFill>
-                  <a:srgbClr val="DC2626"/>
+                  <a:srgbClr val="16A34A"/>
                 </a:solidFill>
                 <a:latin typeface="Trebuchet MS" pitchFamily="34" charset="0"/>
                 <a:ea typeface="Trebuchet MS" pitchFamily="34" charset="-122"/>
                 <a:cs typeface="Trebuchet MS" pitchFamily="34" charset="-120"/>
               </a:rPr>
-              <a:t>FALSE</a:t>
+              <a:t>TRUE</a:t>
             </a:r>
             <a:endParaRPr lang="en-US" sz="1100" dirty="0"/>
           </a:p>
@@ -36806,7 +38088,7 @@
                 <a:ea typeface="Calibri" pitchFamily="34" charset="-122"/>
                 <a:cs typeface="Calibri" pitchFamily="34" charset="-120"/>
               </a:rPr>
-              <a:t>2.  The prefix 'in' in 'inspire' means into or upon.</a:t>
+              <a:t>2.  'spires' means 'small round windows'.</a:t>
             </a:r>
             <a:endParaRPr lang="en-US" sz="1300" dirty="0"/>
           </a:p>
@@ -36829,11 +38111,11 @@
             </a:avLst>
           </a:prstGeom>
           <a:solidFill>
-            <a:srgbClr val="DCFCE7"/>
-          </a:solidFill>
-          <a:ln w="12700">
-            <a:solidFill>
-              <a:srgbClr val="16A34A"/>
+            <a:srgbClr val="FEE2E2"/>
+          </a:solidFill>
+          <a:ln w="12700">
+            <a:solidFill>
+              <a:srgbClr val="DC2626"/>
             </a:solidFill>
             <a:prstDash val="solid"/>
           </a:ln>
@@ -36866,13 +38148,13 @@
             <a:r>
               <a:rPr lang="en-US" sz="1100" b="1" dirty="0">
                 <a:solidFill>
-                  <a:srgbClr val="16A34A"/>
+                  <a:srgbClr val="DC2626"/>
                 </a:solidFill>
                 <a:latin typeface="Trebuchet MS" pitchFamily="34" charset="0"/>
                 <a:ea typeface="Trebuchet MS" pitchFamily="34" charset="-122"/>
                 <a:cs typeface="Trebuchet MS" pitchFamily="34" charset="-120"/>
               </a:rPr>
-              <a:t>TRUE</a:t>
+              <a:t>FALSE</a:t>
             </a:r>
             <a:endParaRPr lang="en-US" sz="1100" dirty="0"/>
           </a:p>
@@ -36945,7 +38227,7 @@
                 <a:ea typeface="Calibri" pitchFamily="34" charset="-122"/>
                 <a:cs typeface="Calibri" pitchFamily="34" charset="-120"/>
               </a:rPr>
-              <a:t>3.  The word 'expire' means to start something new and fresh.</a:t>
+              <a:t>3.  'spire' means 'breathe; live'.</a:t>
             </a:r>
             <a:endParaRPr lang="en-US" sz="1300" dirty="0"/>
           </a:p>
@@ -36968,11 +38250,11 @@
             </a:avLst>
           </a:prstGeom>
           <a:solidFill>
-            <a:srgbClr val="FEE2E2"/>
-          </a:solidFill>
-          <a:ln w="12700">
-            <a:solidFill>
-              <a:srgbClr val="DC2626"/>
+            <a:srgbClr val="DCFCE7"/>
+          </a:solidFill>
+          <a:ln w="12700">
+            <a:solidFill>
+              <a:srgbClr val="16A34A"/>
             </a:solidFill>
             <a:prstDash val="solid"/>
           </a:ln>
@@ -37005,13 +38287,13 @@
             <a:r>
               <a:rPr lang="en-US" sz="1100" b="1" dirty="0">
                 <a:solidFill>
-                  <a:srgbClr val="DC2626"/>
+                  <a:srgbClr val="16A34A"/>
                 </a:solidFill>
                 <a:latin typeface="Trebuchet MS" pitchFamily="34" charset="0"/>
                 <a:ea typeface="Trebuchet MS" pitchFamily="34" charset="-122"/>
                 <a:cs typeface="Trebuchet MS" pitchFamily="34" charset="-120"/>
               </a:rPr>
-              <a:t>FALSE</a:t>
+              <a:t>TRUE</a:t>
             </a:r>
             <a:endParaRPr lang="en-US" sz="1100" dirty="0"/>
           </a:p>
@@ -37084,7 +38366,7 @@
                 <a:ea typeface="Calibri" pitchFamily="34" charset="-122"/>
                 <a:cs typeface="Calibri" pitchFamily="34" charset="-120"/>
               </a:rPr>
-              <a:t>4.  When you perspire, you are sweating because your body is hot.</a:t>
+              <a:t>4.  'spires' means 'tall, pointed structures on top of buildings, usually churches'.</a:t>
             </a:r>
             <a:endParaRPr lang="en-US" sz="1300" dirty="0"/>
           </a:p>
@@ -37223,7 +38505,7 @@
                 <a:ea typeface="Calibri" pitchFamily="34" charset="-122"/>
                 <a:cs typeface="Calibri" pitchFamily="34" charset="-120"/>
               </a:rPr>
-              <a:t>5.  The root 'spire' comes from a Latin word meaning to breathe.</a:t>
+              <a:t>5.  'spiral' means 'a straight line between two points'.</a:t>
             </a:r>
             <a:endParaRPr lang="en-US" sz="1300" dirty="0"/>
           </a:p>
@@ -37246,11 +38528,11 @@
             </a:avLst>
           </a:prstGeom>
           <a:solidFill>
-            <a:srgbClr val="DCFCE7"/>
-          </a:solidFill>
-          <a:ln w="12700">
-            <a:solidFill>
-              <a:srgbClr val="16A34A"/>
+            <a:srgbClr val="FEE2E2"/>
+          </a:solidFill>
+          <a:ln w="12700">
+            <a:solidFill>
+              <a:srgbClr val="DC2626"/>
             </a:solidFill>
             <a:prstDash val="solid"/>
           </a:ln>
@@ -37283,13 +38565,13 @@
             <a:r>
               <a:rPr lang="en-US" sz="1100" b="1" dirty="0">
                 <a:solidFill>
-                  <a:srgbClr val="16A34A"/>
+                  <a:srgbClr val="DC2626"/>
                 </a:solidFill>
                 <a:latin typeface="Trebuchet MS" pitchFamily="34" charset="0"/>
                 <a:ea typeface="Trebuchet MS" pitchFamily="34" charset="-122"/>
                 <a:cs typeface="Trebuchet MS" pitchFamily="34" charset="-120"/>
               </a:rPr>
-              <a:t>TRUE</a:t>
+              <a:t>FALSE</a:t>
             </a:r>
             <a:endParaRPr lang="en-US" sz="1100" dirty="0"/>
           </a:p>
@@ -37581,7 +38863,7 @@
                 <a:ea typeface="Calibri" pitchFamily="34" charset="-122"/>
                 <a:cs typeface="Calibri" pitchFamily="34" charset="-120"/>
               </a:rPr>
-              <a:t>Word Labs  •  wordlabs.app  •  Root: 'spire' = breathe, breath, spirit</a:t>
+              <a:t>Word Labs  •  wordlabs.app  •  Root: 'spire' = breathe; live</a:t>
             </a:r>
             <a:endParaRPr lang="en-US" sz="800" dirty="0"/>
           </a:p>
@@ -37718,7 +39000,7 @@
                 <a:ea typeface="Trebuchet MS" pitchFamily="34" charset="-122"/>
                 <a:cs typeface="Trebuchet MS" pitchFamily="34" charset="-120"/>
               </a:rPr>
-              <a:t>breathe, breath, spirit</a:t>
+              <a:t>breathe; live</a:t>
             </a:r>
             <a:endParaRPr lang="en-US" sz="2000" dirty="0"/>
           </a:p>
@@ -37757,7 +39039,7 @@
                 <a:ea typeface="Calibri" pitchFamily="34" charset="-122"/>
                 <a:cs typeface="Calibri" pitchFamily="34" charset="-120"/>
               </a:rPr>
-              <a:t>Origin: Latin: spirare</a:t>
+              <a:t>Origin: Latin root</a:t>
             </a:r>
             <a:endParaRPr lang="en-US" sz="1100" dirty="0"/>
           </a:p>
@@ -37862,7 +39144,7 @@
                 <a:ea typeface="Trebuchet MS" pitchFamily="34" charset="-122"/>
                 <a:cs typeface="Trebuchet MS" pitchFamily="34" charset="-120"/>
               </a:rPr>
-              <a:t>inspire</a:t>
+              <a:t>spiral</a:t>
             </a:r>
             <a:endParaRPr lang="en-US" sz="1300" dirty="0"/>
           </a:p>
@@ -37928,337 +39210,7 @@
                 <a:ea typeface="Trebuchet MS" pitchFamily="34" charset="-122"/>
                 <a:cs typeface="Trebuchet MS" pitchFamily="34" charset="-120"/>
               </a:rPr>
-              <a:t>expire</a:t>
-            </a:r>
-            <a:endParaRPr lang="en-US" sz="1300" dirty="0"/>
-          </a:p>
-        </p:txBody>
-      </p:sp>
-      <p:sp>
-        <p:nvSpPr>
-          <p:cNvPr id="20" name="Shape 18"/>
-          <p:cNvSpPr/>
-          <p:nvPr/>
-        </p:nvSpPr>
-        <p:spPr>
-          <a:xfrm>
-            <a:off x="4663440" y="2743200"/>
-            <a:ext cx="2011680" cy="502920"/>
-          </a:xfrm>
-          <a:prstGeom prst="rect">
-            <a:avLst>
-              <a:gd name="adj" fmla="val 14545"/>
-            </a:avLst>
-          </a:prstGeom>
-          <a:solidFill>
-            <a:srgbClr val="EEF2FF"/>
-          </a:solidFill>
-          <a:ln w="12700">
-            <a:solidFill>
-              <a:srgbClr val="6366F1"/>
-            </a:solidFill>
-            <a:prstDash val="solid"/>
-          </a:ln>
-        </p:spPr>
-      </p:sp>
-      <p:sp>
-        <p:nvSpPr>
-          <p:cNvPr id="21" name="Text 19"/>
-          <p:cNvSpPr/>
-          <p:nvPr/>
-        </p:nvSpPr>
-        <p:spPr>
-          <a:xfrm>
-            <a:off x="4663440" y="2743200"/>
-            <a:ext cx="2011680" cy="502920"/>
-          </a:xfrm>
-          <a:prstGeom prst="rect">
-            <a:avLst/>
-          </a:prstGeom>
-          <a:noFill/>
-          <a:ln/>
-        </p:spPr>
-        <p:txBody>
-          <a:bodyPr wrap="square" lIns="0" tIns="0" rIns="0" bIns="0" rtlCol="0" anchor="ctr"/>
-          <a:lstStyle/>
-          <a:p>
-            <a:pPr algn="ctr" indent="0" marL="0">
-              <a:buNone/>
-            </a:pPr>
-            <a:r>
-              <a:rPr lang="en-US" sz="1300" b="1" dirty="0">
-                <a:solidFill>
-                  <a:srgbClr val="4338CA"/>
-                </a:solidFill>
-                <a:latin typeface="Trebuchet MS" pitchFamily="34" charset="0"/>
-                <a:ea typeface="Trebuchet MS" pitchFamily="34" charset="-122"/>
-                <a:cs typeface="Trebuchet MS" pitchFamily="34" charset="-120"/>
-              </a:rPr>
-              <a:t>conspire</a:t>
-            </a:r>
-            <a:endParaRPr lang="en-US" sz="1300" dirty="0"/>
-          </a:p>
-        </p:txBody>
-      </p:sp>
-      <p:sp>
-        <p:nvSpPr>
-          <p:cNvPr id="22" name="Shape 20"/>
-          <p:cNvSpPr/>
-          <p:nvPr/>
-        </p:nvSpPr>
-        <p:spPr>
-          <a:xfrm>
-            <a:off x="6812280" y="2743200"/>
-            <a:ext cx="2011680" cy="502920"/>
-          </a:xfrm>
-          <a:prstGeom prst="rect">
-            <a:avLst>
-              <a:gd name="adj" fmla="val 14545"/>
-            </a:avLst>
-          </a:prstGeom>
-          <a:solidFill>
-            <a:srgbClr val="EEF2FF"/>
-          </a:solidFill>
-          <a:ln w="12700">
-            <a:solidFill>
-              <a:srgbClr val="6366F1"/>
-            </a:solidFill>
-            <a:prstDash val="solid"/>
-          </a:ln>
-        </p:spPr>
-      </p:sp>
-      <p:sp>
-        <p:nvSpPr>
-          <p:cNvPr id="23" name="Text 21"/>
-          <p:cNvSpPr/>
-          <p:nvPr/>
-        </p:nvSpPr>
-        <p:spPr>
-          <a:xfrm>
-            <a:off x="6812280" y="2743200"/>
-            <a:ext cx="2011680" cy="502920"/>
-          </a:xfrm>
-          <a:prstGeom prst="rect">
-            <a:avLst/>
-          </a:prstGeom>
-          <a:noFill/>
-          <a:ln/>
-        </p:spPr>
-        <p:txBody>
-          <a:bodyPr wrap="square" lIns="0" tIns="0" rIns="0" bIns="0" rtlCol="0" anchor="ctr"/>
-          <a:lstStyle/>
-          <a:p>
-            <a:pPr algn="ctr" indent="0" marL="0">
-              <a:buNone/>
-            </a:pPr>
-            <a:r>
-              <a:rPr lang="en-US" sz="1300" b="1" dirty="0">
-                <a:solidFill>
-                  <a:srgbClr val="4338CA"/>
-                </a:solidFill>
-                <a:latin typeface="Trebuchet MS" pitchFamily="34" charset="0"/>
-                <a:ea typeface="Trebuchet MS" pitchFamily="34" charset="-122"/>
-                <a:cs typeface="Trebuchet MS" pitchFamily="34" charset="-120"/>
-              </a:rPr>
-              <a:t>respire</a:t>
-            </a:r>
-            <a:endParaRPr lang="en-US" sz="1300" dirty="0"/>
-          </a:p>
-        </p:txBody>
-      </p:sp>
-      <p:sp>
-        <p:nvSpPr>
-          <p:cNvPr id="24" name="Shape 22"/>
-          <p:cNvSpPr/>
-          <p:nvPr/>
-        </p:nvSpPr>
-        <p:spPr>
-          <a:xfrm>
-            <a:off x="365760" y="3401568"/>
-            <a:ext cx="2011680" cy="502920"/>
-          </a:xfrm>
-          <a:prstGeom prst="rect">
-            <a:avLst>
-              <a:gd name="adj" fmla="val 14545"/>
-            </a:avLst>
-          </a:prstGeom>
-          <a:solidFill>
-            <a:srgbClr val="EEF2FF"/>
-          </a:solidFill>
-          <a:ln w="12700">
-            <a:solidFill>
-              <a:srgbClr val="6366F1"/>
-            </a:solidFill>
-            <a:prstDash val="solid"/>
-          </a:ln>
-        </p:spPr>
-      </p:sp>
-      <p:sp>
-        <p:nvSpPr>
-          <p:cNvPr id="25" name="Text 23"/>
-          <p:cNvSpPr/>
-          <p:nvPr/>
-        </p:nvSpPr>
-        <p:spPr>
-          <a:xfrm>
-            <a:off x="365760" y="3401568"/>
-            <a:ext cx="2011680" cy="502920"/>
-          </a:xfrm>
-          <a:prstGeom prst="rect">
-            <a:avLst/>
-          </a:prstGeom>
-          <a:noFill/>
-          <a:ln/>
-        </p:spPr>
-        <p:txBody>
-          <a:bodyPr wrap="square" lIns="0" tIns="0" rIns="0" bIns="0" rtlCol="0" anchor="ctr"/>
-          <a:lstStyle/>
-          <a:p>
-            <a:pPr algn="ctr" indent="0" marL="0">
-              <a:buNone/>
-            </a:pPr>
-            <a:r>
-              <a:rPr lang="en-US" sz="1300" b="1" dirty="0">
-                <a:solidFill>
-                  <a:srgbClr val="4338CA"/>
-                </a:solidFill>
-                <a:latin typeface="Trebuchet MS" pitchFamily="34" charset="0"/>
-                <a:ea typeface="Trebuchet MS" pitchFamily="34" charset="-122"/>
-                <a:cs typeface="Trebuchet MS" pitchFamily="34" charset="-120"/>
-              </a:rPr>
-              <a:t>perspire</a:t>
-            </a:r>
-            <a:endParaRPr lang="en-US" sz="1300" dirty="0"/>
-          </a:p>
-        </p:txBody>
-      </p:sp>
-      <p:sp>
-        <p:nvSpPr>
-          <p:cNvPr id="26" name="Shape 24"/>
-          <p:cNvSpPr/>
-          <p:nvPr/>
-        </p:nvSpPr>
-        <p:spPr>
-          <a:xfrm>
-            <a:off x="2514600" y="3401568"/>
-            <a:ext cx="2011680" cy="502920"/>
-          </a:xfrm>
-          <a:prstGeom prst="rect">
-            <a:avLst>
-              <a:gd name="adj" fmla="val 14545"/>
-            </a:avLst>
-          </a:prstGeom>
-          <a:solidFill>
-            <a:srgbClr val="EEF2FF"/>
-          </a:solidFill>
-          <a:ln w="12700">
-            <a:solidFill>
-              <a:srgbClr val="6366F1"/>
-            </a:solidFill>
-            <a:prstDash val="solid"/>
-          </a:ln>
-        </p:spPr>
-      </p:sp>
-      <p:sp>
-        <p:nvSpPr>
-          <p:cNvPr id="27" name="Text 25"/>
-          <p:cNvSpPr/>
-          <p:nvPr/>
-        </p:nvSpPr>
-        <p:spPr>
-          <a:xfrm>
-            <a:off x="2514600" y="3401568"/>
-            <a:ext cx="2011680" cy="502920"/>
-          </a:xfrm>
-          <a:prstGeom prst="rect">
-            <a:avLst/>
-          </a:prstGeom>
-          <a:noFill/>
-          <a:ln/>
-        </p:spPr>
-        <p:txBody>
-          <a:bodyPr wrap="square" lIns="0" tIns="0" rIns="0" bIns="0" rtlCol="0" anchor="ctr"/>
-          <a:lstStyle/>
-          <a:p>
-            <a:pPr algn="ctr" indent="0" marL="0">
-              <a:buNone/>
-            </a:pPr>
-            <a:r>
-              <a:rPr lang="en-US" sz="1300" b="1" dirty="0">
-                <a:solidFill>
-                  <a:srgbClr val="4338CA"/>
-                </a:solidFill>
-                <a:latin typeface="Trebuchet MS" pitchFamily="34" charset="0"/>
-                <a:ea typeface="Trebuchet MS" pitchFamily="34" charset="-122"/>
-                <a:cs typeface="Trebuchet MS" pitchFamily="34" charset="-120"/>
-              </a:rPr>
-              <a:t>aspire</a:t>
-            </a:r>
-            <a:endParaRPr lang="en-US" sz="1300" dirty="0"/>
-          </a:p>
-        </p:txBody>
-      </p:sp>
-      <p:sp>
-        <p:nvSpPr>
-          <p:cNvPr id="28" name="Shape 26"/>
-          <p:cNvSpPr/>
-          <p:nvPr/>
-        </p:nvSpPr>
-        <p:spPr>
-          <a:xfrm>
-            <a:off x="4663440" y="3401568"/>
-            <a:ext cx="2011680" cy="502920"/>
-          </a:xfrm>
-          <a:prstGeom prst="rect">
-            <a:avLst>
-              <a:gd name="adj" fmla="val 14545"/>
-            </a:avLst>
-          </a:prstGeom>
-          <a:solidFill>
-            <a:srgbClr val="EEF2FF"/>
-          </a:solidFill>
-          <a:ln w="12700">
-            <a:solidFill>
-              <a:srgbClr val="6366F1"/>
-            </a:solidFill>
-            <a:prstDash val="solid"/>
-          </a:ln>
-        </p:spPr>
-      </p:sp>
-      <p:sp>
-        <p:nvSpPr>
-          <p:cNvPr id="29" name="Text 27"/>
-          <p:cNvSpPr/>
-          <p:nvPr/>
-        </p:nvSpPr>
-        <p:spPr>
-          <a:xfrm>
-            <a:off x="4663440" y="3401568"/>
-            <a:ext cx="2011680" cy="502920"/>
-          </a:xfrm>
-          <a:prstGeom prst="rect">
-            <a:avLst/>
-          </a:prstGeom>
-          <a:noFill/>
-          <a:ln/>
-        </p:spPr>
-        <p:txBody>
-          <a:bodyPr wrap="square" lIns="0" tIns="0" rIns="0" bIns="0" rtlCol="0" anchor="ctr"/>
-          <a:lstStyle/>
-          <a:p>
-            <a:pPr algn="ctr" indent="0" marL="0">
-              <a:buNone/>
-            </a:pPr>
-            <a:r>
-              <a:rPr lang="en-US" sz="1300" b="1" dirty="0">
-                <a:solidFill>
-                  <a:srgbClr val="4338CA"/>
-                </a:solidFill>
-                <a:latin typeface="Trebuchet MS" pitchFamily="34" charset="0"/>
-                <a:ea typeface="Trebuchet MS" pitchFamily="34" charset="-122"/>
-                <a:cs typeface="Trebuchet MS" pitchFamily="34" charset="-120"/>
-              </a:rPr>
-              <a:t>inspiration</a:t>
+              <a:t>spires</a:t>
             </a:r>
             <a:endParaRPr lang="en-US" sz="1300" dirty="0"/>
           </a:p>
@@ -38550,7 +39502,7 @@
                 <a:ea typeface="Calibri" pitchFamily="34" charset="-122"/>
                 <a:cs typeface="Calibri" pitchFamily="34" charset="-120"/>
               </a:rPr>
-              <a:t>Word Labs  •  wordlabs.app  •  Root: 'spire' = breathe, breath, spirit</a:t>
+              <a:t>Word Labs  •  wordlabs.app  •  Root: 'spire' = breathe; live</a:t>
             </a:r>
             <a:endParaRPr lang="en-US" sz="800" dirty="0"/>
           </a:p>
@@ -38851,7 +39803,7 @@
                 <a:ea typeface="Trebuchet MS" pitchFamily="34" charset="-122"/>
                 <a:cs typeface="Trebuchet MS" pitchFamily="34" charset="-120"/>
               </a:rPr>
-              <a:t>in-</a:t>
+              <a:t>a-</a:t>
             </a:r>
             <a:endParaRPr lang="en-US" sz="1300" dirty="0"/>
           </a:p>
@@ -39043,7 +39995,7 @@
                 <a:ea typeface="Trebuchet MS" pitchFamily="34" charset="-122"/>
                 <a:cs typeface="Trebuchet MS" pitchFamily="34" charset="-120"/>
               </a:rPr>
-              <a:t>ex-</a:t>
+              <a:t>con-</a:t>
             </a:r>
             <a:endParaRPr lang="en-US" sz="1300" dirty="0"/>
           </a:p>
@@ -39132,7 +40084,7 @@
                 <a:ea typeface="Trebuchet MS" pitchFamily="34" charset="-122"/>
                 <a:cs typeface="Trebuchet MS" pitchFamily="34" charset="-120"/>
               </a:rPr>
-              <a:t>-ing</a:t>
+              <a:t>-ate</a:t>
             </a:r>
             <a:endParaRPr lang="en-US" sz="1300" dirty="0"/>
           </a:p>
@@ -39196,7 +40148,7 @@
                 <a:ea typeface="Trebuchet MS" pitchFamily="34" charset="-122"/>
                 <a:cs typeface="Trebuchet MS" pitchFamily="34" charset="-120"/>
               </a:rPr>
-              <a:t>con-</a:t>
+              <a:t>re-</a:t>
             </a:r>
             <a:endParaRPr lang="en-US" sz="1300" dirty="0"/>
           </a:p>
@@ -39285,7 +40237,7 @@
                 <a:ea typeface="Trebuchet MS" pitchFamily="34" charset="-122"/>
                 <a:cs typeface="Trebuchet MS" pitchFamily="34" charset="-120"/>
               </a:rPr>
-              <a:t>-ed</a:t>
+              <a:t>-al</a:t>
             </a:r>
             <a:endParaRPr lang="en-US" sz="1300" dirty="0"/>
           </a:p>
@@ -39306,7 +40258,7 @@
             <a:avLst/>
           </a:prstGeom>
           <a:solidFill>
-            <a:srgbClr val="DDD6FE"/>
+            <a:srgbClr val="F1F5F9"/>
           </a:solidFill>
           <a:ln w="12700">
             <a:solidFill>
@@ -39318,18 +40270,68 @@
       </p:sp>
       <p:sp>
         <p:nvSpPr>
-          <p:cNvPr id="34" name="Text 32"/>
-          <p:cNvSpPr/>
-          <p:nvPr/>
-        </p:nvSpPr>
-        <p:spPr>
-          <a:xfrm>
-            <a:off x="640080" y="3127248"/>
+          <p:cNvPr id="34" name="Shape 32"/>
+          <p:cNvSpPr/>
+          <p:nvPr/>
+        </p:nvSpPr>
+        <p:spPr>
+          <a:xfrm>
+            <a:off x="3291840" y="3127248"/>
+            <a:ext cx="1645920" cy="420624"/>
+          </a:xfrm>
+          <a:prstGeom prst="rect">
+            <a:avLst/>
+          </a:prstGeom>
+          <a:solidFill>
+            <a:srgbClr val="F1F5F9"/>
+          </a:solidFill>
+          <a:ln w="12700">
+            <a:solidFill>
+              <a:srgbClr val="E5E7EB"/>
+            </a:solidFill>
+            <a:prstDash val="solid"/>
+          </a:ln>
+        </p:spPr>
+      </p:sp>
+      <p:sp>
+        <p:nvSpPr>
+          <p:cNvPr id="35" name="Shape 33"/>
+          <p:cNvSpPr/>
+          <p:nvPr/>
+        </p:nvSpPr>
+        <p:spPr>
+          <a:xfrm>
+            <a:off x="5943600" y="3127248"/>
             <a:ext cx="1463040" cy="420624"/>
           </a:xfrm>
           <a:prstGeom prst="rect">
             <a:avLst/>
           </a:prstGeom>
+          <a:solidFill>
+            <a:srgbClr val="FCE7F3"/>
+          </a:solidFill>
+          <a:ln w="12700">
+            <a:solidFill>
+              <a:srgbClr val="E5E7EB"/>
+            </a:solidFill>
+            <a:prstDash val="solid"/>
+          </a:ln>
+        </p:spPr>
+      </p:sp>
+      <p:sp>
+        <p:nvSpPr>
+          <p:cNvPr id="36" name="Text 34"/>
+          <p:cNvSpPr/>
+          <p:nvPr/>
+        </p:nvSpPr>
+        <p:spPr>
+          <a:xfrm>
+            <a:off x="5943600" y="3127248"/>
+            <a:ext cx="1463040" cy="420624"/>
+          </a:xfrm>
+          <a:prstGeom prst="rect">
+            <a:avLst/>
+          </a:prstGeom>
           <a:noFill/>
           <a:ln/>
         </p:spPr>
@@ -39343,13 +40345,13 @@
             <a:r>
               <a:rPr lang="en-US" sz="1300" b="1" dirty="0">
                 <a:solidFill>
-                  <a:srgbClr val="4C1D95"/>
+                  <a:srgbClr val="9D174D"/>
                 </a:solidFill>
                 <a:latin typeface="Trebuchet MS" pitchFamily="34" charset="0"/>
                 <a:ea typeface="Trebuchet MS" pitchFamily="34" charset="-122"/>
                 <a:cs typeface="Trebuchet MS" pitchFamily="34" charset="-120"/>
               </a:rPr>
-              <a:t>re-</a:t>
+              <a:t>-s</a:t>
             </a:r>
             <a:endParaRPr lang="en-US" sz="1300" dirty="0"/>
           </a:p>
@@ -39357,255 +40359,13 @@
       </p:sp>
       <p:sp>
         <p:nvSpPr>
-          <p:cNvPr id="35" name="Shape 33"/>
-          <p:cNvSpPr/>
-          <p:nvPr/>
-        </p:nvSpPr>
-        <p:spPr>
-          <a:xfrm>
-            <a:off x="3291840" y="3127248"/>
-            <a:ext cx="1645920" cy="420624"/>
-          </a:xfrm>
-          <a:prstGeom prst="rect">
-            <a:avLst/>
-          </a:prstGeom>
-          <a:solidFill>
-            <a:srgbClr val="F1F5F9"/>
-          </a:solidFill>
-          <a:ln w="12700">
-            <a:solidFill>
-              <a:srgbClr val="E5E7EB"/>
-            </a:solidFill>
-            <a:prstDash val="solid"/>
-          </a:ln>
-        </p:spPr>
-      </p:sp>
-      <p:sp>
-        <p:nvSpPr>
-          <p:cNvPr id="36" name="Shape 34"/>
-          <p:cNvSpPr/>
-          <p:nvPr/>
-        </p:nvSpPr>
-        <p:spPr>
-          <a:xfrm>
-            <a:off x="5943600" y="3127248"/>
-            <a:ext cx="1463040" cy="420624"/>
-          </a:xfrm>
-          <a:prstGeom prst="rect">
-            <a:avLst/>
-          </a:prstGeom>
-          <a:solidFill>
-            <a:srgbClr val="FCE7F3"/>
-          </a:solidFill>
-          <a:ln w="12700">
-            <a:solidFill>
-              <a:srgbClr val="E5E7EB"/>
-            </a:solidFill>
-            <a:prstDash val="solid"/>
-          </a:ln>
-        </p:spPr>
-      </p:sp>
-      <p:sp>
-        <p:nvSpPr>
           <p:cNvPr id="37" name="Text 35"/>
           <p:cNvSpPr/>
           <p:nvPr/>
         </p:nvSpPr>
         <p:spPr>
           <a:xfrm>
-            <a:off x="5943600" y="3127248"/>
-            <a:ext cx="1463040" cy="420624"/>
-          </a:xfrm>
-          <a:prstGeom prst="rect">
-            <a:avLst/>
-          </a:prstGeom>
-          <a:noFill/>
-          <a:ln/>
-        </p:spPr>
-        <p:txBody>
-          <a:bodyPr wrap="square" lIns="0" tIns="0" rIns="0" bIns="0" rtlCol="0" anchor="ctr"/>
-          <a:lstStyle/>
-          <a:p>
-            <a:pPr algn="ctr" indent="0" marL="0">
-              <a:buNone/>
-            </a:pPr>
-            <a:r>
-              <a:rPr lang="en-US" sz="1300" b="1" dirty="0">
-                <a:solidFill>
-                  <a:srgbClr val="9D174D"/>
-                </a:solidFill>
-                <a:latin typeface="Trebuchet MS" pitchFamily="34" charset="0"/>
-                <a:ea typeface="Trebuchet MS" pitchFamily="34" charset="-122"/>
-                <a:cs typeface="Trebuchet MS" pitchFamily="34" charset="-120"/>
-              </a:rPr>
-              <a:t>-ational</a:t>
-            </a:r>
-            <a:endParaRPr lang="en-US" sz="1300" dirty="0"/>
-          </a:p>
-        </p:txBody>
-      </p:sp>
-      <p:sp>
-        <p:nvSpPr>
-          <p:cNvPr id="38" name="Shape 36"/>
-          <p:cNvSpPr/>
-          <p:nvPr/>
-        </p:nvSpPr>
-        <p:spPr>
-          <a:xfrm>
-            <a:off x="640080" y="3584448"/>
-            <a:ext cx="1463040" cy="420624"/>
-          </a:xfrm>
-          <a:prstGeom prst="rect">
-            <a:avLst/>
-          </a:prstGeom>
-          <a:solidFill>
-            <a:srgbClr val="DDD6FE"/>
-          </a:solidFill>
-          <a:ln w="12700">
-            <a:solidFill>
-              <a:srgbClr val="E5E7EB"/>
-            </a:solidFill>
-            <a:prstDash val="solid"/>
-          </a:ln>
-        </p:spPr>
-      </p:sp>
-      <p:sp>
-        <p:nvSpPr>
-          <p:cNvPr id="39" name="Text 37"/>
-          <p:cNvSpPr/>
-          <p:nvPr/>
-        </p:nvSpPr>
-        <p:spPr>
-          <a:xfrm>
-            <a:off x="640080" y="3584448"/>
-            <a:ext cx="1463040" cy="420624"/>
-          </a:xfrm>
-          <a:prstGeom prst="rect">
-            <a:avLst/>
-          </a:prstGeom>
-          <a:noFill/>
-          <a:ln/>
-        </p:spPr>
-        <p:txBody>
-          <a:bodyPr wrap="square" lIns="0" tIns="0" rIns="0" bIns="0" rtlCol="0" anchor="ctr"/>
-          <a:lstStyle/>
-          <a:p>
-            <a:pPr algn="ctr" indent="0" marL="0">
-              <a:buNone/>
-            </a:pPr>
-            <a:r>
-              <a:rPr lang="en-US" sz="1300" b="1" dirty="0">
-                <a:solidFill>
-                  <a:srgbClr val="4C1D95"/>
-                </a:solidFill>
-                <a:latin typeface="Trebuchet MS" pitchFamily="34" charset="0"/>
-                <a:ea typeface="Trebuchet MS" pitchFamily="34" charset="-122"/>
-                <a:cs typeface="Trebuchet MS" pitchFamily="34" charset="-120"/>
-              </a:rPr>
-              <a:t>per-</a:t>
-            </a:r>
-            <a:endParaRPr lang="en-US" sz="1300" dirty="0"/>
-          </a:p>
-        </p:txBody>
-      </p:sp>
-      <p:sp>
-        <p:nvSpPr>
-          <p:cNvPr id="40" name="Shape 38"/>
-          <p:cNvSpPr/>
-          <p:nvPr/>
-        </p:nvSpPr>
-        <p:spPr>
-          <a:xfrm>
-            <a:off x="3291840" y="3584448"/>
-            <a:ext cx="1645920" cy="420624"/>
-          </a:xfrm>
-          <a:prstGeom prst="rect">
-            <a:avLst/>
-          </a:prstGeom>
-          <a:solidFill>
-            <a:srgbClr val="F8FAFC"/>
-          </a:solidFill>
-          <a:ln w="12700">
-            <a:solidFill>
-              <a:srgbClr val="E5E7EB"/>
-            </a:solidFill>
-            <a:prstDash val="solid"/>
-          </a:ln>
-        </p:spPr>
-      </p:sp>
-      <p:sp>
-        <p:nvSpPr>
-          <p:cNvPr id="41" name="Shape 39"/>
-          <p:cNvSpPr/>
-          <p:nvPr/>
-        </p:nvSpPr>
-        <p:spPr>
-          <a:xfrm>
-            <a:off x="5943600" y="3584448"/>
-            <a:ext cx="1463040" cy="420624"/>
-          </a:xfrm>
-          <a:prstGeom prst="rect">
-            <a:avLst/>
-          </a:prstGeom>
-          <a:solidFill>
-            <a:srgbClr val="FCE7F3"/>
-          </a:solidFill>
-          <a:ln w="12700">
-            <a:solidFill>
-              <a:srgbClr val="E5E7EB"/>
-            </a:solidFill>
-            <a:prstDash val="solid"/>
-          </a:ln>
-        </p:spPr>
-      </p:sp>
-      <p:sp>
-        <p:nvSpPr>
-          <p:cNvPr id="42" name="Text 40"/>
-          <p:cNvSpPr/>
-          <p:nvPr/>
-        </p:nvSpPr>
-        <p:spPr>
-          <a:xfrm>
-            <a:off x="5943600" y="3584448"/>
-            <a:ext cx="1463040" cy="420624"/>
-          </a:xfrm>
-          <a:prstGeom prst="rect">
-            <a:avLst/>
-          </a:prstGeom>
-          <a:noFill/>
-          <a:ln/>
-        </p:spPr>
-        <p:txBody>
-          <a:bodyPr wrap="square" lIns="0" tIns="0" rIns="0" bIns="0" rtlCol="0" anchor="ctr"/>
-          <a:lstStyle/>
-          <a:p>
-            <a:pPr algn="ctr" indent="0" marL="0">
-              <a:buNone/>
-            </a:pPr>
-            <a:r>
-              <a:rPr lang="en-US" sz="1300" b="1" dirty="0">
-                <a:solidFill>
-                  <a:srgbClr val="9D174D"/>
-                </a:solidFill>
-                <a:latin typeface="Trebuchet MS" pitchFamily="34" charset="0"/>
-                <a:ea typeface="Trebuchet MS" pitchFamily="34" charset="-122"/>
-                <a:cs typeface="Trebuchet MS" pitchFamily="34" charset="-120"/>
-              </a:rPr>
-              <a:t>-acy</a:t>
-            </a:r>
-            <a:endParaRPr lang="en-US" sz="1300" dirty="0"/>
-          </a:p>
-        </p:txBody>
-      </p:sp>
-      <p:sp>
-        <p:nvSpPr>
-          <p:cNvPr id="43" name="Text 41"/>
-          <p:cNvSpPr/>
-          <p:nvPr/>
-        </p:nvSpPr>
-        <p:spPr>
-          <a:xfrm>
-            <a:off x="365760" y="4178808"/>
+            <a:off x="365760" y="3721608"/>
             <a:ext cx="1097280" cy="420624"/>
           </a:xfrm>
           <a:prstGeom prst="rect">
@@ -39638,13 +40398,13 @@
       </p:sp>
       <p:sp>
         <p:nvSpPr>
-          <p:cNvPr id="44" name="Shape 42"/>
-          <p:cNvSpPr/>
-          <p:nvPr/>
-        </p:nvSpPr>
-        <p:spPr>
-          <a:xfrm>
-            <a:off x="1508760" y="4178808"/>
+          <p:cNvPr id="38" name="Shape 36"/>
+          <p:cNvSpPr/>
+          <p:nvPr/>
+        </p:nvSpPr>
+        <p:spPr>
+          <a:xfrm>
+            <a:off x="1508760" y="3721608"/>
             <a:ext cx="822960" cy="420624"/>
           </a:xfrm>
           <a:prstGeom prst="rect">
@@ -39672,13 +40432,13 @@
       </p:sp>
       <p:sp>
         <p:nvSpPr>
-          <p:cNvPr id="45" name="Text 43"/>
-          <p:cNvSpPr/>
-          <p:nvPr/>
-        </p:nvSpPr>
-        <p:spPr>
-          <a:xfrm>
-            <a:off x="1508760" y="4178808"/>
+          <p:cNvPr id="39" name="Text 37"/>
+          <p:cNvSpPr/>
+          <p:nvPr/>
+        </p:nvSpPr>
+        <p:spPr>
+          <a:xfrm>
+            <a:off x="1508760" y="3721608"/>
             <a:ext cx="822960" cy="420624"/>
           </a:xfrm>
           <a:prstGeom prst="rect">
@@ -39703,7 +40463,7 @@
                 <a:ea typeface="Trebuchet MS" pitchFamily="34" charset="-122"/>
                 <a:cs typeface="Trebuchet MS" pitchFamily="34" charset="-120"/>
               </a:rPr>
-              <a:t>in-</a:t>
+              <a:t>a-</a:t>
             </a:r>
             <a:endParaRPr lang="en-US" sz="1300" dirty="0"/>
           </a:p>
@@ -39711,13 +40471,13 @@
       </p:sp>
       <p:sp>
         <p:nvSpPr>
-          <p:cNvPr id="46" name="Text 44"/>
-          <p:cNvSpPr/>
-          <p:nvPr/>
-        </p:nvSpPr>
-        <p:spPr>
-          <a:xfrm>
-            <a:off x="2359152" y="4178808"/>
+          <p:cNvPr id="40" name="Text 38"/>
+          <p:cNvSpPr/>
+          <p:nvPr/>
+        </p:nvSpPr>
+        <p:spPr>
+          <a:xfrm>
+            <a:off x="2359152" y="3721608"/>
             <a:ext cx="320040" cy="420624"/>
           </a:xfrm>
           <a:prstGeom prst="rect">
@@ -39750,13 +40510,13 @@
       </p:sp>
       <p:sp>
         <p:nvSpPr>
-          <p:cNvPr id="47" name="Shape 45"/>
-          <p:cNvSpPr/>
-          <p:nvPr/>
-        </p:nvSpPr>
-        <p:spPr>
-          <a:xfrm>
-            <a:off x="2706624" y="4178808"/>
+          <p:cNvPr id="41" name="Shape 39"/>
+          <p:cNvSpPr/>
+          <p:nvPr/>
+        </p:nvSpPr>
+        <p:spPr>
+          <a:xfrm>
+            <a:off x="2706624" y="3721608"/>
             <a:ext cx="1389888" cy="420624"/>
           </a:xfrm>
           <a:prstGeom prst="rect">
@@ -39784,13 +40544,13 @@
       </p:sp>
       <p:sp>
         <p:nvSpPr>
-          <p:cNvPr id="48" name="Text 46"/>
-          <p:cNvSpPr/>
-          <p:nvPr/>
-        </p:nvSpPr>
-        <p:spPr>
-          <a:xfrm>
-            <a:off x="2706624" y="4178808"/>
+          <p:cNvPr id="42" name="Text 40"/>
+          <p:cNvSpPr/>
+          <p:nvPr/>
+        </p:nvSpPr>
+        <p:spPr>
+          <a:xfrm>
+            <a:off x="2706624" y="3721608"/>
             <a:ext cx="1389888" cy="420624"/>
           </a:xfrm>
           <a:prstGeom prst="rect">
@@ -39823,13 +40583,13 @@
       </p:sp>
       <p:sp>
         <p:nvSpPr>
-          <p:cNvPr id="49" name="Text 47"/>
-          <p:cNvSpPr/>
-          <p:nvPr/>
-        </p:nvSpPr>
-        <p:spPr>
-          <a:xfrm>
-            <a:off x="4123944" y="4178808"/>
+          <p:cNvPr id="43" name="Text 41"/>
+          <p:cNvSpPr/>
+          <p:nvPr/>
+        </p:nvSpPr>
+        <p:spPr>
+          <a:xfrm>
+            <a:off x="4123944" y="3721608"/>
             <a:ext cx="320040" cy="420624"/>
           </a:xfrm>
           <a:prstGeom prst="rect">
@@ -39862,13 +40622,13 @@
       </p:sp>
       <p:sp>
         <p:nvSpPr>
-          <p:cNvPr id="50" name="Shape 48"/>
-          <p:cNvSpPr/>
-          <p:nvPr/>
-        </p:nvSpPr>
-        <p:spPr>
-          <a:xfrm>
-            <a:off x="4471416" y="4178808"/>
+          <p:cNvPr id="44" name="Shape 42"/>
+          <p:cNvSpPr/>
+          <p:nvPr/>
+        </p:nvSpPr>
+        <p:spPr>
+          <a:xfrm>
+            <a:off x="4471416" y="3721608"/>
             <a:ext cx="1243584" cy="420624"/>
           </a:xfrm>
           <a:prstGeom prst="rect">
@@ -39896,13 +40656,13 @@
       </p:sp>
       <p:sp>
         <p:nvSpPr>
-          <p:cNvPr id="51" name="Text 49"/>
-          <p:cNvSpPr/>
-          <p:nvPr/>
-        </p:nvSpPr>
-        <p:spPr>
-          <a:xfrm>
-            <a:off x="4471416" y="4178808"/>
+          <p:cNvPr id="45" name="Text 43"/>
+          <p:cNvSpPr/>
+          <p:nvPr/>
+        </p:nvSpPr>
+        <p:spPr>
+          <a:xfrm>
+            <a:off x="4471416" y="3721608"/>
             <a:ext cx="1243584" cy="420624"/>
           </a:xfrm>
           <a:prstGeom prst="rect">
@@ -39935,13 +40695,13 @@
       </p:sp>
       <p:sp>
         <p:nvSpPr>
-          <p:cNvPr id="52" name="Text 50"/>
-          <p:cNvSpPr/>
-          <p:nvPr/>
-        </p:nvSpPr>
-        <p:spPr>
-          <a:xfrm>
-            <a:off x="5788152" y="4178808"/>
+          <p:cNvPr id="46" name="Text 44"/>
+          <p:cNvSpPr/>
+          <p:nvPr/>
+        </p:nvSpPr>
+        <p:spPr>
+          <a:xfrm>
+            <a:off x="5788152" y="3721608"/>
             <a:ext cx="365760" cy="420624"/>
           </a:xfrm>
           <a:prstGeom prst="rect">
@@ -39974,13 +40734,13 @@
       </p:sp>
       <p:sp>
         <p:nvSpPr>
-          <p:cNvPr id="53" name="Shape 51"/>
-          <p:cNvSpPr/>
-          <p:nvPr/>
-        </p:nvSpPr>
-        <p:spPr>
-          <a:xfrm>
-            <a:off x="6199632" y="4178808"/>
+          <p:cNvPr id="47" name="Shape 45"/>
+          <p:cNvSpPr/>
+          <p:nvPr/>
+        </p:nvSpPr>
+        <p:spPr>
+          <a:xfrm>
+            <a:off x="6199632" y="3721608"/>
             <a:ext cx="2194560" cy="420624"/>
           </a:xfrm>
           <a:prstGeom prst="rect">
@@ -40001,13 +40761,13 @@
       </p:sp>
       <p:sp>
         <p:nvSpPr>
-          <p:cNvPr id="54" name="Text 52"/>
-          <p:cNvSpPr/>
-          <p:nvPr/>
-        </p:nvSpPr>
-        <p:spPr>
-          <a:xfrm>
-            <a:off x="6199632" y="4178808"/>
+          <p:cNvPr id="48" name="Text 46"/>
+          <p:cNvSpPr/>
+          <p:nvPr/>
+        </p:nvSpPr>
+        <p:spPr>
+          <a:xfrm>
+            <a:off x="6199632" y="3721608"/>
             <a:ext cx="2194560" cy="420624"/>
           </a:xfrm>
           <a:prstGeom prst="rect">
@@ -40032,7 +40792,7 @@
                 <a:ea typeface="Trebuchet MS" pitchFamily="34" charset="-122"/>
                 <a:cs typeface="Trebuchet MS" pitchFamily="34" charset="-120"/>
               </a:rPr>
-              <a:t>inspire</a:t>
+              <a:t>spiral</a:t>
             </a:r>
             <a:endParaRPr lang="en-US" sz="1400" dirty="0"/>
           </a:p>
@@ -40324,7 +41084,7 @@
                 <a:ea typeface="Calibri" pitchFamily="34" charset="-122"/>
                 <a:cs typeface="Calibri" pitchFamily="34" charset="-120"/>
               </a:rPr>
-              <a:t>Word Labs  •  wordlabs.app  •  Root: 'spire' = breathe, breath, spirit</a:t>
+              <a:t>Word Labs  •  wordlabs.app  •  Root: 'spire' = breathe; live</a:t>
             </a:r>
             <a:endParaRPr lang="en-US" sz="800" dirty="0"/>
           </a:p>
@@ -40436,7 +41196,7 @@
                 <a:ea typeface="Trebuchet MS" pitchFamily="34" charset="-122"/>
                 <a:cs typeface="Trebuchet MS" pitchFamily="34" charset="-120"/>
               </a:rPr>
-              <a:t>inspire</a:t>
+              <a:t>spiral</a:t>
             </a:r>
             <a:endParaRPr lang="en-US" sz="1200" dirty="0"/>
           </a:p>
@@ -40502,7 +41262,7 @@
                 <a:ea typeface="Calibri" pitchFamily="34" charset="-122"/>
                 <a:cs typeface="Calibri" pitchFamily="34" charset="-120"/>
               </a:rPr>
-              <a:t>A great idea or feeling that makes you want to create or do something amazing.</a:t>
+              <a:t>tall, pointed structures on top of buildings, usually churches</a:t>
             </a:r>
             <a:endParaRPr lang="en-US" sz="1200" dirty="0"/>
           </a:p>
@@ -40575,7 +41335,7 @@
                 <a:ea typeface="Trebuchet MS" pitchFamily="34" charset="-122"/>
                 <a:cs typeface="Trebuchet MS" pitchFamily="34" charset="-120"/>
               </a:rPr>
-              <a:t>expire</a:t>
+              <a:t>spires</a:t>
             </a:r>
             <a:endParaRPr lang="en-US" sz="1200" dirty="0"/>
           </a:p>
@@ -40641,702 +41401,7 @@
                 <a:ea typeface="Calibri" pitchFamily="34" charset="-122"/>
                 <a:cs typeface="Calibri" pitchFamily="34" charset="-120"/>
               </a:rPr>
-              <a:t>To sweat, like when you get hot after running around at sport.</a:t>
-            </a:r>
-            <a:endParaRPr lang="en-US" sz="1200" dirty="0"/>
-          </a:p>
-        </p:txBody>
-      </p:sp>
-      <p:sp>
-        <p:nvSpPr>
-          <p:cNvPr id="19" name="Shape 17"/>
-          <p:cNvSpPr/>
-          <p:nvPr/>
-        </p:nvSpPr>
-        <p:spPr>
-          <a:xfrm>
-            <a:off x="365760" y="2249424"/>
-            <a:ext cx="2011680" cy="457200"/>
-          </a:xfrm>
-          <a:prstGeom prst="rect">
-            <a:avLst>
-              <a:gd name="adj" fmla="val 12000"/>
-            </a:avLst>
-          </a:prstGeom>
-          <a:solidFill>
-            <a:srgbClr val="EEF2FF"/>
-          </a:solidFill>
-          <a:ln w="12700">
-            <a:solidFill>
-              <a:srgbClr val="6366F1"/>
-            </a:solidFill>
-            <a:prstDash val="solid"/>
-          </a:ln>
-          <a:effectLst>
-            <a:outerShdw sx="100000" sy="100000" kx="0" ky="0" algn="bl" rotWithShape="0" blurRad="101600" dist="38100" dir="8100000">
-              <a:srgbClr val="000000">
-                <a:alpha val="12000"/>
-              </a:srgbClr>
-            </a:outerShdw>
-          </a:effectLst>
-        </p:spPr>
-      </p:sp>
-      <p:sp>
-        <p:nvSpPr>
-          <p:cNvPr id="20" name="Text 18"/>
-          <p:cNvSpPr/>
-          <p:nvPr/>
-        </p:nvSpPr>
-        <p:spPr>
-          <a:xfrm>
-            <a:off x="365760" y="2249424"/>
-            <a:ext cx="2011680" cy="457200"/>
-          </a:xfrm>
-          <a:prstGeom prst="rect">
-            <a:avLst/>
-          </a:prstGeom>
-          <a:noFill/>
-          <a:ln/>
-        </p:spPr>
-        <p:txBody>
-          <a:bodyPr wrap="square" lIns="0" tIns="0" rIns="0" bIns="0" rtlCol="0" anchor="ctr"/>
-          <a:lstStyle/>
-          <a:p>
-            <a:pPr algn="ctr" indent="0" marL="0">
-              <a:buNone/>
-            </a:pPr>
-            <a:r>
-              <a:rPr lang="en-US" sz="1200" b="1" dirty="0">
-                <a:solidFill>
-                  <a:srgbClr val="4338CA"/>
-                </a:solidFill>
-                <a:latin typeface="Trebuchet MS" pitchFamily="34" charset="0"/>
-                <a:ea typeface="Trebuchet MS" pitchFamily="34" charset="-122"/>
-                <a:cs typeface="Trebuchet MS" pitchFamily="34" charset="-120"/>
-              </a:rPr>
-              <a:t>conspire</a:t>
-            </a:r>
-            <a:endParaRPr lang="en-US" sz="1200" dirty="0"/>
-          </a:p>
-        </p:txBody>
-      </p:sp>
-      <p:sp>
-        <p:nvSpPr>
-          <p:cNvPr id="21" name="Shape 19"/>
-          <p:cNvSpPr/>
-          <p:nvPr/>
-        </p:nvSpPr>
-        <p:spPr>
-          <a:xfrm>
-            <a:off x="2514600" y="2249424"/>
-            <a:ext cx="6263640" cy="457200"/>
-          </a:xfrm>
-          <a:prstGeom prst="rect">
-            <a:avLst>
-              <a:gd name="adj" fmla="val 12000"/>
-            </a:avLst>
-          </a:prstGeom>
-          <a:solidFill>
-            <a:srgbClr val="F8FAFC"/>
-          </a:solidFill>
-          <a:ln w="12700">
-            <a:solidFill>
-              <a:srgbClr val="E2E8F0"/>
-            </a:solidFill>
-            <a:prstDash val="solid"/>
-          </a:ln>
-        </p:spPr>
-      </p:sp>
-      <p:sp>
-        <p:nvSpPr>
-          <p:cNvPr id="22" name="Text 20"/>
-          <p:cNvSpPr/>
-          <p:nvPr/>
-        </p:nvSpPr>
-        <p:spPr>
-          <a:xfrm>
-            <a:off x="2651760" y="2249424"/>
-            <a:ext cx="6035040" cy="457200"/>
-          </a:xfrm>
-          <a:prstGeom prst="rect">
-            <a:avLst/>
-          </a:prstGeom>
-          <a:noFill/>
-          <a:ln/>
-        </p:spPr>
-        <p:txBody>
-          <a:bodyPr wrap="square" rtlCol="0" anchor="ctr"/>
-          <a:lstStyle/>
-          <a:p>
-            <a:pPr algn="l" indent="0" marL="0">
-              <a:buNone/>
-            </a:pPr>
-            <a:r>
-              <a:rPr lang="en-US" sz="1200" dirty="0">
-                <a:solidFill>
-                  <a:srgbClr val="0F172A"/>
-                </a:solidFill>
-                <a:latin typeface="Calibri" pitchFamily="34" charset="0"/>
-                <a:ea typeface="Calibri" pitchFamily="34" charset="-122"/>
-                <a:cs typeface="Calibri" pitchFamily="34" charset="-120"/>
-              </a:rPr>
-              <a:t>To breathe in and out; what living things do to get energy from oxygen.</a:t>
-            </a:r>
-            <a:endParaRPr lang="en-US" sz="1200" dirty="0"/>
-          </a:p>
-        </p:txBody>
-      </p:sp>
-      <p:sp>
-        <p:nvSpPr>
-          <p:cNvPr id="23" name="Shape 21"/>
-          <p:cNvSpPr/>
-          <p:nvPr/>
-        </p:nvSpPr>
-        <p:spPr>
-          <a:xfrm>
-            <a:off x="365760" y="2779776"/>
-            <a:ext cx="2011680" cy="457200"/>
-          </a:xfrm>
-          <a:prstGeom prst="rect">
-            <a:avLst>
-              <a:gd name="adj" fmla="val 12000"/>
-            </a:avLst>
-          </a:prstGeom>
-          <a:solidFill>
-            <a:srgbClr val="EEF2FF"/>
-          </a:solidFill>
-          <a:ln w="12700">
-            <a:solidFill>
-              <a:srgbClr val="6366F1"/>
-            </a:solidFill>
-            <a:prstDash val="solid"/>
-          </a:ln>
-          <a:effectLst>
-            <a:outerShdw sx="100000" sy="100000" kx="0" ky="0" algn="bl" rotWithShape="0" blurRad="101600" dist="38100" dir="8100000">
-              <a:srgbClr val="000000">
-                <a:alpha val="12000"/>
-              </a:srgbClr>
-            </a:outerShdw>
-          </a:effectLst>
-        </p:spPr>
-      </p:sp>
-      <p:sp>
-        <p:nvSpPr>
-          <p:cNvPr id="24" name="Text 22"/>
-          <p:cNvSpPr/>
-          <p:nvPr/>
-        </p:nvSpPr>
-        <p:spPr>
-          <a:xfrm>
-            <a:off x="365760" y="2779776"/>
-            <a:ext cx="2011680" cy="457200"/>
-          </a:xfrm>
-          <a:prstGeom prst="rect">
-            <a:avLst/>
-          </a:prstGeom>
-          <a:noFill/>
-          <a:ln/>
-        </p:spPr>
-        <p:txBody>
-          <a:bodyPr wrap="square" lIns="0" tIns="0" rIns="0" bIns="0" rtlCol="0" anchor="ctr"/>
-          <a:lstStyle/>
-          <a:p>
-            <a:pPr algn="ctr" indent="0" marL="0">
-              <a:buNone/>
-            </a:pPr>
-            <a:r>
-              <a:rPr lang="en-US" sz="1200" b="1" dirty="0">
-                <a:solidFill>
-                  <a:srgbClr val="4338CA"/>
-                </a:solidFill>
-                <a:latin typeface="Trebuchet MS" pitchFamily="34" charset="0"/>
-                <a:ea typeface="Trebuchet MS" pitchFamily="34" charset="-122"/>
-                <a:cs typeface="Trebuchet MS" pitchFamily="34" charset="-120"/>
-              </a:rPr>
-              <a:t>respire</a:t>
-            </a:r>
-            <a:endParaRPr lang="en-US" sz="1200" dirty="0"/>
-          </a:p>
-        </p:txBody>
-      </p:sp>
-      <p:sp>
-        <p:nvSpPr>
-          <p:cNvPr id="25" name="Shape 23"/>
-          <p:cNvSpPr/>
-          <p:nvPr/>
-        </p:nvSpPr>
-        <p:spPr>
-          <a:xfrm>
-            <a:off x="2514600" y="2779776"/>
-            <a:ext cx="6263640" cy="457200"/>
-          </a:xfrm>
-          <a:prstGeom prst="rect">
-            <a:avLst>
-              <a:gd name="adj" fmla="val 12000"/>
-            </a:avLst>
-          </a:prstGeom>
-          <a:solidFill>
-            <a:srgbClr val="F8FAFC"/>
-          </a:solidFill>
-          <a:ln w="12700">
-            <a:solidFill>
-              <a:srgbClr val="E2E8F0"/>
-            </a:solidFill>
-            <a:prstDash val="solid"/>
-          </a:ln>
-        </p:spPr>
-      </p:sp>
-      <p:sp>
-        <p:nvSpPr>
-          <p:cNvPr id="26" name="Text 24"/>
-          <p:cNvSpPr/>
-          <p:nvPr/>
-        </p:nvSpPr>
-        <p:spPr>
-          <a:xfrm>
-            <a:off x="2651760" y="2779776"/>
-            <a:ext cx="6035040" cy="457200"/>
-          </a:xfrm>
-          <a:prstGeom prst="rect">
-            <a:avLst/>
-          </a:prstGeom>
-          <a:noFill/>
-          <a:ln/>
-        </p:spPr>
-        <p:txBody>
-          <a:bodyPr wrap="square" rtlCol="0" anchor="ctr"/>
-          <a:lstStyle/>
-          <a:p>
-            <a:pPr algn="l" indent="0" marL="0">
-              <a:buNone/>
-            </a:pPr>
-            <a:r>
-              <a:rPr lang="en-US" sz="1200" dirty="0">
-                <a:solidFill>
-                  <a:srgbClr val="0F172A"/>
-                </a:solidFill>
-                <a:latin typeface="Calibri" pitchFamily="34" charset="0"/>
-                <a:ea typeface="Calibri" pitchFamily="34" charset="-122"/>
-                <a:cs typeface="Calibri" pitchFamily="34" charset="-120"/>
-              </a:rPr>
-              <a:t>To really want to achieve something great, like aspiring to become a scientist.</a:t>
-            </a:r>
-            <a:endParaRPr lang="en-US" sz="1200" dirty="0"/>
-          </a:p>
-        </p:txBody>
-      </p:sp>
-      <p:sp>
-        <p:nvSpPr>
-          <p:cNvPr id="27" name="Shape 25"/>
-          <p:cNvSpPr/>
-          <p:nvPr/>
-        </p:nvSpPr>
-        <p:spPr>
-          <a:xfrm>
-            <a:off x="365760" y="3310128"/>
-            <a:ext cx="2011680" cy="457200"/>
-          </a:xfrm>
-          <a:prstGeom prst="rect">
-            <a:avLst>
-              <a:gd name="adj" fmla="val 12000"/>
-            </a:avLst>
-          </a:prstGeom>
-          <a:solidFill>
-            <a:srgbClr val="EEF2FF"/>
-          </a:solidFill>
-          <a:ln w="12700">
-            <a:solidFill>
-              <a:srgbClr val="6366F1"/>
-            </a:solidFill>
-            <a:prstDash val="solid"/>
-          </a:ln>
-          <a:effectLst>
-            <a:outerShdw sx="100000" sy="100000" kx="0" ky="0" algn="bl" rotWithShape="0" blurRad="101600" dist="38100" dir="8100000">
-              <a:srgbClr val="000000">
-                <a:alpha val="12000"/>
-              </a:srgbClr>
-            </a:outerShdw>
-          </a:effectLst>
-        </p:spPr>
-      </p:sp>
-      <p:sp>
-        <p:nvSpPr>
-          <p:cNvPr id="28" name="Text 26"/>
-          <p:cNvSpPr/>
-          <p:nvPr/>
-        </p:nvSpPr>
-        <p:spPr>
-          <a:xfrm>
-            <a:off x="365760" y="3310128"/>
-            <a:ext cx="2011680" cy="457200"/>
-          </a:xfrm>
-          <a:prstGeom prst="rect">
-            <a:avLst/>
-          </a:prstGeom>
-          <a:noFill/>
-          <a:ln/>
-        </p:spPr>
-        <p:txBody>
-          <a:bodyPr wrap="square" lIns="0" tIns="0" rIns="0" bIns="0" rtlCol="0" anchor="ctr"/>
-          <a:lstStyle/>
-          <a:p>
-            <a:pPr algn="ctr" indent="0" marL="0">
-              <a:buNone/>
-            </a:pPr>
-            <a:r>
-              <a:rPr lang="en-US" sz="1200" b="1" dirty="0">
-                <a:solidFill>
-                  <a:srgbClr val="4338CA"/>
-                </a:solidFill>
-                <a:latin typeface="Trebuchet MS" pitchFamily="34" charset="0"/>
-                <a:ea typeface="Trebuchet MS" pitchFamily="34" charset="-122"/>
-                <a:cs typeface="Trebuchet MS" pitchFamily="34" charset="-120"/>
-              </a:rPr>
-              <a:t>perspire</a:t>
-            </a:r>
-            <a:endParaRPr lang="en-US" sz="1200" dirty="0"/>
-          </a:p>
-        </p:txBody>
-      </p:sp>
-      <p:sp>
-        <p:nvSpPr>
-          <p:cNvPr id="29" name="Shape 27"/>
-          <p:cNvSpPr/>
-          <p:nvPr/>
-        </p:nvSpPr>
-        <p:spPr>
-          <a:xfrm>
-            <a:off x="2514600" y="3310128"/>
-            <a:ext cx="6263640" cy="457200"/>
-          </a:xfrm>
-          <a:prstGeom prst="rect">
-            <a:avLst>
-              <a:gd name="adj" fmla="val 12000"/>
-            </a:avLst>
-          </a:prstGeom>
-          <a:solidFill>
-            <a:srgbClr val="F8FAFC"/>
-          </a:solidFill>
-          <a:ln w="12700">
-            <a:solidFill>
-              <a:srgbClr val="E2E8F0"/>
-            </a:solidFill>
-            <a:prstDash val="solid"/>
-          </a:ln>
-        </p:spPr>
-      </p:sp>
-      <p:sp>
-        <p:nvSpPr>
-          <p:cNvPr id="30" name="Text 28"/>
-          <p:cNvSpPr/>
-          <p:nvPr/>
-        </p:nvSpPr>
-        <p:spPr>
-          <a:xfrm>
-            <a:off x="2651760" y="3310128"/>
-            <a:ext cx="6035040" cy="457200"/>
-          </a:xfrm>
-          <a:prstGeom prst="rect">
-            <a:avLst/>
-          </a:prstGeom>
-          <a:noFill/>
-          <a:ln/>
-        </p:spPr>
-        <p:txBody>
-          <a:bodyPr wrap="square" rtlCol="0" anchor="ctr"/>
-          <a:lstStyle/>
-          <a:p>
-            <a:pPr algn="l" indent="0" marL="0">
-              <a:buNone/>
-            </a:pPr>
-            <a:r>
-              <a:rPr lang="en-US" sz="1200" dirty="0">
-                <a:solidFill>
-                  <a:srgbClr val="0F172A"/>
-                </a:solidFill>
-                <a:latin typeface="Calibri" pitchFamily="34" charset="0"/>
-                <a:ea typeface="Calibri" pitchFamily="34" charset="-122"/>
-                <a:cs typeface="Calibri" pitchFamily="34" charset="-120"/>
-              </a:rPr>
-              <a:t>When people secretly plan something together, usually something sneaky or wrong.</a:t>
-            </a:r>
-            <a:endParaRPr lang="en-US" sz="1200" dirty="0"/>
-          </a:p>
-        </p:txBody>
-      </p:sp>
-      <p:sp>
-        <p:nvSpPr>
-          <p:cNvPr id="31" name="Shape 29"/>
-          <p:cNvSpPr/>
-          <p:nvPr/>
-        </p:nvSpPr>
-        <p:spPr>
-          <a:xfrm>
-            <a:off x="365760" y="3840480"/>
-            <a:ext cx="2011680" cy="457200"/>
-          </a:xfrm>
-          <a:prstGeom prst="rect">
-            <a:avLst>
-              <a:gd name="adj" fmla="val 12000"/>
-            </a:avLst>
-          </a:prstGeom>
-          <a:solidFill>
-            <a:srgbClr val="EEF2FF"/>
-          </a:solidFill>
-          <a:ln w="12700">
-            <a:solidFill>
-              <a:srgbClr val="6366F1"/>
-            </a:solidFill>
-            <a:prstDash val="solid"/>
-          </a:ln>
-          <a:effectLst>
-            <a:outerShdw sx="100000" sy="100000" kx="0" ky="0" algn="bl" rotWithShape="0" blurRad="101600" dist="38100" dir="8100000">
-              <a:srgbClr val="000000">
-                <a:alpha val="12000"/>
-              </a:srgbClr>
-            </a:outerShdw>
-          </a:effectLst>
-        </p:spPr>
-      </p:sp>
-      <p:sp>
-        <p:nvSpPr>
-          <p:cNvPr id="32" name="Text 30"/>
-          <p:cNvSpPr/>
-          <p:nvPr/>
-        </p:nvSpPr>
-        <p:spPr>
-          <a:xfrm>
-            <a:off x="365760" y="3840480"/>
-            <a:ext cx="2011680" cy="457200"/>
-          </a:xfrm>
-          <a:prstGeom prst="rect">
-            <a:avLst/>
-          </a:prstGeom>
-          <a:noFill/>
-          <a:ln/>
-        </p:spPr>
-        <p:txBody>
-          <a:bodyPr wrap="square" lIns="0" tIns="0" rIns="0" bIns="0" rtlCol="0" anchor="ctr"/>
-          <a:lstStyle/>
-          <a:p>
-            <a:pPr algn="ctr" indent="0" marL="0">
-              <a:buNone/>
-            </a:pPr>
-            <a:r>
-              <a:rPr lang="en-US" sz="1200" b="1" dirty="0">
-                <a:solidFill>
-                  <a:srgbClr val="4338CA"/>
-                </a:solidFill>
-                <a:latin typeface="Trebuchet MS" pitchFamily="34" charset="0"/>
-                <a:ea typeface="Trebuchet MS" pitchFamily="34" charset="-122"/>
-                <a:cs typeface="Trebuchet MS" pitchFamily="34" charset="-120"/>
-              </a:rPr>
-              <a:t>aspire</a:t>
-            </a:r>
-            <a:endParaRPr lang="en-US" sz="1200" dirty="0"/>
-          </a:p>
-        </p:txBody>
-      </p:sp>
-      <p:sp>
-        <p:nvSpPr>
-          <p:cNvPr id="33" name="Shape 31"/>
-          <p:cNvSpPr/>
-          <p:nvPr/>
-        </p:nvSpPr>
-        <p:spPr>
-          <a:xfrm>
-            <a:off x="2514600" y="3840480"/>
-            <a:ext cx="6263640" cy="457200"/>
-          </a:xfrm>
-          <a:prstGeom prst="rect">
-            <a:avLst>
-              <a:gd name="adj" fmla="val 12000"/>
-            </a:avLst>
-          </a:prstGeom>
-          <a:solidFill>
-            <a:srgbClr val="F8FAFC"/>
-          </a:solidFill>
-          <a:ln w="12700">
-            <a:solidFill>
-              <a:srgbClr val="E2E8F0"/>
-            </a:solidFill>
-            <a:prstDash val="solid"/>
-          </a:ln>
-        </p:spPr>
-      </p:sp>
-      <p:sp>
-        <p:nvSpPr>
-          <p:cNvPr id="34" name="Text 32"/>
-          <p:cNvSpPr/>
-          <p:nvPr/>
-        </p:nvSpPr>
-        <p:spPr>
-          <a:xfrm>
-            <a:off x="2651760" y="3840480"/>
-            <a:ext cx="6035040" cy="457200"/>
-          </a:xfrm>
-          <a:prstGeom prst="rect">
-            <a:avLst/>
-          </a:prstGeom>
-          <a:noFill/>
-          <a:ln/>
-        </p:spPr>
-        <p:txBody>
-          <a:bodyPr wrap="square" rtlCol="0" anchor="ctr"/>
-          <a:lstStyle/>
-          <a:p>
-            <a:pPr algn="l" indent="0" marL="0">
-              <a:buNone/>
-            </a:pPr>
-            <a:r>
-              <a:rPr lang="en-US" sz="1200" dirty="0">
-                <a:solidFill>
-                  <a:srgbClr val="0F172A"/>
-                </a:solidFill>
-                <a:latin typeface="Calibri" pitchFamily="34" charset="0"/>
-                <a:ea typeface="Calibri" pitchFamily="34" charset="-122"/>
-                <a:cs typeface="Calibri" pitchFamily="34" charset="-120"/>
-              </a:rPr>
-              <a:t>To fill someone with excitement or a great idea, like a hero inspiring others to be brave.</a:t>
-            </a:r>
-            <a:endParaRPr lang="en-US" sz="1200" dirty="0"/>
-          </a:p>
-        </p:txBody>
-      </p:sp>
-      <p:sp>
-        <p:nvSpPr>
-          <p:cNvPr id="35" name="Shape 33"/>
-          <p:cNvSpPr/>
-          <p:nvPr/>
-        </p:nvSpPr>
-        <p:spPr>
-          <a:xfrm>
-            <a:off x="365760" y="4370832"/>
-            <a:ext cx="2011680" cy="457200"/>
-          </a:xfrm>
-          <a:prstGeom prst="rect">
-            <a:avLst>
-              <a:gd name="adj" fmla="val 12000"/>
-            </a:avLst>
-          </a:prstGeom>
-          <a:solidFill>
-            <a:srgbClr val="EEF2FF"/>
-          </a:solidFill>
-          <a:ln w="12700">
-            <a:solidFill>
-              <a:srgbClr val="6366F1"/>
-            </a:solidFill>
-            <a:prstDash val="solid"/>
-          </a:ln>
-          <a:effectLst>
-            <a:outerShdw sx="100000" sy="100000" kx="0" ky="0" algn="bl" rotWithShape="0" blurRad="101600" dist="38100" dir="8100000">
-              <a:srgbClr val="000000">
-                <a:alpha val="12000"/>
-              </a:srgbClr>
-            </a:outerShdw>
-          </a:effectLst>
-        </p:spPr>
-      </p:sp>
-      <p:sp>
-        <p:nvSpPr>
-          <p:cNvPr id="36" name="Text 34"/>
-          <p:cNvSpPr/>
-          <p:nvPr/>
-        </p:nvSpPr>
-        <p:spPr>
-          <a:xfrm>
-            <a:off x="365760" y="4370832"/>
-            <a:ext cx="2011680" cy="457200"/>
-          </a:xfrm>
-          <a:prstGeom prst="rect">
-            <a:avLst/>
-          </a:prstGeom>
-          <a:noFill/>
-          <a:ln/>
-        </p:spPr>
-        <p:txBody>
-          <a:bodyPr wrap="square" lIns="0" tIns="0" rIns="0" bIns="0" rtlCol="0" anchor="ctr"/>
-          <a:lstStyle/>
-          <a:p>
-            <a:pPr algn="ctr" indent="0" marL="0">
-              <a:buNone/>
-            </a:pPr>
-            <a:r>
-              <a:rPr lang="en-US" sz="1200" b="1" dirty="0">
-                <a:solidFill>
-                  <a:srgbClr val="4338CA"/>
-                </a:solidFill>
-                <a:latin typeface="Trebuchet MS" pitchFamily="34" charset="0"/>
-                <a:ea typeface="Trebuchet MS" pitchFamily="34" charset="-122"/>
-                <a:cs typeface="Trebuchet MS" pitchFamily="34" charset="-120"/>
-              </a:rPr>
-              <a:t>inspiration</a:t>
-            </a:r>
-            <a:endParaRPr lang="en-US" sz="1200" dirty="0"/>
-          </a:p>
-        </p:txBody>
-      </p:sp>
-      <p:sp>
-        <p:nvSpPr>
-          <p:cNvPr id="37" name="Shape 35"/>
-          <p:cNvSpPr/>
-          <p:nvPr/>
-        </p:nvSpPr>
-        <p:spPr>
-          <a:xfrm>
-            <a:off x="2514600" y="4370832"/>
-            <a:ext cx="6263640" cy="457200"/>
-          </a:xfrm>
-          <a:prstGeom prst="rect">
-            <a:avLst>
-              <a:gd name="adj" fmla="val 12000"/>
-            </a:avLst>
-          </a:prstGeom>
-          <a:solidFill>
-            <a:srgbClr val="F8FAFC"/>
-          </a:solidFill>
-          <a:ln w="12700">
-            <a:solidFill>
-              <a:srgbClr val="E2E8F0"/>
-            </a:solidFill>
-            <a:prstDash val="solid"/>
-          </a:ln>
-        </p:spPr>
-      </p:sp>
-      <p:sp>
-        <p:nvSpPr>
-          <p:cNvPr id="38" name="Text 36"/>
-          <p:cNvSpPr/>
-          <p:nvPr/>
-        </p:nvSpPr>
-        <p:spPr>
-          <a:xfrm>
-            <a:off x="2651760" y="4370832"/>
-            <a:ext cx="6035040" cy="457200"/>
-          </a:xfrm>
-          <a:prstGeom prst="rect">
-            <a:avLst/>
-          </a:prstGeom>
-          <a:noFill/>
-          <a:ln/>
-        </p:spPr>
-        <p:txBody>
-          <a:bodyPr wrap="square" rtlCol="0" anchor="ctr"/>
-          <a:lstStyle/>
-          <a:p>
-            <a:pPr algn="l" indent="0" marL="0">
-              <a:buNone/>
-            </a:pPr>
-            <a:r>
-              <a:rPr lang="en-US" sz="1200" dirty="0">
-                <a:solidFill>
-                  <a:srgbClr val="0F172A"/>
-                </a:solidFill>
-                <a:latin typeface="Calibri" pitchFamily="34" charset="0"/>
-                <a:ea typeface="Calibri" pitchFamily="34" charset="-122"/>
-                <a:cs typeface="Calibri" pitchFamily="34" charset="-120"/>
-              </a:rPr>
-              <a:t>To come to an end or run out, like when food expires and is no longer safe to eat.</a:t>
+              <a:t>a curved shape that winds round and round a central point</a:t>
             </a:r>
             <a:endParaRPr lang="en-US" sz="1200" dirty="0"/>
           </a:p>
@@ -41628,7 +41693,7 @@
                 <a:ea typeface="Calibri" pitchFamily="34" charset="-122"/>
                 <a:cs typeface="Calibri" pitchFamily="34" charset="-120"/>
               </a:rPr>
-              <a:t>Word Labs  •  wordlabs.app  •  Root: 'spire' = breathe, breath, spirit</a:t>
+              <a:t>Word Labs  •  wordlabs.app  •  Root: 'spire' = breathe; live</a:t>
             </a:r>
             <a:endParaRPr lang="en-US" sz="800" dirty="0"/>
           </a:p>
@@ -41831,7 +41896,7 @@
                 <a:ea typeface="Calibri" pitchFamily="34" charset="-122"/>
                 <a:cs typeface="Calibri" pitchFamily="34" charset="-120"/>
               </a:rPr>
-              <a:t>The story of the young athlete was enough to inspire the whole class to try their best.</a:t>
+              <a:t>The staircase wound up in a spiral to the top of the tower.</a:t>
             </a:r>
             <a:endParaRPr lang="en-US" sz="1500" dirty="0"/>
           </a:p>
@@ -41995,7 +42060,7 @@
                 <a:ea typeface="Calibri" pitchFamily="34" charset="-122"/>
                 <a:cs typeface="Calibri" pitchFamily="34" charset="-120"/>
               </a:rPr>
-              <a:t>Make sure you check the expiration date on the yoghurt before you eat it.</a:t>
+              <a:t>The city skyline was full of church spires.</a:t>
             </a:r>
             <a:endParaRPr lang="en-US" sz="1500" dirty="0"/>
           </a:p>
@@ -42159,7 +42224,7 @@
                 <a:ea typeface="Calibri" pitchFamily="34" charset="-122"/>
                 <a:cs typeface="Calibri" pitchFamily="34" charset="-120"/>
               </a:rPr>
-              <a:t>She had a dream to aspire to greatness, and she worked hard every single day.</a:t>
+              <a:t>All living things need to respire in order to survive.</a:t>
             </a:r>
             <a:endParaRPr lang="en-US" sz="1500" dirty="0"/>
           </a:p>
